--- a/stock-specific/hake/output_plots_20260730.pptx
+++ b/stock-specific/hake/output_plots_20260730.pptx
@@ -5,49 +5,50 @@
     <p:sldMasterId id="2147483648" r:id="rId1"/>
   </p:sldMasterIdLst>
   <p:notesMasterIdLst>
-    <p:notesMasterId r:id="rId42"/>
+    <p:notesMasterId r:id="rId43"/>
   </p:notesMasterIdLst>
   <p:sldIdLst>
     <p:sldId id="256" r:id="rId2"/>
     <p:sldId id="263" r:id="rId3"/>
     <p:sldId id="257" r:id="rId4"/>
-    <p:sldId id="258" r:id="rId5"/>
-    <p:sldId id="259" r:id="rId6"/>
-    <p:sldId id="264" r:id="rId7"/>
-    <p:sldId id="271" r:id="rId8"/>
-    <p:sldId id="267" r:id="rId9"/>
-    <p:sldId id="268" r:id="rId10"/>
-    <p:sldId id="299" r:id="rId11"/>
-    <p:sldId id="298" r:id="rId12"/>
-    <p:sldId id="300" r:id="rId13"/>
-    <p:sldId id="269" r:id="rId14"/>
-    <p:sldId id="270" r:id="rId15"/>
-    <p:sldId id="266" r:id="rId16"/>
-    <p:sldId id="260" r:id="rId17"/>
-    <p:sldId id="272" r:id="rId18"/>
-    <p:sldId id="282" r:id="rId19"/>
-    <p:sldId id="274" r:id="rId20"/>
-    <p:sldId id="275" r:id="rId21"/>
-    <p:sldId id="277" r:id="rId22"/>
-    <p:sldId id="276" r:id="rId23"/>
-    <p:sldId id="278" r:id="rId24"/>
-    <p:sldId id="279" r:id="rId25"/>
-    <p:sldId id="285" r:id="rId26"/>
-    <p:sldId id="286" r:id="rId27"/>
-    <p:sldId id="287" r:id="rId28"/>
-    <p:sldId id="280" r:id="rId29"/>
-    <p:sldId id="281" r:id="rId30"/>
-    <p:sldId id="288" r:id="rId31"/>
-    <p:sldId id="289" r:id="rId32"/>
-    <p:sldId id="283" r:id="rId33"/>
-    <p:sldId id="284" r:id="rId34"/>
-    <p:sldId id="293" r:id="rId35"/>
-    <p:sldId id="291" r:id="rId36"/>
-    <p:sldId id="292" r:id="rId37"/>
-    <p:sldId id="294" r:id="rId38"/>
-    <p:sldId id="295" r:id="rId39"/>
-    <p:sldId id="296" r:id="rId40"/>
-    <p:sldId id="297" r:id="rId41"/>
+    <p:sldId id="308" r:id="rId5"/>
+    <p:sldId id="309" r:id="rId6"/>
+    <p:sldId id="310" r:id="rId7"/>
+    <p:sldId id="301" r:id="rId8"/>
+    <p:sldId id="304" r:id="rId9"/>
+    <p:sldId id="302" r:id="rId10"/>
+    <p:sldId id="313" r:id="rId11"/>
+    <p:sldId id="316" r:id="rId12"/>
+    <p:sldId id="306" r:id="rId13"/>
+    <p:sldId id="259" r:id="rId14"/>
+    <p:sldId id="322" r:id="rId15"/>
+    <p:sldId id="268" r:id="rId16"/>
+    <p:sldId id="325" r:id="rId17"/>
+    <p:sldId id="284" r:id="rId18"/>
+    <p:sldId id="293" r:id="rId19"/>
+    <p:sldId id="271" r:id="rId20"/>
+    <p:sldId id="267" r:id="rId21"/>
+    <p:sldId id="326" r:id="rId22"/>
+    <p:sldId id="323" r:id="rId23"/>
+    <p:sldId id="298" r:id="rId24"/>
+    <p:sldId id="269" r:id="rId25"/>
+    <p:sldId id="320" r:id="rId26"/>
+    <p:sldId id="321" r:id="rId27"/>
+    <p:sldId id="317" r:id="rId28"/>
+    <p:sldId id="318" r:id="rId29"/>
+    <p:sldId id="319" r:id="rId30"/>
+    <p:sldId id="270" r:id="rId31"/>
+    <p:sldId id="266" r:id="rId32"/>
+    <p:sldId id="287" r:id="rId33"/>
+    <p:sldId id="280" r:id="rId34"/>
+    <p:sldId id="281" r:id="rId35"/>
+    <p:sldId id="288" r:id="rId36"/>
+    <p:sldId id="289" r:id="rId37"/>
+    <p:sldId id="292" r:id="rId38"/>
+    <p:sldId id="294" r:id="rId39"/>
+    <p:sldId id="295" r:id="rId40"/>
+    <p:sldId id="296" r:id="rId41"/>
+    <p:sldId id="297" r:id="rId42"/>
   </p:sldIdLst>
   <p:sldSz cx="12192000" cy="6858000"/>
   <p:notesSz cx="6858000" cy="9144000"/>
@@ -236,7 +237,7 @@
           <a:p>
             <a:fld id="{B1A585C4-8FDE-44AD-AB8B-4802EADEEE94}" type="datetimeFigureOut">
               <a:rPr lang="en-US" smtClean="0"/>
-              <a:t>9/17/2026</a:t>
+              <a:t>9/28/2026</a:t>
             </a:fld>
             <a:endParaRPr lang="en-US"/>
           </a:p>
@@ -508,7 +509,13 @@
   <p:cSld>
     <p:spTree>
       <p:nvGrpSpPr>
-        <p:cNvPr id="1" name=""/>
+        <p:cNvPr id="1" name="">
+          <a:extLst>
+            <a:ext uri="{FF2B5EF4-FFF2-40B4-BE49-F238E27FC236}">
+              <a16:creationId xmlns:a16="http://schemas.microsoft.com/office/drawing/2014/main" id="{4DDFC4B2-7BBD-99A6-3021-9FA3F90CC8EE}"/>
+            </a:ext>
+          </a:extLst>
+        </p:cNvPr>
         <p:cNvGrpSpPr/>
         <p:nvPr/>
       </p:nvGrpSpPr>
@@ -522,7 +529,13 @@
       </p:grpSpPr>
       <p:sp>
         <p:nvSpPr>
-          <p:cNvPr id="2" name="Slide Image Placeholder 1"/>
+          <p:cNvPr id="2" name="Slide Image Placeholder 1">
+            <a:extLst>
+              <a:ext uri="{FF2B5EF4-FFF2-40B4-BE49-F238E27FC236}">
+                <a16:creationId xmlns:a16="http://schemas.microsoft.com/office/drawing/2014/main" id="{23ACB5EE-C168-5223-B5E0-E2225DA87081}"/>
+              </a:ext>
+            </a:extLst>
+          </p:cNvPr>
           <p:cNvSpPr>
             <a:spLocks noGrp="1" noRot="1" noChangeAspect="1"/>
           </p:cNvSpPr>
@@ -534,7 +547,13 @@
       </p:sp>
       <p:sp>
         <p:nvSpPr>
-          <p:cNvPr id="3" name="Notes Placeholder 2"/>
+          <p:cNvPr id="3" name="Notes Placeholder 2">
+            <a:extLst>
+              <a:ext uri="{FF2B5EF4-FFF2-40B4-BE49-F238E27FC236}">
+                <a16:creationId xmlns:a16="http://schemas.microsoft.com/office/drawing/2014/main" id="{46381252-4A9E-DB7C-B6EA-46D0C96BB963}"/>
+              </a:ext>
+            </a:extLst>
+          </p:cNvPr>
           <p:cNvSpPr>
             <a:spLocks noGrp="1"/>
           </p:cNvSpPr>
@@ -553,7 +572,13 @@
       </p:sp>
       <p:sp>
         <p:nvSpPr>
-          <p:cNvPr id="4" name="Slide Number Placeholder 3"/>
+          <p:cNvPr id="4" name="Slide Number Placeholder 3">
+            <a:extLst>
+              <a:ext uri="{FF2B5EF4-FFF2-40B4-BE49-F238E27FC236}">
+                <a16:creationId xmlns:a16="http://schemas.microsoft.com/office/drawing/2014/main" id="{2ED18B8A-7BCE-EF5F-BDDE-BFF3D6E7BFA6}"/>
+              </a:ext>
+            </a:extLst>
+          </p:cNvPr>
           <p:cNvSpPr>
             <a:spLocks noGrp="1"/>
           </p:cNvSpPr>
@@ -577,7 +602,7 @@
     </p:spTree>
     <p:extLst>
       <p:ext uri="{BB962C8B-B14F-4D97-AF65-F5344CB8AC3E}">
-        <p14:creationId xmlns:p14="http://schemas.microsoft.com/office/powerpoint/2010/main" val="686975811"/>
+        <p14:creationId xmlns:p14="http://schemas.microsoft.com/office/powerpoint/2010/main" val="4094251717"/>
       </p:ext>
     </p:extLst>
   </p:cSld>
@@ -592,7 +617,13 @@
   <p:cSld>
     <p:spTree>
       <p:nvGrpSpPr>
-        <p:cNvPr id="1" name=""/>
+        <p:cNvPr id="1" name="">
+          <a:extLst>
+            <a:ext uri="{FF2B5EF4-FFF2-40B4-BE49-F238E27FC236}">
+              <a16:creationId xmlns:a16="http://schemas.microsoft.com/office/drawing/2014/main" id="{F59C1B9B-F62D-7292-0739-218FAE8E8D86}"/>
+            </a:ext>
+          </a:extLst>
+        </p:cNvPr>
         <p:cNvGrpSpPr/>
         <p:nvPr/>
       </p:nvGrpSpPr>
@@ -606,7 +637,13 @@
       </p:grpSpPr>
       <p:sp>
         <p:nvSpPr>
-          <p:cNvPr id="2" name="Slide Image Placeholder 1"/>
+          <p:cNvPr id="2" name="Slide Image Placeholder 1">
+            <a:extLst>
+              <a:ext uri="{FF2B5EF4-FFF2-40B4-BE49-F238E27FC236}">
+                <a16:creationId xmlns:a16="http://schemas.microsoft.com/office/drawing/2014/main" id="{B771BD2B-95CF-86FC-02A4-0FE594D7F601}"/>
+              </a:ext>
+            </a:extLst>
+          </p:cNvPr>
           <p:cNvSpPr>
             <a:spLocks noGrp="1" noRot="1" noChangeAspect="1"/>
           </p:cNvSpPr>
@@ -618,7 +655,13 @@
       </p:sp>
       <p:sp>
         <p:nvSpPr>
-          <p:cNvPr id="3" name="Notes Placeholder 2"/>
+          <p:cNvPr id="3" name="Notes Placeholder 2">
+            <a:extLst>
+              <a:ext uri="{FF2B5EF4-FFF2-40B4-BE49-F238E27FC236}">
+                <a16:creationId xmlns:a16="http://schemas.microsoft.com/office/drawing/2014/main" id="{B8E71813-B717-2DFE-DD2F-5766C9978612}"/>
+              </a:ext>
+            </a:extLst>
+          </p:cNvPr>
           <p:cNvSpPr>
             <a:spLocks noGrp="1"/>
           </p:cNvSpPr>
@@ -631,28 +674,19 @@
           <a:bodyPr/>
           <a:lstStyle/>
           <a:p>
-            <a:r>
-              <a:rPr lang="en-US" dirty="0"/>
-              <a:t>Maybe look at specific months during sampling – April potentially?</a:t>
-            </a:r>
-          </a:p>
-          <a:p>
-            <a:r>
-              <a:rPr lang="en-US" dirty="0"/>
-              <a:t>Hypotheses of what the driving mechanisms are for the trends with age changes.</a:t>
-            </a:r>
-          </a:p>
-          <a:p>
             <a:endParaRPr lang="en-US" dirty="0"/>
           </a:p>
-          <a:p>
-            <a:endParaRPr lang="en-US" dirty="0"/>
-          </a:p>
-        </p:txBody>
-      </p:sp>
-      <p:sp>
-        <p:nvSpPr>
-          <p:cNvPr id="4" name="Slide Number Placeholder 3"/>
+        </p:txBody>
+      </p:sp>
+      <p:sp>
+        <p:nvSpPr>
+          <p:cNvPr id="4" name="Slide Number Placeholder 3">
+            <a:extLst>
+              <a:ext uri="{FF2B5EF4-FFF2-40B4-BE49-F238E27FC236}">
+                <a16:creationId xmlns:a16="http://schemas.microsoft.com/office/drawing/2014/main" id="{C07E0B04-C723-0D92-2306-63D9FB8912E1}"/>
+              </a:ext>
+            </a:extLst>
+          </p:cNvPr>
           <p:cNvSpPr>
             <a:spLocks noGrp="1"/>
           </p:cNvSpPr>
@@ -667,7 +701,7 @@
           <a:p>
             <a:fld id="{BC9AF6F9-19A8-4B2B-96C4-42992BE88AC3}" type="slidenum">
               <a:rPr lang="en-US" smtClean="0"/>
-              <a:t>8</a:t>
+              <a:t>10</a:t>
             </a:fld>
             <a:endParaRPr lang="en-US"/>
           </a:p>
@@ -676,7 +710,7 @@
     </p:spTree>
     <p:extLst>
       <p:ext uri="{BB962C8B-B14F-4D97-AF65-F5344CB8AC3E}">
-        <p14:creationId xmlns:p14="http://schemas.microsoft.com/office/powerpoint/2010/main" val="2695915399"/>
+        <p14:creationId xmlns:p14="http://schemas.microsoft.com/office/powerpoint/2010/main" val="2868732808"/>
       </p:ext>
     </p:extLst>
   </p:cSld>
@@ -691,7 +725,13 @@
   <p:cSld>
     <p:spTree>
       <p:nvGrpSpPr>
-        <p:cNvPr id="1" name=""/>
+        <p:cNvPr id="1" name="">
+          <a:extLst>
+            <a:ext uri="{FF2B5EF4-FFF2-40B4-BE49-F238E27FC236}">
+              <a16:creationId xmlns:a16="http://schemas.microsoft.com/office/drawing/2014/main" id="{ADF220A8-91B4-DFE6-0717-9650E9761E3A}"/>
+            </a:ext>
+          </a:extLst>
+        </p:cNvPr>
         <p:cNvGrpSpPr/>
         <p:nvPr/>
       </p:nvGrpSpPr>
@@ -705,7 +745,13 @@
       </p:grpSpPr>
       <p:sp>
         <p:nvSpPr>
-          <p:cNvPr id="2" name="Slide Image Placeholder 1"/>
+          <p:cNvPr id="2" name="Slide Image Placeholder 1">
+            <a:extLst>
+              <a:ext uri="{FF2B5EF4-FFF2-40B4-BE49-F238E27FC236}">
+                <a16:creationId xmlns:a16="http://schemas.microsoft.com/office/drawing/2014/main" id="{C5ED38B7-6271-F0D1-A975-2D75FCF0A85B}"/>
+              </a:ext>
+            </a:extLst>
+          </p:cNvPr>
           <p:cNvSpPr>
             <a:spLocks noGrp="1" noRot="1" noChangeAspect="1"/>
           </p:cNvSpPr>
@@ -717,7 +763,13 @@
       </p:sp>
       <p:sp>
         <p:nvSpPr>
-          <p:cNvPr id="3" name="Notes Placeholder 2"/>
+          <p:cNvPr id="3" name="Notes Placeholder 2">
+            <a:extLst>
+              <a:ext uri="{FF2B5EF4-FFF2-40B4-BE49-F238E27FC236}">
+                <a16:creationId xmlns:a16="http://schemas.microsoft.com/office/drawing/2014/main" id="{5F67C3CC-5FBD-3C0D-087F-776F24FC42EF}"/>
+              </a:ext>
+            </a:extLst>
+          </p:cNvPr>
           <p:cNvSpPr>
             <a:spLocks noGrp="1"/>
           </p:cNvSpPr>
@@ -736,7 +788,13 @@
       </p:sp>
       <p:sp>
         <p:nvSpPr>
-          <p:cNvPr id="4" name="Slide Number Placeholder 3"/>
+          <p:cNvPr id="4" name="Slide Number Placeholder 3">
+            <a:extLst>
+              <a:ext uri="{FF2B5EF4-FFF2-40B4-BE49-F238E27FC236}">
+                <a16:creationId xmlns:a16="http://schemas.microsoft.com/office/drawing/2014/main" id="{EF4271FA-3F0D-A303-0BC9-1CC7C111DDA3}"/>
+              </a:ext>
+            </a:extLst>
+          </p:cNvPr>
           <p:cNvSpPr>
             <a:spLocks noGrp="1"/>
           </p:cNvSpPr>
@@ -751,7 +809,7 @@
           <a:p>
             <a:fld id="{BC9AF6F9-19A8-4B2B-96C4-42992BE88AC3}" type="slidenum">
               <a:rPr lang="en-US" smtClean="0"/>
-              <a:t>9</a:t>
+              <a:t>11</a:t>
             </a:fld>
             <a:endParaRPr lang="en-US"/>
           </a:p>
@@ -760,7 +818,7 @@
     </p:spTree>
     <p:extLst>
       <p:ext uri="{BB962C8B-B14F-4D97-AF65-F5344CB8AC3E}">
-        <p14:creationId xmlns:p14="http://schemas.microsoft.com/office/powerpoint/2010/main" val="3567141392"/>
+        <p14:creationId xmlns:p14="http://schemas.microsoft.com/office/powerpoint/2010/main" val="3188254178"/>
       </p:ext>
     </p:extLst>
   </p:cSld>
@@ -778,7 +836,7 @@
         <p:cNvPr id="1" name="">
           <a:extLst>
             <a:ext uri="{FF2B5EF4-FFF2-40B4-BE49-F238E27FC236}">
-              <a16:creationId xmlns:a16="http://schemas.microsoft.com/office/drawing/2014/main" id="{A978B54F-4FB1-7F62-A5FD-28078E5C5DFD}"/>
+              <a16:creationId xmlns:a16="http://schemas.microsoft.com/office/drawing/2014/main" id="{BC4AC4B9-D081-F338-B89A-9D84A441996A}"/>
             </a:ext>
           </a:extLst>
         </p:cNvPr>
@@ -798,7 +856,7 @@
           <p:cNvPr id="2" name="Slide Image Placeholder 1">
             <a:extLst>
               <a:ext uri="{FF2B5EF4-FFF2-40B4-BE49-F238E27FC236}">
-                <a16:creationId xmlns:a16="http://schemas.microsoft.com/office/drawing/2014/main" id="{3A5D0216-D2E0-8F28-9397-501B4B400BE2}"/>
+                <a16:creationId xmlns:a16="http://schemas.microsoft.com/office/drawing/2014/main" id="{1C8D8140-43E9-53F2-CAE5-5DDE80256077}"/>
               </a:ext>
             </a:extLst>
           </p:cNvPr>
@@ -816,7 +874,7 @@
           <p:cNvPr id="3" name="Notes Placeholder 2">
             <a:extLst>
               <a:ext uri="{FF2B5EF4-FFF2-40B4-BE49-F238E27FC236}">
-                <a16:creationId xmlns:a16="http://schemas.microsoft.com/office/drawing/2014/main" id="{BDAE8413-AB0D-26DC-0B3C-05E603FFA069}"/>
+                <a16:creationId xmlns:a16="http://schemas.microsoft.com/office/drawing/2014/main" id="{9243144D-D2E2-2C0C-39A4-B1485582675C}"/>
               </a:ext>
             </a:extLst>
           </p:cNvPr>
@@ -841,7 +899,7 @@
           <p:cNvPr id="4" name="Slide Number Placeholder 3">
             <a:extLst>
               <a:ext uri="{FF2B5EF4-FFF2-40B4-BE49-F238E27FC236}">
-                <a16:creationId xmlns:a16="http://schemas.microsoft.com/office/drawing/2014/main" id="{8557D058-395D-DF05-2C81-6122843EC590}"/>
+                <a16:creationId xmlns:a16="http://schemas.microsoft.com/office/drawing/2014/main" id="{BB4DEF7F-6D94-FE3E-0337-E0CB9F170D2B}"/>
               </a:ext>
             </a:extLst>
           </p:cNvPr>
@@ -859,7 +917,7 @@
           <a:p>
             <a:fld id="{BC9AF6F9-19A8-4B2B-96C4-42992BE88AC3}" type="slidenum">
               <a:rPr lang="en-US" smtClean="0"/>
-              <a:t>10</a:t>
+              <a:t>14</a:t>
             </a:fld>
             <a:endParaRPr lang="en-US"/>
           </a:p>
@@ -868,7 +926,7 @@
     </p:spTree>
     <p:extLst>
       <p:ext uri="{BB962C8B-B14F-4D97-AF65-F5344CB8AC3E}">
-        <p14:creationId xmlns:p14="http://schemas.microsoft.com/office/powerpoint/2010/main" val="3725228758"/>
+        <p14:creationId xmlns:p14="http://schemas.microsoft.com/office/powerpoint/2010/main" val="1508225190"/>
       </p:ext>
     </p:extLst>
   </p:cSld>
@@ -943,7 +1001,7 @@
           <a:p>
             <a:fld id="{BC9AF6F9-19A8-4B2B-96C4-42992BE88AC3}" type="slidenum">
               <a:rPr lang="en-US" smtClean="0"/>
-              <a:t>22</a:t>
+              <a:t>15</a:t>
             </a:fld>
             <a:endParaRPr lang="en-US"/>
           </a:p>
@@ -952,7 +1010,106 @@
     </p:spTree>
     <p:extLst>
       <p:ext uri="{BB962C8B-B14F-4D97-AF65-F5344CB8AC3E}">
-        <p14:creationId xmlns:p14="http://schemas.microsoft.com/office/powerpoint/2010/main" val="743210991"/>
+        <p14:creationId xmlns:p14="http://schemas.microsoft.com/office/powerpoint/2010/main" val="3165118547"/>
+      </p:ext>
+    </p:extLst>
+  </p:cSld>
+  <p:clrMapOvr>
+    <a:masterClrMapping/>
+  </p:clrMapOvr>
+</p:notes>
+</file>
+
+<file path=ppt/notesSlides/notesSlide6.xml><?xml version="1.0" encoding="utf-8"?>
+<p:notes xmlns:a="http://schemas.openxmlformats.org/drawingml/2006/main" xmlns:r="http://schemas.openxmlformats.org/officeDocument/2006/relationships" xmlns:p="http://schemas.openxmlformats.org/presentationml/2006/main">
+  <p:cSld>
+    <p:spTree>
+      <p:nvGrpSpPr>
+        <p:cNvPr id="1" name=""/>
+        <p:cNvGrpSpPr/>
+        <p:nvPr/>
+      </p:nvGrpSpPr>
+      <p:grpSpPr>
+        <a:xfrm>
+          <a:off x="0" y="0"/>
+          <a:ext cx="0" cy="0"/>
+          <a:chOff x="0" y="0"/>
+          <a:chExt cx="0" cy="0"/>
+        </a:xfrm>
+      </p:grpSpPr>
+      <p:sp>
+        <p:nvSpPr>
+          <p:cNvPr id="2" name="Slide Image Placeholder 1"/>
+          <p:cNvSpPr>
+            <a:spLocks noGrp="1" noRot="1" noChangeAspect="1"/>
+          </p:cNvSpPr>
+          <p:nvPr>
+            <p:ph type="sldImg"/>
+          </p:nvPr>
+        </p:nvSpPr>
+        <p:spPr/>
+      </p:sp>
+      <p:sp>
+        <p:nvSpPr>
+          <p:cNvPr id="3" name="Notes Placeholder 2"/>
+          <p:cNvSpPr>
+            <a:spLocks noGrp="1"/>
+          </p:cNvSpPr>
+          <p:nvPr>
+            <p:ph type="body" idx="1"/>
+          </p:nvPr>
+        </p:nvSpPr>
+        <p:spPr/>
+        <p:txBody>
+          <a:bodyPr/>
+          <a:lstStyle/>
+          <a:p>
+            <a:r>
+              <a:rPr lang="en-US" dirty="0"/>
+              <a:t>Maybe look at specific months during sampling – April potentially?</a:t>
+            </a:r>
+          </a:p>
+          <a:p>
+            <a:r>
+              <a:rPr lang="en-US" dirty="0"/>
+              <a:t>Hypotheses of what the driving mechanisms are for the trends with age changes.</a:t>
+            </a:r>
+          </a:p>
+          <a:p>
+            <a:endParaRPr lang="en-US" dirty="0"/>
+          </a:p>
+          <a:p>
+            <a:endParaRPr lang="en-US" dirty="0"/>
+          </a:p>
+        </p:txBody>
+      </p:sp>
+      <p:sp>
+        <p:nvSpPr>
+          <p:cNvPr id="4" name="Slide Number Placeholder 3"/>
+          <p:cNvSpPr>
+            <a:spLocks noGrp="1"/>
+          </p:cNvSpPr>
+          <p:nvPr>
+            <p:ph type="sldNum" sz="quarter" idx="5"/>
+          </p:nvPr>
+        </p:nvSpPr>
+        <p:spPr/>
+        <p:txBody>
+          <a:bodyPr/>
+          <a:lstStyle/>
+          <a:p>
+            <a:fld id="{BC9AF6F9-19A8-4B2B-96C4-42992BE88AC3}" type="slidenum">
+              <a:rPr lang="en-US" smtClean="0"/>
+              <a:t>20</a:t>
+            </a:fld>
+            <a:endParaRPr lang="en-US"/>
+          </a:p>
+        </p:txBody>
+      </p:sp>
+    </p:spTree>
+    <p:extLst>
+      <p:ext uri="{BB962C8B-B14F-4D97-AF65-F5344CB8AC3E}">
+        <p14:creationId xmlns:p14="http://schemas.microsoft.com/office/powerpoint/2010/main" val="2695915399"/>
       </p:ext>
     </p:extLst>
   </p:cSld>
@@ -1109,7 +1266,7 @@
           <a:p>
             <a:fld id="{0679C2E1-833F-46B1-9B12-C4DA11FEBF42}" type="datetimeFigureOut">
               <a:rPr lang="en-US" smtClean="0"/>
-              <a:t>9/17/2026</a:t>
+              <a:t>9/28/2026</a:t>
             </a:fld>
             <a:endParaRPr lang="en-US"/>
           </a:p>
@@ -1307,7 +1464,7 @@
           <a:p>
             <a:fld id="{0679C2E1-833F-46B1-9B12-C4DA11FEBF42}" type="datetimeFigureOut">
               <a:rPr lang="en-US" smtClean="0"/>
-              <a:t>9/17/2026</a:t>
+              <a:t>9/28/2026</a:t>
             </a:fld>
             <a:endParaRPr lang="en-US"/>
           </a:p>
@@ -1515,7 +1672,7 @@
           <a:p>
             <a:fld id="{0679C2E1-833F-46B1-9B12-C4DA11FEBF42}" type="datetimeFigureOut">
               <a:rPr lang="en-US" smtClean="0"/>
-              <a:t>9/17/2026</a:t>
+              <a:t>9/28/2026</a:t>
             </a:fld>
             <a:endParaRPr lang="en-US"/>
           </a:p>
@@ -1713,7 +1870,7 @@
           <a:p>
             <a:fld id="{0679C2E1-833F-46B1-9B12-C4DA11FEBF42}" type="datetimeFigureOut">
               <a:rPr lang="en-US" smtClean="0"/>
-              <a:t>9/17/2026</a:t>
+              <a:t>9/28/2026</a:t>
             </a:fld>
             <a:endParaRPr lang="en-US"/>
           </a:p>
@@ -1988,7 +2145,7 @@
           <a:p>
             <a:fld id="{0679C2E1-833F-46B1-9B12-C4DA11FEBF42}" type="datetimeFigureOut">
               <a:rPr lang="en-US" smtClean="0"/>
-              <a:t>9/17/2026</a:t>
+              <a:t>9/28/2026</a:t>
             </a:fld>
             <a:endParaRPr lang="en-US"/>
           </a:p>
@@ -2253,7 +2410,7 @@
           <a:p>
             <a:fld id="{0679C2E1-833F-46B1-9B12-C4DA11FEBF42}" type="datetimeFigureOut">
               <a:rPr lang="en-US" smtClean="0"/>
-              <a:t>9/17/2026</a:t>
+              <a:t>9/28/2026</a:t>
             </a:fld>
             <a:endParaRPr lang="en-US"/>
           </a:p>
@@ -2665,7 +2822,7 @@
           <a:p>
             <a:fld id="{0679C2E1-833F-46B1-9B12-C4DA11FEBF42}" type="datetimeFigureOut">
               <a:rPr lang="en-US" smtClean="0"/>
-              <a:t>9/17/2026</a:t>
+              <a:t>9/28/2026</a:t>
             </a:fld>
             <a:endParaRPr lang="en-US"/>
           </a:p>
@@ -2806,7 +2963,7 @@
           <a:p>
             <a:fld id="{0679C2E1-833F-46B1-9B12-C4DA11FEBF42}" type="datetimeFigureOut">
               <a:rPr lang="en-US" smtClean="0"/>
-              <a:t>9/17/2026</a:t>
+              <a:t>9/28/2026</a:t>
             </a:fld>
             <a:endParaRPr lang="en-US"/>
           </a:p>
@@ -2919,7 +3076,7 @@
           <a:p>
             <a:fld id="{0679C2E1-833F-46B1-9B12-C4DA11FEBF42}" type="datetimeFigureOut">
               <a:rPr lang="en-US" smtClean="0"/>
-              <a:t>9/17/2026</a:t>
+              <a:t>9/28/2026</a:t>
             </a:fld>
             <a:endParaRPr lang="en-US"/>
           </a:p>
@@ -3230,7 +3387,7 @@
           <a:p>
             <a:fld id="{0679C2E1-833F-46B1-9B12-C4DA11FEBF42}" type="datetimeFigureOut">
               <a:rPr lang="en-US" smtClean="0"/>
-              <a:t>9/17/2026</a:t>
+              <a:t>9/28/2026</a:t>
             </a:fld>
             <a:endParaRPr lang="en-US"/>
           </a:p>
@@ -3518,7 +3675,7 @@
           <a:p>
             <a:fld id="{0679C2E1-833F-46B1-9B12-C4DA11FEBF42}" type="datetimeFigureOut">
               <a:rPr lang="en-US" smtClean="0"/>
-              <a:t>9/17/2026</a:t>
+              <a:t>9/28/2026</a:t>
             </a:fld>
             <a:endParaRPr lang="en-US"/>
           </a:p>
@@ -3759,7 +3916,7 @@
           <a:p>
             <a:fld id="{0679C2E1-833F-46B1-9B12-C4DA11FEBF42}" type="datetimeFigureOut">
               <a:rPr lang="en-US" smtClean="0"/>
-              <a:t>9/17/2026</a:t>
+              <a:t>9/28/2026</a:t>
             </a:fld>
             <a:endParaRPr lang="en-US"/>
           </a:p>
@@ -4298,7 +4455,7 @@
         <p:cNvPr id="1" name="">
           <a:extLst>
             <a:ext uri="{FF2B5EF4-FFF2-40B4-BE49-F238E27FC236}">
-              <a16:creationId xmlns:a16="http://schemas.microsoft.com/office/drawing/2014/main" id="{32C722D0-414D-FC1A-F1F0-E88095A36A4D}"/>
+              <a16:creationId xmlns:a16="http://schemas.microsoft.com/office/drawing/2014/main" id="{99EB299D-3070-B03A-6039-34685C748421}"/>
             </a:ext>
           </a:extLst>
         </p:cNvPr>
@@ -4318,7 +4475,7 @@
           <p:cNvPr id="2" name="Title 1">
             <a:extLst>
               <a:ext uri="{FF2B5EF4-FFF2-40B4-BE49-F238E27FC236}">
-                <a16:creationId xmlns:a16="http://schemas.microsoft.com/office/drawing/2014/main" id="{62DF668B-5DF0-C981-BF4C-1EEA10CC4282}"/>
+                <a16:creationId xmlns:a16="http://schemas.microsoft.com/office/drawing/2014/main" id="{7287E5C3-6A63-10AA-1280-022AC875066C}"/>
               </a:ext>
             </a:extLst>
           </p:cNvPr>
@@ -4336,42 +4493,17 @@
           <a:p>
             <a:r>
               <a:rPr lang="en-US" dirty="0"/>
-              <a:t>Just Canada data</a:t>
-            </a:r>
-          </a:p>
-        </p:txBody>
-      </p:sp>
-      <p:sp>
-        <p:nvSpPr>
-          <p:cNvPr id="3" name="Content Placeholder 2">
-            <a:extLst>
-              <a:ext uri="{FF2B5EF4-FFF2-40B4-BE49-F238E27FC236}">
-                <a16:creationId xmlns:a16="http://schemas.microsoft.com/office/drawing/2014/main" id="{33163A41-F312-9FF2-3B68-61166F02B0B1}"/>
-              </a:ext>
-            </a:extLst>
-          </p:cNvPr>
-          <p:cNvSpPr>
-            <a:spLocks noGrp="1"/>
-          </p:cNvSpPr>
-          <p:nvPr>
-            <p:ph idx="1"/>
-          </p:nvPr>
-        </p:nvSpPr>
-        <p:spPr/>
-        <p:txBody>
-          <a:bodyPr/>
-          <a:lstStyle/>
-          <a:p>
-            <a:endParaRPr lang="en-US"/>
+              <a:t>Env data plots – US Data</a:t>
+            </a:r>
           </a:p>
         </p:txBody>
       </p:sp>
       <p:pic>
         <p:nvPicPr>
-          <p:cNvPr id="6" name="Picture 5">
-            <a:extLst>
-              <a:ext uri="{FF2B5EF4-FFF2-40B4-BE49-F238E27FC236}">
-                <a16:creationId xmlns:a16="http://schemas.microsoft.com/office/drawing/2014/main" id="{E1070D0B-8981-C750-9AB9-55593E26B232}"/>
+          <p:cNvPr id="4" name="Picture 3">
+            <a:extLst>
+              <a:ext uri="{FF2B5EF4-FFF2-40B4-BE49-F238E27FC236}">
+                <a16:creationId xmlns:a16="http://schemas.microsoft.com/office/drawing/2014/main" id="{759E3529-BD8B-027B-CDD6-9F00584D5600}"/>
               </a:ext>
             </a:extLst>
           </p:cNvPr>
@@ -4388,8 +4520,8 @@
         </p:blipFill>
         <p:spPr>
           <a:xfrm>
-            <a:off x="1563329" y="1501877"/>
-            <a:ext cx="8396748" cy="5247968"/>
+            <a:off x="2203578" y="1475632"/>
+            <a:ext cx="7784844" cy="5017243"/>
           </a:xfrm>
           <a:prstGeom prst="rect">
             <a:avLst/>
@@ -4399,7 +4531,7 @@
     </p:spTree>
     <p:extLst>
       <p:ext uri="{BB962C8B-B14F-4D97-AF65-F5344CB8AC3E}">
-        <p14:creationId xmlns:p14="http://schemas.microsoft.com/office/powerpoint/2010/main" val="54637490"/>
+        <p14:creationId xmlns:p14="http://schemas.microsoft.com/office/powerpoint/2010/main" val="3763793456"/>
       </p:ext>
     </p:extLst>
   </p:cSld>
@@ -4410,6 +4542,100 @@
 </file>
 
 <file path=ppt/slides/slide11.xml><?xml version="1.0" encoding="utf-8"?>
+<p:sld xmlns:a="http://schemas.openxmlformats.org/drawingml/2006/main" xmlns:r="http://schemas.openxmlformats.org/officeDocument/2006/relationships" xmlns:p="http://schemas.openxmlformats.org/presentationml/2006/main">
+  <p:cSld>
+    <p:spTree>
+      <p:nvGrpSpPr>
+        <p:cNvPr id="1" name="">
+          <a:extLst>
+            <a:ext uri="{FF2B5EF4-FFF2-40B4-BE49-F238E27FC236}">
+              <a16:creationId xmlns:a16="http://schemas.microsoft.com/office/drawing/2014/main" id="{CD0533FE-2750-141E-9C8C-562999CA41E6}"/>
+            </a:ext>
+          </a:extLst>
+        </p:cNvPr>
+        <p:cNvGrpSpPr/>
+        <p:nvPr/>
+      </p:nvGrpSpPr>
+      <p:grpSpPr>
+        <a:xfrm>
+          <a:off x="0" y="0"/>
+          <a:ext cx="0" cy="0"/>
+          <a:chOff x="0" y="0"/>
+          <a:chExt cx="0" cy="0"/>
+        </a:xfrm>
+      </p:grpSpPr>
+      <p:sp>
+        <p:nvSpPr>
+          <p:cNvPr id="2" name="Title 1">
+            <a:extLst>
+              <a:ext uri="{FF2B5EF4-FFF2-40B4-BE49-F238E27FC236}">
+                <a16:creationId xmlns:a16="http://schemas.microsoft.com/office/drawing/2014/main" id="{560EE8FA-5A59-1FA1-FAA1-0FE4373DF318}"/>
+              </a:ext>
+            </a:extLst>
+          </p:cNvPr>
+          <p:cNvSpPr>
+            <a:spLocks noGrp="1"/>
+          </p:cNvSpPr>
+          <p:nvPr>
+            <p:ph type="title"/>
+          </p:nvPr>
+        </p:nvSpPr>
+        <p:spPr/>
+        <p:txBody>
+          <a:bodyPr/>
+          <a:lstStyle/>
+          <a:p>
+            <a:r>
+              <a:rPr lang="en-US" dirty="0"/>
+              <a:t>Env data plots – Can Data</a:t>
+            </a:r>
+          </a:p>
+        </p:txBody>
+      </p:sp>
+      <p:pic>
+        <p:nvPicPr>
+          <p:cNvPr id="4" name="Picture 3">
+            <a:extLst>
+              <a:ext uri="{FF2B5EF4-FFF2-40B4-BE49-F238E27FC236}">
+                <a16:creationId xmlns:a16="http://schemas.microsoft.com/office/drawing/2014/main" id="{2B424EF2-198A-1D85-8612-ED226BFA4037}"/>
+              </a:ext>
+            </a:extLst>
+          </p:cNvPr>
+          <p:cNvPicPr>
+            <a:picLocks noChangeAspect="1"/>
+          </p:cNvPicPr>
+          <p:nvPr/>
+        </p:nvPicPr>
+        <p:blipFill>
+          <a:blip r:embed="rId3"/>
+          <a:stretch>
+            <a:fillRect/>
+          </a:stretch>
+        </p:blipFill>
+        <p:spPr>
+          <a:xfrm>
+            <a:off x="1791776" y="1735439"/>
+            <a:ext cx="7381722" cy="4757436"/>
+          </a:xfrm>
+          <a:prstGeom prst="rect">
+            <a:avLst/>
+          </a:prstGeom>
+        </p:spPr>
+      </p:pic>
+    </p:spTree>
+    <p:extLst>
+      <p:ext uri="{BB962C8B-B14F-4D97-AF65-F5344CB8AC3E}">
+        <p14:creationId xmlns:p14="http://schemas.microsoft.com/office/powerpoint/2010/main" val="1380386091"/>
+      </p:ext>
+    </p:extLst>
+  </p:cSld>
+  <p:clrMapOvr>
+    <a:masterClrMapping/>
+  </p:clrMapOvr>
+</p:sld>
+</file>
+
+<file path=ppt/slides/slide12.xml><?xml version="1.0" encoding="utf-8"?>
 <p:sld xmlns:a="http://schemas.openxmlformats.org/drawingml/2006/main" xmlns:r="http://schemas.openxmlformats.org/officeDocument/2006/relationships" xmlns:p="http://schemas.openxmlformats.org/presentationml/2006/main">
   <p:cSld>
     <p:spTree>
@@ -4431,7 +4657,7 @@
           <p:cNvPr id="2" name="Title 1">
             <a:extLst>
               <a:ext uri="{FF2B5EF4-FFF2-40B4-BE49-F238E27FC236}">
-                <a16:creationId xmlns:a16="http://schemas.microsoft.com/office/drawing/2014/main" id="{9273D0CC-1390-23CA-659C-80D238F832DD}"/>
+                <a16:creationId xmlns:a16="http://schemas.microsoft.com/office/drawing/2014/main" id="{01E53C5E-E8C5-1617-78E1-FC5D8747D8D7}"/>
               </a:ext>
             </a:extLst>
           </p:cNvPr>
@@ -4449,7 +4675,7 @@
           <a:p>
             <a:r>
               <a:rPr lang="en-US" dirty="0"/>
-              <a:t>Just Canada data</a:t>
+              <a:t>Bayesian model output</a:t>
             </a:r>
           </a:p>
         </p:txBody>
@@ -4459,7 +4685,7 @@
           <p:cNvPr id="3" name="Content Placeholder 2">
             <a:extLst>
               <a:ext uri="{FF2B5EF4-FFF2-40B4-BE49-F238E27FC236}">
-                <a16:creationId xmlns:a16="http://schemas.microsoft.com/office/drawing/2014/main" id="{0C1CDF77-A571-9D75-D96E-4405D388DC13}"/>
+                <a16:creationId xmlns:a16="http://schemas.microsoft.com/office/drawing/2014/main" id="{D5C43D05-A3EB-146E-88BB-0F7D4C7754D0}"/>
               </a:ext>
             </a:extLst>
           </p:cNvPr>
@@ -4479,159 +4705,10 @@
           </a:p>
         </p:txBody>
       </p:sp>
-      <p:pic>
-        <p:nvPicPr>
-          <p:cNvPr id="7" name="Picture 6">
-            <a:extLst>
-              <a:ext uri="{FF2B5EF4-FFF2-40B4-BE49-F238E27FC236}">
-                <a16:creationId xmlns:a16="http://schemas.microsoft.com/office/drawing/2014/main" id="{1E8BBBDB-5E60-3B0F-568F-69DA7E4354B3}"/>
-              </a:ext>
-            </a:extLst>
-          </p:cNvPr>
-          <p:cNvPicPr>
-            <a:picLocks noChangeAspect="1"/>
-          </p:cNvPicPr>
-          <p:nvPr/>
-        </p:nvPicPr>
-        <p:blipFill>
-          <a:blip r:embed="rId2"/>
-          <a:stretch>
-            <a:fillRect/>
-          </a:stretch>
-        </p:blipFill>
-        <p:spPr>
-          <a:xfrm>
-            <a:off x="5225733" y="1027906"/>
-            <a:ext cx="6262425" cy="4939378"/>
-          </a:xfrm>
-          <a:prstGeom prst="rect">
-            <a:avLst/>
-          </a:prstGeom>
-        </p:spPr>
-      </p:pic>
     </p:spTree>
     <p:extLst>
       <p:ext uri="{BB962C8B-B14F-4D97-AF65-F5344CB8AC3E}">
-        <p14:creationId xmlns:p14="http://schemas.microsoft.com/office/powerpoint/2010/main" val="2072463996"/>
-      </p:ext>
-    </p:extLst>
-  </p:cSld>
-  <p:clrMapOvr>
-    <a:masterClrMapping/>
-  </p:clrMapOvr>
-</p:sld>
-</file>
-
-<file path=ppt/slides/slide12.xml><?xml version="1.0" encoding="utf-8"?>
-<p:sld xmlns:a="http://schemas.openxmlformats.org/drawingml/2006/main" xmlns:r="http://schemas.openxmlformats.org/officeDocument/2006/relationships" xmlns:p="http://schemas.openxmlformats.org/presentationml/2006/main">
-  <p:cSld>
-    <p:spTree>
-      <p:nvGrpSpPr>
-        <p:cNvPr id="1" name="">
-          <a:extLst>
-            <a:ext uri="{FF2B5EF4-FFF2-40B4-BE49-F238E27FC236}">
-              <a16:creationId xmlns:a16="http://schemas.microsoft.com/office/drawing/2014/main" id="{EB07A947-88C8-BDAE-580C-D3163431981D}"/>
-            </a:ext>
-          </a:extLst>
-        </p:cNvPr>
-        <p:cNvGrpSpPr/>
-        <p:nvPr/>
-      </p:nvGrpSpPr>
-      <p:grpSpPr>
-        <a:xfrm>
-          <a:off x="0" y="0"/>
-          <a:ext cx="0" cy="0"/>
-          <a:chOff x="0" y="0"/>
-          <a:chExt cx="0" cy="0"/>
-        </a:xfrm>
-      </p:grpSpPr>
-      <p:sp>
-        <p:nvSpPr>
-          <p:cNvPr id="2" name="Title 1">
-            <a:extLst>
-              <a:ext uri="{FF2B5EF4-FFF2-40B4-BE49-F238E27FC236}">
-                <a16:creationId xmlns:a16="http://schemas.microsoft.com/office/drawing/2014/main" id="{C8A5C2BE-BDC0-F2CA-F531-1EB129401C11}"/>
-              </a:ext>
-            </a:extLst>
-          </p:cNvPr>
-          <p:cNvSpPr>
-            <a:spLocks noGrp="1"/>
-          </p:cNvSpPr>
-          <p:nvPr>
-            <p:ph type="title"/>
-          </p:nvPr>
-        </p:nvSpPr>
-        <p:spPr/>
-        <p:txBody>
-          <a:bodyPr/>
-          <a:lstStyle/>
-          <a:p>
-            <a:r>
-              <a:rPr lang="en-US" dirty="0"/>
-              <a:t>Just Canada data</a:t>
-            </a:r>
-          </a:p>
-        </p:txBody>
-      </p:sp>
-      <p:sp>
-        <p:nvSpPr>
-          <p:cNvPr id="3" name="Content Placeholder 2">
-            <a:extLst>
-              <a:ext uri="{FF2B5EF4-FFF2-40B4-BE49-F238E27FC236}">
-                <a16:creationId xmlns:a16="http://schemas.microsoft.com/office/drawing/2014/main" id="{2D08286C-F777-7B7E-7654-F16B83E67488}"/>
-              </a:ext>
-            </a:extLst>
-          </p:cNvPr>
-          <p:cNvSpPr>
-            <a:spLocks noGrp="1"/>
-          </p:cNvSpPr>
-          <p:nvPr>
-            <p:ph idx="1"/>
-          </p:nvPr>
-        </p:nvSpPr>
-        <p:spPr/>
-        <p:txBody>
-          <a:bodyPr/>
-          <a:lstStyle/>
-          <a:p>
-            <a:endParaRPr lang="en-US"/>
-          </a:p>
-        </p:txBody>
-      </p:sp>
-      <p:pic>
-        <p:nvPicPr>
-          <p:cNvPr id="6" name="Picture 5">
-            <a:extLst>
-              <a:ext uri="{FF2B5EF4-FFF2-40B4-BE49-F238E27FC236}">
-                <a16:creationId xmlns:a16="http://schemas.microsoft.com/office/drawing/2014/main" id="{3F313313-3DA2-03BF-A2A7-EA7EBC20CA5C}"/>
-              </a:ext>
-            </a:extLst>
-          </p:cNvPr>
-          <p:cNvPicPr>
-            <a:picLocks noChangeAspect="1"/>
-          </p:cNvPicPr>
-          <p:nvPr/>
-        </p:nvPicPr>
-        <p:blipFill>
-          <a:blip r:embed="rId2"/>
-          <a:stretch>
-            <a:fillRect/>
-          </a:stretch>
-        </p:blipFill>
-        <p:spPr>
-          <a:xfrm>
-            <a:off x="5812547" y="0"/>
-            <a:ext cx="5369814" cy="6858000"/>
-          </a:xfrm>
-          <a:prstGeom prst="rect">
-            <a:avLst/>
-          </a:prstGeom>
-        </p:spPr>
-      </p:pic>
-    </p:spTree>
-    <p:extLst>
-      <p:ext uri="{BB962C8B-B14F-4D97-AF65-F5344CB8AC3E}">
-        <p14:creationId xmlns:p14="http://schemas.microsoft.com/office/powerpoint/2010/main" val="2065265143"/>
+        <p14:creationId xmlns:p14="http://schemas.microsoft.com/office/powerpoint/2010/main" val="1566926840"/>
       </p:ext>
     </p:extLst>
   </p:cSld>
@@ -4663,7 +4740,7 @@
           <p:cNvPr id="2" name="Title 1">
             <a:extLst>
               <a:ext uri="{FF2B5EF4-FFF2-40B4-BE49-F238E27FC236}">
-                <a16:creationId xmlns:a16="http://schemas.microsoft.com/office/drawing/2014/main" id="{41E099BD-4E63-9C99-EF1E-ADFEDE7516DB}"/>
+                <a16:creationId xmlns:a16="http://schemas.microsoft.com/office/drawing/2014/main" id="{030618CE-196B-4610-700F-D477A87C3BDC}"/>
               </a:ext>
             </a:extLst>
           </p:cNvPr>
@@ -4679,7 +4756,10 @@
           <a:bodyPr/>
           <a:lstStyle/>
           <a:p>
-            <a:endParaRPr lang="en-US"/>
+            <a:r>
+              <a:rPr lang="en-US" dirty="0"/>
+              <a:t>All data – posterior distribution of environmental covariates</a:t>
+            </a:r>
           </a:p>
         </p:txBody>
       </p:sp>
@@ -4688,7 +4768,7 @@
           <p:cNvPr id="3" name="Content Placeholder 2">
             <a:extLst>
               <a:ext uri="{FF2B5EF4-FFF2-40B4-BE49-F238E27FC236}">
-                <a16:creationId xmlns:a16="http://schemas.microsoft.com/office/drawing/2014/main" id="{2F23340C-F7AC-6021-9475-4E439BD30966}"/>
+                <a16:creationId xmlns:a16="http://schemas.microsoft.com/office/drawing/2014/main" id="{EC9D7370-E9A1-8842-4C68-AE1912AD72DE}"/>
               </a:ext>
             </a:extLst>
           </p:cNvPr>
@@ -4704,14 +4784,44 @@
           <a:bodyPr/>
           <a:lstStyle/>
           <a:p>
-            <a:endParaRPr lang="en-US"/>
-          </a:p>
-        </p:txBody>
-      </p:sp>
+            <a:endParaRPr lang="en-US" dirty="0"/>
+          </a:p>
+        </p:txBody>
+      </p:sp>
+      <p:pic>
+        <p:nvPicPr>
+          <p:cNvPr id="10" name="Picture 9">
+            <a:extLst>
+              <a:ext uri="{FF2B5EF4-FFF2-40B4-BE49-F238E27FC236}">
+                <a16:creationId xmlns:a16="http://schemas.microsoft.com/office/drawing/2014/main" id="{4CB5E670-C7EF-4E71-1F74-D1DE16BC25E4}"/>
+              </a:ext>
+            </a:extLst>
+          </p:cNvPr>
+          <p:cNvPicPr>
+            <a:picLocks noChangeAspect="1"/>
+          </p:cNvPicPr>
+          <p:nvPr/>
+        </p:nvPicPr>
+        <p:blipFill>
+          <a:blip r:embed="rId2"/>
+          <a:stretch>
+            <a:fillRect/>
+          </a:stretch>
+        </p:blipFill>
+        <p:spPr>
+          <a:xfrm>
+            <a:off x="1596064" y="1690688"/>
+            <a:ext cx="8274620" cy="4869079"/>
+          </a:xfrm>
+          <a:prstGeom prst="rect">
+            <a:avLst/>
+          </a:prstGeom>
+        </p:spPr>
+      </p:pic>
     </p:spTree>
     <p:extLst>
       <p:ext uri="{BB962C8B-B14F-4D97-AF65-F5344CB8AC3E}">
-        <p14:creationId xmlns:p14="http://schemas.microsoft.com/office/powerpoint/2010/main" val="2979283072"/>
+        <p14:creationId xmlns:p14="http://schemas.microsoft.com/office/powerpoint/2010/main" val="3555751872"/>
       </p:ext>
     </p:extLst>
   </p:cSld>
@@ -4726,7 +4836,13 @@
   <p:cSld>
     <p:spTree>
       <p:nvGrpSpPr>
-        <p:cNvPr id="1" name=""/>
+        <p:cNvPr id="1" name="">
+          <a:extLst>
+            <a:ext uri="{FF2B5EF4-FFF2-40B4-BE49-F238E27FC236}">
+              <a16:creationId xmlns:a16="http://schemas.microsoft.com/office/drawing/2014/main" id="{49F10814-80D6-9893-902D-1A42DBB0E13D}"/>
+            </a:ext>
+          </a:extLst>
+        </p:cNvPr>
         <p:cNvGrpSpPr/>
         <p:nvPr/>
       </p:nvGrpSpPr>
@@ -4743,7 +4859,7 @@
           <p:cNvPr id="2" name="Title 1">
             <a:extLst>
               <a:ext uri="{FF2B5EF4-FFF2-40B4-BE49-F238E27FC236}">
-                <a16:creationId xmlns:a16="http://schemas.microsoft.com/office/drawing/2014/main" id="{2473313D-9410-7606-DB19-CE63EE0B4B09}"/>
+                <a16:creationId xmlns:a16="http://schemas.microsoft.com/office/drawing/2014/main" id="{8F7DCAE1-14C1-1D63-D6BA-9384B18DB4A8}"/>
               </a:ext>
             </a:extLst>
           </p:cNvPr>
@@ -4759,39 +4875,72 @@
           <a:bodyPr/>
           <a:lstStyle/>
           <a:p>
+            <a:r>
+              <a:rPr lang="en-US" dirty="0"/>
+              <a:t>Just US data</a:t>
+            </a:r>
+          </a:p>
+        </p:txBody>
+      </p:sp>
+      <p:sp>
+        <p:nvSpPr>
+          <p:cNvPr id="3" name="Content Placeholder 2">
+            <a:extLst>
+              <a:ext uri="{FF2B5EF4-FFF2-40B4-BE49-F238E27FC236}">
+                <a16:creationId xmlns:a16="http://schemas.microsoft.com/office/drawing/2014/main" id="{658A9FFC-407F-4868-B015-D96FF80D1C54}"/>
+              </a:ext>
+            </a:extLst>
+          </p:cNvPr>
+          <p:cNvSpPr>
+            <a:spLocks noGrp="1"/>
+          </p:cNvSpPr>
+          <p:nvPr>
+            <p:ph idx="1"/>
+          </p:nvPr>
+        </p:nvSpPr>
+        <p:spPr/>
+        <p:txBody>
+          <a:bodyPr/>
+          <a:lstStyle/>
+          <a:p>
             <a:endParaRPr lang="en-US"/>
           </a:p>
         </p:txBody>
       </p:sp>
-      <p:sp>
-        <p:nvSpPr>
-          <p:cNvPr id="3" name="Content Placeholder 2">
-            <a:extLst>
-              <a:ext uri="{FF2B5EF4-FFF2-40B4-BE49-F238E27FC236}">
-                <a16:creationId xmlns:a16="http://schemas.microsoft.com/office/drawing/2014/main" id="{2F30C77D-E59B-5D9E-C679-3B98F968634F}"/>
-              </a:ext>
-            </a:extLst>
-          </p:cNvPr>
-          <p:cNvSpPr>
-            <a:spLocks noGrp="1"/>
-          </p:cNvSpPr>
-          <p:nvPr>
-            <p:ph idx="1"/>
-          </p:nvPr>
-        </p:nvSpPr>
-        <p:spPr/>
-        <p:txBody>
-          <a:bodyPr/>
-          <a:lstStyle/>
-          <a:p>
-            <a:endParaRPr lang="en-US"/>
-          </a:p>
-        </p:txBody>
-      </p:sp>
+      <p:pic>
+        <p:nvPicPr>
+          <p:cNvPr id="6" name="Picture 5">
+            <a:extLst>
+              <a:ext uri="{FF2B5EF4-FFF2-40B4-BE49-F238E27FC236}">
+                <a16:creationId xmlns:a16="http://schemas.microsoft.com/office/drawing/2014/main" id="{331A3B09-6505-D02B-0EF4-B0F9F6CE7025}"/>
+              </a:ext>
+            </a:extLst>
+          </p:cNvPr>
+          <p:cNvPicPr>
+            <a:picLocks noChangeAspect="1"/>
+          </p:cNvPicPr>
+          <p:nvPr/>
+        </p:nvPicPr>
+        <p:blipFill>
+          <a:blip r:embed="rId3"/>
+          <a:stretch>
+            <a:fillRect/>
+          </a:stretch>
+        </p:blipFill>
+        <p:spPr>
+          <a:xfrm>
+            <a:off x="1714500" y="1510533"/>
+            <a:ext cx="7704803" cy="4982342"/>
+          </a:xfrm>
+          <a:prstGeom prst="rect">
+            <a:avLst/>
+          </a:prstGeom>
+        </p:spPr>
+      </p:pic>
     </p:spTree>
     <p:extLst>
       <p:ext uri="{BB962C8B-B14F-4D97-AF65-F5344CB8AC3E}">
-        <p14:creationId xmlns:p14="http://schemas.microsoft.com/office/powerpoint/2010/main" val="787473245"/>
+        <p14:creationId xmlns:p14="http://schemas.microsoft.com/office/powerpoint/2010/main" val="885696841"/>
       </p:ext>
     </p:extLst>
   </p:cSld>
@@ -4823,7 +4972,7 @@
           <p:cNvPr id="2" name="Title 1">
             <a:extLst>
               <a:ext uri="{FF2B5EF4-FFF2-40B4-BE49-F238E27FC236}">
-                <a16:creationId xmlns:a16="http://schemas.microsoft.com/office/drawing/2014/main" id="{17F016EE-8CCC-98C7-EBF4-3DD8648C6038}"/>
+                <a16:creationId xmlns:a16="http://schemas.microsoft.com/office/drawing/2014/main" id="{14AF0C41-4BDC-C2E4-6A88-0FAA8A9A19C1}"/>
               </a:ext>
             </a:extLst>
           </p:cNvPr>
@@ -4839,39 +4988,72 @@
           <a:bodyPr/>
           <a:lstStyle/>
           <a:p>
+            <a:r>
+              <a:rPr lang="en-US" dirty="0"/>
+              <a:t>Just Canada data</a:t>
+            </a:r>
+          </a:p>
+        </p:txBody>
+      </p:sp>
+      <p:sp>
+        <p:nvSpPr>
+          <p:cNvPr id="3" name="Content Placeholder 2">
+            <a:extLst>
+              <a:ext uri="{FF2B5EF4-FFF2-40B4-BE49-F238E27FC236}">
+                <a16:creationId xmlns:a16="http://schemas.microsoft.com/office/drawing/2014/main" id="{358B1119-DC78-09C3-7CBC-BEE59913D1E0}"/>
+              </a:ext>
+            </a:extLst>
+          </p:cNvPr>
+          <p:cNvSpPr>
+            <a:spLocks noGrp="1"/>
+          </p:cNvSpPr>
+          <p:nvPr>
+            <p:ph idx="1"/>
+          </p:nvPr>
+        </p:nvSpPr>
+        <p:spPr/>
+        <p:txBody>
+          <a:bodyPr/>
+          <a:lstStyle/>
+          <a:p>
             <a:endParaRPr lang="en-US"/>
           </a:p>
         </p:txBody>
       </p:sp>
-      <p:sp>
-        <p:nvSpPr>
-          <p:cNvPr id="3" name="Content Placeholder 2">
-            <a:extLst>
-              <a:ext uri="{FF2B5EF4-FFF2-40B4-BE49-F238E27FC236}">
-                <a16:creationId xmlns:a16="http://schemas.microsoft.com/office/drawing/2014/main" id="{FCEEF53E-840B-45A6-AEE4-B33A69894A7B}"/>
-              </a:ext>
-            </a:extLst>
-          </p:cNvPr>
-          <p:cNvSpPr>
-            <a:spLocks noGrp="1"/>
-          </p:cNvSpPr>
-          <p:nvPr>
-            <p:ph idx="1"/>
-          </p:nvPr>
-        </p:nvSpPr>
-        <p:spPr/>
-        <p:txBody>
-          <a:bodyPr/>
-          <a:lstStyle/>
-          <a:p>
-            <a:endParaRPr lang="en-US"/>
-          </a:p>
-        </p:txBody>
-      </p:sp>
+      <p:pic>
+        <p:nvPicPr>
+          <p:cNvPr id="5" name="Picture 4">
+            <a:extLst>
+              <a:ext uri="{FF2B5EF4-FFF2-40B4-BE49-F238E27FC236}">
+                <a16:creationId xmlns:a16="http://schemas.microsoft.com/office/drawing/2014/main" id="{0D2A1E25-CE59-3857-AA1F-BCEA4CE6FBF4}"/>
+              </a:ext>
+            </a:extLst>
+          </p:cNvPr>
+          <p:cNvPicPr>
+            <a:picLocks noChangeAspect="1"/>
+          </p:cNvPicPr>
+          <p:nvPr/>
+        </p:nvPicPr>
+        <p:blipFill>
+          <a:blip r:embed="rId3"/>
+          <a:stretch>
+            <a:fillRect/>
+          </a:stretch>
+        </p:blipFill>
+        <p:spPr>
+          <a:xfrm>
+            <a:off x="1563329" y="1432688"/>
+            <a:ext cx="8400766" cy="5250479"/>
+          </a:xfrm>
+          <a:prstGeom prst="rect">
+            <a:avLst/>
+          </a:prstGeom>
+        </p:spPr>
+      </p:pic>
     </p:spTree>
     <p:extLst>
       <p:ext uri="{BB962C8B-B14F-4D97-AF65-F5344CB8AC3E}">
-        <p14:creationId xmlns:p14="http://schemas.microsoft.com/office/powerpoint/2010/main" val="612133903"/>
+        <p14:creationId xmlns:p14="http://schemas.microsoft.com/office/powerpoint/2010/main" val="2038841415"/>
       </p:ext>
     </p:extLst>
   </p:cSld>
@@ -4903,7 +5085,7 @@
           <p:cNvPr id="2" name="Title 1">
             <a:extLst>
               <a:ext uri="{FF2B5EF4-FFF2-40B4-BE49-F238E27FC236}">
-                <a16:creationId xmlns:a16="http://schemas.microsoft.com/office/drawing/2014/main" id="{F6CE3BBC-76C8-E041-942E-45A5DD2F53D9}"/>
+                <a16:creationId xmlns:a16="http://schemas.microsoft.com/office/drawing/2014/main" id="{77A369A2-DEC3-515B-5BE1-1D8AA5255826}"/>
               </a:ext>
             </a:extLst>
           </p:cNvPr>
@@ -4921,7 +5103,7 @@
           <a:p>
             <a:r>
               <a:rPr lang="en-US" dirty="0"/>
-              <a:t>OUTPUT</a:t>
+              <a:t>Mean age and env covariates</a:t>
             </a:r>
           </a:p>
         </p:txBody>
@@ -4931,7 +5113,7 @@
           <p:cNvPr id="3" name="Content Placeholder 2">
             <a:extLst>
               <a:ext uri="{FF2B5EF4-FFF2-40B4-BE49-F238E27FC236}">
-                <a16:creationId xmlns:a16="http://schemas.microsoft.com/office/drawing/2014/main" id="{38E5DEC1-7971-A827-BD84-1DF1212DDA18}"/>
+                <a16:creationId xmlns:a16="http://schemas.microsoft.com/office/drawing/2014/main" id="{3BCA4288-C993-A07D-5D7D-F51FFD0309F8}"/>
               </a:ext>
             </a:extLst>
           </p:cNvPr>
@@ -4947,14 +5129,23 @@
           <a:bodyPr/>
           <a:lstStyle/>
           <a:p>
-            <a:endParaRPr lang="en-US"/>
+            <a:r>
+              <a:rPr lang="en-US" dirty="0"/>
+              <a:t>For monthly indices, averaged Apr – June</a:t>
+            </a:r>
+          </a:p>
+          <a:p>
+            <a:r>
+              <a:rPr lang="en-US" dirty="0"/>
+              <a:t>BI and NPI are annual indices</a:t>
+            </a:r>
           </a:p>
         </p:txBody>
       </p:sp>
     </p:spTree>
     <p:extLst>
       <p:ext uri="{BB962C8B-B14F-4D97-AF65-F5344CB8AC3E}">
-        <p14:creationId xmlns:p14="http://schemas.microsoft.com/office/powerpoint/2010/main" val="4249319123"/>
+        <p14:creationId xmlns:p14="http://schemas.microsoft.com/office/powerpoint/2010/main" val="3712924652"/>
       </p:ext>
     </p:extLst>
   </p:cSld>
@@ -4986,7 +5177,7 @@
           <p:cNvPr id="2" name="Title 1">
             <a:extLst>
               <a:ext uri="{FF2B5EF4-FFF2-40B4-BE49-F238E27FC236}">
-                <a16:creationId xmlns:a16="http://schemas.microsoft.com/office/drawing/2014/main" id="{DB0BC29E-0CE6-5A4B-B6DC-1490D20BBFAF}"/>
+                <a16:creationId xmlns:a16="http://schemas.microsoft.com/office/drawing/2014/main" id="{A14176ED-83BB-5EBE-45EE-66C373F833EB}"/>
               </a:ext>
             </a:extLst>
           </p:cNvPr>
@@ -5002,55 +5193,44 @@
           <a:bodyPr/>
           <a:lstStyle/>
           <a:p>
+            <a:r>
+              <a:rPr lang="en-US" dirty="0"/>
+              <a:t>Mean age with current year indices</a:t>
+            </a:r>
+          </a:p>
+        </p:txBody>
+      </p:sp>
+      <p:sp>
+        <p:nvSpPr>
+          <p:cNvPr id="3" name="Content Placeholder 2">
+            <a:extLst>
+              <a:ext uri="{FF2B5EF4-FFF2-40B4-BE49-F238E27FC236}">
+                <a16:creationId xmlns:a16="http://schemas.microsoft.com/office/drawing/2014/main" id="{829EB13B-F738-1BF9-3D36-5754F3F98042}"/>
+              </a:ext>
+            </a:extLst>
+          </p:cNvPr>
+          <p:cNvSpPr>
+            <a:spLocks noGrp="1"/>
+          </p:cNvSpPr>
+          <p:nvPr>
+            <p:ph idx="1"/>
+          </p:nvPr>
+        </p:nvSpPr>
+        <p:spPr/>
+        <p:txBody>
+          <a:bodyPr/>
+          <a:lstStyle/>
+          <a:p>
             <a:endParaRPr lang="en-US" dirty="0"/>
-          </a:p>
-        </p:txBody>
-      </p:sp>
-      <p:sp>
-        <p:nvSpPr>
-          <p:cNvPr id="3" name="Content Placeholder 2">
-            <a:extLst>
-              <a:ext uri="{FF2B5EF4-FFF2-40B4-BE49-F238E27FC236}">
-                <a16:creationId xmlns:a16="http://schemas.microsoft.com/office/drawing/2014/main" id="{0B8211A9-44A1-A05E-2540-A866E02DEE95}"/>
-              </a:ext>
-            </a:extLst>
-          </p:cNvPr>
-          <p:cNvSpPr>
-            <a:spLocks noGrp="1"/>
-          </p:cNvSpPr>
-          <p:nvPr>
-            <p:ph idx="1"/>
-          </p:nvPr>
-        </p:nvSpPr>
-        <p:spPr>
-          <a:xfrm>
-            <a:off x="838200" y="1825625"/>
-            <a:ext cx="4490884" cy="4351338"/>
-          </a:xfrm>
-        </p:spPr>
-        <p:txBody>
-          <a:bodyPr/>
-          <a:lstStyle/>
-          <a:p>
-            <a:r>
-              <a:rPr lang="en-US" dirty="0"/>
-              <a:t>Best fit model includes all factors </a:t>
-            </a:r>
-          </a:p>
-          <a:p>
-            <a:r>
-              <a:rPr lang="en-US" dirty="0"/>
-              <a:t>But not the best for estimating condition for use in an environmental analysis</a:t>
-            </a:r>
           </a:p>
         </p:txBody>
       </p:sp>
       <p:pic>
         <p:nvPicPr>
-          <p:cNvPr id="5" name="Picture 4">
-            <a:extLst>
-              <a:ext uri="{FF2B5EF4-FFF2-40B4-BE49-F238E27FC236}">
-                <a16:creationId xmlns:a16="http://schemas.microsoft.com/office/drawing/2014/main" id="{F25B0154-4B15-FBE7-66A2-B8F8E47FE106}"/>
+          <p:cNvPr id="10" name="Picture 9">
+            <a:extLst>
+              <a:ext uri="{FF2B5EF4-FFF2-40B4-BE49-F238E27FC236}">
+                <a16:creationId xmlns:a16="http://schemas.microsoft.com/office/drawing/2014/main" id="{A49A0387-19E8-6F0E-B7CB-2FABA40E6BBC}"/>
               </a:ext>
             </a:extLst>
           </p:cNvPr>
@@ -5067,797 +5247,18 @@
         </p:blipFill>
         <p:spPr>
           <a:xfrm>
-            <a:off x="6007510" y="681037"/>
-            <a:ext cx="5746668" cy="3194463"/>
+            <a:off x="1319212" y="1520031"/>
+            <a:ext cx="9553575" cy="4962525"/>
           </a:xfrm>
           <a:prstGeom prst="rect">
             <a:avLst/>
           </a:prstGeom>
         </p:spPr>
       </p:pic>
-      <p:sp>
-        <p:nvSpPr>
-          <p:cNvPr id="7" name="TextBox 6">
-            <a:extLst>
-              <a:ext uri="{FF2B5EF4-FFF2-40B4-BE49-F238E27FC236}">
-                <a16:creationId xmlns:a16="http://schemas.microsoft.com/office/drawing/2014/main" id="{5EBC5112-ADAC-F8B1-A4E9-5667ADA27D7C}"/>
-              </a:ext>
-            </a:extLst>
-          </p:cNvPr>
-          <p:cNvSpPr txBox="1"/>
-          <p:nvPr/>
-        </p:nvSpPr>
-        <p:spPr>
-          <a:xfrm>
-            <a:off x="6096000" y="4191412"/>
-            <a:ext cx="6115664" cy="2185214"/>
-          </a:xfrm>
-          <a:prstGeom prst="rect">
-            <a:avLst/>
-          </a:prstGeom>
-          <a:noFill/>
-        </p:spPr>
-        <p:txBody>
-          <a:bodyPr wrap="square">
-            <a:spAutoFit/>
-          </a:bodyPr>
-          <a:lstStyle/>
-          <a:p>
-            <a:pPr marL="0" marR="0" indent="0" algn="l" latinLnBrk="1">
-              <a:buNone/>
-            </a:pPr>
-            <a:r>
-              <a:rPr lang="en-US" sz="800" b="0" i="0" dirty="0">
-                <a:solidFill>
-                  <a:srgbClr val="000000"/>
-                </a:solidFill>
-                <a:effectLst/>
-                <a:latin typeface="Lucida Console" panose="020B0609040504020204" pitchFamily="49" charset="0"/>
-              </a:rPr>
-              <a:t>Models:</a:t>
-            </a:r>
-          </a:p>
-          <a:p>
-            <a:pPr marL="0" marR="0" indent="0" algn="l" latinLnBrk="1">
-              <a:buNone/>
-            </a:pPr>
-            <a:r>
-              <a:rPr lang="en-US" sz="800" b="0" i="0" dirty="0">
-                <a:solidFill>
-                  <a:srgbClr val="000000"/>
-                </a:solidFill>
-                <a:effectLst/>
-                <a:latin typeface="Lucida Console" panose="020B0609040504020204" pitchFamily="49" charset="0"/>
-              </a:rPr>
-              <a:t>m_lw5.1: </a:t>
-            </a:r>
-            <a:r>
-              <a:rPr lang="en-US" sz="800" b="0" i="0" dirty="0" err="1">
-                <a:solidFill>
-                  <a:srgbClr val="000000"/>
-                </a:solidFill>
-                <a:effectLst/>
-                <a:latin typeface="Lucida Console" panose="020B0609040504020204" pitchFamily="49" charset="0"/>
-              </a:rPr>
-              <a:t>log_weight</a:t>
-            </a:r>
-            <a:r>
-              <a:rPr lang="en-US" sz="800" b="0" i="0" dirty="0">
-                <a:solidFill>
-                  <a:srgbClr val="000000"/>
-                </a:solidFill>
-                <a:effectLst/>
-                <a:latin typeface="Lucida Console" panose="020B0609040504020204" pitchFamily="49" charset="0"/>
-              </a:rPr>
-              <a:t> ~ </a:t>
-            </a:r>
-            <a:r>
-              <a:rPr lang="en-US" sz="800" b="0" i="0" dirty="0" err="1">
-                <a:solidFill>
-                  <a:srgbClr val="000000"/>
-                </a:solidFill>
-                <a:effectLst/>
-                <a:latin typeface="Lucida Console" panose="020B0609040504020204" pitchFamily="49" charset="0"/>
-              </a:rPr>
-              <a:t>log_length</a:t>
-            </a:r>
-            <a:r>
-              <a:rPr lang="en-US" sz="800" b="0" i="0" dirty="0">
-                <a:solidFill>
-                  <a:srgbClr val="000000"/>
-                </a:solidFill>
-                <a:effectLst/>
-                <a:latin typeface="Lucida Console" panose="020B0609040504020204" pitchFamily="49" charset="0"/>
-              </a:rPr>
-              <a:t> + Sex + factor(Month) + (1 | Source) + , zi=~0, </a:t>
-            </a:r>
-            <a:r>
-              <a:rPr lang="en-US" sz="800" b="0" i="0" dirty="0" err="1">
-                <a:solidFill>
-                  <a:srgbClr val="000000"/>
-                </a:solidFill>
-                <a:effectLst/>
-                <a:latin typeface="Lucida Console" panose="020B0609040504020204" pitchFamily="49" charset="0"/>
-              </a:rPr>
-              <a:t>disp</a:t>
-            </a:r>
-            <a:r>
-              <a:rPr lang="en-US" sz="800" b="0" i="0" dirty="0">
-                <a:solidFill>
-                  <a:srgbClr val="000000"/>
-                </a:solidFill>
-                <a:effectLst/>
-                <a:latin typeface="Lucida Console" panose="020B0609040504020204" pitchFamily="49" charset="0"/>
-              </a:rPr>
-              <a:t>=~1</a:t>
-            </a:r>
-          </a:p>
-          <a:p>
-            <a:pPr marL="0" marR="0" indent="0" algn="l" latinLnBrk="1">
-              <a:buNone/>
-            </a:pPr>
-            <a:r>
-              <a:rPr lang="en-US" sz="800" b="0" i="0" dirty="0">
-                <a:solidFill>
-                  <a:srgbClr val="000000"/>
-                </a:solidFill>
-                <a:effectLst/>
-                <a:latin typeface="Lucida Console" panose="020B0609040504020204" pitchFamily="49" charset="0"/>
-              </a:rPr>
-              <a:t>m_lw5.1:     (1 | Year), zi=~0, </a:t>
-            </a:r>
-            <a:r>
-              <a:rPr lang="en-US" sz="800" b="0" i="0" dirty="0" err="1">
-                <a:solidFill>
-                  <a:srgbClr val="000000"/>
-                </a:solidFill>
-                <a:effectLst/>
-                <a:latin typeface="Lucida Console" panose="020B0609040504020204" pitchFamily="49" charset="0"/>
-              </a:rPr>
-              <a:t>disp</a:t>
-            </a:r>
-            <a:r>
-              <a:rPr lang="en-US" sz="800" b="0" i="0" dirty="0">
-                <a:solidFill>
-                  <a:srgbClr val="000000"/>
-                </a:solidFill>
-                <a:effectLst/>
-                <a:latin typeface="Lucida Console" panose="020B0609040504020204" pitchFamily="49" charset="0"/>
-              </a:rPr>
-              <a:t>=~1</a:t>
-            </a:r>
-          </a:p>
-          <a:p>
-            <a:pPr marL="0" marR="0" indent="0" algn="l" latinLnBrk="1">
-              <a:buNone/>
-            </a:pPr>
-            <a:r>
-              <a:rPr lang="en-US" sz="800" b="0" i="0" dirty="0">
-                <a:solidFill>
-                  <a:srgbClr val="000000"/>
-                </a:solidFill>
-                <a:effectLst/>
-                <a:latin typeface="Lucida Console" panose="020B0609040504020204" pitchFamily="49" charset="0"/>
-              </a:rPr>
-              <a:t>m_lw3.1: </a:t>
-            </a:r>
-            <a:r>
-              <a:rPr lang="en-US" sz="800" b="0" i="0" dirty="0" err="1">
-                <a:solidFill>
-                  <a:srgbClr val="000000"/>
-                </a:solidFill>
-                <a:effectLst/>
-                <a:latin typeface="Lucida Console" panose="020B0609040504020204" pitchFamily="49" charset="0"/>
-              </a:rPr>
-              <a:t>log_weight</a:t>
-            </a:r>
-            <a:r>
-              <a:rPr lang="en-US" sz="800" b="0" i="0" dirty="0">
-                <a:solidFill>
-                  <a:srgbClr val="000000"/>
-                </a:solidFill>
-                <a:effectLst/>
-                <a:latin typeface="Lucida Console" panose="020B0609040504020204" pitchFamily="49" charset="0"/>
-              </a:rPr>
-              <a:t> ~ </a:t>
-            </a:r>
-            <a:r>
-              <a:rPr lang="en-US" sz="800" b="0" i="0" dirty="0" err="1">
-                <a:solidFill>
-                  <a:srgbClr val="000000"/>
-                </a:solidFill>
-                <a:effectLst/>
-                <a:latin typeface="Lucida Console" panose="020B0609040504020204" pitchFamily="49" charset="0"/>
-              </a:rPr>
-              <a:t>log_length</a:t>
-            </a:r>
-            <a:r>
-              <a:rPr lang="en-US" sz="800" b="0" i="0" dirty="0">
-                <a:solidFill>
-                  <a:srgbClr val="000000"/>
-                </a:solidFill>
-                <a:effectLst/>
-                <a:latin typeface="Lucida Console" panose="020B0609040504020204" pitchFamily="49" charset="0"/>
-              </a:rPr>
-              <a:t> * Sex + factor(Month) + (1 | Source) + , zi=~0, </a:t>
-            </a:r>
-            <a:r>
-              <a:rPr lang="en-US" sz="800" b="0" i="0" dirty="0" err="1">
-                <a:solidFill>
-                  <a:srgbClr val="000000"/>
-                </a:solidFill>
-                <a:effectLst/>
-                <a:latin typeface="Lucida Console" panose="020B0609040504020204" pitchFamily="49" charset="0"/>
-              </a:rPr>
-              <a:t>disp</a:t>
-            </a:r>
-            <a:r>
-              <a:rPr lang="en-US" sz="800" b="0" i="0" dirty="0">
-                <a:solidFill>
-                  <a:srgbClr val="000000"/>
-                </a:solidFill>
-                <a:effectLst/>
-                <a:latin typeface="Lucida Console" panose="020B0609040504020204" pitchFamily="49" charset="0"/>
-              </a:rPr>
-              <a:t>=~1</a:t>
-            </a:r>
-          </a:p>
-          <a:p>
-            <a:pPr marL="0" marR="0" indent="0" algn="l" latinLnBrk="1">
-              <a:buNone/>
-            </a:pPr>
-            <a:r>
-              <a:rPr lang="en-US" sz="800" b="0" i="0" dirty="0">
-                <a:solidFill>
-                  <a:srgbClr val="000000"/>
-                </a:solidFill>
-                <a:effectLst/>
-                <a:latin typeface="Lucida Console" panose="020B0609040504020204" pitchFamily="49" charset="0"/>
-              </a:rPr>
-              <a:t>m_lw3.1:     (1 | Year), zi=~0, </a:t>
-            </a:r>
-            <a:r>
-              <a:rPr lang="en-US" sz="800" b="0" i="0" dirty="0" err="1">
-                <a:solidFill>
-                  <a:srgbClr val="000000"/>
-                </a:solidFill>
-                <a:effectLst/>
-                <a:latin typeface="Lucida Console" panose="020B0609040504020204" pitchFamily="49" charset="0"/>
-              </a:rPr>
-              <a:t>disp</a:t>
-            </a:r>
-            <a:r>
-              <a:rPr lang="en-US" sz="800" b="0" i="0" dirty="0">
-                <a:solidFill>
-                  <a:srgbClr val="000000"/>
-                </a:solidFill>
-                <a:effectLst/>
-                <a:latin typeface="Lucida Console" panose="020B0609040504020204" pitchFamily="49" charset="0"/>
-              </a:rPr>
-              <a:t>=~1</a:t>
-            </a:r>
-          </a:p>
-          <a:p>
-            <a:pPr marL="0" marR="0" indent="0" algn="l" latinLnBrk="1">
-              <a:buNone/>
-            </a:pPr>
-            <a:r>
-              <a:rPr lang="en-US" sz="800" b="0" i="0" dirty="0">
-                <a:solidFill>
-                  <a:srgbClr val="000000"/>
-                </a:solidFill>
-                <a:effectLst/>
-                <a:latin typeface="Lucida Console" panose="020B0609040504020204" pitchFamily="49" charset="0"/>
-              </a:rPr>
-              <a:t>m_lw2.1: </a:t>
-            </a:r>
-            <a:r>
-              <a:rPr lang="en-US" sz="800" b="0" i="0" dirty="0" err="1">
-                <a:solidFill>
-                  <a:srgbClr val="000000"/>
-                </a:solidFill>
-                <a:effectLst/>
-                <a:latin typeface="Lucida Console" panose="020B0609040504020204" pitchFamily="49" charset="0"/>
-              </a:rPr>
-              <a:t>log_weight</a:t>
-            </a:r>
-            <a:r>
-              <a:rPr lang="en-US" sz="800" b="0" i="0" dirty="0">
-                <a:solidFill>
-                  <a:srgbClr val="000000"/>
-                </a:solidFill>
-                <a:effectLst/>
-                <a:latin typeface="Lucida Console" panose="020B0609040504020204" pitchFamily="49" charset="0"/>
-              </a:rPr>
-              <a:t> ~ </a:t>
-            </a:r>
-            <a:r>
-              <a:rPr lang="en-US" sz="800" b="0" i="0" dirty="0" err="1">
-                <a:solidFill>
-                  <a:srgbClr val="000000"/>
-                </a:solidFill>
-                <a:effectLst/>
-                <a:latin typeface="Lucida Console" panose="020B0609040504020204" pitchFamily="49" charset="0"/>
-              </a:rPr>
-              <a:t>log_length</a:t>
-            </a:r>
-            <a:r>
-              <a:rPr lang="en-US" sz="800" b="0" i="0" dirty="0">
-                <a:solidFill>
-                  <a:srgbClr val="000000"/>
-                </a:solidFill>
-                <a:effectLst/>
-                <a:latin typeface="Lucida Console" panose="020B0609040504020204" pitchFamily="49" charset="0"/>
-              </a:rPr>
-              <a:t> * Sex + </a:t>
-            </a:r>
-            <a:r>
-              <a:rPr lang="en-US" sz="800" b="0" i="0" dirty="0" err="1">
-                <a:solidFill>
-                  <a:srgbClr val="000000"/>
-                </a:solidFill>
-                <a:effectLst/>
-                <a:latin typeface="Lucida Console" panose="020B0609040504020204" pitchFamily="49" charset="0"/>
-              </a:rPr>
-              <a:t>Age_yrs</a:t>
-            </a:r>
-            <a:r>
-              <a:rPr lang="en-US" sz="800" b="0" i="0" dirty="0">
-                <a:solidFill>
-                  <a:srgbClr val="000000"/>
-                </a:solidFill>
-                <a:effectLst/>
-                <a:latin typeface="Lucida Console" panose="020B0609040504020204" pitchFamily="49" charset="0"/>
-              </a:rPr>
-              <a:t> + factor(Month) + (1 | , zi=~0, </a:t>
-            </a:r>
-            <a:r>
-              <a:rPr lang="en-US" sz="800" b="0" i="0" dirty="0" err="1">
-                <a:solidFill>
-                  <a:srgbClr val="000000"/>
-                </a:solidFill>
-                <a:effectLst/>
-                <a:latin typeface="Lucida Console" panose="020B0609040504020204" pitchFamily="49" charset="0"/>
-              </a:rPr>
-              <a:t>disp</a:t>
-            </a:r>
-            <a:r>
-              <a:rPr lang="en-US" sz="800" b="0" i="0" dirty="0">
-                <a:solidFill>
-                  <a:srgbClr val="000000"/>
-                </a:solidFill>
-                <a:effectLst/>
-                <a:latin typeface="Lucida Console" panose="020B0609040504020204" pitchFamily="49" charset="0"/>
-              </a:rPr>
-              <a:t>=~1</a:t>
-            </a:r>
-          </a:p>
-          <a:p>
-            <a:pPr marL="0" marR="0" indent="0" algn="l" latinLnBrk="1">
-              <a:buNone/>
-            </a:pPr>
-            <a:r>
-              <a:rPr lang="en-US" sz="800" b="0" i="0" dirty="0">
-                <a:solidFill>
-                  <a:srgbClr val="000000"/>
-                </a:solidFill>
-                <a:effectLst/>
-                <a:latin typeface="Lucida Console" panose="020B0609040504020204" pitchFamily="49" charset="0"/>
-              </a:rPr>
-              <a:t>m_lw2.1:     Source) + (1 | Year), zi=~0, </a:t>
-            </a:r>
-            <a:r>
-              <a:rPr lang="en-US" sz="800" b="0" i="0" dirty="0" err="1">
-                <a:solidFill>
-                  <a:srgbClr val="000000"/>
-                </a:solidFill>
-                <a:effectLst/>
-                <a:latin typeface="Lucida Console" panose="020B0609040504020204" pitchFamily="49" charset="0"/>
-              </a:rPr>
-              <a:t>disp</a:t>
-            </a:r>
-            <a:r>
-              <a:rPr lang="en-US" sz="800" b="0" i="0" dirty="0">
-                <a:solidFill>
-                  <a:srgbClr val="000000"/>
-                </a:solidFill>
-                <a:effectLst/>
-                <a:latin typeface="Lucida Console" panose="020B0609040504020204" pitchFamily="49" charset="0"/>
-              </a:rPr>
-              <a:t>=~1</a:t>
-            </a:r>
-          </a:p>
-          <a:p>
-            <a:pPr marL="0" marR="0" indent="0" algn="l" latinLnBrk="1">
-              <a:buNone/>
-            </a:pPr>
-            <a:r>
-              <a:rPr lang="en-US" sz="800" b="0" i="0" dirty="0">
-                <a:solidFill>
-                  <a:srgbClr val="000000"/>
-                </a:solidFill>
-                <a:effectLst/>
-                <a:latin typeface="Lucida Console" panose="020B0609040504020204" pitchFamily="49" charset="0"/>
-              </a:rPr>
-              <a:t>m_lw1.1: </a:t>
-            </a:r>
-            <a:r>
-              <a:rPr lang="en-US" sz="800" b="0" i="0" dirty="0" err="1">
-                <a:solidFill>
-                  <a:srgbClr val="000000"/>
-                </a:solidFill>
-                <a:effectLst/>
-                <a:latin typeface="Lucida Console" panose="020B0609040504020204" pitchFamily="49" charset="0"/>
-              </a:rPr>
-              <a:t>log_weight</a:t>
-            </a:r>
-            <a:r>
-              <a:rPr lang="en-US" sz="800" b="0" i="0" dirty="0">
-                <a:solidFill>
-                  <a:srgbClr val="000000"/>
-                </a:solidFill>
-                <a:effectLst/>
-                <a:latin typeface="Lucida Console" panose="020B0609040504020204" pitchFamily="49" charset="0"/>
-              </a:rPr>
-              <a:t> ~ </a:t>
-            </a:r>
-            <a:r>
-              <a:rPr lang="en-US" sz="800" b="0" i="0" dirty="0" err="1">
-                <a:solidFill>
-                  <a:srgbClr val="000000"/>
-                </a:solidFill>
-                <a:effectLst/>
-                <a:latin typeface="Lucida Console" panose="020B0609040504020204" pitchFamily="49" charset="0"/>
-              </a:rPr>
-              <a:t>log_length</a:t>
-            </a:r>
-            <a:r>
-              <a:rPr lang="en-US" sz="800" b="0" i="0" dirty="0">
-                <a:solidFill>
-                  <a:srgbClr val="000000"/>
-                </a:solidFill>
-                <a:effectLst/>
-                <a:latin typeface="Lucida Console" panose="020B0609040504020204" pitchFamily="49" charset="0"/>
-              </a:rPr>
-              <a:t> * Sex + </a:t>
-            </a:r>
-            <a:r>
-              <a:rPr lang="en-US" sz="800" b="0" i="0" dirty="0" err="1">
-                <a:solidFill>
-                  <a:srgbClr val="000000"/>
-                </a:solidFill>
-                <a:effectLst/>
-                <a:latin typeface="Lucida Console" panose="020B0609040504020204" pitchFamily="49" charset="0"/>
-              </a:rPr>
-              <a:t>log_length</a:t>
-            </a:r>
-            <a:r>
-              <a:rPr lang="en-US" sz="800" b="0" i="0" dirty="0">
-                <a:solidFill>
-                  <a:srgbClr val="000000"/>
-                </a:solidFill>
-                <a:effectLst/>
-                <a:latin typeface="Lucida Console" panose="020B0609040504020204" pitchFamily="49" charset="0"/>
-              </a:rPr>
-              <a:t> * </a:t>
-            </a:r>
-            <a:r>
-              <a:rPr lang="en-US" sz="800" b="0" i="0" dirty="0" err="1">
-                <a:solidFill>
-                  <a:srgbClr val="000000"/>
-                </a:solidFill>
-                <a:effectLst/>
-                <a:latin typeface="Lucida Console" panose="020B0609040504020204" pitchFamily="49" charset="0"/>
-              </a:rPr>
-              <a:t>Age_yrs</a:t>
-            </a:r>
-            <a:r>
-              <a:rPr lang="en-US" sz="800" b="0" i="0" dirty="0">
-                <a:solidFill>
-                  <a:srgbClr val="000000"/>
-                </a:solidFill>
-                <a:effectLst/>
-                <a:latin typeface="Lucida Console" panose="020B0609040504020204" pitchFamily="49" charset="0"/>
-              </a:rPr>
-              <a:t> + factor(Month) + , zi=~0, </a:t>
-            </a:r>
-            <a:r>
-              <a:rPr lang="en-US" sz="800" b="0" i="0" dirty="0" err="1">
-                <a:solidFill>
-                  <a:srgbClr val="000000"/>
-                </a:solidFill>
-                <a:effectLst/>
-                <a:latin typeface="Lucida Console" panose="020B0609040504020204" pitchFamily="49" charset="0"/>
-              </a:rPr>
-              <a:t>disp</a:t>
-            </a:r>
-            <a:r>
-              <a:rPr lang="en-US" sz="800" b="0" i="0" dirty="0">
-                <a:solidFill>
-                  <a:srgbClr val="000000"/>
-                </a:solidFill>
-                <a:effectLst/>
-                <a:latin typeface="Lucida Console" panose="020B0609040504020204" pitchFamily="49" charset="0"/>
-              </a:rPr>
-              <a:t>=~1</a:t>
-            </a:r>
-          </a:p>
-          <a:p>
-            <a:pPr marL="0" marR="0" indent="0" algn="l" latinLnBrk="1">
-              <a:buNone/>
-            </a:pPr>
-            <a:r>
-              <a:rPr lang="en-US" sz="800" b="0" i="0" dirty="0">
-                <a:solidFill>
-                  <a:srgbClr val="000000"/>
-                </a:solidFill>
-                <a:effectLst/>
-                <a:latin typeface="Lucida Console" panose="020B0609040504020204" pitchFamily="49" charset="0"/>
-              </a:rPr>
-              <a:t>m_lw1.1:     (1 | Source) + (1 | Year), zi=~0, </a:t>
-            </a:r>
-            <a:r>
-              <a:rPr lang="en-US" sz="800" b="0" i="0" dirty="0" err="1">
-                <a:solidFill>
-                  <a:srgbClr val="000000"/>
-                </a:solidFill>
-                <a:effectLst/>
-                <a:latin typeface="Lucida Console" panose="020B0609040504020204" pitchFamily="49" charset="0"/>
-              </a:rPr>
-              <a:t>disp</a:t>
-            </a:r>
-            <a:r>
-              <a:rPr lang="en-US" sz="800" b="0" i="0" dirty="0">
-                <a:solidFill>
-                  <a:srgbClr val="000000"/>
-                </a:solidFill>
-                <a:effectLst/>
-                <a:latin typeface="Lucida Console" panose="020B0609040504020204" pitchFamily="49" charset="0"/>
-              </a:rPr>
-              <a:t>=~1</a:t>
-            </a:r>
-          </a:p>
-          <a:p>
-            <a:pPr marL="0" marR="0" indent="0" algn="l" latinLnBrk="1">
-              <a:buNone/>
-            </a:pPr>
-            <a:r>
-              <a:rPr lang="en-US" sz="800" b="0" i="0" dirty="0">
-                <a:solidFill>
-                  <a:srgbClr val="000000"/>
-                </a:solidFill>
-                <a:effectLst/>
-                <a:latin typeface="Lucida Console" panose="020B0609040504020204" pitchFamily="49" charset="0"/>
-              </a:rPr>
-              <a:t>        </a:t>
-            </a:r>
-            <a:r>
-              <a:rPr lang="en-US" sz="800" b="0" i="0" dirty="0" err="1">
-                <a:solidFill>
-                  <a:srgbClr val="000000"/>
-                </a:solidFill>
-                <a:effectLst/>
-                <a:latin typeface="Lucida Console" panose="020B0609040504020204" pitchFamily="49" charset="0"/>
-              </a:rPr>
-              <a:t>Df</a:t>
-            </a:r>
-            <a:r>
-              <a:rPr lang="en-US" sz="800" b="0" i="0" dirty="0">
-                <a:solidFill>
-                  <a:srgbClr val="000000"/>
-                </a:solidFill>
-                <a:effectLst/>
-                <a:latin typeface="Lucida Console" panose="020B0609040504020204" pitchFamily="49" charset="0"/>
-              </a:rPr>
-              <a:t>     AIC     BIC </a:t>
-            </a:r>
-            <a:r>
-              <a:rPr lang="en-US" sz="800" b="0" i="0" dirty="0" err="1">
-                <a:solidFill>
-                  <a:srgbClr val="000000"/>
-                </a:solidFill>
-                <a:effectLst/>
-                <a:latin typeface="Lucida Console" panose="020B0609040504020204" pitchFamily="49" charset="0"/>
-              </a:rPr>
-              <a:t>logLik</a:t>
-            </a:r>
-            <a:r>
-              <a:rPr lang="en-US" sz="800" b="0" i="0" dirty="0">
-                <a:solidFill>
-                  <a:srgbClr val="000000"/>
-                </a:solidFill>
-                <a:effectLst/>
-                <a:latin typeface="Lucida Console" panose="020B0609040504020204" pitchFamily="49" charset="0"/>
-              </a:rPr>
-              <a:t> deviance  </a:t>
-            </a:r>
-            <a:r>
-              <a:rPr lang="en-US" sz="800" b="0" i="0" dirty="0" err="1">
-                <a:solidFill>
-                  <a:srgbClr val="000000"/>
-                </a:solidFill>
-                <a:effectLst/>
-                <a:latin typeface="Lucida Console" panose="020B0609040504020204" pitchFamily="49" charset="0"/>
-              </a:rPr>
-              <a:t>Chisq</a:t>
-            </a:r>
-            <a:r>
-              <a:rPr lang="en-US" sz="800" b="0" i="0" dirty="0">
-                <a:solidFill>
-                  <a:srgbClr val="000000"/>
-                </a:solidFill>
-                <a:effectLst/>
-                <a:latin typeface="Lucida Console" panose="020B0609040504020204" pitchFamily="49" charset="0"/>
-              </a:rPr>
-              <a:t> Chi </a:t>
-            </a:r>
-            <a:r>
-              <a:rPr lang="en-US" sz="800" b="0" i="0" dirty="0" err="1">
-                <a:solidFill>
-                  <a:srgbClr val="000000"/>
-                </a:solidFill>
-                <a:effectLst/>
-                <a:latin typeface="Lucida Console" panose="020B0609040504020204" pitchFamily="49" charset="0"/>
-              </a:rPr>
-              <a:t>Df</a:t>
-            </a:r>
-            <a:r>
-              <a:rPr lang="en-US" sz="800" b="0" i="0" dirty="0">
-                <a:solidFill>
-                  <a:srgbClr val="000000"/>
-                </a:solidFill>
-                <a:effectLst/>
-                <a:latin typeface="Lucida Console" panose="020B0609040504020204" pitchFamily="49" charset="0"/>
-              </a:rPr>
-              <a:t> </a:t>
-            </a:r>
-            <a:r>
-              <a:rPr lang="en-US" sz="800" b="0" i="0" dirty="0" err="1">
-                <a:solidFill>
-                  <a:srgbClr val="000000"/>
-                </a:solidFill>
-                <a:effectLst/>
-                <a:latin typeface="Lucida Console" panose="020B0609040504020204" pitchFamily="49" charset="0"/>
-              </a:rPr>
-              <a:t>Pr</a:t>
-            </a:r>
-            <a:r>
-              <a:rPr lang="en-US" sz="800" b="0" i="0" dirty="0">
-                <a:solidFill>
-                  <a:srgbClr val="000000"/>
-                </a:solidFill>
-                <a:effectLst/>
-                <a:latin typeface="Lucida Console" panose="020B0609040504020204" pitchFamily="49" charset="0"/>
-              </a:rPr>
-              <a:t>(&gt;</a:t>
-            </a:r>
-            <a:r>
-              <a:rPr lang="en-US" sz="800" b="0" i="0" dirty="0" err="1">
-                <a:solidFill>
-                  <a:srgbClr val="000000"/>
-                </a:solidFill>
-                <a:effectLst/>
-                <a:latin typeface="Lucida Console" panose="020B0609040504020204" pitchFamily="49" charset="0"/>
-              </a:rPr>
-              <a:t>Chisq</a:t>
-            </a:r>
-            <a:r>
-              <a:rPr lang="en-US" sz="800" b="0" i="0" dirty="0">
-                <a:solidFill>
-                  <a:srgbClr val="000000"/>
-                </a:solidFill>
-                <a:effectLst/>
-                <a:latin typeface="Lucida Console" panose="020B0609040504020204" pitchFamily="49" charset="0"/>
-              </a:rPr>
-              <a:t>)    </a:t>
-            </a:r>
-          </a:p>
-          <a:p>
-            <a:pPr marL="0" marR="0" indent="0" algn="l" latinLnBrk="1">
-              <a:buNone/>
-            </a:pPr>
-            <a:r>
-              <a:rPr lang="en-US" sz="800" b="0" i="0" dirty="0">
-                <a:solidFill>
-                  <a:srgbClr val="000000"/>
-                </a:solidFill>
-                <a:effectLst/>
-                <a:latin typeface="Lucida Console" panose="020B0609040504020204" pitchFamily="49" charset="0"/>
-              </a:rPr>
-              <a:t>m_lw5.1 17 -309310 -309135 154672  -309344                             </a:t>
-            </a:r>
-          </a:p>
-          <a:p>
-            <a:pPr marL="0" marR="0" indent="0" algn="l" latinLnBrk="1">
-              <a:buNone/>
-            </a:pPr>
-            <a:r>
-              <a:rPr lang="en-US" sz="800" b="0" i="0" dirty="0">
-                <a:solidFill>
-                  <a:srgbClr val="000000"/>
-                </a:solidFill>
-                <a:effectLst/>
-                <a:latin typeface="Lucida Console" panose="020B0609040504020204" pitchFamily="49" charset="0"/>
-              </a:rPr>
-              <a:t>m_lw3.1 18 -309761 -309575 154899  -309797  452.8      1  &lt; 2.2e-16 ***</a:t>
-            </a:r>
-          </a:p>
-          <a:p>
-            <a:pPr marL="0" marR="0" indent="0" algn="l" latinLnBrk="1">
-              <a:buNone/>
-            </a:pPr>
-            <a:r>
-              <a:rPr lang="en-US" sz="800" b="0" i="0" dirty="0">
-                <a:solidFill>
-                  <a:srgbClr val="000000"/>
-                </a:solidFill>
-                <a:effectLst/>
-                <a:latin typeface="Lucida Console" panose="020B0609040504020204" pitchFamily="49" charset="0"/>
-              </a:rPr>
-              <a:t>m_lw2.1 45 -318507 -318043 159299  -318597 8800.1     27  &lt; 2.2e-16 ***</a:t>
-            </a:r>
-          </a:p>
-          <a:p>
-            <a:pPr marL="0" marR="0" indent="0" algn="l" latinLnBrk="1">
-              <a:buNone/>
-            </a:pPr>
-            <a:r>
-              <a:rPr lang="en-US" sz="800" b="0" i="0" dirty="0">
-                <a:solidFill>
-                  <a:srgbClr val="000000"/>
-                </a:solidFill>
-                <a:effectLst/>
-                <a:latin typeface="Lucida Console" panose="020B0609040504020204" pitchFamily="49" charset="0"/>
-              </a:rPr>
-              <a:t>m_lw1.1 69 -322897 -322185 161518  -323035 4437.9     24  &lt; 2.2e-16 ***</a:t>
-            </a:r>
-          </a:p>
-          <a:p>
-            <a:pPr marL="0" marR="0" indent="0" algn="l" latinLnBrk="1">
-              <a:buNone/>
-            </a:pPr>
-            <a:r>
-              <a:rPr lang="en-US" sz="800" b="0" i="0" dirty="0">
-                <a:solidFill>
-                  <a:srgbClr val="000000"/>
-                </a:solidFill>
-                <a:effectLst/>
-                <a:latin typeface="Lucida Console" panose="020B0609040504020204" pitchFamily="49" charset="0"/>
-              </a:rPr>
-              <a:t>---</a:t>
-            </a:r>
-          </a:p>
-          <a:p>
-            <a:pPr marL="0" marR="0" indent="0" algn="l" latinLnBrk="1">
-              <a:buNone/>
-            </a:pPr>
-            <a:r>
-              <a:rPr lang="en-US" sz="800" b="0" i="0" dirty="0" err="1">
-                <a:solidFill>
-                  <a:srgbClr val="000000"/>
-                </a:solidFill>
-                <a:effectLst/>
-                <a:latin typeface="Lucida Console" panose="020B0609040504020204" pitchFamily="49" charset="0"/>
-              </a:rPr>
-              <a:t>Signif</a:t>
-            </a:r>
-            <a:r>
-              <a:rPr lang="en-US" sz="800" b="0" i="0" dirty="0">
-                <a:solidFill>
-                  <a:srgbClr val="000000"/>
-                </a:solidFill>
-                <a:effectLst/>
-                <a:latin typeface="Lucida Console" panose="020B0609040504020204" pitchFamily="49" charset="0"/>
-              </a:rPr>
-              <a:t>. codes:  0 ‘***’ 0.001 ‘**’ 0.01 ‘*’ 0.05 ‘.’ 0.1 ‘ ’ 1</a:t>
-            </a:r>
-          </a:p>
-        </p:txBody>
-      </p:sp>
     </p:spTree>
     <p:extLst>
       <p:ext uri="{BB962C8B-B14F-4D97-AF65-F5344CB8AC3E}">
-        <p14:creationId xmlns:p14="http://schemas.microsoft.com/office/powerpoint/2010/main" val="389532839"/>
+        <p14:creationId xmlns:p14="http://schemas.microsoft.com/office/powerpoint/2010/main" val="4005208080"/>
       </p:ext>
     </p:extLst>
   </p:cSld>
@@ -5872,7 +5273,13 @@
   <p:cSld>
     <p:spTree>
       <p:nvGrpSpPr>
-        <p:cNvPr id="1" name=""/>
+        <p:cNvPr id="1" name="">
+          <a:extLst>
+            <a:ext uri="{FF2B5EF4-FFF2-40B4-BE49-F238E27FC236}">
+              <a16:creationId xmlns:a16="http://schemas.microsoft.com/office/drawing/2014/main" id="{8667B489-3000-3E4E-7AD8-0C23ED9A8F02}"/>
+            </a:ext>
+          </a:extLst>
+        </p:cNvPr>
         <p:cNvGrpSpPr/>
         <p:nvPr/>
       </p:nvGrpSpPr>
@@ -5889,7 +5296,7 @@
           <p:cNvPr id="2" name="Title 1">
             <a:extLst>
               <a:ext uri="{FF2B5EF4-FFF2-40B4-BE49-F238E27FC236}">
-                <a16:creationId xmlns:a16="http://schemas.microsoft.com/office/drawing/2014/main" id="{EAC7B99E-81C9-5BB5-AEB3-C51B918E3704}"/>
+                <a16:creationId xmlns:a16="http://schemas.microsoft.com/office/drawing/2014/main" id="{B25D383B-EA5B-A45E-8E01-56CAA461C84E}"/>
               </a:ext>
             </a:extLst>
           </p:cNvPr>
@@ -5907,7 +5314,7 @@
           <a:p>
             <a:r>
               <a:rPr lang="en-US" dirty="0"/>
-              <a:t>Body condition and month</a:t>
+              <a:t>Mean age with prior year indices</a:t>
             </a:r>
           </a:p>
         </p:txBody>
@@ -5917,7 +5324,7 @@
           <p:cNvPr id="3" name="Content Placeholder 2">
             <a:extLst>
               <a:ext uri="{FF2B5EF4-FFF2-40B4-BE49-F238E27FC236}">
-                <a16:creationId xmlns:a16="http://schemas.microsoft.com/office/drawing/2014/main" id="{91B607D8-6DDA-44AB-A7C3-49A8B0E865D1}"/>
+                <a16:creationId xmlns:a16="http://schemas.microsoft.com/office/drawing/2014/main" id="{280727A3-90A8-9006-BA43-2301FC0E7E67}"/>
               </a:ext>
             </a:extLst>
           </p:cNvPr>
@@ -5939,10 +5346,10 @@
       </p:sp>
       <p:pic>
         <p:nvPicPr>
-          <p:cNvPr id="5" name="Picture 4">
-            <a:extLst>
-              <a:ext uri="{FF2B5EF4-FFF2-40B4-BE49-F238E27FC236}">
-                <a16:creationId xmlns:a16="http://schemas.microsoft.com/office/drawing/2014/main" id="{AD671EF2-2997-961E-AE1E-77C7D837FB1E}"/>
+          <p:cNvPr id="6" name="Picture 5">
+            <a:extLst>
+              <a:ext uri="{FF2B5EF4-FFF2-40B4-BE49-F238E27FC236}">
+                <a16:creationId xmlns:a16="http://schemas.microsoft.com/office/drawing/2014/main" id="{92CC9468-F924-1B29-CE48-7EBDC1187824}"/>
               </a:ext>
             </a:extLst>
           </p:cNvPr>
@@ -5959,8 +5366,8 @@
         </p:blipFill>
         <p:spPr>
           <a:xfrm>
-            <a:off x="1248697" y="1825625"/>
-            <a:ext cx="8912457" cy="4805115"/>
+            <a:off x="1319212" y="1530350"/>
+            <a:ext cx="9553575" cy="4962525"/>
           </a:xfrm>
           <a:prstGeom prst="rect">
             <a:avLst/>
@@ -5970,7 +5377,7 @@
     </p:spTree>
     <p:extLst>
       <p:ext uri="{BB962C8B-B14F-4D97-AF65-F5344CB8AC3E}">
-        <p14:creationId xmlns:p14="http://schemas.microsoft.com/office/powerpoint/2010/main" val="884622790"/>
+        <p14:creationId xmlns:p14="http://schemas.microsoft.com/office/powerpoint/2010/main" val="2010853907"/>
       </p:ext>
     </p:extLst>
   </p:cSld>
@@ -6002,7 +5409,7 @@
           <p:cNvPr id="2" name="Title 1">
             <a:extLst>
               <a:ext uri="{FF2B5EF4-FFF2-40B4-BE49-F238E27FC236}">
-                <a16:creationId xmlns:a16="http://schemas.microsoft.com/office/drawing/2014/main" id="{72A7D33C-7FE6-C705-E013-D8B767CD2B2B}"/>
+                <a16:creationId xmlns:a16="http://schemas.microsoft.com/office/drawing/2014/main" id="{63974EF5-9152-C1CB-5024-DF20EC0C92A0}"/>
               </a:ext>
             </a:extLst>
           </p:cNvPr>
@@ -6013,14 +5420,19 @@
             <p:ph type="title"/>
           </p:nvPr>
         </p:nvSpPr>
-        <p:spPr/>
+        <p:spPr>
+          <a:xfrm>
+            <a:off x="254913" y="84740"/>
+            <a:ext cx="10515600" cy="1325563"/>
+          </a:xfrm>
+        </p:spPr>
         <p:txBody>
           <a:bodyPr/>
           <a:lstStyle/>
           <a:p>
             <a:r>
               <a:rPr lang="en-US" dirty="0"/>
-              <a:t>Model 1.1 results</a:t>
+              <a:t>Annual mean age with env covariates</a:t>
             </a:r>
           </a:p>
         </p:txBody>
@@ -6030,7 +5442,7 @@
           <p:cNvPr id="3" name="Content Placeholder 2">
             <a:extLst>
               <a:ext uri="{FF2B5EF4-FFF2-40B4-BE49-F238E27FC236}">
-                <a16:creationId xmlns:a16="http://schemas.microsoft.com/office/drawing/2014/main" id="{1B65A6B6-B613-17A6-84E3-8CEB075BADF2}"/>
+                <a16:creationId xmlns:a16="http://schemas.microsoft.com/office/drawing/2014/main" id="{F0069C7D-117B-E5CF-E117-185BC93578DC}"/>
               </a:ext>
             </a:extLst>
           </p:cNvPr>
@@ -6052,10 +5464,10 @@
       </p:sp>
       <p:pic>
         <p:nvPicPr>
-          <p:cNvPr id="5" name="Picture 4">
-            <a:extLst>
-              <a:ext uri="{FF2B5EF4-FFF2-40B4-BE49-F238E27FC236}">
-                <a16:creationId xmlns:a16="http://schemas.microsoft.com/office/drawing/2014/main" id="{2C713606-1DAA-34F0-9F5F-980A1666EFFA}"/>
+          <p:cNvPr id="8" name="Picture 7">
+            <a:extLst>
+              <a:ext uri="{FF2B5EF4-FFF2-40B4-BE49-F238E27FC236}">
+                <a16:creationId xmlns:a16="http://schemas.microsoft.com/office/drawing/2014/main" id="{3B35CE2F-5329-6B02-B0B3-8EEE4CD6EE84}"/>
               </a:ext>
             </a:extLst>
           </p:cNvPr>
@@ -6072,8 +5484,8 @@
         </p:blipFill>
         <p:spPr>
           <a:xfrm>
-            <a:off x="416712" y="2344558"/>
-            <a:ext cx="5207298" cy="3313471"/>
+            <a:off x="254913" y="1571370"/>
+            <a:ext cx="5956238" cy="4921505"/>
           </a:xfrm>
           <a:prstGeom prst="rect">
             <a:avLst/>
@@ -6082,10 +5494,10 @@
       </p:pic>
       <p:pic>
         <p:nvPicPr>
-          <p:cNvPr id="7" name="Picture 6">
-            <a:extLst>
-              <a:ext uri="{FF2B5EF4-FFF2-40B4-BE49-F238E27FC236}">
-                <a16:creationId xmlns:a16="http://schemas.microsoft.com/office/drawing/2014/main" id="{4AFA15D6-5EA3-7A28-9AE6-B84BB7567943}"/>
+          <p:cNvPr id="12" name="Picture 11">
+            <a:extLst>
+              <a:ext uri="{FF2B5EF4-FFF2-40B4-BE49-F238E27FC236}">
+                <a16:creationId xmlns:a16="http://schemas.microsoft.com/office/drawing/2014/main" id="{0A39B213-D867-8C9B-4E79-4E845AAC3F93}"/>
               </a:ext>
             </a:extLst>
           </p:cNvPr>
@@ -6102,18 +5514,88 @@
         </p:blipFill>
         <p:spPr>
           <a:xfrm>
-            <a:off x="5758716" y="1544879"/>
-            <a:ext cx="6016572" cy="4548928"/>
+            <a:off x="6400639" y="1503491"/>
+            <a:ext cx="5779071" cy="4989384"/>
           </a:xfrm>
           <a:prstGeom prst="rect">
             <a:avLst/>
           </a:prstGeom>
         </p:spPr>
       </p:pic>
+      <p:sp>
+        <p:nvSpPr>
+          <p:cNvPr id="14" name="TextBox 13">
+            <a:extLst>
+              <a:ext uri="{FF2B5EF4-FFF2-40B4-BE49-F238E27FC236}">
+                <a16:creationId xmlns:a16="http://schemas.microsoft.com/office/drawing/2014/main" id="{84C87C66-D5D4-E059-9326-536F7A75785E}"/>
+              </a:ext>
+            </a:extLst>
+          </p:cNvPr>
+          <p:cNvSpPr txBox="1"/>
+          <p:nvPr/>
+        </p:nvSpPr>
+        <p:spPr>
+          <a:xfrm>
+            <a:off x="671121" y="1177358"/>
+            <a:ext cx="1500732" cy="369332"/>
+          </a:xfrm>
+          <a:prstGeom prst="rect">
+            <a:avLst/>
+          </a:prstGeom>
+          <a:noFill/>
+        </p:spPr>
+        <p:txBody>
+          <a:bodyPr wrap="none" rtlCol="0">
+            <a:spAutoFit/>
+          </a:bodyPr>
+          <a:lstStyle/>
+          <a:p>
+            <a:r>
+              <a:rPr lang="en-US" dirty="0"/>
+              <a:t>Annual mean</a:t>
+            </a:r>
+          </a:p>
+        </p:txBody>
+      </p:sp>
+      <p:sp>
+        <p:nvSpPr>
+          <p:cNvPr id="16" name="TextBox 15">
+            <a:extLst>
+              <a:ext uri="{FF2B5EF4-FFF2-40B4-BE49-F238E27FC236}">
+                <a16:creationId xmlns:a16="http://schemas.microsoft.com/office/drawing/2014/main" id="{55029EBF-8225-99EE-0EBF-0EC9C0F0050D}"/>
+              </a:ext>
+            </a:extLst>
+          </p:cNvPr>
+          <p:cNvSpPr txBox="1"/>
+          <p:nvPr/>
+        </p:nvSpPr>
+        <p:spPr>
+          <a:xfrm>
+            <a:off x="6892414" y="1121505"/>
+            <a:ext cx="2720617" cy="369332"/>
+          </a:xfrm>
+          <a:prstGeom prst="rect">
+            <a:avLst/>
+          </a:prstGeom>
+          <a:noFill/>
+        </p:spPr>
+        <p:txBody>
+          <a:bodyPr wrap="none" rtlCol="0">
+            <a:spAutoFit/>
+          </a:bodyPr>
+          <a:lstStyle/>
+          <a:p>
+            <a:r>
+              <a:rPr lang="en-US" dirty="0"/>
+              <a:t>Spring mean (April – June)</a:t>
+            </a:r>
+          </a:p>
+        </p:txBody>
+      </p:sp>
     </p:spTree>
     <p:extLst>
       <p:ext uri="{BB962C8B-B14F-4D97-AF65-F5344CB8AC3E}">
-        <p14:creationId xmlns:p14="http://schemas.microsoft.com/office/powerpoint/2010/main" val="3578121112"/>
+        <p14:creationId xmlns:p14="http://schemas.microsoft.com/office/powerpoint/2010/main" val="4222444916"/>
       </p:ext>
     </p:extLst>
   </p:cSld>
@@ -6303,7 +5785,7 @@
           <p:cNvPr id="2" name="Title 1">
             <a:extLst>
               <a:ext uri="{FF2B5EF4-FFF2-40B4-BE49-F238E27FC236}">
-                <a16:creationId xmlns:a16="http://schemas.microsoft.com/office/drawing/2014/main" id="{34F341FF-7F23-0D3E-4539-EFE4EA381947}"/>
+                <a16:creationId xmlns:a16="http://schemas.microsoft.com/office/drawing/2014/main" id="{5B5204AC-FB7D-0970-F42A-67583A6AFFB6}"/>
               </a:ext>
             </a:extLst>
           </p:cNvPr>
@@ -6321,7 +5803,7 @@
           <a:p>
             <a:r>
               <a:rPr lang="en-US" dirty="0"/>
-              <a:t>Env data plots</a:t>
+              <a:t>Summary of findings</a:t>
             </a:r>
           </a:p>
         </p:txBody>
@@ -6331,7 +5813,7 @@
           <p:cNvPr id="3" name="Content Placeholder 2">
             <a:extLst>
               <a:ext uri="{FF2B5EF4-FFF2-40B4-BE49-F238E27FC236}">
-                <a16:creationId xmlns:a16="http://schemas.microsoft.com/office/drawing/2014/main" id="{8D388062-3F75-DCC5-86B7-65FD8A2426A9}"/>
+                <a16:creationId xmlns:a16="http://schemas.microsoft.com/office/drawing/2014/main" id="{26EC6780-3C58-00CC-74AC-BFF12E0942F5}"/>
               </a:ext>
             </a:extLst>
           </p:cNvPr>
@@ -6349,75 +5831,118 @@
           <a:p>
             <a:r>
               <a:rPr lang="en-US" dirty="0"/>
-              <a:t>PDO and NPGO</a:t>
-            </a:r>
-          </a:p>
-        </p:txBody>
-      </p:sp>
-      <p:pic>
-        <p:nvPicPr>
-          <p:cNvPr id="5" name="Picture 4">
-            <a:extLst>
-              <a:ext uri="{FF2B5EF4-FFF2-40B4-BE49-F238E27FC236}">
-                <a16:creationId xmlns:a16="http://schemas.microsoft.com/office/drawing/2014/main" id="{5C1D9E4B-7458-4098-D8E7-B5E3896613E3}"/>
-              </a:ext>
-            </a:extLst>
-          </p:cNvPr>
-          <p:cNvPicPr>
-            <a:picLocks noChangeAspect="1"/>
-          </p:cNvPicPr>
-          <p:nvPr/>
-        </p:nvPicPr>
-        <p:blipFill>
-          <a:blip r:embed="rId2"/>
-          <a:stretch>
-            <a:fillRect/>
-          </a:stretch>
-        </p:blipFill>
-        <p:spPr>
-          <a:xfrm>
-            <a:off x="209301" y="2243697"/>
-            <a:ext cx="5957819" cy="3791037"/>
-          </a:xfrm>
-          <a:prstGeom prst="rect">
-            <a:avLst/>
-          </a:prstGeom>
-        </p:spPr>
-      </p:pic>
-      <p:pic>
-        <p:nvPicPr>
-          <p:cNvPr id="7" name="Picture 6">
-            <a:extLst>
-              <a:ext uri="{FF2B5EF4-FFF2-40B4-BE49-F238E27FC236}">
-                <a16:creationId xmlns:a16="http://schemas.microsoft.com/office/drawing/2014/main" id="{42E5C601-EFE2-C792-FDD1-DD959E575D94}"/>
-              </a:ext>
-            </a:extLst>
-          </p:cNvPr>
-          <p:cNvPicPr>
-            <a:picLocks noChangeAspect="1"/>
-          </p:cNvPicPr>
-          <p:nvPr/>
-        </p:nvPicPr>
-        <p:blipFill>
-          <a:blip r:embed="rId3"/>
-          <a:stretch>
-            <a:fillRect/>
-          </a:stretch>
-        </p:blipFill>
-        <p:spPr>
-          <a:xfrm>
-            <a:off x="6370320" y="2243697"/>
-            <a:ext cx="5747618" cy="3657283"/>
-          </a:xfrm>
-          <a:prstGeom prst="rect">
-            <a:avLst/>
-          </a:prstGeom>
-        </p:spPr>
-      </p:pic>
+              <a:t>PDO negative effects on body condition (+</a:t>
+            </a:r>
+            <a:r>
+              <a:rPr lang="en-US" dirty="0" err="1"/>
+              <a:t>ve</a:t>
+            </a:r>
+            <a:r>
+              <a:rPr lang="en-US" dirty="0"/>
+              <a:t> PDO = thinner fish)</a:t>
+            </a:r>
+          </a:p>
+          <a:p>
+            <a:r>
+              <a:rPr lang="en-US" dirty="0"/>
+              <a:t>PDO slight positive effects on mean age (+</a:t>
+            </a:r>
+            <a:r>
+              <a:rPr lang="en-US" dirty="0" err="1"/>
+              <a:t>ve</a:t>
+            </a:r>
+            <a:r>
+              <a:rPr lang="en-US" dirty="0"/>
+              <a:t> PDO = older </a:t>
+            </a:r>
+            <a:r>
+              <a:rPr lang="en-US" dirty="0" err="1"/>
+              <a:t>pop’n</a:t>
+            </a:r>
+            <a:r>
+              <a:rPr lang="en-US" dirty="0"/>
+              <a:t>)</a:t>
+            </a:r>
+          </a:p>
+          <a:p>
+            <a:r>
+              <a:rPr lang="en-US" dirty="0"/>
+              <a:t>NPGO negative effects on mean age (+</a:t>
+            </a:r>
+            <a:r>
+              <a:rPr lang="en-US" dirty="0" err="1"/>
+              <a:t>ve</a:t>
+            </a:r>
+            <a:r>
+              <a:rPr lang="en-US" dirty="0"/>
+              <a:t> NPGO = younger </a:t>
+            </a:r>
+            <a:r>
+              <a:rPr lang="en-US" dirty="0" err="1"/>
+              <a:t>pop’n</a:t>
+            </a:r>
+            <a:r>
+              <a:rPr lang="en-US" dirty="0"/>
+              <a:t>)</a:t>
+            </a:r>
+          </a:p>
+          <a:p>
+            <a:endParaRPr lang="en-US" dirty="0"/>
+          </a:p>
+          <a:p>
+            <a:r>
+              <a:rPr lang="en-US" dirty="0"/>
+              <a:t>+</a:t>
+            </a:r>
+            <a:r>
+              <a:rPr lang="en-US" dirty="0" err="1"/>
+              <a:t>ve</a:t>
+            </a:r>
+            <a:r>
+              <a:rPr lang="en-US" dirty="0"/>
+              <a:t> PDO could lead to less </a:t>
+            </a:r>
+            <a:r>
+              <a:rPr lang="en-US" dirty="0" err="1"/>
+              <a:t>favourable</a:t>
+            </a:r>
+            <a:r>
+              <a:rPr lang="en-US" dirty="0"/>
+              <a:t> (warmer?) conditions, thinner fish, lower recruitment, increased age </a:t>
+            </a:r>
+          </a:p>
+          <a:p>
+            <a:r>
+              <a:rPr lang="en-US" dirty="0"/>
+              <a:t>+</a:t>
+            </a:r>
+            <a:r>
+              <a:rPr lang="en-US" dirty="0" err="1"/>
+              <a:t>ve</a:t>
+            </a:r>
+            <a:r>
+              <a:rPr lang="en-US" dirty="0"/>
+              <a:t> NPGO could lead to greater productivity along CC thus increasing recruitment and lowering (</a:t>
+            </a:r>
+            <a:r>
+              <a:rPr lang="en-US" dirty="0" err="1"/>
+              <a:t>ie</a:t>
+            </a:r>
+            <a:r>
+              <a:rPr lang="en-US" dirty="0"/>
+              <a:t>. younger) mean age</a:t>
+            </a:r>
+          </a:p>
+          <a:p>
+            <a:pPr lvl="1"/>
+            <a:endParaRPr lang="en-US" dirty="0"/>
+          </a:p>
+        </p:txBody>
+      </p:sp>
     </p:spTree>
     <p:extLst>
       <p:ext uri="{BB962C8B-B14F-4D97-AF65-F5344CB8AC3E}">
-        <p14:creationId xmlns:p14="http://schemas.microsoft.com/office/powerpoint/2010/main" val="3959152760"/>
+        <p14:creationId xmlns:p14="http://schemas.microsoft.com/office/powerpoint/2010/main" val="2123511324"/>
       </p:ext>
     </p:extLst>
   </p:cSld>
@@ -6428,158 +5953,6 @@
 </file>
 
 <file path=ppt/slides/slide21.xml><?xml version="1.0" encoding="utf-8"?>
-<p:sld xmlns:a="http://schemas.openxmlformats.org/drawingml/2006/main" xmlns:r="http://schemas.openxmlformats.org/officeDocument/2006/relationships" xmlns:p="http://schemas.openxmlformats.org/presentationml/2006/main">
-  <p:cSld>
-    <p:spTree>
-      <p:nvGrpSpPr>
-        <p:cNvPr id="1" name="">
-          <a:extLst>
-            <a:ext uri="{FF2B5EF4-FFF2-40B4-BE49-F238E27FC236}">
-              <a16:creationId xmlns:a16="http://schemas.microsoft.com/office/drawing/2014/main" id="{7264CFD7-1669-7C38-873E-DF58F18A156C}"/>
-            </a:ext>
-          </a:extLst>
-        </p:cNvPr>
-        <p:cNvGrpSpPr/>
-        <p:nvPr/>
-      </p:nvGrpSpPr>
-      <p:grpSpPr>
-        <a:xfrm>
-          <a:off x="0" y="0"/>
-          <a:ext cx="0" cy="0"/>
-          <a:chOff x="0" y="0"/>
-          <a:chExt cx="0" cy="0"/>
-        </a:xfrm>
-      </p:grpSpPr>
-      <p:sp>
-        <p:nvSpPr>
-          <p:cNvPr id="2" name="Title 1">
-            <a:extLst>
-              <a:ext uri="{FF2B5EF4-FFF2-40B4-BE49-F238E27FC236}">
-                <a16:creationId xmlns:a16="http://schemas.microsoft.com/office/drawing/2014/main" id="{27FF622F-93A4-3F67-89D2-39E207D26768}"/>
-              </a:ext>
-            </a:extLst>
-          </p:cNvPr>
-          <p:cNvSpPr>
-            <a:spLocks noGrp="1"/>
-          </p:cNvSpPr>
-          <p:nvPr>
-            <p:ph type="title"/>
-          </p:nvPr>
-        </p:nvSpPr>
-        <p:spPr/>
-        <p:txBody>
-          <a:bodyPr/>
-          <a:lstStyle/>
-          <a:p>
-            <a:r>
-              <a:rPr lang="en-US" dirty="0"/>
-              <a:t>Env data plots</a:t>
-            </a:r>
-          </a:p>
-        </p:txBody>
-      </p:sp>
-      <p:sp>
-        <p:nvSpPr>
-          <p:cNvPr id="3" name="Content Placeholder 2">
-            <a:extLst>
-              <a:ext uri="{FF2B5EF4-FFF2-40B4-BE49-F238E27FC236}">
-                <a16:creationId xmlns:a16="http://schemas.microsoft.com/office/drawing/2014/main" id="{2E0F7A91-D373-9E45-6031-9EF2213D77EC}"/>
-              </a:ext>
-            </a:extLst>
-          </p:cNvPr>
-          <p:cNvSpPr>
-            <a:spLocks noGrp="1"/>
-          </p:cNvSpPr>
-          <p:nvPr>
-            <p:ph idx="1"/>
-          </p:nvPr>
-        </p:nvSpPr>
-        <p:spPr/>
-        <p:txBody>
-          <a:bodyPr/>
-          <a:lstStyle/>
-          <a:p>
-            <a:r>
-              <a:rPr lang="en-US" dirty="0"/>
-              <a:t>ONI and NPI</a:t>
-            </a:r>
-          </a:p>
-        </p:txBody>
-      </p:sp>
-      <p:pic>
-        <p:nvPicPr>
-          <p:cNvPr id="6" name="Picture 5">
-            <a:extLst>
-              <a:ext uri="{FF2B5EF4-FFF2-40B4-BE49-F238E27FC236}">
-                <a16:creationId xmlns:a16="http://schemas.microsoft.com/office/drawing/2014/main" id="{6F0D0C00-3390-6809-09F7-3D60C7DD08CD}"/>
-              </a:ext>
-            </a:extLst>
-          </p:cNvPr>
-          <p:cNvPicPr>
-            <a:picLocks noChangeAspect="1"/>
-          </p:cNvPicPr>
-          <p:nvPr/>
-        </p:nvPicPr>
-        <p:blipFill>
-          <a:blip r:embed="rId2"/>
-          <a:stretch>
-            <a:fillRect/>
-          </a:stretch>
-        </p:blipFill>
-        <p:spPr>
-          <a:xfrm>
-            <a:off x="97541" y="2408555"/>
-            <a:ext cx="6150859" cy="3913871"/>
-          </a:xfrm>
-          <a:prstGeom prst="rect">
-            <a:avLst/>
-          </a:prstGeom>
-        </p:spPr>
-      </p:pic>
-      <p:pic>
-        <p:nvPicPr>
-          <p:cNvPr id="9" name="Picture 8">
-            <a:extLst>
-              <a:ext uri="{FF2B5EF4-FFF2-40B4-BE49-F238E27FC236}">
-                <a16:creationId xmlns:a16="http://schemas.microsoft.com/office/drawing/2014/main" id="{4D013116-1949-3C29-F322-5BC9453F9637}"/>
-              </a:ext>
-            </a:extLst>
-          </p:cNvPr>
-          <p:cNvPicPr>
-            <a:picLocks noChangeAspect="1"/>
-          </p:cNvPicPr>
-          <p:nvPr/>
-        </p:nvPicPr>
-        <p:blipFill>
-          <a:blip r:embed="rId3"/>
-          <a:stretch>
-            <a:fillRect/>
-          </a:stretch>
-        </p:blipFill>
-        <p:spPr>
-          <a:xfrm>
-            <a:off x="6269745" y="2408555"/>
-            <a:ext cx="5922256" cy="3768408"/>
-          </a:xfrm>
-          <a:prstGeom prst="rect">
-            <a:avLst/>
-          </a:prstGeom>
-        </p:spPr>
-      </p:pic>
-    </p:spTree>
-    <p:extLst>
-      <p:ext uri="{BB962C8B-B14F-4D97-AF65-F5344CB8AC3E}">
-        <p14:creationId xmlns:p14="http://schemas.microsoft.com/office/powerpoint/2010/main" val="3068822273"/>
-      </p:ext>
-    </p:extLst>
-  </p:cSld>
-  <p:clrMapOvr>
-    <a:masterClrMapping/>
-  </p:clrMapOvr>
-</p:sld>
-</file>
-
-<file path=ppt/slides/slide22.xml><?xml version="1.0" encoding="utf-8"?>
 <p:sld xmlns:a="http://schemas.openxmlformats.org/drawingml/2006/main" xmlns:r="http://schemas.openxmlformats.org/officeDocument/2006/relationships" xmlns:p="http://schemas.openxmlformats.org/presentationml/2006/main">
   <p:cSld>
     <p:spTree>
@@ -6601,7 +5974,7 @@
           <p:cNvPr id="2" name="Title 1">
             <a:extLst>
               <a:ext uri="{FF2B5EF4-FFF2-40B4-BE49-F238E27FC236}">
-                <a16:creationId xmlns:a16="http://schemas.microsoft.com/office/drawing/2014/main" id="{49C38D7B-5A56-5B4F-96C9-227BC1D55FB6}"/>
+                <a16:creationId xmlns:a16="http://schemas.microsoft.com/office/drawing/2014/main" id="{4A40D08C-72B6-4DD4-E3BE-211064DEAB73}"/>
               </a:ext>
             </a:extLst>
           </p:cNvPr>
@@ -6617,10 +5990,7 @@
           <a:bodyPr/>
           <a:lstStyle/>
           <a:p>
-            <a:r>
-              <a:rPr lang="en-US" dirty="0"/>
-              <a:t>Env data plots</a:t>
-            </a:r>
+            <a:endParaRPr lang="en-US"/>
           </a:p>
         </p:txBody>
       </p:sp>
@@ -6629,7 +5999,7 @@
           <p:cNvPr id="3" name="Content Placeholder 2">
             <a:extLst>
               <a:ext uri="{FF2B5EF4-FFF2-40B4-BE49-F238E27FC236}">
-                <a16:creationId xmlns:a16="http://schemas.microsoft.com/office/drawing/2014/main" id="{BD8AEF29-84C5-4818-0C0D-00AD67503E12}"/>
+                <a16:creationId xmlns:a16="http://schemas.microsoft.com/office/drawing/2014/main" id="{4EA5B1FA-525A-B4CD-020C-63DD73F43364}"/>
               </a:ext>
             </a:extLst>
           </p:cNvPr>
@@ -6645,7 +6015,7 @@
           <a:bodyPr/>
           <a:lstStyle/>
           <a:p>
-            <a:endParaRPr lang="en-US" dirty="0"/>
+            <a:endParaRPr lang="en-US"/>
           </a:p>
         </p:txBody>
       </p:sp>
@@ -6654,7 +6024,173 @@
           <p:cNvPr id="5" name="Picture 4">
             <a:extLst>
               <a:ext uri="{FF2B5EF4-FFF2-40B4-BE49-F238E27FC236}">
-                <a16:creationId xmlns:a16="http://schemas.microsoft.com/office/drawing/2014/main" id="{B953571D-B07B-65A2-882D-56CE80A12031}"/>
+                <a16:creationId xmlns:a16="http://schemas.microsoft.com/office/drawing/2014/main" id="{8DCDE47D-5478-D00A-87A3-A4A5E72B631D}"/>
+              </a:ext>
+            </a:extLst>
+          </p:cNvPr>
+          <p:cNvPicPr>
+            <a:picLocks noChangeAspect="1"/>
+          </p:cNvPicPr>
+          <p:nvPr/>
+        </p:nvPicPr>
+        <p:blipFill>
+          <a:blip r:embed="rId2"/>
+          <a:stretch>
+            <a:fillRect/>
+          </a:stretch>
+        </p:blipFill>
+        <p:spPr>
+          <a:xfrm>
+            <a:off x="2766244" y="1400021"/>
+            <a:ext cx="6915150" cy="4962525"/>
+          </a:xfrm>
+          <a:prstGeom prst="rect">
+            <a:avLst/>
+          </a:prstGeom>
+        </p:spPr>
+      </p:pic>
+    </p:spTree>
+    <p:extLst>
+      <p:ext uri="{BB962C8B-B14F-4D97-AF65-F5344CB8AC3E}">
+        <p14:creationId xmlns:p14="http://schemas.microsoft.com/office/powerpoint/2010/main" val="3844227694"/>
+      </p:ext>
+    </p:extLst>
+  </p:cSld>
+  <p:clrMapOvr>
+    <a:masterClrMapping/>
+  </p:clrMapOvr>
+</p:sld>
+</file>
+
+<file path=ppt/slides/slide22.xml><?xml version="1.0" encoding="utf-8"?>
+<p:sld xmlns:a="http://schemas.openxmlformats.org/drawingml/2006/main" xmlns:r="http://schemas.openxmlformats.org/officeDocument/2006/relationships" xmlns:p="http://schemas.openxmlformats.org/presentationml/2006/main">
+  <p:cSld>
+    <p:spTree>
+      <p:nvGrpSpPr>
+        <p:cNvPr id="1" name="">
+          <a:extLst>
+            <a:ext uri="{FF2B5EF4-FFF2-40B4-BE49-F238E27FC236}">
+              <a16:creationId xmlns:a16="http://schemas.microsoft.com/office/drawing/2014/main" id="{0840A8E1-9B56-931D-BA68-1C8F5F1389C9}"/>
+            </a:ext>
+          </a:extLst>
+        </p:cNvPr>
+        <p:cNvGrpSpPr/>
+        <p:nvPr/>
+      </p:nvGrpSpPr>
+      <p:grpSpPr>
+        <a:xfrm>
+          <a:off x="0" y="0"/>
+          <a:ext cx="0" cy="0"/>
+          <a:chOff x="0" y="0"/>
+          <a:chExt cx="0" cy="0"/>
+        </a:xfrm>
+      </p:grpSpPr>
+      <p:sp>
+        <p:nvSpPr>
+          <p:cNvPr id="10" name="TextBox 9">
+            <a:extLst>
+              <a:ext uri="{FF2B5EF4-FFF2-40B4-BE49-F238E27FC236}">
+                <a16:creationId xmlns:a16="http://schemas.microsoft.com/office/drawing/2014/main" id="{391A8A35-27A4-83DC-579C-43BD96E781B8}"/>
+              </a:ext>
+            </a:extLst>
+          </p:cNvPr>
+          <p:cNvSpPr txBox="1"/>
+          <p:nvPr/>
+        </p:nvSpPr>
+        <p:spPr>
+          <a:xfrm>
+            <a:off x="678426" y="462116"/>
+            <a:ext cx="935128" cy="369332"/>
+          </a:xfrm>
+          <a:prstGeom prst="rect">
+            <a:avLst/>
+          </a:prstGeom>
+          <a:noFill/>
+        </p:spPr>
+        <p:txBody>
+          <a:bodyPr wrap="none" rtlCol="0">
+            <a:spAutoFit/>
+          </a:bodyPr>
+          <a:lstStyle/>
+          <a:p>
+            <a:r>
+              <a:rPr lang="en-US" dirty="0"/>
+              <a:t>All data</a:t>
+            </a:r>
+          </a:p>
+        </p:txBody>
+      </p:sp>
+      <p:sp>
+        <p:nvSpPr>
+          <p:cNvPr id="11" name="TextBox 10">
+            <a:extLst>
+              <a:ext uri="{FF2B5EF4-FFF2-40B4-BE49-F238E27FC236}">
+                <a16:creationId xmlns:a16="http://schemas.microsoft.com/office/drawing/2014/main" id="{223E88BD-C8BD-AC1B-F099-1C07AECAB55A}"/>
+              </a:ext>
+            </a:extLst>
+          </p:cNvPr>
+          <p:cNvSpPr txBox="1"/>
+          <p:nvPr/>
+        </p:nvSpPr>
+        <p:spPr>
+          <a:xfrm>
+            <a:off x="6813755" y="550606"/>
+            <a:ext cx="976549" cy="369332"/>
+          </a:xfrm>
+          <a:prstGeom prst="rect">
+            <a:avLst/>
+          </a:prstGeom>
+          <a:noFill/>
+        </p:spPr>
+        <p:txBody>
+          <a:bodyPr wrap="none" rtlCol="0">
+            <a:spAutoFit/>
+          </a:bodyPr>
+          <a:lstStyle/>
+          <a:p>
+            <a:r>
+              <a:rPr lang="en-US" dirty="0"/>
+              <a:t>Only US</a:t>
+            </a:r>
+          </a:p>
+        </p:txBody>
+      </p:sp>
+      <p:pic>
+        <p:nvPicPr>
+          <p:cNvPr id="9" name="Picture 8">
+            <a:extLst>
+              <a:ext uri="{FF2B5EF4-FFF2-40B4-BE49-F238E27FC236}">
+                <a16:creationId xmlns:a16="http://schemas.microsoft.com/office/drawing/2014/main" id="{01E5FCEC-54BD-057F-E982-A424A32F51BE}"/>
+              </a:ext>
+            </a:extLst>
+          </p:cNvPr>
+          <p:cNvPicPr>
+            <a:picLocks noChangeAspect="1"/>
+          </p:cNvPicPr>
+          <p:nvPr/>
+        </p:nvPicPr>
+        <p:blipFill>
+          <a:blip r:embed="rId2"/>
+          <a:stretch>
+            <a:fillRect/>
+          </a:stretch>
+        </p:blipFill>
+        <p:spPr>
+          <a:xfrm>
+            <a:off x="5840977" y="1001662"/>
+            <a:ext cx="6134100" cy="5562600"/>
+          </a:xfrm>
+          <a:prstGeom prst="rect">
+            <a:avLst/>
+          </a:prstGeom>
+        </p:spPr>
+      </p:pic>
+      <p:pic>
+        <p:nvPicPr>
+          <p:cNvPr id="13" name="Picture 12">
+            <a:extLst>
+              <a:ext uri="{FF2B5EF4-FFF2-40B4-BE49-F238E27FC236}">
+                <a16:creationId xmlns:a16="http://schemas.microsoft.com/office/drawing/2014/main" id="{FE82D3A8-8789-2BF4-CC3A-0E647BF7E6C5}"/>
               </a:ext>
             </a:extLst>
           </p:cNvPr>
@@ -6671,8 +6207,8 @@
         </p:blipFill>
         <p:spPr>
           <a:xfrm>
-            <a:off x="3168988" y="1624449"/>
-            <a:ext cx="7650994" cy="4868426"/>
+            <a:off x="61906" y="1288270"/>
+            <a:ext cx="5779071" cy="4989384"/>
           </a:xfrm>
           <a:prstGeom prst="rect">
             <a:avLst/>
@@ -6682,7 +6218,7 @@
     </p:spTree>
     <p:extLst>
       <p:ext uri="{BB962C8B-B14F-4D97-AF65-F5344CB8AC3E}">
-        <p14:creationId xmlns:p14="http://schemas.microsoft.com/office/powerpoint/2010/main" val="736488394"/>
+        <p14:creationId xmlns:p14="http://schemas.microsoft.com/office/powerpoint/2010/main" val="3298373475"/>
       </p:ext>
     </p:extLst>
   </p:cSld>
@@ -6711,63 +6247,80 @@
       </p:grpSpPr>
       <p:sp>
         <p:nvSpPr>
-          <p:cNvPr id="2" name="Title 1">
-            <a:extLst>
-              <a:ext uri="{FF2B5EF4-FFF2-40B4-BE49-F238E27FC236}">
-                <a16:creationId xmlns:a16="http://schemas.microsoft.com/office/drawing/2014/main" id="{47243C71-A58A-21C8-9DD2-A47889265488}"/>
-              </a:ext>
-            </a:extLst>
-          </p:cNvPr>
-          <p:cNvSpPr>
-            <a:spLocks noGrp="1"/>
-          </p:cNvSpPr>
-          <p:nvPr>
-            <p:ph type="title"/>
-          </p:nvPr>
-        </p:nvSpPr>
-        <p:spPr/>
-        <p:txBody>
-          <a:bodyPr/>
+          <p:cNvPr id="10" name="TextBox 9">
+            <a:extLst>
+              <a:ext uri="{FF2B5EF4-FFF2-40B4-BE49-F238E27FC236}">
+                <a16:creationId xmlns:a16="http://schemas.microsoft.com/office/drawing/2014/main" id="{40C2088E-1C3B-6D5F-E5B5-F0A1C0013846}"/>
+              </a:ext>
+            </a:extLst>
+          </p:cNvPr>
+          <p:cNvSpPr txBox="1"/>
+          <p:nvPr/>
+        </p:nvSpPr>
+        <p:spPr>
+          <a:xfrm>
+            <a:off x="678426" y="462116"/>
+            <a:ext cx="935128" cy="369332"/>
+          </a:xfrm>
+          <a:prstGeom prst="rect">
+            <a:avLst/>
+          </a:prstGeom>
+          <a:noFill/>
+        </p:spPr>
+        <p:txBody>
+          <a:bodyPr wrap="none" rtlCol="0">
+            <a:spAutoFit/>
+          </a:bodyPr>
           <a:lstStyle/>
           <a:p>
             <a:r>
               <a:rPr lang="en-US" dirty="0"/>
-              <a:t>Mixed effects env effects model with m1.1</a:t>
-            </a:r>
-          </a:p>
-        </p:txBody>
-      </p:sp>
-      <p:sp>
-        <p:nvSpPr>
-          <p:cNvPr id="3" name="Content Placeholder 2">
-            <a:extLst>
-              <a:ext uri="{FF2B5EF4-FFF2-40B4-BE49-F238E27FC236}">
-                <a16:creationId xmlns:a16="http://schemas.microsoft.com/office/drawing/2014/main" id="{D22FBA73-FE31-98A3-4C0C-0C1E5E659061}"/>
-              </a:ext>
-            </a:extLst>
-          </p:cNvPr>
-          <p:cNvSpPr>
-            <a:spLocks noGrp="1"/>
-          </p:cNvSpPr>
-          <p:nvPr>
-            <p:ph idx="1"/>
-          </p:nvPr>
-        </p:nvSpPr>
-        <p:spPr/>
-        <p:txBody>
-          <a:bodyPr/>
-          <a:lstStyle/>
-          <a:p>
-            <a:endParaRPr lang="en-US"/>
+              <a:t>All data</a:t>
+            </a:r>
+          </a:p>
+        </p:txBody>
+      </p:sp>
+      <p:sp>
+        <p:nvSpPr>
+          <p:cNvPr id="11" name="TextBox 10">
+            <a:extLst>
+              <a:ext uri="{FF2B5EF4-FFF2-40B4-BE49-F238E27FC236}">
+                <a16:creationId xmlns:a16="http://schemas.microsoft.com/office/drawing/2014/main" id="{3561F02C-B080-33A6-0396-DCE776DF34A7}"/>
+              </a:ext>
+            </a:extLst>
+          </p:cNvPr>
+          <p:cNvSpPr txBox="1"/>
+          <p:nvPr/>
+        </p:nvSpPr>
+        <p:spPr>
+          <a:xfrm>
+            <a:off x="6361472" y="402981"/>
+            <a:ext cx="1476686" cy="369332"/>
+          </a:xfrm>
+          <a:prstGeom prst="rect">
+            <a:avLst/>
+          </a:prstGeom>
+          <a:noFill/>
+        </p:spPr>
+        <p:txBody>
+          <a:bodyPr wrap="none" rtlCol="0">
+            <a:spAutoFit/>
+          </a:bodyPr>
+          <a:lstStyle/>
+          <a:p>
+            <a:r>
+              <a:rPr lang="en-US" dirty="0"/>
+              <a:t>Only Canada</a:t>
+            </a:r>
           </a:p>
         </p:txBody>
       </p:sp>
       <p:pic>
         <p:nvPicPr>
-          <p:cNvPr id="5" name="Picture 4">
-            <a:extLst>
-              <a:ext uri="{FF2B5EF4-FFF2-40B4-BE49-F238E27FC236}">
-                <a16:creationId xmlns:a16="http://schemas.microsoft.com/office/drawing/2014/main" id="{6A628034-2E3E-78FE-DB30-F138C40A92D8}"/>
+          <p:cNvPr id="13" name="Picture 12">
+            <a:extLst>
+              <a:ext uri="{FF2B5EF4-FFF2-40B4-BE49-F238E27FC236}">
+                <a16:creationId xmlns:a16="http://schemas.microsoft.com/office/drawing/2014/main" id="{61E0CEEC-B7FD-EEF2-C7AE-52F43876C12D}"/>
               </a:ext>
             </a:extLst>
           </p:cNvPr>
@@ -6784,8 +6337,38 @@
         </p:blipFill>
         <p:spPr>
           <a:xfrm>
-            <a:off x="445850" y="1371369"/>
-            <a:ext cx="8386918" cy="5259850"/>
+            <a:off x="137490" y="1159362"/>
+            <a:ext cx="5779071" cy="4989384"/>
+          </a:xfrm>
+          <a:prstGeom prst="rect">
+            <a:avLst/>
+          </a:prstGeom>
+        </p:spPr>
+      </p:pic>
+      <p:pic>
+        <p:nvPicPr>
+          <p:cNvPr id="15" name="Picture 14">
+            <a:extLst>
+              <a:ext uri="{FF2B5EF4-FFF2-40B4-BE49-F238E27FC236}">
+                <a16:creationId xmlns:a16="http://schemas.microsoft.com/office/drawing/2014/main" id="{9D406D67-1CEF-C6F5-B1DD-B7F80C0F9C09}"/>
+              </a:ext>
+            </a:extLst>
+          </p:cNvPr>
+          <p:cNvPicPr>
+            <a:picLocks noChangeAspect="1"/>
+          </p:cNvPicPr>
+          <p:nvPr/>
+        </p:nvPicPr>
+        <p:blipFill>
+          <a:blip r:embed="rId3"/>
+          <a:stretch>
+            <a:fillRect/>
+          </a:stretch>
+        </p:blipFill>
+        <p:spPr>
+          <a:xfrm>
+            <a:off x="5920410" y="872754"/>
+            <a:ext cx="6134100" cy="5562600"/>
           </a:xfrm>
           <a:prstGeom prst="rect">
             <a:avLst/>
@@ -6795,7 +6378,7 @@
     </p:spTree>
     <p:extLst>
       <p:ext uri="{BB962C8B-B14F-4D97-AF65-F5344CB8AC3E}">
-        <p14:creationId xmlns:p14="http://schemas.microsoft.com/office/powerpoint/2010/main" val="3804727872"/>
+        <p14:creationId xmlns:p14="http://schemas.microsoft.com/office/powerpoint/2010/main" val="2072463996"/>
       </p:ext>
     </p:extLst>
   </p:cSld>
@@ -6827,7 +6410,7 @@
           <p:cNvPr id="2" name="Title 1">
             <a:extLst>
               <a:ext uri="{FF2B5EF4-FFF2-40B4-BE49-F238E27FC236}">
-                <a16:creationId xmlns:a16="http://schemas.microsoft.com/office/drawing/2014/main" id="{CF7F1EAB-6A01-A0EC-A423-D6331EC5F6D6}"/>
+                <a16:creationId xmlns:a16="http://schemas.microsoft.com/office/drawing/2014/main" id="{41E099BD-4E63-9C99-EF1E-ADFEDE7516DB}"/>
               </a:ext>
             </a:extLst>
           </p:cNvPr>
@@ -6843,49 +6426,39 @@
           <a:bodyPr/>
           <a:lstStyle/>
           <a:p>
-            <a:r>
-              <a:rPr lang="en-US" dirty="0"/>
-              <a:t>Mixed effects model prediction with m1.1</a:t>
-            </a:r>
-          </a:p>
-        </p:txBody>
-      </p:sp>
-      <p:pic>
-        <p:nvPicPr>
-          <p:cNvPr id="5" name="Content Placeholder 4">
-            <a:extLst>
-              <a:ext uri="{FF2B5EF4-FFF2-40B4-BE49-F238E27FC236}">
-                <a16:creationId xmlns:a16="http://schemas.microsoft.com/office/drawing/2014/main" id="{6084E6A8-D978-3935-FB6C-C0A8648FE0B2}"/>
-              </a:ext>
-            </a:extLst>
-          </p:cNvPr>
-          <p:cNvPicPr>
-            <a:picLocks noGrp="1" noChangeAspect="1"/>
-          </p:cNvPicPr>
+            <a:endParaRPr lang="en-US"/>
+          </a:p>
+        </p:txBody>
+      </p:sp>
+      <p:sp>
+        <p:nvSpPr>
+          <p:cNvPr id="3" name="Content Placeholder 2">
+            <a:extLst>
+              <a:ext uri="{FF2B5EF4-FFF2-40B4-BE49-F238E27FC236}">
+                <a16:creationId xmlns:a16="http://schemas.microsoft.com/office/drawing/2014/main" id="{2F23340C-F7AC-6021-9475-4E439BD30966}"/>
+              </a:ext>
+            </a:extLst>
+          </p:cNvPr>
+          <p:cNvSpPr>
+            <a:spLocks noGrp="1"/>
+          </p:cNvSpPr>
           <p:nvPr>
             <p:ph idx="1"/>
           </p:nvPr>
-        </p:nvPicPr>
-        <p:blipFill>
-          <a:blip r:embed="rId2"/>
-          <a:stretch>
-            <a:fillRect/>
-          </a:stretch>
-        </p:blipFill>
-        <p:spPr>
-          <a:xfrm>
-            <a:off x="1928152" y="1825625"/>
-            <a:ext cx="8335695" cy="4351338"/>
-          </a:xfrm>
-          <a:prstGeom prst="rect">
-            <a:avLst/>
-          </a:prstGeom>
-        </p:spPr>
-      </p:pic>
+        </p:nvSpPr>
+        <p:spPr/>
+        <p:txBody>
+          <a:bodyPr/>
+          <a:lstStyle/>
+          <a:p>
+            <a:endParaRPr lang="en-US"/>
+          </a:p>
+        </p:txBody>
+      </p:sp>
     </p:spTree>
     <p:extLst>
       <p:ext uri="{BB962C8B-B14F-4D97-AF65-F5344CB8AC3E}">
-        <p14:creationId xmlns:p14="http://schemas.microsoft.com/office/powerpoint/2010/main" val="852449700"/>
+        <p14:creationId xmlns:p14="http://schemas.microsoft.com/office/powerpoint/2010/main" val="2979283072"/>
       </p:ext>
     </p:extLst>
   </p:cSld>
@@ -6900,13 +6473,7 @@
   <p:cSld>
     <p:spTree>
       <p:nvGrpSpPr>
-        <p:cNvPr id="1" name="">
-          <a:extLst>
-            <a:ext uri="{FF2B5EF4-FFF2-40B4-BE49-F238E27FC236}">
-              <a16:creationId xmlns:a16="http://schemas.microsoft.com/office/drawing/2014/main" id="{84461C4B-25ED-11E2-FFF1-3FEF3E97D744}"/>
-            </a:ext>
-          </a:extLst>
-        </p:cNvPr>
+        <p:cNvPr id="1" name=""/>
         <p:cNvGrpSpPr/>
         <p:nvPr/>
       </p:nvGrpSpPr>
@@ -6923,7 +6490,7 @@
           <p:cNvPr id="2" name="Title 1">
             <a:extLst>
               <a:ext uri="{FF2B5EF4-FFF2-40B4-BE49-F238E27FC236}">
-                <a16:creationId xmlns:a16="http://schemas.microsoft.com/office/drawing/2014/main" id="{139389DC-8207-252C-7FBC-4B52E27CDDE7}"/>
+                <a16:creationId xmlns:a16="http://schemas.microsoft.com/office/drawing/2014/main" id="{C66E8B6F-B603-525C-4310-5D9717D8C4A5}"/>
               </a:ext>
             </a:extLst>
           </p:cNvPr>
@@ -6939,10 +6506,7 @@
           <a:bodyPr/>
           <a:lstStyle/>
           <a:p>
-            <a:r>
-              <a:rPr lang="en-US" dirty="0"/>
-              <a:t>Mixed effects env effects model with m7.1 (only length and sex as predictors)</a:t>
-            </a:r>
+            <a:endParaRPr lang="en-US"/>
           </a:p>
         </p:txBody>
       </p:sp>
@@ -6951,7 +6515,7 @@
           <p:cNvPr id="3" name="Content Placeholder 2">
             <a:extLst>
               <a:ext uri="{FF2B5EF4-FFF2-40B4-BE49-F238E27FC236}">
-                <a16:creationId xmlns:a16="http://schemas.microsoft.com/office/drawing/2014/main" id="{47909D1E-8D96-E1B8-8278-C8D9E52B47EB}"/>
+                <a16:creationId xmlns:a16="http://schemas.microsoft.com/office/drawing/2014/main" id="{B7BFB9DB-C069-57D8-E94D-256FC60CC888}"/>
               </a:ext>
             </a:extLst>
           </p:cNvPr>
@@ -6971,40 +6535,10 @@
           </a:p>
         </p:txBody>
       </p:sp>
-      <p:pic>
-        <p:nvPicPr>
-          <p:cNvPr id="6" name="Picture 5">
-            <a:extLst>
-              <a:ext uri="{FF2B5EF4-FFF2-40B4-BE49-F238E27FC236}">
-                <a16:creationId xmlns:a16="http://schemas.microsoft.com/office/drawing/2014/main" id="{9B1B1BE6-FD78-FAE2-A2EE-5FFBE12B44D2}"/>
-              </a:ext>
-            </a:extLst>
-          </p:cNvPr>
-          <p:cNvPicPr>
-            <a:picLocks noChangeAspect="1"/>
-          </p:cNvPicPr>
-          <p:nvPr/>
-        </p:nvPicPr>
-        <p:blipFill>
-          <a:blip r:embed="rId2"/>
-          <a:stretch>
-            <a:fillRect/>
-          </a:stretch>
-        </p:blipFill>
-        <p:spPr>
-          <a:xfrm>
-            <a:off x="1396181" y="1690688"/>
-            <a:ext cx="9229010" cy="4975783"/>
-          </a:xfrm>
-          <a:prstGeom prst="rect">
-            <a:avLst/>
-          </a:prstGeom>
-        </p:spPr>
-      </p:pic>
     </p:spTree>
     <p:extLst>
       <p:ext uri="{BB962C8B-B14F-4D97-AF65-F5344CB8AC3E}">
-        <p14:creationId xmlns:p14="http://schemas.microsoft.com/office/powerpoint/2010/main" val="3547723992"/>
+        <p14:creationId xmlns:p14="http://schemas.microsoft.com/office/powerpoint/2010/main" val="3851835664"/>
       </p:ext>
     </p:extLst>
   </p:cSld>
@@ -7019,13 +6553,7 @@
   <p:cSld>
     <p:spTree>
       <p:nvGrpSpPr>
-        <p:cNvPr id="1" name="">
-          <a:extLst>
-            <a:ext uri="{FF2B5EF4-FFF2-40B4-BE49-F238E27FC236}">
-              <a16:creationId xmlns:a16="http://schemas.microsoft.com/office/drawing/2014/main" id="{B6339167-00C2-CFC8-B826-EC070AB22F0E}"/>
-            </a:ext>
-          </a:extLst>
-        </p:cNvPr>
+        <p:cNvPr id="1" name=""/>
         <p:cNvGrpSpPr/>
         <p:nvPr/>
       </p:nvGrpSpPr>
@@ -7042,7 +6570,7 @@
           <p:cNvPr id="2" name="Title 1">
             <a:extLst>
               <a:ext uri="{FF2B5EF4-FFF2-40B4-BE49-F238E27FC236}">
-                <a16:creationId xmlns:a16="http://schemas.microsoft.com/office/drawing/2014/main" id="{8647FD77-FE84-D158-7C2B-DED173F66A52}"/>
+                <a16:creationId xmlns:a16="http://schemas.microsoft.com/office/drawing/2014/main" id="{C0B608F8-BBCA-D4E4-04B8-D6FAF5965948}"/>
               </a:ext>
             </a:extLst>
           </p:cNvPr>
@@ -7058,19 +6586,16 @@
           <a:bodyPr/>
           <a:lstStyle/>
           <a:p>
-            <a:r>
-              <a:rPr lang="en-US" dirty="0"/>
-              <a:t>Mixed effects model prediction with m7.1</a:t>
-            </a:r>
-          </a:p>
-        </p:txBody>
-      </p:sp>
-      <p:sp>
-        <p:nvSpPr>
-          <p:cNvPr id="4" name="Content Placeholder 3">
-            <a:extLst>
-              <a:ext uri="{FF2B5EF4-FFF2-40B4-BE49-F238E27FC236}">
-                <a16:creationId xmlns:a16="http://schemas.microsoft.com/office/drawing/2014/main" id="{ECA59455-5662-49D7-817F-EE0061EF152C}"/>
+            <a:endParaRPr lang="en-US"/>
+          </a:p>
+        </p:txBody>
+      </p:sp>
+      <p:sp>
+        <p:nvSpPr>
+          <p:cNvPr id="3" name="Content Placeholder 2">
+            <a:extLst>
+              <a:ext uri="{FF2B5EF4-FFF2-40B4-BE49-F238E27FC236}">
+                <a16:creationId xmlns:a16="http://schemas.microsoft.com/office/drawing/2014/main" id="{69CBC5E0-A2A5-68A6-C41E-630D4281CB74}"/>
               </a:ext>
             </a:extLst>
           </p:cNvPr>
@@ -7090,40 +6615,10 @@
           </a:p>
         </p:txBody>
       </p:sp>
-      <p:pic>
-        <p:nvPicPr>
-          <p:cNvPr id="7" name="Picture 6">
-            <a:extLst>
-              <a:ext uri="{FF2B5EF4-FFF2-40B4-BE49-F238E27FC236}">
-                <a16:creationId xmlns:a16="http://schemas.microsoft.com/office/drawing/2014/main" id="{0AA2491D-E607-8C7D-1FB8-9D838D9E4BB8}"/>
-              </a:ext>
-            </a:extLst>
-          </p:cNvPr>
-          <p:cNvPicPr>
-            <a:picLocks noChangeAspect="1"/>
-          </p:cNvPicPr>
-          <p:nvPr/>
-        </p:nvPicPr>
-        <p:blipFill>
-          <a:blip r:embed="rId2"/>
-          <a:stretch>
-            <a:fillRect/>
-          </a:stretch>
-        </p:blipFill>
-        <p:spPr>
-          <a:xfrm>
-            <a:off x="1258529" y="1393191"/>
-            <a:ext cx="9674942" cy="5216205"/>
-          </a:xfrm>
-          <a:prstGeom prst="rect">
-            <a:avLst/>
-          </a:prstGeom>
-        </p:spPr>
-      </p:pic>
     </p:spTree>
     <p:extLst>
       <p:ext uri="{BB962C8B-B14F-4D97-AF65-F5344CB8AC3E}">
-        <p14:creationId xmlns:p14="http://schemas.microsoft.com/office/powerpoint/2010/main" val="4216842418"/>
+        <p14:creationId xmlns:p14="http://schemas.microsoft.com/office/powerpoint/2010/main" val="330511795"/>
       </p:ext>
     </p:extLst>
   </p:cSld>
@@ -7155,7 +6650,7 @@
           <p:cNvPr id="2" name="Title 1">
             <a:extLst>
               <a:ext uri="{FF2B5EF4-FFF2-40B4-BE49-F238E27FC236}">
-                <a16:creationId xmlns:a16="http://schemas.microsoft.com/office/drawing/2014/main" id="{6555FD4B-716A-8585-F669-ED515BE77843}"/>
+                <a16:creationId xmlns:a16="http://schemas.microsoft.com/office/drawing/2014/main" id="{346CF44C-CD1F-7FFD-1178-6E1FEF57E7A6}"/>
               </a:ext>
             </a:extLst>
           </p:cNvPr>
@@ -7171,10 +6666,7 @@
           <a:bodyPr/>
           <a:lstStyle/>
           <a:p>
-            <a:r>
-              <a:rPr lang="en-US" dirty="0"/>
-              <a:t>Bayesian length weight</a:t>
-            </a:r>
+            <a:endParaRPr lang="en-US"/>
           </a:p>
         </p:txBody>
       </p:sp>
@@ -7183,7 +6675,7 @@
           <p:cNvPr id="3" name="Content Placeholder 2">
             <a:extLst>
               <a:ext uri="{FF2B5EF4-FFF2-40B4-BE49-F238E27FC236}">
-                <a16:creationId xmlns:a16="http://schemas.microsoft.com/office/drawing/2014/main" id="{43F7D47F-8C8E-E942-FC4A-B62B138417C1}"/>
+                <a16:creationId xmlns:a16="http://schemas.microsoft.com/office/drawing/2014/main" id="{0E5F1611-A3B8-8B48-4802-F7C9F91FCC3B}"/>
               </a:ext>
             </a:extLst>
           </p:cNvPr>
@@ -7206,7 +6698,7 @@
     </p:spTree>
     <p:extLst>
       <p:ext uri="{BB962C8B-B14F-4D97-AF65-F5344CB8AC3E}">
-        <p14:creationId xmlns:p14="http://schemas.microsoft.com/office/powerpoint/2010/main" val="3446152002"/>
+        <p14:creationId xmlns:p14="http://schemas.microsoft.com/office/powerpoint/2010/main" val="3630585970"/>
       </p:ext>
     </p:extLst>
   </p:cSld>
@@ -7238,7 +6730,7 @@
           <p:cNvPr id="2" name="Title 1">
             <a:extLst>
               <a:ext uri="{FF2B5EF4-FFF2-40B4-BE49-F238E27FC236}">
-                <a16:creationId xmlns:a16="http://schemas.microsoft.com/office/drawing/2014/main" id="{64477608-1C72-5E9F-823C-10FA913192F1}"/>
+                <a16:creationId xmlns:a16="http://schemas.microsoft.com/office/drawing/2014/main" id="{BCBCD289-7E48-5C9A-EFA7-3D935118A830}"/>
               </a:ext>
             </a:extLst>
           </p:cNvPr>
@@ -7254,7 +6746,7 @@
           <a:bodyPr/>
           <a:lstStyle/>
           <a:p>
-            <a:endParaRPr lang="en-US" dirty="0"/>
+            <a:endParaRPr lang="en-US"/>
           </a:p>
         </p:txBody>
       </p:sp>
@@ -7263,7 +6755,7 @@
           <p:cNvPr id="3" name="Content Placeholder 2">
             <a:extLst>
               <a:ext uri="{FF2B5EF4-FFF2-40B4-BE49-F238E27FC236}">
-                <a16:creationId xmlns:a16="http://schemas.microsoft.com/office/drawing/2014/main" id="{544801D6-7DE0-58BB-F6B8-4666BC42FB03}"/>
+                <a16:creationId xmlns:a16="http://schemas.microsoft.com/office/drawing/2014/main" id="{308B9F9F-32C3-BF94-4533-D143344C9A6C}"/>
               </a:ext>
             </a:extLst>
           </p:cNvPr>
@@ -7283,40 +6775,10 @@
           </a:p>
         </p:txBody>
       </p:sp>
-      <p:pic>
-        <p:nvPicPr>
-          <p:cNvPr id="5" name="Picture 4">
-            <a:extLst>
-              <a:ext uri="{FF2B5EF4-FFF2-40B4-BE49-F238E27FC236}">
-                <a16:creationId xmlns:a16="http://schemas.microsoft.com/office/drawing/2014/main" id="{770792CB-DE3C-D67D-AAA4-B0DCA3555CED}"/>
-              </a:ext>
-            </a:extLst>
-          </p:cNvPr>
-          <p:cNvPicPr>
-            <a:picLocks noChangeAspect="1"/>
-          </p:cNvPicPr>
-          <p:nvPr/>
-        </p:nvPicPr>
-        <p:blipFill>
-          <a:blip r:embed="rId2"/>
-          <a:stretch>
-            <a:fillRect/>
-          </a:stretch>
-        </p:blipFill>
-        <p:spPr>
-          <a:xfrm>
-            <a:off x="1573161" y="1825625"/>
-            <a:ext cx="8799871" cy="4744414"/>
-          </a:xfrm>
-          <a:prstGeom prst="rect">
-            <a:avLst/>
-          </a:prstGeom>
-        </p:spPr>
-      </p:pic>
     </p:spTree>
     <p:extLst>
       <p:ext uri="{BB962C8B-B14F-4D97-AF65-F5344CB8AC3E}">
-        <p14:creationId xmlns:p14="http://schemas.microsoft.com/office/powerpoint/2010/main" val="3702729453"/>
+        <p14:creationId xmlns:p14="http://schemas.microsoft.com/office/powerpoint/2010/main" val="4291675638"/>
       </p:ext>
     </p:extLst>
   </p:cSld>
@@ -7348,7 +6810,7 @@
           <p:cNvPr id="2" name="Title 1">
             <a:extLst>
               <a:ext uri="{FF2B5EF4-FFF2-40B4-BE49-F238E27FC236}">
-                <a16:creationId xmlns:a16="http://schemas.microsoft.com/office/drawing/2014/main" id="{E5DA7936-CD51-60B3-C438-8309BFB0537D}"/>
+                <a16:creationId xmlns:a16="http://schemas.microsoft.com/office/drawing/2014/main" id="{CFCD8A87-80DC-C180-D3F1-FFE60E84471A}"/>
               </a:ext>
             </a:extLst>
           </p:cNvPr>
@@ -7373,7 +6835,7 @@
           <p:cNvPr id="3" name="Content Placeholder 2">
             <a:extLst>
               <a:ext uri="{FF2B5EF4-FFF2-40B4-BE49-F238E27FC236}">
-                <a16:creationId xmlns:a16="http://schemas.microsoft.com/office/drawing/2014/main" id="{25FC91EE-F35D-6863-5C80-C0CDB72A7FCC}"/>
+                <a16:creationId xmlns:a16="http://schemas.microsoft.com/office/drawing/2014/main" id="{B2064F4C-0661-F4C6-1DB0-87302985C104}"/>
               </a:ext>
             </a:extLst>
           </p:cNvPr>
@@ -7393,40 +6855,10 @@
           </a:p>
         </p:txBody>
       </p:sp>
-      <p:pic>
-        <p:nvPicPr>
-          <p:cNvPr id="5" name="Picture 4">
-            <a:extLst>
-              <a:ext uri="{FF2B5EF4-FFF2-40B4-BE49-F238E27FC236}">
-                <a16:creationId xmlns:a16="http://schemas.microsoft.com/office/drawing/2014/main" id="{0138E8CD-F2C8-6FB0-55E8-CC35AA46A7F0}"/>
-              </a:ext>
-            </a:extLst>
-          </p:cNvPr>
-          <p:cNvPicPr>
-            <a:picLocks noChangeAspect="1"/>
-          </p:cNvPicPr>
-          <p:nvPr/>
-        </p:nvPicPr>
-        <p:blipFill>
-          <a:blip r:embed="rId2"/>
-          <a:stretch>
-            <a:fillRect/>
-          </a:stretch>
-        </p:blipFill>
-        <p:spPr>
-          <a:xfrm>
-            <a:off x="0" y="142366"/>
-            <a:ext cx="12192000" cy="6573267"/>
-          </a:xfrm>
-          <a:prstGeom prst="rect">
-            <a:avLst/>
-          </a:prstGeom>
-        </p:spPr>
-      </p:pic>
     </p:spTree>
     <p:extLst>
       <p:ext uri="{BB962C8B-B14F-4D97-AF65-F5344CB8AC3E}">
-        <p14:creationId xmlns:p14="http://schemas.microsoft.com/office/powerpoint/2010/main" val="381996913"/>
+        <p14:creationId xmlns:p14="http://schemas.microsoft.com/office/powerpoint/2010/main" val="1264616559"/>
       </p:ext>
     </p:extLst>
   </p:cSld>
@@ -7453,73 +6885,12 @@
           <a:chExt cx="0" cy="0"/>
         </a:xfrm>
       </p:grpSpPr>
-      <p:sp>
-        <p:nvSpPr>
-          <p:cNvPr id="2" name="Title 1">
-            <a:extLst>
-              <a:ext uri="{FF2B5EF4-FFF2-40B4-BE49-F238E27FC236}">
-                <a16:creationId xmlns:a16="http://schemas.microsoft.com/office/drawing/2014/main" id="{7C99787E-C5E9-7C55-BF99-5D920886E980}"/>
-              </a:ext>
-            </a:extLst>
-          </p:cNvPr>
-          <p:cNvSpPr>
-            <a:spLocks noGrp="1"/>
-          </p:cNvSpPr>
-          <p:nvPr>
-            <p:ph type="title"/>
-          </p:nvPr>
-        </p:nvSpPr>
-        <p:spPr/>
-        <p:txBody>
-          <a:bodyPr/>
-          <a:lstStyle/>
-          <a:p>
-            <a:r>
-              <a:rPr lang="en-US" dirty="0"/>
-              <a:t>Le </a:t>
-            </a:r>
-            <a:r>
-              <a:rPr lang="en-US" dirty="0" err="1"/>
-              <a:t>Cren’s</a:t>
-            </a:r>
-            <a:r>
-              <a:rPr lang="en-US" dirty="0"/>
-              <a:t> body condition</a:t>
-            </a:r>
-          </a:p>
-        </p:txBody>
-      </p:sp>
-      <p:sp>
-        <p:nvSpPr>
-          <p:cNvPr id="3" name="Content Placeholder 2">
-            <a:extLst>
-              <a:ext uri="{FF2B5EF4-FFF2-40B4-BE49-F238E27FC236}">
-                <a16:creationId xmlns:a16="http://schemas.microsoft.com/office/drawing/2014/main" id="{90C36CF5-35F6-7683-E969-73033189FB70}"/>
-              </a:ext>
-            </a:extLst>
-          </p:cNvPr>
-          <p:cNvSpPr>
-            <a:spLocks noGrp="1"/>
-          </p:cNvSpPr>
-          <p:nvPr>
-            <p:ph idx="1"/>
-          </p:nvPr>
-        </p:nvSpPr>
-        <p:spPr/>
-        <p:txBody>
-          <a:bodyPr/>
-          <a:lstStyle/>
-          <a:p>
-            <a:endParaRPr lang="en-US"/>
-          </a:p>
-        </p:txBody>
-      </p:sp>
       <p:pic>
         <p:nvPicPr>
-          <p:cNvPr id="5" name="Picture 4">
-            <a:extLst>
-              <a:ext uri="{FF2B5EF4-FFF2-40B4-BE49-F238E27FC236}">
-                <a16:creationId xmlns:a16="http://schemas.microsoft.com/office/drawing/2014/main" id="{8D7BB72E-5078-F9EF-E301-47A247313968}"/>
+          <p:cNvPr id="9" name="Picture 8">
+            <a:extLst>
+              <a:ext uri="{FF2B5EF4-FFF2-40B4-BE49-F238E27FC236}">
+                <a16:creationId xmlns:a16="http://schemas.microsoft.com/office/drawing/2014/main" id="{B4461000-CD6C-C489-4AF9-496580DE2C94}"/>
               </a:ext>
             </a:extLst>
           </p:cNvPr>
@@ -7536,20 +6907,81 @@
         </p:blipFill>
         <p:spPr>
           <a:xfrm>
-            <a:off x="385657" y="2853310"/>
-            <a:ext cx="5710343" cy="3033906"/>
+            <a:off x="6272199" y="858981"/>
+            <a:ext cx="5324747" cy="5731164"/>
           </a:xfrm>
           <a:prstGeom prst="rect">
             <a:avLst/>
           </a:prstGeom>
         </p:spPr>
       </p:pic>
+      <p:sp>
+        <p:nvSpPr>
+          <p:cNvPr id="2" name="Title 1">
+            <a:extLst>
+              <a:ext uri="{FF2B5EF4-FFF2-40B4-BE49-F238E27FC236}">
+                <a16:creationId xmlns:a16="http://schemas.microsoft.com/office/drawing/2014/main" id="{7C99787E-C5E9-7C55-BF99-5D920886E980}"/>
+              </a:ext>
+            </a:extLst>
+          </p:cNvPr>
+          <p:cNvSpPr>
+            <a:spLocks noGrp="1"/>
+          </p:cNvSpPr>
+          <p:nvPr>
+            <p:ph type="title"/>
+          </p:nvPr>
+        </p:nvSpPr>
+        <p:spPr/>
+        <p:txBody>
+          <a:bodyPr/>
+          <a:lstStyle/>
+          <a:p>
+            <a:r>
+              <a:rPr lang="en-US" dirty="0"/>
+              <a:t>Le </a:t>
+            </a:r>
+            <a:r>
+              <a:rPr lang="en-US" dirty="0" err="1"/>
+              <a:t>Cren’s</a:t>
+            </a:r>
+            <a:r>
+              <a:rPr lang="en-US" dirty="0"/>
+              <a:t> body condition</a:t>
+            </a:r>
+          </a:p>
+        </p:txBody>
+      </p:sp>
+      <p:sp>
+        <p:nvSpPr>
+          <p:cNvPr id="3" name="Content Placeholder 2">
+            <a:extLst>
+              <a:ext uri="{FF2B5EF4-FFF2-40B4-BE49-F238E27FC236}">
+                <a16:creationId xmlns:a16="http://schemas.microsoft.com/office/drawing/2014/main" id="{90C36CF5-35F6-7683-E969-73033189FB70}"/>
+              </a:ext>
+            </a:extLst>
+          </p:cNvPr>
+          <p:cNvSpPr>
+            <a:spLocks noGrp="1"/>
+          </p:cNvSpPr>
+          <p:nvPr>
+            <p:ph idx="1"/>
+          </p:nvPr>
+        </p:nvSpPr>
+        <p:spPr/>
+        <p:txBody>
+          <a:bodyPr/>
+          <a:lstStyle/>
+          <a:p>
+            <a:endParaRPr lang="en-US" dirty="0"/>
+          </a:p>
+        </p:txBody>
+      </p:sp>
       <p:pic>
         <p:nvPicPr>
-          <p:cNvPr id="7" name="Picture 6">
-            <a:extLst>
-              <a:ext uri="{FF2B5EF4-FFF2-40B4-BE49-F238E27FC236}">
-                <a16:creationId xmlns:a16="http://schemas.microsoft.com/office/drawing/2014/main" id="{11B8F54D-D854-063D-48E0-5BF85A402F40}"/>
+          <p:cNvPr id="11" name="Picture 10">
+            <a:extLst>
+              <a:ext uri="{FF2B5EF4-FFF2-40B4-BE49-F238E27FC236}">
+                <a16:creationId xmlns:a16="http://schemas.microsoft.com/office/drawing/2014/main" id="{F96F4006-B815-AF60-A4C3-097F022B6D0D}"/>
               </a:ext>
             </a:extLst>
           </p:cNvPr>
@@ -7566,8 +6998,8 @@
         </p:blipFill>
         <p:spPr>
           <a:xfrm>
-            <a:off x="6706217" y="365125"/>
-            <a:ext cx="5485783" cy="6176963"/>
+            <a:off x="235594" y="2576945"/>
+            <a:ext cx="5945824" cy="3338946"/>
           </a:xfrm>
           <a:prstGeom prst="rect">
             <a:avLst/>
@@ -7609,6 +7041,469 @@
           <p:cNvPr id="2" name="Title 1">
             <a:extLst>
               <a:ext uri="{FF2B5EF4-FFF2-40B4-BE49-F238E27FC236}">
+                <a16:creationId xmlns:a16="http://schemas.microsoft.com/office/drawing/2014/main" id="{2473313D-9410-7606-DB19-CE63EE0B4B09}"/>
+              </a:ext>
+            </a:extLst>
+          </p:cNvPr>
+          <p:cNvSpPr>
+            <a:spLocks noGrp="1"/>
+          </p:cNvSpPr>
+          <p:nvPr>
+            <p:ph type="title"/>
+          </p:nvPr>
+        </p:nvSpPr>
+        <p:spPr/>
+        <p:txBody>
+          <a:bodyPr/>
+          <a:lstStyle/>
+          <a:p>
+            <a:endParaRPr lang="en-US"/>
+          </a:p>
+        </p:txBody>
+      </p:sp>
+      <p:sp>
+        <p:nvSpPr>
+          <p:cNvPr id="3" name="Content Placeholder 2">
+            <a:extLst>
+              <a:ext uri="{FF2B5EF4-FFF2-40B4-BE49-F238E27FC236}">
+                <a16:creationId xmlns:a16="http://schemas.microsoft.com/office/drawing/2014/main" id="{2F30C77D-E59B-5D9E-C679-3B98F968634F}"/>
+              </a:ext>
+            </a:extLst>
+          </p:cNvPr>
+          <p:cNvSpPr>
+            <a:spLocks noGrp="1"/>
+          </p:cNvSpPr>
+          <p:nvPr>
+            <p:ph idx="1"/>
+          </p:nvPr>
+        </p:nvSpPr>
+        <p:spPr/>
+        <p:txBody>
+          <a:bodyPr/>
+          <a:lstStyle/>
+          <a:p>
+            <a:endParaRPr lang="en-US"/>
+          </a:p>
+        </p:txBody>
+      </p:sp>
+    </p:spTree>
+    <p:extLst>
+      <p:ext uri="{BB962C8B-B14F-4D97-AF65-F5344CB8AC3E}">
+        <p14:creationId xmlns:p14="http://schemas.microsoft.com/office/powerpoint/2010/main" val="787473245"/>
+      </p:ext>
+    </p:extLst>
+  </p:cSld>
+  <p:clrMapOvr>
+    <a:masterClrMapping/>
+  </p:clrMapOvr>
+</p:sld>
+</file>
+
+<file path=ppt/slides/slide31.xml><?xml version="1.0" encoding="utf-8"?>
+<p:sld xmlns:a="http://schemas.openxmlformats.org/drawingml/2006/main" xmlns:r="http://schemas.openxmlformats.org/officeDocument/2006/relationships" xmlns:p="http://schemas.openxmlformats.org/presentationml/2006/main">
+  <p:cSld>
+    <p:spTree>
+      <p:nvGrpSpPr>
+        <p:cNvPr id="1" name=""/>
+        <p:cNvGrpSpPr/>
+        <p:nvPr/>
+      </p:nvGrpSpPr>
+      <p:grpSpPr>
+        <a:xfrm>
+          <a:off x="0" y="0"/>
+          <a:ext cx="0" cy="0"/>
+          <a:chOff x="0" y="0"/>
+          <a:chExt cx="0" cy="0"/>
+        </a:xfrm>
+      </p:grpSpPr>
+      <p:sp>
+        <p:nvSpPr>
+          <p:cNvPr id="2" name="Title 1">
+            <a:extLst>
+              <a:ext uri="{FF2B5EF4-FFF2-40B4-BE49-F238E27FC236}">
+                <a16:creationId xmlns:a16="http://schemas.microsoft.com/office/drawing/2014/main" id="{17F016EE-8CCC-98C7-EBF4-3DD8648C6038}"/>
+              </a:ext>
+            </a:extLst>
+          </p:cNvPr>
+          <p:cNvSpPr>
+            <a:spLocks noGrp="1"/>
+          </p:cNvSpPr>
+          <p:nvPr>
+            <p:ph type="title"/>
+          </p:nvPr>
+        </p:nvSpPr>
+        <p:spPr/>
+        <p:txBody>
+          <a:bodyPr/>
+          <a:lstStyle/>
+          <a:p>
+            <a:endParaRPr lang="en-US"/>
+          </a:p>
+        </p:txBody>
+      </p:sp>
+      <p:sp>
+        <p:nvSpPr>
+          <p:cNvPr id="3" name="Content Placeholder 2">
+            <a:extLst>
+              <a:ext uri="{FF2B5EF4-FFF2-40B4-BE49-F238E27FC236}">
+                <a16:creationId xmlns:a16="http://schemas.microsoft.com/office/drawing/2014/main" id="{FCEEF53E-840B-45A6-AEE4-B33A69894A7B}"/>
+              </a:ext>
+            </a:extLst>
+          </p:cNvPr>
+          <p:cNvSpPr>
+            <a:spLocks noGrp="1"/>
+          </p:cNvSpPr>
+          <p:nvPr>
+            <p:ph idx="1"/>
+          </p:nvPr>
+        </p:nvSpPr>
+        <p:spPr/>
+        <p:txBody>
+          <a:bodyPr/>
+          <a:lstStyle/>
+          <a:p>
+            <a:endParaRPr lang="en-US"/>
+          </a:p>
+        </p:txBody>
+      </p:sp>
+    </p:spTree>
+    <p:extLst>
+      <p:ext uri="{BB962C8B-B14F-4D97-AF65-F5344CB8AC3E}">
+        <p14:creationId xmlns:p14="http://schemas.microsoft.com/office/powerpoint/2010/main" val="612133903"/>
+      </p:ext>
+    </p:extLst>
+  </p:cSld>
+  <p:clrMapOvr>
+    <a:masterClrMapping/>
+  </p:clrMapOvr>
+</p:sld>
+</file>
+
+<file path=ppt/slides/slide32.xml><?xml version="1.0" encoding="utf-8"?>
+<p:sld xmlns:a="http://schemas.openxmlformats.org/drawingml/2006/main" xmlns:r="http://schemas.openxmlformats.org/officeDocument/2006/relationships" xmlns:p="http://schemas.openxmlformats.org/presentationml/2006/main">
+  <p:cSld>
+    <p:spTree>
+      <p:nvGrpSpPr>
+        <p:cNvPr id="1" name=""/>
+        <p:cNvGrpSpPr/>
+        <p:nvPr/>
+      </p:nvGrpSpPr>
+      <p:grpSpPr>
+        <a:xfrm>
+          <a:off x="0" y="0"/>
+          <a:ext cx="0" cy="0"/>
+          <a:chOff x="0" y="0"/>
+          <a:chExt cx="0" cy="0"/>
+        </a:xfrm>
+      </p:grpSpPr>
+      <p:sp>
+        <p:nvSpPr>
+          <p:cNvPr id="2" name="Title 1">
+            <a:extLst>
+              <a:ext uri="{FF2B5EF4-FFF2-40B4-BE49-F238E27FC236}">
+                <a16:creationId xmlns:a16="http://schemas.microsoft.com/office/drawing/2014/main" id="{6555FD4B-716A-8585-F669-ED515BE77843}"/>
+              </a:ext>
+            </a:extLst>
+          </p:cNvPr>
+          <p:cNvSpPr>
+            <a:spLocks noGrp="1"/>
+          </p:cNvSpPr>
+          <p:nvPr>
+            <p:ph type="title"/>
+          </p:nvPr>
+        </p:nvSpPr>
+        <p:spPr/>
+        <p:txBody>
+          <a:bodyPr/>
+          <a:lstStyle/>
+          <a:p>
+            <a:r>
+              <a:rPr lang="en-US" dirty="0"/>
+              <a:t>Bayesian length weight diagnostic plots</a:t>
+            </a:r>
+          </a:p>
+        </p:txBody>
+      </p:sp>
+      <p:sp>
+        <p:nvSpPr>
+          <p:cNvPr id="3" name="Content Placeholder 2">
+            <a:extLst>
+              <a:ext uri="{FF2B5EF4-FFF2-40B4-BE49-F238E27FC236}">
+                <a16:creationId xmlns:a16="http://schemas.microsoft.com/office/drawing/2014/main" id="{43F7D47F-8C8E-E942-FC4A-B62B138417C1}"/>
+              </a:ext>
+            </a:extLst>
+          </p:cNvPr>
+          <p:cNvSpPr>
+            <a:spLocks noGrp="1"/>
+          </p:cNvSpPr>
+          <p:nvPr>
+            <p:ph idx="1"/>
+          </p:nvPr>
+        </p:nvSpPr>
+        <p:spPr/>
+        <p:txBody>
+          <a:bodyPr/>
+          <a:lstStyle/>
+          <a:p>
+            <a:endParaRPr lang="en-US"/>
+          </a:p>
+        </p:txBody>
+      </p:sp>
+    </p:spTree>
+    <p:extLst>
+      <p:ext uri="{BB962C8B-B14F-4D97-AF65-F5344CB8AC3E}">
+        <p14:creationId xmlns:p14="http://schemas.microsoft.com/office/powerpoint/2010/main" val="3446152002"/>
+      </p:ext>
+    </p:extLst>
+  </p:cSld>
+  <p:clrMapOvr>
+    <a:masterClrMapping/>
+  </p:clrMapOvr>
+</p:sld>
+</file>
+
+<file path=ppt/slides/slide33.xml><?xml version="1.0" encoding="utf-8"?>
+<p:sld xmlns:a="http://schemas.openxmlformats.org/drawingml/2006/main" xmlns:r="http://schemas.openxmlformats.org/officeDocument/2006/relationships" xmlns:p="http://schemas.openxmlformats.org/presentationml/2006/main">
+  <p:cSld>
+    <p:spTree>
+      <p:nvGrpSpPr>
+        <p:cNvPr id="1" name=""/>
+        <p:cNvGrpSpPr/>
+        <p:nvPr/>
+      </p:nvGrpSpPr>
+      <p:grpSpPr>
+        <a:xfrm>
+          <a:off x="0" y="0"/>
+          <a:ext cx="0" cy="0"/>
+          <a:chOff x="0" y="0"/>
+          <a:chExt cx="0" cy="0"/>
+        </a:xfrm>
+      </p:grpSpPr>
+      <p:sp>
+        <p:nvSpPr>
+          <p:cNvPr id="2" name="Title 1">
+            <a:extLst>
+              <a:ext uri="{FF2B5EF4-FFF2-40B4-BE49-F238E27FC236}">
+                <a16:creationId xmlns:a16="http://schemas.microsoft.com/office/drawing/2014/main" id="{64477608-1C72-5E9F-823C-10FA913192F1}"/>
+              </a:ext>
+            </a:extLst>
+          </p:cNvPr>
+          <p:cNvSpPr>
+            <a:spLocks noGrp="1"/>
+          </p:cNvSpPr>
+          <p:nvPr>
+            <p:ph type="title"/>
+          </p:nvPr>
+        </p:nvSpPr>
+        <p:spPr/>
+        <p:txBody>
+          <a:bodyPr/>
+          <a:lstStyle/>
+          <a:p>
+            <a:endParaRPr lang="en-US" dirty="0"/>
+          </a:p>
+        </p:txBody>
+      </p:sp>
+      <p:sp>
+        <p:nvSpPr>
+          <p:cNvPr id="3" name="Content Placeholder 2">
+            <a:extLst>
+              <a:ext uri="{FF2B5EF4-FFF2-40B4-BE49-F238E27FC236}">
+                <a16:creationId xmlns:a16="http://schemas.microsoft.com/office/drawing/2014/main" id="{544801D6-7DE0-58BB-F6B8-4666BC42FB03}"/>
+              </a:ext>
+            </a:extLst>
+          </p:cNvPr>
+          <p:cNvSpPr>
+            <a:spLocks noGrp="1"/>
+          </p:cNvSpPr>
+          <p:nvPr>
+            <p:ph idx="1"/>
+          </p:nvPr>
+        </p:nvSpPr>
+        <p:spPr/>
+        <p:txBody>
+          <a:bodyPr/>
+          <a:lstStyle/>
+          <a:p>
+            <a:endParaRPr lang="en-US"/>
+          </a:p>
+        </p:txBody>
+      </p:sp>
+      <p:pic>
+        <p:nvPicPr>
+          <p:cNvPr id="5" name="Picture 4">
+            <a:extLst>
+              <a:ext uri="{FF2B5EF4-FFF2-40B4-BE49-F238E27FC236}">
+                <a16:creationId xmlns:a16="http://schemas.microsoft.com/office/drawing/2014/main" id="{770792CB-DE3C-D67D-AAA4-B0DCA3555CED}"/>
+              </a:ext>
+            </a:extLst>
+          </p:cNvPr>
+          <p:cNvPicPr>
+            <a:picLocks noChangeAspect="1"/>
+          </p:cNvPicPr>
+          <p:nvPr/>
+        </p:nvPicPr>
+        <p:blipFill>
+          <a:blip r:embed="rId2"/>
+          <a:stretch>
+            <a:fillRect/>
+          </a:stretch>
+        </p:blipFill>
+        <p:spPr>
+          <a:xfrm>
+            <a:off x="1573161" y="1825625"/>
+            <a:ext cx="8799871" cy="4744414"/>
+          </a:xfrm>
+          <a:prstGeom prst="rect">
+            <a:avLst/>
+          </a:prstGeom>
+        </p:spPr>
+      </p:pic>
+    </p:spTree>
+    <p:extLst>
+      <p:ext uri="{BB962C8B-B14F-4D97-AF65-F5344CB8AC3E}">
+        <p14:creationId xmlns:p14="http://schemas.microsoft.com/office/powerpoint/2010/main" val="3702729453"/>
+      </p:ext>
+    </p:extLst>
+  </p:cSld>
+  <p:clrMapOvr>
+    <a:masterClrMapping/>
+  </p:clrMapOvr>
+</p:sld>
+</file>
+
+<file path=ppt/slides/slide34.xml><?xml version="1.0" encoding="utf-8"?>
+<p:sld xmlns:a="http://schemas.openxmlformats.org/drawingml/2006/main" xmlns:r="http://schemas.openxmlformats.org/officeDocument/2006/relationships" xmlns:p="http://schemas.openxmlformats.org/presentationml/2006/main">
+  <p:cSld>
+    <p:spTree>
+      <p:nvGrpSpPr>
+        <p:cNvPr id="1" name=""/>
+        <p:cNvGrpSpPr/>
+        <p:nvPr/>
+      </p:nvGrpSpPr>
+      <p:grpSpPr>
+        <a:xfrm>
+          <a:off x="0" y="0"/>
+          <a:ext cx="0" cy="0"/>
+          <a:chOff x="0" y="0"/>
+          <a:chExt cx="0" cy="0"/>
+        </a:xfrm>
+      </p:grpSpPr>
+      <p:sp>
+        <p:nvSpPr>
+          <p:cNvPr id="2" name="Title 1">
+            <a:extLst>
+              <a:ext uri="{FF2B5EF4-FFF2-40B4-BE49-F238E27FC236}">
+                <a16:creationId xmlns:a16="http://schemas.microsoft.com/office/drawing/2014/main" id="{E5DA7936-CD51-60B3-C438-8309BFB0537D}"/>
+              </a:ext>
+            </a:extLst>
+          </p:cNvPr>
+          <p:cNvSpPr>
+            <a:spLocks noGrp="1"/>
+          </p:cNvSpPr>
+          <p:nvPr>
+            <p:ph type="title"/>
+          </p:nvPr>
+        </p:nvSpPr>
+        <p:spPr/>
+        <p:txBody>
+          <a:bodyPr/>
+          <a:lstStyle/>
+          <a:p>
+            <a:endParaRPr lang="en-US"/>
+          </a:p>
+        </p:txBody>
+      </p:sp>
+      <p:sp>
+        <p:nvSpPr>
+          <p:cNvPr id="3" name="Content Placeholder 2">
+            <a:extLst>
+              <a:ext uri="{FF2B5EF4-FFF2-40B4-BE49-F238E27FC236}">
+                <a16:creationId xmlns:a16="http://schemas.microsoft.com/office/drawing/2014/main" id="{25FC91EE-F35D-6863-5C80-C0CDB72A7FCC}"/>
+              </a:ext>
+            </a:extLst>
+          </p:cNvPr>
+          <p:cNvSpPr>
+            <a:spLocks noGrp="1"/>
+          </p:cNvSpPr>
+          <p:nvPr>
+            <p:ph idx="1"/>
+          </p:nvPr>
+        </p:nvSpPr>
+        <p:spPr/>
+        <p:txBody>
+          <a:bodyPr/>
+          <a:lstStyle/>
+          <a:p>
+            <a:endParaRPr lang="en-US"/>
+          </a:p>
+        </p:txBody>
+      </p:sp>
+      <p:pic>
+        <p:nvPicPr>
+          <p:cNvPr id="5" name="Picture 4">
+            <a:extLst>
+              <a:ext uri="{FF2B5EF4-FFF2-40B4-BE49-F238E27FC236}">
+                <a16:creationId xmlns:a16="http://schemas.microsoft.com/office/drawing/2014/main" id="{0138E8CD-F2C8-6FB0-55E8-CC35AA46A7F0}"/>
+              </a:ext>
+            </a:extLst>
+          </p:cNvPr>
+          <p:cNvPicPr>
+            <a:picLocks noChangeAspect="1"/>
+          </p:cNvPicPr>
+          <p:nvPr/>
+        </p:nvPicPr>
+        <p:blipFill>
+          <a:blip r:embed="rId2"/>
+          <a:stretch>
+            <a:fillRect/>
+          </a:stretch>
+        </p:blipFill>
+        <p:spPr>
+          <a:xfrm>
+            <a:off x="0" y="142366"/>
+            <a:ext cx="12192000" cy="6573267"/>
+          </a:xfrm>
+          <a:prstGeom prst="rect">
+            <a:avLst/>
+          </a:prstGeom>
+        </p:spPr>
+      </p:pic>
+    </p:spTree>
+    <p:extLst>
+      <p:ext uri="{BB962C8B-B14F-4D97-AF65-F5344CB8AC3E}">
+        <p14:creationId xmlns:p14="http://schemas.microsoft.com/office/powerpoint/2010/main" val="381996913"/>
+      </p:ext>
+    </p:extLst>
+  </p:cSld>
+  <p:clrMapOvr>
+    <a:masterClrMapping/>
+  </p:clrMapOvr>
+</p:sld>
+</file>
+
+<file path=ppt/slides/slide35.xml><?xml version="1.0" encoding="utf-8"?>
+<p:sld xmlns:a="http://schemas.openxmlformats.org/drawingml/2006/main" xmlns:r="http://schemas.openxmlformats.org/officeDocument/2006/relationships" xmlns:p="http://schemas.openxmlformats.org/presentationml/2006/main">
+  <p:cSld>
+    <p:spTree>
+      <p:nvGrpSpPr>
+        <p:cNvPr id="1" name=""/>
+        <p:cNvGrpSpPr/>
+        <p:nvPr/>
+      </p:nvGrpSpPr>
+      <p:grpSpPr>
+        <a:xfrm>
+          <a:off x="0" y="0"/>
+          <a:ext cx="0" cy="0"/>
+          <a:chOff x="0" y="0"/>
+          <a:chExt cx="0" cy="0"/>
+        </a:xfrm>
+      </p:grpSpPr>
+      <p:sp>
+        <p:nvSpPr>
+          <p:cNvPr id="2" name="Title 1">
+            <a:extLst>
+              <a:ext uri="{FF2B5EF4-FFF2-40B4-BE49-F238E27FC236}">
                 <a16:creationId xmlns:a16="http://schemas.microsoft.com/office/drawing/2014/main" id="{0600E158-5373-FD1E-8616-70CE1E235D18}"/>
               </a:ext>
             </a:extLst>
@@ -7697,7 +7592,7 @@
 </p:sld>
 </file>
 
-<file path=ppt/slides/slide31.xml><?xml version="1.0" encoding="utf-8"?>
+<file path=ppt/slides/slide36.xml><?xml version="1.0" encoding="utf-8"?>
 <p:sld xmlns:a="http://schemas.openxmlformats.org/drawingml/2006/main" xmlns:r="http://schemas.openxmlformats.org/officeDocument/2006/relationships" xmlns:p="http://schemas.openxmlformats.org/presentationml/2006/main">
   <p:cSld>
     <p:spTree>
@@ -7777,440 +7672,7 @@
 </p:sld>
 </file>
 
-<file path=ppt/slides/slide32.xml><?xml version="1.0" encoding="utf-8"?>
-<p:sld xmlns:a="http://schemas.openxmlformats.org/drawingml/2006/main" xmlns:r="http://schemas.openxmlformats.org/officeDocument/2006/relationships" xmlns:p="http://schemas.openxmlformats.org/presentationml/2006/main">
-  <p:cSld>
-    <p:spTree>
-      <p:nvGrpSpPr>
-        <p:cNvPr id="1" name=""/>
-        <p:cNvGrpSpPr/>
-        <p:nvPr/>
-      </p:nvGrpSpPr>
-      <p:grpSpPr>
-        <a:xfrm>
-          <a:off x="0" y="0"/>
-          <a:ext cx="0" cy="0"/>
-          <a:chOff x="0" y="0"/>
-          <a:chExt cx="0" cy="0"/>
-        </a:xfrm>
-      </p:grpSpPr>
-      <p:sp>
-        <p:nvSpPr>
-          <p:cNvPr id="2" name="Title 1">
-            <a:extLst>
-              <a:ext uri="{FF2B5EF4-FFF2-40B4-BE49-F238E27FC236}">
-                <a16:creationId xmlns:a16="http://schemas.microsoft.com/office/drawing/2014/main" id="{22D39B4A-DFD8-2A37-025C-017682E10703}"/>
-              </a:ext>
-            </a:extLst>
-          </p:cNvPr>
-          <p:cNvSpPr>
-            <a:spLocks noGrp="1"/>
-          </p:cNvSpPr>
-          <p:nvPr>
-            <p:ph type="title"/>
-          </p:nvPr>
-        </p:nvSpPr>
-        <p:spPr/>
-        <p:txBody>
-          <a:bodyPr/>
-          <a:lstStyle/>
-          <a:p>
-            <a:r>
-              <a:rPr lang="en-US" dirty="0"/>
-              <a:t>Bayesian posteriors of body condition and env variables </a:t>
-            </a:r>
-          </a:p>
-        </p:txBody>
-      </p:sp>
-      <p:pic>
-        <p:nvPicPr>
-          <p:cNvPr id="5" name="Picture 4">
-            <a:extLst>
-              <a:ext uri="{FF2B5EF4-FFF2-40B4-BE49-F238E27FC236}">
-                <a16:creationId xmlns:a16="http://schemas.microsoft.com/office/drawing/2014/main" id="{BEEB644F-E7B6-7E7F-7E85-2CB13FFB14D9}"/>
-              </a:ext>
-            </a:extLst>
-          </p:cNvPr>
-          <p:cNvPicPr>
-            <a:picLocks noChangeAspect="1"/>
-          </p:cNvPicPr>
-          <p:nvPr/>
-        </p:nvPicPr>
-        <p:blipFill>
-          <a:blip r:embed="rId2"/>
-          <a:stretch>
-            <a:fillRect/>
-          </a:stretch>
-        </p:blipFill>
-        <p:spPr>
-          <a:xfrm>
-            <a:off x="1740310" y="1956159"/>
-            <a:ext cx="8134435" cy="4385647"/>
-          </a:xfrm>
-          <a:prstGeom prst="rect">
-            <a:avLst/>
-          </a:prstGeom>
-        </p:spPr>
-      </p:pic>
-    </p:spTree>
-    <p:extLst>
-      <p:ext uri="{BB962C8B-B14F-4D97-AF65-F5344CB8AC3E}">
-        <p14:creationId xmlns:p14="http://schemas.microsoft.com/office/powerpoint/2010/main" val="904291774"/>
-      </p:ext>
-    </p:extLst>
-  </p:cSld>
-  <p:clrMapOvr>
-    <a:masterClrMapping/>
-  </p:clrMapOvr>
-</p:sld>
-</file>
-
-<file path=ppt/slides/slide33.xml><?xml version="1.0" encoding="utf-8"?>
-<p:sld xmlns:a="http://schemas.openxmlformats.org/drawingml/2006/main" xmlns:r="http://schemas.openxmlformats.org/officeDocument/2006/relationships" xmlns:p="http://schemas.openxmlformats.org/presentationml/2006/main">
-  <p:cSld>
-    <p:spTree>
-      <p:nvGrpSpPr>
-        <p:cNvPr id="1" name=""/>
-        <p:cNvGrpSpPr/>
-        <p:nvPr/>
-      </p:nvGrpSpPr>
-      <p:grpSpPr>
-        <a:xfrm>
-          <a:off x="0" y="0"/>
-          <a:ext cx="0" cy="0"/>
-          <a:chOff x="0" y="0"/>
-          <a:chExt cx="0" cy="0"/>
-        </a:xfrm>
-      </p:grpSpPr>
-      <p:sp>
-        <p:nvSpPr>
-          <p:cNvPr id="2" name="Title 1">
-            <a:extLst>
-              <a:ext uri="{FF2B5EF4-FFF2-40B4-BE49-F238E27FC236}">
-                <a16:creationId xmlns:a16="http://schemas.microsoft.com/office/drawing/2014/main" id="{A14176ED-83BB-5EBE-45EE-66C373F833EB}"/>
-              </a:ext>
-            </a:extLst>
-          </p:cNvPr>
-          <p:cNvSpPr>
-            <a:spLocks noGrp="1"/>
-          </p:cNvSpPr>
-          <p:nvPr>
-            <p:ph type="title"/>
-          </p:nvPr>
-        </p:nvSpPr>
-        <p:spPr/>
-        <p:txBody>
-          <a:bodyPr/>
-          <a:lstStyle/>
-          <a:p>
-            <a:r>
-              <a:rPr lang="en-US" dirty="0"/>
-              <a:t>Mean age with current year indices</a:t>
-            </a:r>
-          </a:p>
-        </p:txBody>
-      </p:sp>
-      <p:sp>
-        <p:nvSpPr>
-          <p:cNvPr id="3" name="Content Placeholder 2">
-            <a:extLst>
-              <a:ext uri="{FF2B5EF4-FFF2-40B4-BE49-F238E27FC236}">
-                <a16:creationId xmlns:a16="http://schemas.microsoft.com/office/drawing/2014/main" id="{829EB13B-F738-1BF9-3D36-5754F3F98042}"/>
-              </a:ext>
-            </a:extLst>
-          </p:cNvPr>
-          <p:cNvSpPr>
-            <a:spLocks noGrp="1"/>
-          </p:cNvSpPr>
-          <p:nvPr>
-            <p:ph idx="1"/>
-          </p:nvPr>
-        </p:nvSpPr>
-        <p:spPr/>
-        <p:txBody>
-          <a:bodyPr/>
-          <a:lstStyle/>
-          <a:p>
-            <a:endParaRPr lang="en-US" dirty="0"/>
-          </a:p>
-        </p:txBody>
-      </p:sp>
-      <p:pic>
-        <p:nvPicPr>
-          <p:cNvPr id="9" name="Picture 8">
-            <a:extLst>
-              <a:ext uri="{FF2B5EF4-FFF2-40B4-BE49-F238E27FC236}">
-                <a16:creationId xmlns:a16="http://schemas.microsoft.com/office/drawing/2014/main" id="{916C3896-E5E6-42D6-D95E-72F05C892DAB}"/>
-              </a:ext>
-            </a:extLst>
-          </p:cNvPr>
-          <p:cNvPicPr>
-            <a:picLocks noChangeAspect="1"/>
-          </p:cNvPicPr>
-          <p:nvPr/>
-        </p:nvPicPr>
-        <p:blipFill>
-          <a:blip r:embed="rId2"/>
-          <a:stretch>
-            <a:fillRect/>
-          </a:stretch>
-        </p:blipFill>
-        <p:spPr>
-          <a:xfrm>
-            <a:off x="838200" y="1690688"/>
-            <a:ext cx="9979742" cy="4230736"/>
-          </a:xfrm>
-          <a:prstGeom prst="rect">
-            <a:avLst/>
-          </a:prstGeom>
-        </p:spPr>
-      </p:pic>
-    </p:spTree>
-    <p:extLst>
-      <p:ext uri="{BB962C8B-B14F-4D97-AF65-F5344CB8AC3E}">
-        <p14:creationId xmlns:p14="http://schemas.microsoft.com/office/powerpoint/2010/main" val="3486998307"/>
-      </p:ext>
-    </p:extLst>
-  </p:cSld>
-  <p:clrMapOvr>
-    <a:masterClrMapping/>
-  </p:clrMapOvr>
-</p:sld>
-</file>
-
-<file path=ppt/slides/slide34.xml><?xml version="1.0" encoding="utf-8"?>
-<p:sld xmlns:a="http://schemas.openxmlformats.org/drawingml/2006/main" xmlns:r="http://schemas.openxmlformats.org/officeDocument/2006/relationships" xmlns:p="http://schemas.openxmlformats.org/presentationml/2006/main">
-  <p:cSld>
-    <p:spTree>
-      <p:nvGrpSpPr>
-        <p:cNvPr id="1" name="">
-          <a:extLst>
-            <a:ext uri="{FF2B5EF4-FFF2-40B4-BE49-F238E27FC236}">
-              <a16:creationId xmlns:a16="http://schemas.microsoft.com/office/drawing/2014/main" id="{8667B489-3000-3E4E-7AD8-0C23ED9A8F02}"/>
-            </a:ext>
-          </a:extLst>
-        </p:cNvPr>
-        <p:cNvGrpSpPr/>
-        <p:nvPr/>
-      </p:nvGrpSpPr>
-      <p:grpSpPr>
-        <a:xfrm>
-          <a:off x="0" y="0"/>
-          <a:ext cx="0" cy="0"/>
-          <a:chOff x="0" y="0"/>
-          <a:chExt cx="0" cy="0"/>
-        </a:xfrm>
-      </p:grpSpPr>
-      <p:sp>
-        <p:nvSpPr>
-          <p:cNvPr id="2" name="Title 1">
-            <a:extLst>
-              <a:ext uri="{FF2B5EF4-FFF2-40B4-BE49-F238E27FC236}">
-                <a16:creationId xmlns:a16="http://schemas.microsoft.com/office/drawing/2014/main" id="{B25D383B-EA5B-A45E-8E01-56CAA461C84E}"/>
-              </a:ext>
-            </a:extLst>
-          </p:cNvPr>
-          <p:cNvSpPr>
-            <a:spLocks noGrp="1"/>
-          </p:cNvSpPr>
-          <p:nvPr>
-            <p:ph type="title"/>
-          </p:nvPr>
-        </p:nvSpPr>
-        <p:spPr/>
-        <p:txBody>
-          <a:bodyPr/>
-          <a:lstStyle/>
-          <a:p>
-            <a:r>
-              <a:rPr lang="en-US" dirty="0"/>
-              <a:t>Mean age with prior year indices</a:t>
-            </a:r>
-          </a:p>
-        </p:txBody>
-      </p:sp>
-      <p:sp>
-        <p:nvSpPr>
-          <p:cNvPr id="3" name="Content Placeholder 2">
-            <a:extLst>
-              <a:ext uri="{FF2B5EF4-FFF2-40B4-BE49-F238E27FC236}">
-                <a16:creationId xmlns:a16="http://schemas.microsoft.com/office/drawing/2014/main" id="{280727A3-90A8-9006-BA43-2301FC0E7E67}"/>
-              </a:ext>
-            </a:extLst>
-          </p:cNvPr>
-          <p:cNvSpPr>
-            <a:spLocks noGrp="1"/>
-          </p:cNvSpPr>
-          <p:nvPr>
-            <p:ph idx="1"/>
-          </p:nvPr>
-        </p:nvSpPr>
-        <p:spPr/>
-        <p:txBody>
-          <a:bodyPr/>
-          <a:lstStyle/>
-          <a:p>
-            <a:endParaRPr lang="en-US" dirty="0"/>
-          </a:p>
-        </p:txBody>
-      </p:sp>
-      <p:pic>
-        <p:nvPicPr>
-          <p:cNvPr id="5" name="Picture 4">
-            <a:extLst>
-              <a:ext uri="{FF2B5EF4-FFF2-40B4-BE49-F238E27FC236}">
-                <a16:creationId xmlns:a16="http://schemas.microsoft.com/office/drawing/2014/main" id="{4C3765D7-419C-3226-8297-BE7635CEC052}"/>
-              </a:ext>
-            </a:extLst>
-          </p:cNvPr>
-          <p:cNvPicPr>
-            <a:picLocks noChangeAspect="1"/>
-          </p:cNvPicPr>
-          <p:nvPr/>
-        </p:nvPicPr>
-        <p:blipFill>
-          <a:blip r:embed="rId2"/>
-          <a:stretch>
-            <a:fillRect/>
-          </a:stretch>
-        </p:blipFill>
-        <p:spPr>
-          <a:xfrm>
-            <a:off x="919316" y="1690688"/>
-            <a:ext cx="10353368" cy="4389128"/>
-          </a:xfrm>
-          <a:prstGeom prst="rect">
-            <a:avLst/>
-          </a:prstGeom>
-        </p:spPr>
-      </p:pic>
-    </p:spTree>
-    <p:extLst>
-      <p:ext uri="{BB962C8B-B14F-4D97-AF65-F5344CB8AC3E}">
-        <p14:creationId xmlns:p14="http://schemas.microsoft.com/office/powerpoint/2010/main" val="3787528480"/>
-      </p:ext>
-    </p:extLst>
-  </p:cSld>
-  <p:clrMapOvr>
-    <a:masterClrMapping/>
-  </p:clrMapOvr>
-</p:sld>
-</file>
-
-<file path=ppt/slides/slide35.xml><?xml version="1.0" encoding="utf-8"?>
-<p:sld xmlns:a="http://schemas.openxmlformats.org/drawingml/2006/main" xmlns:r="http://schemas.openxmlformats.org/officeDocument/2006/relationships" xmlns:p="http://schemas.openxmlformats.org/presentationml/2006/main">
-  <p:cSld>
-    <p:spTree>
-      <p:nvGrpSpPr>
-        <p:cNvPr id="1" name=""/>
-        <p:cNvGrpSpPr/>
-        <p:nvPr/>
-      </p:nvGrpSpPr>
-      <p:grpSpPr>
-        <a:xfrm>
-          <a:off x="0" y="0"/>
-          <a:ext cx="0" cy="0"/>
-          <a:chOff x="0" y="0"/>
-          <a:chExt cx="0" cy="0"/>
-        </a:xfrm>
-      </p:grpSpPr>
-      <p:sp>
-        <p:nvSpPr>
-          <p:cNvPr id="2" name="Title 1">
-            <a:extLst>
-              <a:ext uri="{FF2B5EF4-FFF2-40B4-BE49-F238E27FC236}">
-                <a16:creationId xmlns:a16="http://schemas.microsoft.com/office/drawing/2014/main" id="{FE80FAB3-006B-FCE3-0AA0-7D0F1E898456}"/>
-              </a:ext>
-            </a:extLst>
-          </p:cNvPr>
-          <p:cNvSpPr>
-            <a:spLocks noGrp="1"/>
-          </p:cNvSpPr>
-          <p:nvPr>
-            <p:ph type="title"/>
-          </p:nvPr>
-        </p:nvSpPr>
-        <p:spPr/>
-        <p:txBody>
-          <a:bodyPr/>
-          <a:lstStyle/>
-          <a:p>
-            <a:r>
-              <a:rPr lang="en-US" dirty="0"/>
-              <a:t>Annual mean age and env indices</a:t>
-            </a:r>
-          </a:p>
-        </p:txBody>
-      </p:sp>
-      <p:sp>
-        <p:nvSpPr>
-          <p:cNvPr id="3" name="Content Placeholder 2">
-            <a:extLst>
-              <a:ext uri="{FF2B5EF4-FFF2-40B4-BE49-F238E27FC236}">
-                <a16:creationId xmlns:a16="http://schemas.microsoft.com/office/drawing/2014/main" id="{3B4E46CB-52A0-6D48-D67E-4C44D9CEC27A}"/>
-              </a:ext>
-            </a:extLst>
-          </p:cNvPr>
-          <p:cNvSpPr>
-            <a:spLocks noGrp="1"/>
-          </p:cNvSpPr>
-          <p:nvPr>
-            <p:ph idx="1"/>
-          </p:nvPr>
-        </p:nvSpPr>
-        <p:spPr/>
-        <p:txBody>
-          <a:bodyPr/>
-          <a:lstStyle/>
-          <a:p>
-            <a:endParaRPr lang="en-US"/>
-          </a:p>
-        </p:txBody>
-      </p:sp>
-      <p:pic>
-        <p:nvPicPr>
-          <p:cNvPr id="5" name="Picture 4">
-            <a:extLst>
-              <a:ext uri="{FF2B5EF4-FFF2-40B4-BE49-F238E27FC236}">
-                <a16:creationId xmlns:a16="http://schemas.microsoft.com/office/drawing/2014/main" id="{A3537B1E-AF09-F142-C8D1-B92FCB742BFC}"/>
-              </a:ext>
-            </a:extLst>
-          </p:cNvPr>
-          <p:cNvPicPr>
-            <a:picLocks noChangeAspect="1"/>
-          </p:cNvPicPr>
-          <p:nvPr/>
-        </p:nvPicPr>
-        <p:blipFill>
-          <a:blip r:embed="rId2"/>
-          <a:stretch>
-            <a:fillRect/>
-          </a:stretch>
-        </p:blipFill>
-        <p:spPr>
-          <a:xfrm>
-            <a:off x="2899791" y="1690688"/>
-            <a:ext cx="5956238" cy="4921505"/>
-          </a:xfrm>
-          <a:prstGeom prst="rect">
-            <a:avLst/>
-          </a:prstGeom>
-        </p:spPr>
-      </p:pic>
-    </p:spTree>
-    <p:extLst>
-      <p:ext uri="{BB962C8B-B14F-4D97-AF65-F5344CB8AC3E}">
-        <p14:creationId xmlns:p14="http://schemas.microsoft.com/office/powerpoint/2010/main" val="691954332"/>
-      </p:ext>
-    </p:extLst>
-  </p:cSld>
-  <p:clrMapOvr>
-    <a:masterClrMapping/>
-  </p:clrMapOvr>
-</p:sld>
-</file>
-
-<file path=ppt/slides/slide36.xml><?xml version="1.0" encoding="utf-8"?>
+<file path=ppt/slides/slide37.xml><?xml version="1.0" encoding="utf-8"?>
 <p:sld xmlns:a="http://schemas.openxmlformats.org/drawingml/2006/main" xmlns:r="http://schemas.openxmlformats.org/officeDocument/2006/relationships" xmlns:p="http://schemas.openxmlformats.org/presentationml/2006/main">
   <p:cSld>
     <p:spTree>
@@ -8320,7 +7782,7 @@
 </p:sld>
 </file>
 
-<file path=ppt/slides/slide37.xml><?xml version="1.0" encoding="utf-8"?>
+<file path=ppt/slides/slide38.xml><?xml version="1.0" encoding="utf-8"?>
 <p:sld xmlns:a="http://schemas.openxmlformats.org/drawingml/2006/main" xmlns:r="http://schemas.openxmlformats.org/officeDocument/2006/relationships" xmlns:p="http://schemas.openxmlformats.org/presentationml/2006/main">
   <p:cSld>
     <p:spTree>
@@ -8358,7 +7820,10 @@
           <a:bodyPr/>
           <a:lstStyle/>
           <a:p>
-            <a:endParaRPr lang="en-US"/>
+            <a:r>
+              <a:rPr lang="en-US" dirty="0"/>
+              <a:t>Rebecca’s plot</a:t>
+            </a:r>
           </a:p>
         </p:txBody>
       </p:sp>
@@ -8416,7 +7881,7 @@
         </p:blipFill>
         <p:spPr bwMode="auto">
           <a:xfrm>
-            <a:off x="3143941" y="365125"/>
+            <a:off x="5552844" y="365125"/>
             <a:ext cx="5904118" cy="5904118"/>
           </a:xfrm>
           <a:prstGeom prst="rect">
@@ -8460,7 +7925,7 @@
 </p:sld>
 </file>
 
-<file path=ppt/slides/slide38.xml><?xml version="1.0" encoding="utf-8"?>
+<file path=ppt/slides/slide39.xml><?xml version="1.0" encoding="utf-8"?>
 <p:sld xmlns:a="http://schemas.openxmlformats.org/drawingml/2006/main" xmlns:r="http://schemas.openxmlformats.org/officeDocument/2006/relationships" xmlns:p="http://schemas.openxmlformats.org/presentationml/2006/main">
   <p:cSld>
     <p:spTree>
@@ -8570,12 +8035,18 @@
 </p:sld>
 </file>
 
-<file path=ppt/slides/slide39.xml><?xml version="1.0" encoding="utf-8"?>
+<file path=ppt/slides/slide4.xml><?xml version="1.0" encoding="utf-8"?>
 <p:sld xmlns:a="http://schemas.openxmlformats.org/drawingml/2006/main" xmlns:r="http://schemas.openxmlformats.org/officeDocument/2006/relationships" xmlns:p="http://schemas.openxmlformats.org/presentationml/2006/main">
   <p:cSld>
     <p:spTree>
       <p:nvGrpSpPr>
-        <p:cNvPr id="1" name=""/>
+        <p:cNvPr id="1" name="">
+          <a:extLst>
+            <a:ext uri="{FF2B5EF4-FFF2-40B4-BE49-F238E27FC236}">
+              <a16:creationId xmlns:a16="http://schemas.microsoft.com/office/drawing/2014/main" id="{57D9EE95-29B0-444E-862E-C8EBBB46B271}"/>
+            </a:ext>
+          </a:extLst>
+        </p:cNvPr>
         <p:cNvGrpSpPr/>
         <p:nvPr/>
       </p:nvGrpSpPr>
@@ -8592,7 +8063,7 @@
           <p:cNvPr id="2" name="Title 1">
             <a:extLst>
               <a:ext uri="{FF2B5EF4-FFF2-40B4-BE49-F238E27FC236}">
-                <a16:creationId xmlns:a16="http://schemas.microsoft.com/office/drawing/2014/main" id="{1B4F899D-7172-97F0-AEB9-22F23528885F}"/>
+                <a16:creationId xmlns:a16="http://schemas.microsoft.com/office/drawing/2014/main" id="{5A38A37B-F21C-0AC6-B0A5-6E00BCBF6BD7}"/>
               </a:ext>
             </a:extLst>
           </p:cNvPr>
@@ -8608,7 +8079,10 @@
           <a:bodyPr/>
           <a:lstStyle/>
           <a:p>
-            <a:endParaRPr lang="en-US"/>
+            <a:r>
+              <a:rPr lang="en-US" dirty="0"/>
+              <a:t>Env data plots</a:t>
+            </a:r>
           </a:p>
         </p:txBody>
       </p:sp>
@@ -8617,7 +8091,7 @@
           <p:cNvPr id="3" name="Content Placeholder 2">
             <a:extLst>
               <a:ext uri="{FF2B5EF4-FFF2-40B4-BE49-F238E27FC236}">
-                <a16:creationId xmlns:a16="http://schemas.microsoft.com/office/drawing/2014/main" id="{97E331C5-05F1-E46E-09B0-CA9D5E9401D7}"/>
+                <a16:creationId xmlns:a16="http://schemas.microsoft.com/office/drawing/2014/main" id="{C590EC79-74F3-B72A-D66F-4C024AA7B044}"/>
               </a:ext>
             </a:extLst>
           </p:cNvPr>
@@ -8633,96 +8107,19 @@
           <a:bodyPr/>
           <a:lstStyle/>
           <a:p>
-            <a:endParaRPr lang="en-US"/>
-          </a:p>
-        </p:txBody>
-      </p:sp>
-    </p:spTree>
-    <p:extLst>
-      <p:ext uri="{BB962C8B-B14F-4D97-AF65-F5344CB8AC3E}">
-        <p14:creationId xmlns:p14="http://schemas.microsoft.com/office/powerpoint/2010/main" val="387653240"/>
-      </p:ext>
-    </p:extLst>
-  </p:cSld>
-  <p:clrMapOvr>
-    <a:masterClrMapping/>
-  </p:clrMapOvr>
-</p:sld>
-</file>
-
-<file path=ppt/slides/slide4.xml><?xml version="1.0" encoding="utf-8"?>
-<p:sld xmlns:a="http://schemas.openxmlformats.org/drawingml/2006/main" xmlns:r="http://schemas.openxmlformats.org/officeDocument/2006/relationships" xmlns:p="http://schemas.openxmlformats.org/presentationml/2006/main">
-  <p:cSld>
-    <p:spTree>
-      <p:nvGrpSpPr>
-        <p:cNvPr id="1" name=""/>
-        <p:cNvGrpSpPr/>
-        <p:nvPr/>
-      </p:nvGrpSpPr>
-      <p:grpSpPr>
-        <a:xfrm>
-          <a:off x="0" y="0"/>
-          <a:ext cx="0" cy="0"/>
-          <a:chOff x="0" y="0"/>
-          <a:chExt cx="0" cy="0"/>
-        </a:xfrm>
-      </p:grpSpPr>
-      <p:sp>
-        <p:nvSpPr>
-          <p:cNvPr id="2" name="Title 1">
-            <a:extLst>
-              <a:ext uri="{FF2B5EF4-FFF2-40B4-BE49-F238E27FC236}">
-                <a16:creationId xmlns:a16="http://schemas.microsoft.com/office/drawing/2014/main" id="{5BF49668-4576-C6DF-0E14-E677DDA299AE}"/>
-              </a:ext>
-            </a:extLst>
-          </p:cNvPr>
-          <p:cNvSpPr>
-            <a:spLocks noGrp="1"/>
-          </p:cNvSpPr>
-          <p:nvPr>
-            <p:ph type="title"/>
-          </p:nvPr>
-        </p:nvSpPr>
-        <p:spPr/>
-        <p:txBody>
-          <a:bodyPr/>
-          <a:lstStyle/>
-          <a:p>
-            <a:endParaRPr lang="en-US"/>
-          </a:p>
-        </p:txBody>
-      </p:sp>
-      <p:sp>
-        <p:nvSpPr>
-          <p:cNvPr id="3" name="Content Placeholder 2">
-            <a:extLst>
-              <a:ext uri="{FF2B5EF4-FFF2-40B4-BE49-F238E27FC236}">
-                <a16:creationId xmlns:a16="http://schemas.microsoft.com/office/drawing/2014/main" id="{0038DD60-D576-6D5C-4A8E-D5A4CCE231CC}"/>
-              </a:ext>
-            </a:extLst>
-          </p:cNvPr>
-          <p:cNvSpPr>
-            <a:spLocks noGrp="1"/>
-          </p:cNvSpPr>
-          <p:nvPr>
-            <p:ph idx="1"/>
-          </p:nvPr>
-        </p:nvSpPr>
-        <p:spPr/>
-        <p:txBody>
-          <a:bodyPr/>
-          <a:lstStyle/>
-          <a:p>
-            <a:endParaRPr lang="en-US"/>
+            <a:r>
+              <a:rPr lang="en-US" dirty="0"/>
+              <a:t>PDO and NPGO</a:t>
+            </a:r>
           </a:p>
         </p:txBody>
       </p:sp>
       <p:pic>
         <p:nvPicPr>
-          <p:cNvPr id="5" name="Picture 4">
-            <a:extLst>
-              <a:ext uri="{FF2B5EF4-FFF2-40B4-BE49-F238E27FC236}">
-                <a16:creationId xmlns:a16="http://schemas.microsoft.com/office/drawing/2014/main" id="{CDC8FF70-39B4-8EB8-824D-7EA79DCE3D4A}"/>
+          <p:cNvPr id="6" name="Picture 5">
+            <a:extLst>
+              <a:ext uri="{FF2B5EF4-FFF2-40B4-BE49-F238E27FC236}">
+                <a16:creationId xmlns:a16="http://schemas.microsoft.com/office/drawing/2014/main" id="{A7C554CA-1D2A-2FEB-F754-E7533274B0F3}"/>
               </a:ext>
             </a:extLst>
           </p:cNvPr>
@@ -8739,8 +8136,38 @@
         </p:blipFill>
         <p:spPr>
           <a:xfrm>
-            <a:off x="0" y="681037"/>
-            <a:ext cx="12192000" cy="6109557"/>
+            <a:off x="266020" y="2844799"/>
+            <a:ext cx="5720956" cy="3648076"/>
+          </a:xfrm>
+          <a:prstGeom prst="rect">
+            <a:avLst/>
+          </a:prstGeom>
+        </p:spPr>
+      </p:pic>
+      <p:pic>
+        <p:nvPicPr>
+          <p:cNvPr id="9" name="Picture 8">
+            <a:extLst>
+              <a:ext uri="{FF2B5EF4-FFF2-40B4-BE49-F238E27FC236}">
+                <a16:creationId xmlns:a16="http://schemas.microsoft.com/office/drawing/2014/main" id="{71B2C31F-292E-17AE-72DF-3499C1211FDD}"/>
+              </a:ext>
+            </a:extLst>
+          </p:cNvPr>
+          <p:cNvPicPr>
+            <a:picLocks noChangeAspect="1"/>
+          </p:cNvPicPr>
+          <p:nvPr/>
+        </p:nvPicPr>
+        <p:blipFill>
+          <a:blip r:embed="rId3"/>
+          <a:stretch>
+            <a:fillRect/>
+          </a:stretch>
+        </p:blipFill>
+        <p:spPr>
+          <a:xfrm>
+            <a:off x="6205026" y="2844799"/>
+            <a:ext cx="5720956" cy="3648076"/>
           </a:xfrm>
           <a:prstGeom prst="rect">
             <a:avLst/>
@@ -8750,7 +8177,7 @@
     </p:spTree>
     <p:extLst>
       <p:ext uri="{BB962C8B-B14F-4D97-AF65-F5344CB8AC3E}">
-        <p14:creationId xmlns:p14="http://schemas.microsoft.com/office/powerpoint/2010/main" val="1850076112"/>
+        <p14:creationId xmlns:p14="http://schemas.microsoft.com/office/powerpoint/2010/main" val="1379679899"/>
       </p:ext>
     </p:extLst>
   </p:cSld>
@@ -8782,6 +8209,86 @@
           <p:cNvPr id="2" name="Title 1">
             <a:extLst>
               <a:ext uri="{FF2B5EF4-FFF2-40B4-BE49-F238E27FC236}">
+                <a16:creationId xmlns:a16="http://schemas.microsoft.com/office/drawing/2014/main" id="{1B4F899D-7172-97F0-AEB9-22F23528885F}"/>
+              </a:ext>
+            </a:extLst>
+          </p:cNvPr>
+          <p:cNvSpPr>
+            <a:spLocks noGrp="1"/>
+          </p:cNvSpPr>
+          <p:nvPr>
+            <p:ph type="title"/>
+          </p:nvPr>
+        </p:nvSpPr>
+        <p:spPr/>
+        <p:txBody>
+          <a:bodyPr/>
+          <a:lstStyle/>
+          <a:p>
+            <a:endParaRPr lang="en-US"/>
+          </a:p>
+        </p:txBody>
+      </p:sp>
+      <p:sp>
+        <p:nvSpPr>
+          <p:cNvPr id="3" name="Content Placeholder 2">
+            <a:extLst>
+              <a:ext uri="{FF2B5EF4-FFF2-40B4-BE49-F238E27FC236}">
+                <a16:creationId xmlns:a16="http://schemas.microsoft.com/office/drawing/2014/main" id="{97E331C5-05F1-E46E-09B0-CA9D5E9401D7}"/>
+              </a:ext>
+            </a:extLst>
+          </p:cNvPr>
+          <p:cNvSpPr>
+            <a:spLocks noGrp="1"/>
+          </p:cNvSpPr>
+          <p:nvPr>
+            <p:ph idx="1"/>
+          </p:nvPr>
+        </p:nvSpPr>
+        <p:spPr/>
+        <p:txBody>
+          <a:bodyPr/>
+          <a:lstStyle/>
+          <a:p>
+            <a:endParaRPr lang="en-US"/>
+          </a:p>
+        </p:txBody>
+      </p:sp>
+    </p:spTree>
+    <p:extLst>
+      <p:ext uri="{BB962C8B-B14F-4D97-AF65-F5344CB8AC3E}">
+        <p14:creationId xmlns:p14="http://schemas.microsoft.com/office/powerpoint/2010/main" val="387653240"/>
+      </p:ext>
+    </p:extLst>
+  </p:cSld>
+  <p:clrMapOvr>
+    <a:masterClrMapping/>
+  </p:clrMapOvr>
+</p:sld>
+</file>
+
+<file path=ppt/slides/slide41.xml><?xml version="1.0" encoding="utf-8"?>
+<p:sld xmlns:a="http://schemas.openxmlformats.org/drawingml/2006/main" xmlns:r="http://schemas.openxmlformats.org/officeDocument/2006/relationships" xmlns:p="http://schemas.openxmlformats.org/presentationml/2006/main">
+  <p:cSld>
+    <p:spTree>
+      <p:nvGrpSpPr>
+        <p:cNvPr id="1" name=""/>
+        <p:cNvGrpSpPr/>
+        <p:nvPr/>
+      </p:nvGrpSpPr>
+      <p:grpSpPr>
+        <a:xfrm>
+          <a:off x="0" y="0"/>
+          <a:ext cx="0" cy="0"/>
+          <a:chOff x="0" y="0"/>
+          <a:chExt cx="0" cy="0"/>
+        </a:xfrm>
+      </p:grpSpPr>
+      <p:sp>
+        <p:nvSpPr>
+          <p:cNvPr id="2" name="Title 1">
+            <a:extLst>
+              <a:ext uri="{FF2B5EF4-FFF2-40B4-BE49-F238E27FC236}">
                 <a16:creationId xmlns:a16="http://schemas.microsoft.com/office/drawing/2014/main" id="{8283EF55-EB33-0AE4-2506-D01C6C8E560B}"/>
               </a:ext>
             </a:extLst>
@@ -8845,7 +8352,13 @@
   <p:cSld>
     <p:spTree>
       <p:nvGrpSpPr>
-        <p:cNvPr id="1" name=""/>
+        <p:cNvPr id="1" name="">
+          <a:extLst>
+            <a:ext uri="{FF2B5EF4-FFF2-40B4-BE49-F238E27FC236}">
+              <a16:creationId xmlns:a16="http://schemas.microsoft.com/office/drawing/2014/main" id="{EEB1E60C-20CB-5321-9E5D-94DB47F4B15A}"/>
+            </a:ext>
+          </a:extLst>
+        </p:cNvPr>
         <p:cNvGrpSpPr/>
         <p:nvPr/>
       </p:nvGrpSpPr>
@@ -8862,7 +8375,7 @@
           <p:cNvPr id="2" name="Title 1">
             <a:extLst>
               <a:ext uri="{FF2B5EF4-FFF2-40B4-BE49-F238E27FC236}">
-                <a16:creationId xmlns:a16="http://schemas.microsoft.com/office/drawing/2014/main" id="{030618CE-196B-4610-700F-D477A87C3BDC}"/>
+                <a16:creationId xmlns:a16="http://schemas.microsoft.com/office/drawing/2014/main" id="{5DA238A7-6716-640F-7161-17FECB540E5B}"/>
               </a:ext>
             </a:extLst>
           </p:cNvPr>
@@ -8878,7 +8391,10 @@
           <a:bodyPr/>
           <a:lstStyle/>
           <a:p>
-            <a:endParaRPr lang="en-US"/>
+            <a:r>
+              <a:rPr lang="en-US" dirty="0"/>
+              <a:t>Env data plots</a:t>
+            </a:r>
           </a:p>
         </p:txBody>
       </p:sp>
@@ -8887,7 +8403,7 @@
           <p:cNvPr id="3" name="Content Placeholder 2">
             <a:extLst>
               <a:ext uri="{FF2B5EF4-FFF2-40B4-BE49-F238E27FC236}">
-                <a16:creationId xmlns:a16="http://schemas.microsoft.com/office/drawing/2014/main" id="{EC9D7370-E9A1-8842-4C68-AE1912AD72DE}"/>
+                <a16:creationId xmlns:a16="http://schemas.microsoft.com/office/drawing/2014/main" id="{67A12D8A-C703-C271-5D8B-3E9500284D34}"/>
               </a:ext>
             </a:extLst>
           </p:cNvPr>
@@ -8903,7 +8419,10 @@
           <a:bodyPr/>
           <a:lstStyle/>
           <a:p>
-            <a:endParaRPr lang="en-US"/>
+            <a:r>
+              <a:rPr lang="en-US" dirty="0"/>
+              <a:t>ONI and NPI</a:t>
+            </a:r>
           </a:p>
         </p:txBody>
       </p:sp>
@@ -8912,7 +8431,7 @@
           <p:cNvPr id="5" name="Picture 4">
             <a:extLst>
               <a:ext uri="{FF2B5EF4-FFF2-40B4-BE49-F238E27FC236}">
-                <a16:creationId xmlns:a16="http://schemas.microsoft.com/office/drawing/2014/main" id="{73DD1275-1BF9-4D34-7873-EB4F0709D301}"/>
+                <a16:creationId xmlns:a16="http://schemas.microsoft.com/office/drawing/2014/main" id="{FFF0C0A6-3A03-C95A-6F50-3F21A82E042A}"/>
               </a:ext>
             </a:extLst>
           </p:cNvPr>
@@ -8929,8 +8448,38 @@
         </p:blipFill>
         <p:spPr>
           <a:xfrm>
-            <a:off x="1080387" y="585390"/>
-            <a:ext cx="10031225" cy="5687219"/>
+            <a:off x="148331" y="2993641"/>
+            <a:ext cx="5766286" cy="3676982"/>
+          </a:xfrm>
+          <a:prstGeom prst="rect">
+            <a:avLst/>
+          </a:prstGeom>
+        </p:spPr>
+      </p:pic>
+      <p:pic>
+        <p:nvPicPr>
+          <p:cNvPr id="8" name="Picture 7">
+            <a:extLst>
+              <a:ext uri="{FF2B5EF4-FFF2-40B4-BE49-F238E27FC236}">
+                <a16:creationId xmlns:a16="http://schemas.microsoft.com/office/drawing/2014/main" id="{156E5472-1329-A51D-495D-A204CDAE34F7}"/>
+              </a:ext>
+            </a:extLst>
+          </p:cNvPr>
+          <p:cNvPicPr>
+            <a:picLocks noChangeAspect="1"/>
+          </p:cNvPicPr>
+          <p:nvPr/>
+        </p:nvPicPr>
+        <p:blipFill>
+          <a:blip r:embed="rId3"/>
+          <a:stretch>
+            <a:fillRect/>
+          </a:stretch>
+        </p:blipFill>
+        <p:spPr>
+          <a:xfrm>
+            <a:off x="6096000" y="2993641"/>
+            <a:ext cx="5766287" cy="3676982"/>
           </a:xfrm>
           <a:prstGeom prst="rect">
             <a:avLst/>
@@ -8940,7 +8489,7 @@
     </p:spTree>
     <p:extLst>
       <p:ext uri="{BB962C8B-B14F-4D97-AF65-F5344CB8AC3E}">
-        <p14:creationId xmlns:p14="http://schemas.microsoft.com/office/powerpoint/2010/main" val="3555751872"/>
+        <p14:creationId xmlns:p14="http://schemas.microsoft.com/office/powerpoint/2010/main" val="1212096548"/>
       </p:ext>
     </p:extLst>
   </p:cSld>
@@ -8955,7 +8504,13 @@
   <p:cSld>
     <p:spTree>
       <p:nvGrpSpPr>
-        <p:cNvPr id="1" name=""/>
+        <p:cNvPr id="1" name="">
+          <a:extLst>
+            <a:ext uri="{FF2B5EF4-FFF2-40B4-BE49-F238E27FC236}">
+              <a16:creationId xmlns:a16="http://schemas.microsoft.com/office/drawing/2014/main" id="{CFBE8C97-63DB-8E2C-6558-7AAEE8C4986C}"/>
+            </a:ext>
+          </a:extLst>
+        </p:cNvPr>
         <p:cNvGrpSpPr/>
         <p:nvPr/>
       </p:nvGrpSpPr>
@@ -8972,7 +8527,7 @@
           <p:cNvPr id="2" name="Title 1">
             <a:extLst>
               <a:ext uri="{FF2B5EF4-FFF2-40B4-BE49-F238E27FC236}">
-                <a16:creationId xmlns:a16="http://schemas.microsoft.com/office/drawing/2014/main" id="{4B11B8AB-1F09-9E8D-CC80-1D6BAA2B7BDC}"/>
+                <a16:creationId xmlns:a16="http://schemas.microsoft.com/office/drawing/2014/main" id="{012D260B-519A-A60D-482B-91274A411653}"/>
               </a:ext>
             </a:extLst>
           </p:cNvPr>
@@ -8988,41 +8543,19 @@
           <a:bodyPr/>
           <a:lstStyle/>
           <a:p>
-            <a:endParaRPr lang="en-US"/>
-          </a:p>
-        </p:txBody>
-      </p:sp>
-      <p:sp>
-        <p:nvSpPr>
-          <p:cNvPr id="3" name="Content Placeholder 2">
-            <a:extLst>
-              <a:ext uri="{FF2B5EF4-FFF2-40B4-BE49-F238E27FC236}">
-                <a16:creationId xmlns:a16="http://schemas.microsoft.com/office/drawing/2014/main" id="{07808ECD-3202-74EA-8CD6-8746BA379108}"/>
-              </a:ext>
-            </a:extLst>
-          </p:cNvPr>
-          <p:cNvSpPr>
-            <a:spLocks noGrp="1"/>
-          </p:cNvSpPr>
-          <p:nvPr>
-            <p:ph idx="1"/>
-          </p:nvPr>
-        </p:nvSpPr>
-        <p:spPr/>
-        <p:txBody>
-          <a:bodyPr/>
-          <a:lstStyle/>
-          <a:p>
-            <a:endParaRPr lang="en-US"/>
+            <a:r>
+              <a:rPr lang="en-US" dirty="0"/>
+              <a:t>Env data plots</a:t>
+            </a:r>
           </a:p>
         </p:txBody>
       </p:sp>
       <p:pic>
         <p:nvPicPr>
-          <p:cNvPr id="5" name="Picture 4">
-            <a:extLst>
-              <a:ext uri="{FF2B5EF4-FFF2-40B4-BE49-F238E27FC236}">
-                <a16:creationId xmlns:a16="http://schemas.microsoft.com/office/drawing/2014/main" id="{761C76D7-E6A3-3DFA-6BF8-C6973F9D1B3C}"/>
+          <p:cNvPr id="6" name="Picture 5">
+            <a:extLst>
+              <a:ext uri="{FF2B5EF4-FFF2-40B4-BE49-F238E27FC236}">
+                <a16:creationId xmlns:a16="http://schemas.microsoft.com/office/drawing/2014/main" id="{B87F4BCF-CA3A-6797-CA45-7DDBC5198F4C}"/>
               </a:ext>
             </a:extLst>
           </p:cNvPr>
@@ -9039,8 +8572,8 @@
         </p:blipFill>
         <p:spPr>
           <a:xfrm>
-            <a:off x="1089914" y="542522"/>
-            <a:ext cx="10012172" cy="5772956"/>
+            <a:off x="1791775" y="1663701"/>
+            <a:ext cx="7493033" cy="4829174"/>
           </a:xfrm>
           <a:prstGeom prst="rect">
             <a:avLst/>
@@ -9050,7 +8583,7 @@
     </p:spTree>
     <p:extLst>
       <p:ext uri="{BB962C8B-B14F-4D97-AF65-F5344CB8AC3E}">
-        <p14:creationId xmlns:p14="http://schemas.microsoft.com/office/powerpoint/2010/main" val="1245400549"/>
+        <p14:creationId xmlns:p14="http://schemas.microsoft.com/office/powerpoint/2010/main" val="256147235"/>
       </p:ext>
     </p:extLst>
   </p:cSld>
@@ -9065,7 +8598,13 @@
   <p:cSld>
     <p:spTree>
       <p:nvGrpSpPr>
-        <p:cNvPr id="1" name=""/>
+        <p:cNvPr id="1" name="">
+          <a:extLst>
+            <a:ext uri="{FF2B5EF4-FFF2-40B4-BE49-F238E27FC236}">
+              <a16:creationId xmlns:a16="http://schemas.microsoft.com/office/drawing/2014/main" id="{29EDBE0E-8B45-0534-A6DA-36146FB8DA67}"/>
+            </a:ext>
+          </a:extLst>
+        </p:cNvPr>
         <p:cNvGrpSpPr/>
         <p:nvPr/>
       </p:nvGrpSpPr>
@@ -9082,7 +8621,7 @@
           <p:cNvPr id="2" name="Title 1">
             <a:extLst>
               <a:ext uri="{FF2B5EF4-FFF2-40B4-BE49-F238E27FC236}">
-                <a16:creationId xmlns:a16="http://schemas.microsoft.com/office/drawing/2014/main" id="{63974EF5-9152-C1CB-5024-DF20EC0C92A0}"/>
+                <a16:creationId xmlns:a16="http://schemas.microsoft.com/office/drawing/2014/main" id="{989FA31F-982D-D5AE-8814-E40816E4167F}"/>
               </a:ext>
             </a:extLst>
           </p:cNvPr>
@@ -9100,7 +8639,7 @@
           <a:p>
             <a:r>
               <a:rPr lang="en-US" dirty="0"/>
-              <a:t>Annual median age with env covariates</a:t>
+              <a:t>All data</a:t>
             </a:r>
           </a:p>
         </p:txBody>
@@ -9110,7 +8649,7 @@
           <p:cNvPr id="3" name="Content Placeholder 2">
             <a:extLst>
               <a:ext uri="{FF2B5EF4-FFF2-40B4-BE49-F238E27FC236}">
-                <a16:creationId xmlns:a16="http://schemas.microsoft.com/office/drawing/2014/main" id="{F0069C7D-117B-E5CF-E117-185BC93578DC}"/>
+                <a16:creationId xmlns:a16="http://schemas.microsoft.com/office/drawing/2014/main" id="{456CA686-B73E-5491-1DF5-9CCFF773BA14}"/>
               </a:ext>
             </a:extLst>
           </p:cNvPr>
@@ -9132,10 +8671,10 @@
       </p:sp>
       <p:pic>
         <p:nvPicPr>
-          <p:cNvPr id="5" name="Picture 4">
-            <a:extLst>
-              <a:ext uri="{FF2B5EF4-FFF2-40B4-BE49-F238E27FC236}">
-                <a16:creationId xmlns:a16="http://schemas.microsoft.com/office/drawing/2014/main" id="{EF6163E0-F512-824F-9672-2DC2B199BDC4}"/>
+          <p:cNvPr id="8" name="Picture 7">
+            <a:extLst>
+              <a:ext uri="{FF2B5EF4-FFF2-40B4-BE49-F238E27FC236}">
+                <a16:creationId xmlns:a16="http://schemas.microsoft.com/office/drawing/2014/main" id="{89B8349C-3E71-C291-2C40-F1866F801B4B}"/>
               </a:ext>
             </a:extLst>
           </p:cNvPr>
@@ -9152,8 +8691,8 @@
         </p:blipFill>
         <p:spPr>
           <a:xfrm>
-            <a:off x="5717796" y="1120878"/>
-            <a:ext cx="5448300" cy="5448300"/>
+            <a:off x="1579417" y="1450109"/>
+            <a:ext cx="9595749" cy="5042766"/>
           </a:xfrm>
           <a:prstGeom prst="rect">
             <a:avLst/>
@@ -9163,7 +8702,7 @@
     </p:spTree>
     <p:extLst>
       <p:ext uri="{BB962C8B-B14F-4D97-AF65-F5344CB8AC3E}">
-        <p14:creationId xmlns:p14="http://schemas.microsoft.com/office/powerpoint/2010/main" val="4222444916"/>
+        <p14:creationId xmlns:p14="http://schemas.microsoft.com/office/powerpoint/2010/main" val="1921639036"/>
       </p:ext>
     </p:extLst>
   </p:cSld>
@@ -9178,7 +8717,13 @@
   <p:cSld>
     <p:spTree>
       <p:nvGrpSpPr>
-        <p:cNvPr id="1" name=""/>
+        <p:cNvPr id="1" name="">
+          <a:extLst>
+            <a:ext uri="{FF2B5EF4-FFF2-40B4-BE49-F238E27FC236}">
+              <a16:creationId xmlns:a16="http://schemas.microsoft.com/office/drawing/2014/main" id="{75DDABBD-215C-FE37-0AAF-544024657B4D}"/>
+            </a:ext>
+          </a:extLst>
+        </p:cNvPr>
         <p:cNvGrpSpPr/>
         <p:nvPr/>
       </p:nvGrpSpPr>
@@ -9195,7 +8740,7 @@
           <p:cNvPr id="2" name="Title 1">
             <a:extLst>
               <a:ext uri="{FF2B5EF4-FFF2-40B4-BE49-F238E27FC236}">
-                <a16:creationId xmlns:a16="http://schemas.microsoft.com/office/drawing/2014/main" id="{5B5204AC-FB7D-0970-F42A-67583A6AFFB6}"/>
+                <a16:creationId xmlns:a16="http://schemas.microsoft.com/office/drawing/2014/main" id="{20ACD09B-71F2-4CDA-48E6-991626E4A111}"/>
               </a:ext>
             </a:extLst>
           </p:cNvPr>
@@ -9213,7 +8758,7 @@
           <a:p>
             <a:r>
               <a:rPr lang="en-US" dirty="0"/>
-              <a:t>Explanation of findings</a:t>
+              <a:t>US data</a:t>
             </a:r>
           </a:p>
         </p:txBody>
@@ -9223,7 +8768,7 @@
           <p:cNvPr id="3" name="Content Placeholder 2">
             <a:extLst>
               <a:ext uri="{FF2B5EF4-FFF2-40B4-BE49-F238E27FC236}">
-                <a16:creationId xmlns:a16="http://schemas.microsoft.com/office/drawing/2014/main" id="{26EC6780-3C58-00CC-74AC-BFF12E0942F5}"/>
+                <a16:creationId xmlns:a16="http://schemas.microsoft.com/office/drawing/2014/main" id="{2E7A0296-F48B-C5C2-2F06-B58DBC21346B}"/>
               </a:ext>
             </a:extLst>
           </p:cNvPr>
@@ -9239,93 +8784,44 @@
           <a:bodyPr/>
           <a:lstStyle/>
           <a:p>
-            <a:r>
-              <a:rPr lang="en-US" dirty="0"/>
-              <a:t>PDO negative effects on body condition</a:t>
-            </a:r>
-          </a:p>
-          <a:p>
-            <a:r>
-              <a:rPr lang="en-US" dirty="0"/>
-              <a:t>PDO slight positive effects on mean age (+</a:t>
-            </a:r>
-            <a:r>
-              <a:rPr lang="en-US" dirty="0" err="1"/>
-              <a:t>ve</a:t>
-            </a:r>
-            <a:r>
-              <a:rPr lang="en-US" dirty="0"/>
-              <a:t> PDO = older </a:t>
-            </a:r>
-            <a:r>
-              <a:rPr lang="en-US" dirty="0" err="1"/>
-              <a:t>pop’n</a:t>
-            </a:r>
-            <a:r>
-              <a:rPr lang="en-US" dirty="0"/>
-              <a:t>)</a:t>
-            </a:r>
-          </a:p>
-          <a:p>
-            <a:r>
-              <a:rPr lang="en-US" dirty="0"/>
-              <a:t>NPGO negative effects on mean age (+</a:t>
-            </a:r>
-            <a:r>
-              <a:rPr lang="en-US" dirty="0" err="1"/>
-              <a:t>ve</a:t>
-            </a:r>
-            <a:r>
-              <a:rPr lang="en-US" dirty="0"/>
-              <a:t> NPGO = younger </a:t>
-            </a:r>
-            <a:r>
-              <a:rPr lang="en-US" dirty="0" err="1"/>
-              <a:t>pop’n</a:t>
-            </a:r>
-            <a:r>
-              <a:rPr lang="en-US" dirty="0"/>
-              <a:t>)</a:t>
-            </a:r>
-          </a:p>
-          <a:p>
-            <a:r>
-              <a:rPr lang="en-US" dirty="0"/>
-              <a:t>PDO and NPGO are independent orthogonal phases of EOF, but have been linked to be negatively correlated as of recent (1980)</a:t>
-            </a:r>
-          </a:p>
-          <a:p>
-            <a:r>
-              <a:rPr lang="en-US" dirty="0"/>
-              <a:t>Strong +</a:t>
-            </a:r>
-            <a:r>
-              <a:rPr lang="en-US" dirty="0" err="1"/>
-              <a:t>ve</a:t>
-            </a:r>
-            <a:r>
-              <a:rPr lang="en-US" dirty="0"/>
-              <a:t> NPGO could lead to greater productivity along CC thus increasing recruitment and lowering (</a:t>
-            </a:r>
-            <a:r>
-              <a:rPr lang="en-US" dirty="0" err="1"/>
-              <a:t>ie</a:t>
-            </a:r>
-            <a:r>
-              <a:rPr lang="en-US" dirty="0"/>
-              <a:t> younger) age class</a:t>
-            </a:r>
-          </a:p>
-          <a:p>
-            <a:pPr lvl="1"/>
-            <a:endParaRPr lang="en-US" dirty="0"/>
-          </a:p>
-        </p:txBody>
-      </p:sp>
+            <a:endParaRPr lang="en-US"/>
+          </a:p>
+        </p:txBody>
+      </p:sp>
+      <p:pic>
+        <p:nvPicPr>
+          <p:cNvPr id="5" name="Picture 4">
+            <a:extLst>
+              <a:ext uri="{FF2B5EF4-FFF2-40B4-BE49-F238E27FC236}">
+                <a16:creationId xmlns:a16="http://schemas.microsoft.com/office/drawing/2014/main" id="{76B044E2-5DC3-BBD6-04B4-EEC3D9F0AAC3}"/>
+              </a:ext>
+            </a:extLst>
+          </p:cNvPr>
+          <p:cNvPicPr>
+            <a:picLocks noChangeAspect="1"/>
+          </p:cNvPicPr>
+          <p:nvPr/>
+        </p:nvPicPr>
+        <p:blipFill>
+          <a:blip r:embed="rId2"/>
+          <a:stretch>
+            <a:fillRect/>
+          </a:stretch>
+        </p:blipFill>
+        <p:spPr>
+          <a:xfrm>
+            <a:off x="1145309" y="1399603"/>
+            <a:ext cx="9901382" cy="5203382"/>
+          </a:xfrm>
+          <a:prstGeom prst="rect">
+            <a:avLst/>
+          </a:prstGeom>
+        </p:spPr>
+      </p:pic>
     </p:spTree>
     <p:extLst>
       <p:ext uri="{BB962C8B-B14F-4D97-AF65-F5344CB8AC3E}">
-        <p14:creationId xmlns:p14="http://schemas.microsoft.com/office/powerpoint/2010/main" val="2123511324"/>
+        <p14:creationId xmlns:p14="http://schemas.microsoft.com/office/powerpoint/2010/main" val="1308273600"/>
       </p:ext>
     </p:extLst>
   </p:cSld>
@@ -9357,7 +8853,7 @@
           <p:cNvPr id="2" name="Title 1">
             <a:extLst>
               <a:ext uri="{FF2B5EF4-FFF2-40B4-BE49-F238E27FC236}">
-                <a16:creationId xmlns:a16="http://schemas.microsoft.com/office/drawing/2014/main" id="{14AF0C41-4BDC-C2E4-6A88-0FAA8A9A19C1}"/>
+                <a16:creationId xmlns:a16="http://schemas.microsoft.com/office/drawing/2014/main" id="{F1B1653F-35B4-FBE9-0B28-2017C45D6BA9}"/>
               </a:ext>
             </a:extLst>
           </p:cNvPr>
@@ -9375,7 +8871,7 @@
           <a:p>
             <a:r>
               <a:rPr lang="en-US" dirty="0"/>
-              <a:t>Just Canada data</a:t>
+              <a:t>Can data</a:t>
             </a:r>
           </a:p>
         </p:txBody>
@@ -9385,7 +8881,7 @@
           <p:cNvPr id="3" name="Content Placeholder 2">
             <a:extLst>
               <a:ext uri="{FF2B5EF4-FFF2-40B4-BE49-F238E27FC236}">
-                <a16:creationId xmlns:a16="http://schemas.microsoft.com/office/drawing/2014/main" id="{358B1119-DC78-09C3-7CBC-BEE59913D1E0}"/>
+                <a16:creationId xmlns:a16="http://schemas.microsoft.com/office/drawing/2014/main" id="{98A1EEDE-8532-2E5D-49DB-FAF617B6EFC6}"/>
               </a:ext>
             </a:extLst>
           </p:cNvPr>
@@ -9407,10 +8903,10 @@
       </p:sp>
       <p:pic>
         <p:nvPicPr>
-          <p:cNvPr id="5" name="Picture 4">
-            <a:extLst>
-              <a:ext uri="{FF2B5EF4-FFF2-40B4-BE49-F238E27FC236}">
-                <a16:creationId xmlns:a16="http://schemas.microsoft.com/office/drawing/2014/main" id="{0D2A1E25-CE59-3857-AA1F-BCEA4CE6FBF4}"/>
+          <p:cNvPr id="7" name="Picture 6">
+            <a:extLst>
+              <a:ext uri="{FF2B5EF4-FFF2-40B4-BE49-F238E27FC236}">
+                <a16:creationId xmlns:a16="http://schemas.microsoft.com/office/drawing/2014/main" id="{C8B2EDEE-60D4-186D-0710-668519A7E873}"/>
               </a:ext>
             </a:extLst>
           </p:cNvPr>
@@ -9420,15 +8916,15 @@
           <p:nvPr/>
         </p:nvPicPr>
         <p:blipFill>
-          <a:blip r:embed="rId3"/>
+          <a:blip r:embed="rId2"/>
           <a:stretch>
             <a:fillRect/>
           </a:stretch>
         </p:blipFill>
         <p:spPr>
           <a:xfrm>
-            <a:off x="1563329" y="1432688"/>
-            <a:ext cx="8400766" cy="5250479"/>
+            <a:off x="1690255" y="1546341"/>
+            <a:ext cx="8811490" cy="4630622"/>
           </a:xfrm>
           <a:prstGeom prst="rect">
             <a:avLst/>
@@ -9438,7 +8934,7 @@
     </p:spTree>
     <p:extLst>
       <p:ext uri="{BB962C8B-B14F-4D97-AF65-F5344CB8AC3E}">
-        <p14:creationId xmlns:p14="http://schemas.microsoft.com/office/powerpoint/2010/main" val="473488895"/>
+        <p14:creationId xmlns:p14="http://schemas.microsoft.com/office/powerpoint/2010/main" val="1479296786"/>
       </p:ext>
     </p:extLst>
   </p:cSld>

--- a/stock-specific/hake/output_plots_20260730.pptx
+++ b/stock-specific/hake/output_plots_20260730.pptx
@@ -5,50 +5,60 @@
     <p:sldMasterId id="2147483648" r:id="rId1"/>
   </p:sldMasterIdLst>
   <p:notesMasterIdLst>
-    <p:notesMasterId r:id="rId43"/>
+    <p:notesMasterId r:id="rId53"/>
   </p:notesMasterIdLst>
   <p:sldIdLst>
     <p:sldId id="256" r:id="rId2"/>
     <p:sldId id="263" r:id="rId3"/>
-    <p:sldId id="257" r:id="rId4"/>
-    <p:sldId id="308" r:id="rId5"/>
-    <p:sldId id="309" r:id="rId6"/>
-    <p:sldId id="310" r:id="rId7"/>
-    <p:sldId id="301" r:id="rId8"/>
-    <p:sldId id="304" r:id="rId9"/>
-    <p:sldId id="302" r:id="rId10"/>
-    <p:sldId id="313" r:id="rId11"/>
-    <p:sldId id="316" r:id="rId12"/>
-    <p:sldId id="306" r:id="rId13"/>
-    <p:sldId id="259" r:id="rId14"/>
-    <p:sldId id="322" r:id="rId15"/>
-    <p:sldId id="268" r:id="rId16"/>
-    <p:sldId id="325" r:id="rId17"/>
-    <p:sldId id="284" r:id="rId18"/>
-    <p:sldId id="293" r:id="rId19"/>
-    <p:sldId id="271" r:id="rId20"/>
-    <p:sldId id="267" r:id="rId21"/>
-    <p:sldId id="326" r:id="rId22"/>
-    <p:sldId id="323" r:id="rId23"/>
-    <p:sldId id="298" r:id="rId24"/>
-    <p:sldId id="269" r:id="rId25"/>
-    <p:sldId id="320" r:id="rId26"/>
-    <p:sldId id="321" r:id="rId27"/>
-    <p:sldId id="317" r:id="rId28"/>
-    <p:sldId id="318" r:id="rId29"/>
-    <p:sldId id="319" r:id="rId30"/>
-    <p:sldId id="270" r:id="rId31"/>
-    <p:sldId id="266" r:id="rId32"/>
-    <p:sldId id="287" r:id="rId33"/>
-    <p:sldId id="280" r:id="rId34"/>
-    <p:sldId id="281" r:id="rId35"/>
-    <p:sldId id="288" r:id="rId36"/>
-    <p:sldId id="289" r:id="rId37"/>
-    <p:sldId id="292" r:id="rId38"/>
-    <p:sldId id="294" r:id="rId39"/>
-    <p:sldId id="295" r:id="rId40"/>
-    <p:sldId id="296" r:id="rId41"/>
-    <p:sldId id="297" r:id="rId42"/>
+    <p:sldId id="308" r:id="rId4"/>
+    <p:sldId id="309" r:id="rId5"/>
+    <p:sldId id="310" r:id="rId6"/>
+    <p:sldId id="301" r:id="rId7"/>
+    <p:sldId id="304" r:id="rId8"/>
+    <p:sldId id="302" r:id="rId9"/>
+    <p:sldId id="313" r:id="rId10"/>
+    <p:sldId id="316" r:id="rId11"/>
+    <p:sldId id="306" r:id="rId12"/>
+    <p:sldId id="259" r:id="rId13"/>
+    <p:sldId id="328" r:id="rId14"/>
+    <p:sldId id="327" r:id="rId15"/>
+    <p:sldId id="322" r:id="rId16"/>
+    <p:sldId id="268" r:id="rId17"/>
+    <p:sldId id="325" r:id="rId18"/>
+    <p:sldId id="284" r:id="rId19"/>
+    <p:sldId id="293" r:id="rId20"/>
+    <p:sldId id="271" r:id="rId21"/>
+    <p:sldId id="329" r:id="rId22"/>
+    <p:sldId id="330" r:id="rId23"/>
+    <p:sldId id="331" r:id="rId24"/>
+    <p:sldId id="332" r:id="rId25"/>
+    <p:sldId id="333" r:id="rId26"/>
+    <p:sldId id="334" r:id="rId27"/>
+    <p:sldId id="335" r:id="rId28"/>
+    <p:sldId id="267" r:id="rId29"/>
+    <p:sldId id="326" r:id="rId30"/>
+    <p:sldId id="323" r:id="rId31"/>
+    <p:sldId id="298" r:id="rId32"/>
+    <p:sldId id="269" r:id="rId33"/>
+    <p:sldId id="320" r:id="rId34"/>
+    <p:sldId id="336" r:id="rId35"/>
+    <p:sldId id="321" r:id="rId36"/>
+    <p:sldId id="317" r:id="rId37"/>
+    <p:sldId id="318" r:id="rId38"/>
+    <p:sldId id="319" r:id="rId39"/>
+    <p:sldId id="270" r:id="rId40"/>
+    <p:sldId id="266" r:id="rId41"/>
+    <p:sldId id="257" r:id="rId42"/>
+    <p:sldId id="287" r:id="rId43"/>
+    <p:sldId id="280" r:id="rId44"/>
+    <p:sldId id="281" r:id="rId45"/>
+    <p:sldId id="288" r:id="rId46"/>
+    <p:sldId id="289" r:id="rId47"/>
+    <p:sldId id="292" r:id="rId48"/>
+    <p:sldId id="294" r:id="rId49"/>
+    <p:sldId id="295" r:id="rId50"/>
+    <p:sldId id="296" r:id="rId51"/>
+    <p:sldId id="297" r:id="rId52"/>
   </p:sldIdLst>
   <p:sldSz cx="12192000" cy="6858000"/>
   <p:notesSz cx="6858000" cy="9144000"/>
@@ -237,7 +247,7 @@
           <a:p>
             <a:fld id="{B1A585C4-8FDE-44AD-AB8B-4802EADEEE94}" type="datetimeFigureOut">
               <a:rPr lang="en-US" smtClean="0"/>
-              <a:t>9/28/2026</a:t>
+              <a:t>10/21/2026</a:t>
             </a:fld>
             <a:endParaRPr lang="en-US"/>
           </a:p>
@@ -593,7 +603,7 @@
           <a:p>
             <a:fld id="{BC9AF6F9-19A8-4B2B-96C4-42992BE88AC3}" type="slidenum">
               <a:rPr lang="en-US" smtClean="0"/>
-              <a:t>6</a:t>
+              <a:t>5</a:t>
             </a:fld>
             <a:endParaRPr lang="en-US"/>
           </a:p>
@@ -701,7 +711,7 @@
           <a:p>
             <a:fld id="{BC9AF6F9-19A8-4B2B-96C4-42992BE88AC3}" type="slidenum">
               <a:rPr lang="en-US" smtClean="0"/>
-              <a:t>10</a:t>
+              <a:t>9</a:t>
             </a:fld>
             <a:endParaRPr lang="en-US"/>
           </a:p>
@@ -809,7 +819,7 @@
           <a:p>
             <a:fld id="{BC9AF6F9-19A8-4B2B-96C4-42992BE88AC3}" type="slidenum">
               <a:rPr lang="en-US" smtClean="0"/>
-              <a:t>11</a:t>
+              <a:t>10</a:t>
             </a:fld>
             <a:endParaRPr lang="en-US"/>
           </a:p>
@@ -917,7 +927,7 @@
           <a:p>
             <a:fld id="{BC9AF6F9-19A8-4B2B-96C4-42992BE88AC3}" type="slidenum">
               <a:rPr lang="en-US" smtClean="0"/>
-              <a:t>14</a:t>
+              <a:t>15</a:t>
             </a:fld>
             <a:endParaRPr lang="en-US"/>
           </a:p>
@@ -1001,7 +1011,7 @@
           <a:p>
             <a:fld id="{BC9AF6F9-19A8-4B2B-96C4-42992BE88AC3}" type="slidenum">
               <a:rPr lang="en-US" smtClean="0"/>
-              <a:t>15</a:t>
+              <a:t>16</a:t>
             </a:fld>
             <a:endParaRPr lang="en-US"/>
           </a:p>
@@ -1100,7 +1110,7 @@
           <a:p>
             <a:fld id="{BC9AF6F9-19A8-4B2B-96C4-42992BE88AC3}" type="slidenum">
               <a:rPr lang="en-US" smtClean="0"/>
-              <a:t>20</a:t>
+              <a:t>28</a:t>
             </a:fld>
             <a:endParaRPr lang="en-US"/>
           </a:p>
@@ -1266,7 +1276,7 @@
           <a:p>
             <a:fld id="{0679C2E1-833F-46B1-9B12-C4DA11FEBF42}" type="datetimeFigureOut">
               <a:rPr lang="en-US" smtClean="0"/>
-              <a:t>9/28/2026</a:t>
+              <a:t>10/21/2026</a:t>
             </a:fld>
             <a:endParaRPr lang="en-US"/>
           </a:p>
@@ -1464,7 +1474,7 @@
           <a:p>
             <a:fld id="{0679C2E1-833F-46B1-9B12-C4DA11FEBF42}" type="datetimeFigureOut">
               <a:rPr lang="en-US" smtClean="0"/>
-              <a:t>9/28/2026</a:t>
+              <a:t>10/21/2026</a:t>
             </a:fld>
             <a:endParaRPr lang="en-US"/>
           </a:p>
@@ -1672,7 +1682,7 @@
           <a:p>
             <a:fld id="{0679C2E1-833F-46B1-9B12-C4DA11FEBF42}" type="datetimeFigureOut">
               <a:rPr lang="en-US" smtClean="0"/>
-              <a:t>9/28/2026</a:t>
+              <a:t>10/21/2026</a:t>
             </a:fld>
             <a:endParaRPr lang="en-US"/>
           </a:p>
@@ -1870,7 +1880,7 @@
           <a:p>
             <a:fld id="{0679C2E1-833F-46B1-9B12-C4DA11FEBF42}" type="datetimeFigureOut">
               <a:rPr lang="en-US" smtClean="0"/>
-              <a:t>9/28/2026</a:t>
+              <a:t>10/21/2026</a:t>
             </a:fld>
             <a:endParaRPr lang="en-US"/>
           </a:p>
@@ -2145,7 +2155,7 @@
           <a:p>
             <a:fld id="{0679C2E1-833F-46B1-9B12-C4DA11FEBF42}" type="datetimeFigureOut">
               <a:rPr lang="en-US" smtClean="0"/>
-              <a:t>9/28/2026</a:t>
+              <a:t>10/21/2026</a:t>
             </a:fld>
             <a:endParaRPr lang="en-US"/>
           </a:p>
@@ -2410,7 +2420,7 @@
           <a:p>
             <a:fld id="{0679C2E1-833F-46B1-9B12-C4DA11FEBF42}" type="datetimeFigureOut">
               <a:rPr lang="en-US" smtClean="0"/>
-              <a:t>9/28/2026</a:t>
+              <a:t>10/21/2026</a:t>
             </a:fld>
             <a:endParaRPr lang="en-US"/>
           </a:p>
@@ -2822,7 +2832,7 @@
           <a:p>
             <a:fld id="{0679C2E1-833F-46B1-9B12-C4DA11FEBF42}" type="datetimeFigureOut">
               <a:rPr lang="en-US" smtClean="0"/>
-              <a:t>9/28/2026</a:t>
+              <a:t>10/21/2026</a:t>
             </a:fld>
             <a:endParaRPr lang="en-US"/>
           </a:p>
@@ -2963,7 +2973,7 @@
           <a:p>
             <a:fld id="{0679C2E1-833F-46B1-9B12-C4DA11FEBF42}" type="datetimeFigureOut">
               <a:rPr lang="en-US" smtClean="0"/>
-              <a:t>9/28/2026</a:t>
+              <a:t>10/21/2026</a:t>
             </a:fld>
             <a:endParaRPr lang="en-US"/>
           </a:p>
@@ -3076,7 +3086,7 @@
           <a:p>
             <a:fld id="{0679C2E1-833F-46B1-9B12-C4DA11FEBF42}" type="datetimeFigureOut">
               <a:rPr lang="en-US" smtClean="0"/>
-              <a:t>9/28/2026</a:t>
+              <a:t>10/21/2026</a:t>
             </a:fld>
             <a:endParaRPr lang="en-US"/>
           </a:p>
@@ -3387,7 +3397,7 @@
           <a:p>
             <a:fld id="{0679C2E1-833F-46B1-9B12-C4DA11FEBF42}" type="datetimeFigureOut">
               <a:rPr lang="en-US" smtClean="0"/>
-              <a:t>9/28/2026</a:t>
+              <a:t>10/21/2026</a:t>
             </a:fld>
             <a:endParaRPr lang="en-US"/>
           </a:p>
@@ -3675,7 +3685,7 @@
           <a:p>
             <a:fld id="{0679C2E1-833F-46B1-9B12-C4DA11FEBF42}" type="datetimeFigureOut">
               <a:rPr lang="en-US" smtClean="0"/>
-              <a:t>9/28/2026</a:t>
+              <a:t>10/21/2026</a:t>
             </a:fld>
             <a:endParaRPr lang="en-US"/>
           </a:p>
@@ -3916,7 +3926,7 @@
           <a:p>
             <a:fld id="{0679C2E1-833F-46B1-9B12-C4DA11FEBF42}" type="datetimeFigureOut">
               <a:rPr lang="en-US" smtClean="0"/>
-              <a:t>9/28/2026</a:t>
+              <a:t>10/21/2026</a:t>
             </a:fld>
             <a:endParaRPr lang="en-US"/>
           </a:p>
@@ -4404,7 +4414,7 @@
           <a:p>
             <a:r>
               <a:rPr lang="en-US" dirty="0"/>
-              <a:t>Hake, age and environmental factors</a:t>
+              <a:t>Hake, body condition. age and environmental factors</a:t>
             </a:r>
           </a:p>
         </p:txBody>
@@ -4448,100 +4458,6 @@
 </file>
 
 <file path=ppt/slides/slide10.xml><?xml version="1.0" encoding="utf-8"?>
-<p:sld xmlns:a="http://schemas.openxmlformats.org/drawingml/2006/main" xmlns:r="http://schemas.openxmlformats.org/officeDocument/2006/relationships" xmlns:p="http://schemas.openxmlformats.org/presentationml/2006/main">
-  <p:cSld>
-    <p:spTree>
-      <p:nvGrpSpPr>
-        <p:cNvPr id="1" name="">
-          <a:extLst>
-            <a:ext uri="{FF2B5EF4-FFF2-40B4-BE49-F238E27FC236}">
-              <a16:creationId xmlns:a16="http://schemas.microsoft.com/office/drawing/2014/main" id="{99EB299D-3070-B03A-6039-34685C748421}"/>
-            </a:ext>
-          </a:extLst>
-        </p:cNvPr>
-        <p:cNvGrpSpPr/>
-        <p:nvPr/>
-      </p:nvGrpSpPr>
-      <p:grpSpPr>
-        <a:xfrm>
-          <a:off x="0" y="0"/>
-          <a:ext cx="0" cy="0"/>
-          <a:chOff x="0" y="0"/>
-          <a:chExt cx="0" cy="0"/>
-        </a:xfrm>
-      </p:grpSpPr>
-      <p:sp>
-        <p:nvSpPr>
-          <p:cNvPr id="2" name="Title 1">
-            <a:extLst>
-              <a:ext uri="{FF2B5EF4-FFF2-40B4-BE49-F238E27FC236}">
-                <a16:creationId xmlns:a16="http://schemas.microsoft.com/office/drawing/2014/main" id="{7287E5C3-6A63-10AA-1280-022AC875066C}"/>
-              </a:ext>
-            </a:extLst>
-          </p:cNvPr>
-          <p:cNvSpPr>
-            <a:spLocks noGrp="1"/>
-          </p:cNvSpPr>
-          <p:nvPr>
-            <p:ph type="title"/>
-          </p:nvPr>
-        </p:nvSpPr>
-        <p:spPr/>
-        <p:txBody>
-          <a:bodyPr/>
-          <a:lstStyle/>
-          <a:p>
-            <a:r>
-              <a:rPr lang="en-US" dirty="0"/>
-              <a:t>Env data plots – US Data</a:t>
-            </a:r>
-          </a:p>
-        </p:txBody>
-      </p:sp>
-      <p:pic>
-        <p:nvPicPr>
-          <p:cNvPr id="4" name="Picture 3">
-            <a:extLst>
-              <a:ext uri="{FF2B5EF4-FFF2-40B4-BE49-F238E27FC236}">
-                <a16:creationId xmlns:a16="http://schemas.microsoft.com/office/drawing/2014/main" id="{759E3529-BD8B-027B-CDD6-9F00584D5600}"/>
-              </a:ext>
-            </a:extLst>
-          </p:cNvPr>
-          <p:cNvPicPr>
-            <a:picLocks noChangeAspect="1"/>
-          </p:cNvPicPr>
-          <p:nvPr/>
-        </p:nvPicPr>
-        <p:blipFill>
-          <a:blip r:embed="rId3"/>
-          <a:stretch>
-            <a:fillRect/>
-          </a:stretch>
-        </p:blipFill>
-        <p:spPr>
-          <a:xfrm>
-            <a:off x="2203578" y="1475632"/>
-            <a:ext cx="7784844" cy="5017243"/>
-          </a:xfrm>
-          <a:prstGeom prst="rect">
-            <a:avLst/>
-          </a:prstGeom>
-        </p:spPr>
-      </p:pic>
-    </p:spTree>
-    <p:extLst>
-      <p:ext uri="{BB962C8B-B14F-4D97-AF65-F5344CB8AC3E}">
-        <p14:creationId xmlns:p14="http://schemas.microsoft.com/office/powerpoint/2010/main" val="3763793456"/>
-      </p:ext>
-    </p:extLst>
-  </p:cSld>
-  <p:clrMapOvr>
-    <a:masterClrMapping/>
-  </p:clrMapOvr>
-</p:sld>
-</file>
-
-<file path=ppt/slides/slide11.xml><?xml version="1.0" encoding="utf-8"?>
 <p:sld xmlns:a="http://schemas.openxmlformats.org/drawingml/2006/main" xmlns:r="http://schemas.openxmlformats.org/officeDocument/2006/relationships" xmlns:p="http://schemas.openxmlformats.org/presentationml/2006/main">
   <p:cSld>
     <p:spTree>
@@ -4635,6 +4551,89 @@
 </p:sld>
 </file>
 
+<file path=ppt/slides/slide11.xml><?xml version="1.0" encoding="utf-8"?>
+<p:sld xmlns:a="http://schemas.openxmlformats.org/drawingml/2006/main" xmlns:r="http://schemas.openxmlformats.org/officeDocument/2006/relationships" xmlns:p="http://schemas.openxmlformats.org/presentationml/2006/main">
+  <p:cSld>
+    <p:spTree>
+      <p:nvGrpSpPr>
+        <p:cNvPr id="1" name=""/>
+        <p:cNvGrpSpPr/>
+        <p:nvPr/>
+      </p:nvGrpSpPr>
+      <p:grpSpPr>
+        <a:xfrm>
+          <a:off x="0" y="0"/>
+          <a:ext cx="0" cy="0"/>
+          <a:chOff x="0" y="0"/>
+          <a:chExt cx="0" cy="0"/>
+        </a:xfrm>
+      </p:grpSpPr>
+      <p:sp>
+        <p:nvSpPr>
+          <p:cNvPr id="2" name="Title 1">
+            <a:extLst>
+              <a:ext uri="{FF2B5EF4-FFF2-40B4-BE49-F238E27FC236}">
+                <a16:creationId xmlns:a16="http://schemas.microsoft.com/office/drawing/2014/main" id="{01E53C5E-E8C5-1617-78E1-FC5D8747D8D7}"/>
+              </a:ext>
+            </a:extLst>
+          </p:cNvPr>
+          <p:cNvSpPr>
+            <a:spLocks noGrp="1"/>
+          </p:cNvSpPr>
+          <p:nvPr>
+            <p:ph type="title"/>
+          </p:nvPr>
+        </p:nvSpPr>
+        <p:spPr/>
+        <p:txBody>
+          <a:bodyPr/>
+          <a:lstStyle/>
+          <a:p>
+            <a:r>
+              <a:rPr lang="en-US" dirty="0"/>
+              <a:t>Bayesian model output</a:t>
+            </a:r>
+          </a:p>
+        </p:txBody>
+      </p:sp>
+      <p:sp>
+        <p:nvSpPr>
+          <p:cNvPr id="3" name="Content Placeholder 2">
+            <a:extLst>
+              <a:ext uri="{FF2B5EF4-FFF2-40B4-BE49-F238E27FC236}">
+                <a16:creationId xmlns:a16="http://schemas.microsoft.com/office/drawing/2014/main" id="{D5C43D05-A3EB-146E-88BB-0F7D4C7754D0}"/>
+              </a:ext>
+            </a:extLst>
+          </p:cNvPr>
+          <p:cNvSpPr>
+            <a:spLocks noGrp="1"/>
+          </p:cNvSpPr>
+          <p:nvPr>
+            <p:ph idx="1"/>
+          </p:nvPr>
+        </p:nvSpPr>
+        <p:spPr/>
+        <p:txBody>
+          <a:bodyPr/>
+          <a:lstStyle/>
+          <a:p>
+            <a:endParaRPr lang="en-US"/>
+          </a:p>
+        </p:txBody>
+      </p:sp>
+    </p:spTree>
+    <p:extLst>
+      <p:ext uri="{BB962C8B-B14F-4D97-AF65-F5344CB8AC3E}">
+        <p14:creationId xmlns:p14="http://schemas.microsoft.com/office/powerpoint/2010/main" val="1566926840"/>
+      </p:ext>
+    </p:extLst>
+  </p:cSld>
+  <p:clrMapOvr>
+    <a:masterClrMapping/>
+  </p:clrMapOvr>
+</p:sld>
+</file>
+
 <file path=ppt/slides/slide12.xml><?xml version="1.0" encoding="utf-8"?>
 <p:sld xmlns:a="http://schemas.openxmlformats.org/drawingml/2006/main" xmlns:r="http://schemas.openxmlformats.org/officeDocument/2006/relationships" xmlns:p="http://schemas.openxmlformats.org/presentationml/2006/main">
   <p:cSld>
@@ -4657,7 +4656,7 @@
           <p:cNvPr id="2" name="Title 1">
             <a:extLst>
               <a:ext uri="{FF2B5EF4-FFF2-40B4-BE49-F238E27FC236}">
-                <a16:creationId xmlns:a16="http://schemas.microsoft.com/office/drawing/2014/main" id="{01E53C5E-E8C5-1617-78E1-FC5D8747D8D7}"/>
+                <a16:creationId xmlns:a16="http://schemas.microsoft.com/office/drawing/2014/main" id="{030618CE-196B-4610-700F-D477A87C3BDC}"/>
               </a:ext>
             </a:extLst>
           </p:cNvPr>
@@ -4674,9 +4673,10 @@
           <a:lstStyle/>
           <a:p>
             <a:r>
-              <a:rPr lang="en-US" dirty="0"/>
-              <a:t>Bayesian model output</a:t>
-            </a:r>
+              <a:rPr lang="en-US"/>
+              <a:t>All data – posterior distribution of environmental covariates</a:t>
+            </a:r>
+            <a:endParaRPr lang="en-US" dirty="0"/>
           </a:p>
         </p:txBody>
       </p:sp>
@@ -4685,7 +4685,7 @@
           <p:cNvPr id="3" name="Content Placeholder 2">
             <a:extLst>
               <a:ext uri="{FF2B5EF4-FFF2-40B4-BE49-F238E27FC236}">
-                <a16:creationId xmlns:a16="http://schemas.microsoft.com/office/drawing/2014/main" id="{D5C43D05-A3EB-146E-88BB-0F7D4C7754D0}"/>
+                <a16:creationId xmlns:a16="http://schemas.microsoft.com/office/drawing/2014/main" id="{EC9D7370-E9A1-8842-4C68-AE1912AD72DE}"/>
               </a:ext>
             </a:extLst>
           </p:cNvPr>
@@ -4701,14 +4701,44 @@
           <a:bodyPr/>
           <a:lstStyle/>
           <a:p>
-            <a:endParaRPr lang="en-US"/>
-          </a:p>
-        </p:txBody>
-      </p:sp>
+            <a:endParaRPr lang="en-US" dirty="0"/>
+          </a:p>
+        </p:txBody>
+      </p:sp>
+      <p:pic>
+        <p:nvPicPr>
+          <p:cNvPr id="5" name="Picture 4">
+            <a:extLst>
+              <a:ext uri="{FF2B5EF4-FFF2-40B4-BE49-F238E27FC236}">
+                <a16:creationId xmlns:a16="http://schemas.microsoft.com/office/drawing/2014/main" id="{209DEE5B-4399-5A97-5265-ED6F2CDFCB9B}"/>
+              </a:ext>
+            </a:extLst>
+          </p:cNvPr>
+          <p:cNvPicPr>
+            <a:picLocks noChangeAspect="1"/>
+          </p:cNvPicPr>
+          <p:nvPr/>
+        </p:nvPicPr>
+        <p:blipFill>
+          <a:blip r:embed="rId2"/>
+          <a:stretch>
+            <a:fillRect/>
+          </a:stretch>
+        </p:blipFill>
+        <p:spPr>
+          <a:xfrm>
+            <a:off x="4305012" y="2043906"/>
+            <a:ext cx="5743863" cy="3914775"/>
+          </a:xfrm>
+          <a:prstGeom prst="rect">
+            <a:avLst/>
+          </a:prstGeom>
+        </p:spPr>
+      </p:pic>
     </p:spTree>
     <p:extLst>
       <p:ext uri="{BB962C8B-B14F-4D97-AF65-F5344CB8AC3E}">
-        <p14:creationId xmlns:p14="http://schemas.microsoft.com/office/powerpoint/2010/main" val="1566926840"/>
+        <p14:creationId xmlns:p14="http://schemas.microsoft.com/office/powerpoint/2010/main" val="3555751872"/>
       </p:ext>
     </p:extLst>
   </p:cSld>
@@ -4740,7 +4770,7 @@
           <p:cNvPr id="2" name="Title 1">
             <a:extLst>
               <a:ext uri="{FF2B5EF4-FFF2-40B4-BE49-F238E27FC236}">
-                <a16:creationId xmlns:a16="http://schemas.microsoft.com/office/drawing/2014/main" id="{030618CE-196B-4610-700F-D477A87C3BDC}"/>
+                <a16:creationId xmlns:a16="http://schemas.microsoft.com/office/drawing/2014/main" id="{A76E1893-F885-30C7-28A7-99621162EF96}"/>
               </a:ext>
             </a:extLst>
           </p:cNvPr>
@@ -4756,10 +4786,7 @@
           <a:bodyPr/>
           <a:lstStyle/>
           <a:p>
-            <a:r>
-              <a:rPr lang="en-US" dirty="0"/>
-              <a:t>All data – posterior distribution of environmental covariates</a:t>
-            </a:r>
+            <a:endParaRPr lang="en-US"/>
           </a:p>
         </p:txBody>
       </p:sp>
@@ -4768,7 +4795,7 @@
           <p:cNvPr id="3" name="Content Placeholder 2">
             <a:extLst>
               <a:ext uri="{FF2B5EF4-FFF2-40B4-BE49-F238E27FC236}">
-                <a16:creationId xmlns:a16="http://schemas.microsoft.com/office/drawing/2014/main" id="{EC9D7370-E9A1-8842-4C68-AE1912AD72DE}"/>
+                <a16:creationId xmlns:a16="http://schemas.microsoft.com/office/drawing/2014/main" id="{0742EA1B-F4DE-1DEE-4F7E-88BBA386538A}"/>
               </a:ext>
             </a:extLst>
           </p:cNvPr>
@@ -4784,16 +4811,16 @@
           <a:bodyPr/>
           <a:lstStyle/>
           <a:p>
-            <a:endParaRPr lang="en-US" dirty="0"/>
+            <a:endParaRPr lang="en-US"/>
           </a:p>
         </p:txBody>
       </p:sp>
       <p:pic>
         <p:nvPicPr>
-          <p:cNvPr id="10" name="Picture 9">
-            <a:extLst>
-              <a:ext uri="{FF2B5EF4-FFF2-40B4-BE49-F238E27FC236}">
-                <a16:creationId xmlns:a16="http://schemas.microsoft.com/office/drawing/2014/main" id="{4CB5E670-C7EF-4E71-1F74-D1DE16BC25E4}"/>
+          <p:cNvPr id="5" name="Picture 4">
+            <a:extLst>
+              <a:ext uri="{FF2B5EF4-FFF2-40B4-BE49-F238E27FC236}">
+                <a16:creationId xmlns:a16="http://schemas.microsoft.com/office/drawing/2014/main" id="{C41CE28B-3551-87AC-4616-77DCCD6E5AB1}"/>
               </a:ext>
             </a:extLst>
           </p:cNvPr>
@@ -4810,8 +4837,8 @@
         </p:blipFill>
         <p:spPr>
           <a:xfrm>
-            <a:off x="1596064" y="1690688"/>
-            <a:ext cx="8274620" cy="4869079"/>
+            <a:off x="2811018" y="0"/>
+            <a:ext cx="6569964" cy="6858000"/>
           </a:xfrm>
           <a:prstGeom prst="rect">
             <a:avLst/>
@@ -4821,7 +4848,7 @@
     </p:spTree>
     <p:extLst>
       <p:ext uri="{BB962C8B-B14F-4D97-AF65-F5344CB8AC3E}">
-        <p14:creationId xmlns:p14="http://schemas.microsoft.com/office/powerpoint/2010/main" val="3555751872"/>
+        <p14:creationId xmlns:p14="http://schemas.microsoft.com/office/powerpoint/2010/main" val="434478555"/>
       </p:ext>
     </p:extLst>
   </p:cSld>
@@ -4832,6 +4859,116 @@
 </file>
 
 <file path=ppt/slides/slide14.xml><?xml version="1.0" encoding="utf-8"?>
+<p:sld xmlns:a="http://schemas.openxmlformats.org/drawingml/2006/main" xmlns:r="http://schemas.openxmlformats.org/officeDocument/2006/relationships" xmlns:p="http://schemas.openxmlformats.org/presentationml/2006/main">
+  <p:cSld>
+    <p:spTree>
+      <p:nvGrpSpPr>
+        <p:cNvPr id="1" name=""/>
+        <p:cNvGrpSpPr/>
+        <p:nvPr/>
+      </p:nvGrpSpPr>
+      <p:grpSpPr>
+        <a:xfrm>
+          <a:off x="0" y="0"/>
+          <a:ext cx="0" cy="0"/>
+          <a:chOff x="0" y="0"/>
+          <a:chExt cx="0" cy="0"/>
+        </a:xfrm>
+      </p:grpSpPr>
+      <p:sp>
+        <p:nvSpPr>
+          <p:cNvPr id="2" name="Title 1">
+            <a:extLst>
+              <a:ext uri="{FF2B5EF4-FFF2-40B4-BE49-F238E27FC236}">
+                <a16:creationId xmlns:a16="http://schemas.microsoft.com/office/drawing/2014/main" id="{45C05EB4-186C-174C-11C8-150A20CAD864}"/>
+              </a:ext>
+            </a:extLst>
+          </p:cNvPr>
+          <p:cNvSpPr>
+            <a:spLocks noGrp="1"/>
+          </p:cNvSpPr>
+          <p:nvPr>
+            <p:ph type="title"/>
+          </p:nvPr>
+        </p:nvSpPr>
+        <p:spPr/>
+        <p:txBody>
+          <a:bodyPr/>
+          <a:lstStyle/>
+          <a:p>
+            <a:endParaRPr lang="en-US"/>
+          </a:p>
+        </p:txBody>
+      </p:sp>
+      <p:sp>
+        <p:nvSpPr>
+          <p:cNvPr id="3" name="Content Placeholder 2">
+            <a:extLst>
+              <a:ext uri="{FF2B5EF4-FFF2-40B4-BE49-F238E27FC236}">
+                <a16:creationId xmlns:a16="http://schemas.microsoft.com/office/drawing/2014/main" id="{7B80C4F9-F655-F3C7-470E-FB6B9864B798}"/>
+              </a:ext>
+            </a:extLst>
+          </p:cNvPr>
+          <p:cNvSpPr>
+            <a:spLocks noGrp="1"/>
+          </p:cNvSpPr>
+          <p:nvPr>
+            <p:ph idx="1"/>
+          </p:nvPr>
+        </p:nvSpPr>
+        <p:spPr/>
+        <p:txBody>
+          <a:bodyPr/>
+          <a:lstStyle/>
+          <a:p>
+            <a:endParaRPr lang="en-US"/>
+          </a:p>
+        </p:txBody>
+      </p:sp>
+      <p:pic>
+        <p:nvPicPr>
+          <p:cNvPr id="5" name="Picture 4">
+            <a:extLst>
+              <a:ext uri="{FF2B5EF4-FFF2-40B4-BE49-F238E27FC236}">
+                <a16:creationId xmlns:a16="http://schemas.microsoft.com/office/drawing/2014/main" id="{EC8A23BC-ADCC-7459-24D4-3259525F9F98}"/>
+              </a:ext>
+            </a:extLst>
+          </p:cNvPr>
+          <p:cNvPicPr>
+            <a:picLocks noChangeAspect="1"/>
+          </p:cNvPicPr>
+          <p:nvPr/>
+        </p:nvPicPr>
+        <p:blipFill>
+          <a:blip r:embed="rId2"/>
+          <a:stretch>
+            <a:fillRect/>
+          </a:stretch>
+        </p:blipFill>
+        <p:spPr>
+          <a:xfrm>
+            <a:off x="2671763" y="595312"/>
+            <a:ext cx="7581899" cy="5667375"/>
+          </a:xfrm>
+          <a:prstGeom prst="rect">
+            <a:avLst/>
+          </a:prstGeom>
+        </p:spPr>
+      </p:pic>
+    </p:spTree>
+    <p:extLst>
+      <p:ext uri="{BB962C8B-B14F-4D97-AF65-F5344CB8AC3E}">
+        <p14:creationId xmlns:p14="http://schemas.microsoft.com/office/powerpoint/2010/main" val="1527682479"/>
+      </p:ext>
+    </p:extLst>
+  </p:cSld>
+  <p:clrMapOvr>
+    <a:masterClrMapping/>
+  </p:clrMapOvr>
+</p:sld>
+</file>
+
+<file path=ppt/slides/slide15.xml><?xml version="1.0" encoding="utf-8"?>
 <p:sld xmlns:a="http://schemas.openxmlformats.org/drawingml/2006/main" xmlns:r="http://schemas.openxmlformats.org/officeDocument/2006/relationships" xmlns:p="http://schemas.openxmlformats.org/presentationml/2006/main">
   <p:cSld>
     <p:spTree>
@@ -4950,7 +5087,7 @@
 </p:sld>
 </file>
 
-<file path=ppt/slides/slide15.xml><?xml version="1.0" encoding="utf-8"?>
+<file path=ppt/slides/slide16.xml><?xml version="1.0" encoding="utf-8"?>
 <p:sld xmlns:a="http://schemas.openxmlformats.org/drawingml/2006/main" xmlns:r="http://schemas.openxmlformats.org/officeDocument/2006/relationships" xmlns:p="http://schemas.openxmlformats.org/presentationml/2006/main">
   <p:cSld>
     <p:spTree>
@@ -5063,7 +5200,7 @@
 </p:sld>
 </file>
 
-<file path=ppt/slides/slide16.xml><?xml version="1.0" encoding="utf-8"?>
+<file path=ppt/slides/slide17.xml><?xml version="1.0" encoding="utf-8"?>
 <p:sld xmlns:a="http://schemas.openxmlformats.org/drawingml/2006/main" xmlns:r="http://schemas.openxmlformats.org/officeDocument/2006/relationships" xmlns:p="http://schemas.openxmlformats.org/presentationml/2006/main">
   <p:cSld>
     <p:spTree>
@@ -5155,7 +5292,7 @@
 </p:sld>
 </file>
 
-<file path=ppt/slides/slide17.xml><?xml version="1.0" encoding="utf-8"?>
+<file path=ppt/slides/slide18.xml><?xml version="1.0" encoding="utf-8"?>
 <p:sld xmlns:a="http://schemas.openxmlformats.org/drawingml/2006/main" xmlns:r="http://schemas.openxmlformats.org/officeDocument/2006/relationships" xmlns:p="http://schemas.openxmlformats.org/presentationml/2006/main">
   <p:cSld>
     <p:spTree>
@@ -5268,7 +5405,7 @@
 </p:sld>
 </file>
 
-<file path=ppt/slides/slide18.xml><?xml version="1.0" encoding="utf-8"?>
+<file path=ppt/slides/slide19.xml><?xml version="1.0" encoding="utf-8"?>
 <p:sld xmlns:a="http://schemas.openxmlformats.org/drawingml/2006/main" xmlns:r="http://schemas.openxmlformats.org/officeDocument/2006/relationships" xmlns:p="http://schemas.openxmlformats.org/presentationml/2006/main">
   <p:cSld>
     <p:spTree>
@@ -5387,224 +5524,6 @@
 </p:sld>
 </file>
 
-<file path=ppt/slides/slide19.xml><?xml version="1.0" encoding="utf-8"?>
-<p:sld xmlns:a="http://schemas.openxmlformats.org/drawingml/2006/main" xmlns:r="http://schemas.openxmlformats.org/officeDocument/2006/relationships" xmlns:p="http://schemas.openxmlformats.org/presentationml/2006/main">
-  <p:cSld>
-    <p:spTree>
-      <p:nvGrpSpPr>
-        <p:cNvPr id="1" name=""/>
-        <p:cNvGrpSpPr/>
-        <p:nvPr/>
-      </p:nvGrpSpPr>
-      <p:grpSpPr>
-        <a:xfrm>
-          <a:off x="0" y="0"/>
-          <a:ext cx="0" cy="0"/>
-          <a:chOff x="0" y="0"/>
-          <a:chExt cx="0" cy="0"/>
-        </a:xfrm>
-      </p:grpSpPr>
-      <p:sp>
-        <p:nvSpPr>
-          <p:cNvPr id="2" name="Title 1">
-            <a:extLst>
-              <a:ext uri="{FF2B5EF4-FFF2-40B4-BE49-F238E27FC236}">
-                <a16:creationId xmlns:a16="http://schemas.microsoft.com/office/drawing/2014/main" id="{63974EF5-9152-C1CB-5024-DF20EC0C92A0}"/>
-              </a:ext>
-            </a:extLst>
-          </p:cNvPr>
-          <p:cNvSpPr>
-            <a:spLocks noGrp="1"/>
-          </p:cNvSpPr>
-          <p:nvPr>
-            <p:ph type="title"/>
-          </p:nvPr>
-        </p:nvSpPr>
-        <p:spPr>
-          <a:xfrm>
-            <a:off x="254913" y="84740"/>
-            <a:ext cx="10515600" cy="1325563"/>
-          </a:xfrm>
-        </p:spPr>
-        <p:txBody>
-          <a:bodyPr/>
-          <a:lstStyle/>
-          <a:p>
-            <a:r>
-              <a:rPr lang="en-US" dirty="0"/>
-              <a:t>Annual mean age with env covariates</a:t>
-            </a:r>
-          </a:p>
-        </p:txBody>
-      </p:sp>
-      <p:sp>
-        <p:nvSpPr>
-          <p:cNvPr id="3" name="Content Placeholder 2">
-            <a:extLst>
-              <a:ext uri="{FF2B5EF4-FFF2-40B4-BE49-F238E27FC236}">
-                <a16:creationId xmlns:a16="http://schemas.microsoft.com/office/drawing/2014/main" id="{F0069C7D-117B-E5CF-E117-185BC93578DC}"/>
-              </a:ext>
-            </a:extLst>
-          </p:cNvPr>
-          <p:cNvSpPr>
-            <a:spLocks noGrp="1"/>
-          </p:cNvSpPr>
-          <p:nvPr>
-            <p:ph idx="1"/>
-          </p:nvPr>
-        </p:nvSpPr>
-        <p:spPr/>
-        <p:txBody>
-          <a:bodyPr/>
-          <a:lstStyle/>
-          <a:p>
-            <a:endParaRPr lang="en-US"/>
-          </a:p>
-        </p:txBody>
-      </p:sp>
-      <p:pic>
-        <p:nvPicPr>
-          <p:cNvPr id="8" name="Picture 7">
-            <a:extLst>
-              <a:ext uri="{FF2B5EF4-FFF2-40B4-BE49-F238E27FC236}">
-                <a16:creationId xmlns:a16="http://schemas.microsoft.com/office/drawing/2014/main" id="{3B35CE2F-5329-6B02-B0B3-8EEE4CD6EE84}"/>
-              </a:ext>
-            </a:extLst>
-          </p:cNvPr>
-          <p:cNvPicPr>
-            <a:picLocks noChangeAspect="1"/>
-          </p:cNvPicPr>
-          <p:nvPr/>
-        </p:nvPicPr>
-        <p:blipFill>
-          <a:blip r:embed="rId2"/>
-          <a:stretch>
-            <a:fillRect/>
-          </a:stretch>
-        </p:blipFill>
-        <p:spPr>
-          <a:xfrm>
-            <a:off x="254913" y="1571370"/>
-            <a:ext cx="5956238" cy="4921505"/>
-          </a:xfrm>
-          <a:prstGeom prst="rect">
-            <a:avLst/>
-          </a:prstGeom>
-        </p:spPr>
-      </p:pic>
-      <p:pic>
-        <p:nvPicPr>
-          <p:cNvPr id="12" name="Picture 11">
-            <a:extLst>
-              <a:ext uri="{FF2B5EF4-FFF2-40B4-BE49-F238E27FC236}">
-                <a16:creationId xmlns:a16="http://schemas.microsoft.com/office/drawing/2014/main" id="{0A39B213-D867-8C9B-4E79-4E845AAC3F93}"/>
-              </a:ext>
-            </a:extLst>
-          </p:cNvPr>
-          <p:cNvPicPr>
-            <a:picLocks noChangeAspect="1"/>
-          </p:cNvPicPr>
-          <p:nvPr/>
-        </p:nvPicPr>
-        <p:blipFill>
-          <a:blip r:embed="rId3"/>
-          <a:stretch>
-            <a:fillRect/>
-          </a:stretch>
-        </p:blipFill>
-        <p:spPr>
-          <a:xfrm>
-            <a:off x="6400639" y="1503491"/>
-            <a:ext cx="5779071" cy="4989384"/>
-          </a:xfrm>
-          <a:prstGeom prst="rect">
-            <a:avLst/>
-          </a:prstGeom>
-        </p:spPr>
-      </p:pic>
-      <p:sp>
-        <p:nvSpPr>
-          <p:cNvPr id="14" name="TextBox 13">
-            <a:extLst>
-              <a:ext uri="{FF2B5EF4-FFF2-40B4-BE49-F238E27FC236}">
-                <a16:creationId xmlns:a16="http://schemas.microsoft.com/office/drawing/2014/main" id="{84C87C66-D5D4-E059-9326-536F7A75785E}"/>
-              </a:ext>
-            </a:extLst>
-          </p:cNvPr>
-          <p:cNvSpPr txBox="1"/>
-          <p:nvPr/>
-        </p:nvSpPr>
-        <p:spPr>
-          <a:xfrm>
-            <a:off x="671121" y="1177358"/>
-            <a:ext cx="1500732" cy="369332"/>
-          </a:xfrm>
-          <a:prstGeom prst="rect">
-            <a:avLst/>
-          </a:prstGeom>
-          <a:noFill/>
-        </p:spPr>
-        <p:txBody>
-          <a:bodyPr wrap="none" rtlCol="0">
-            <a:spAutoFit/>
-          </a:bodyPr>
-          <a:lstStyle/>
-          <a:p>
-            <a:r>
-              <a:rPr lang="en-US" dirty="0"/>
-              <a:t>Annual mean</a:t>
-            </a:r>
-          </a:p>
-        </p:txBody>
-      </p:sp>
-      <p:sp>
-        <p:nvSpPr>
-          <p:cNvPr id="16" name="TextBox 15">
-            <a:extLst>
-              <a:ext uri="{FF2B5EF4-FFF2-40B4-BE49-F238E27FC236}">
-                <a16:creationId xmlns:a16="http://schemas.microsoft.com/office/drawing/2014/main" id="{55029EBF-8225-99EE-0EBF-0EC9C0F0050D}"/>
-              </a:ext>
-            </a:extLst>
-          </p:cNvPr>
-          <p:cNvSpPr txBox="1"/>
-          <p:nvPr/>
-        </p:nvSpPr>
-        <p:spPr>
-          <a:xfrm>
-            <a:off x="6892414" y="1121505"/>
-            <a:ext cx="2720617" cy="369332"/>
-          </a:xfrm>
-          <a:prstGeom prst="rect">
-            <a:avLst/>
-          </a:prstGeom>
-          <a:noFill/>
-        </p:spPr>
-        <p:txBody>
-          <a:bodyPr wrap="none" rtlCol="0">
-            <a:spAutoFit/>
-          </a:bodyPr>
-          <a:lstStyle/>
-          <a:p>
-            <a:r>
-              <a:rPr lang="en-US" dirty="0"/>
-              <a:t>Spring mean (April – June)</a:t>
-            </a:r>
-          </a:p>
-        </p:txBody>
-      </p:sp>
-    </p:spTree>
-    <p:extLst>
-      <p:ext uri="{BB962C8B-B14F-4D97-AF65-F5344CB8AC3E}">
-        <p14:creationId xmlns:p14="http://schemas.microsoft.com/office/powerpoint/2010/main" val="4222444916"/>
-      </p:ext>
-    </p:extLst>
-  </p:cSld>
-  <p:clrMapOvr>
-    <a:masterClrMapping/>
-  </p:clrMapOvr>
-</p:sld>
-</file>
-
 <file path=ppt/slides/slide2.xml><?xml version="1.0" encoding="utf-8"?>
 <p:sld xmlns:a="http://schemas.openxmlformats.org/drawingml/2006/main" xmlns:r="http://schemas.openxmlformats.org/officeDocument/2006/relationships" xmlns:p="http://schemas.openxmlformats.org/presentationml/2006/main">
   <p:cSld>
@@ -5785,6 +5704,994 @@
           <p:cNvPr id="2" name="Title 1">
             <a:extLst>
               <a:ext uri="{FF2B5EF4-FFF2-40B4-BE49-F238E27FC236}">
+                <a16:creationId xmlns:a16="http://schemas.microsoft.com/office/drawing/2014/main" id="{63974EF5-9152-C1CB-5024-DF20EC0C92A0}"/>
+              </a:ext>
+            </a:extLst>
+          </p:cNvPr>
+          <p:cNvSpPr>
+            <a:spLocks noGrp="1"/>
+          </p:cNvSpPr>
+          <p:nvPr>
+            <p:ph type="title"/>
+          </p:nvPr>
+        </p:nvSpPr>
+        <p:spPr>
+          <a:xfrm>
+            <a:off x="254913" y="84740"/>
+            <a:ext cx="10515600" cy="1325563"/>
+          </a:xfrm>
+        </p:spPr>
+        <p:txBody>
+          <a:bodyPr/>
+          <a:lstStyle/>
+          <a:p>
+            <a:r>
+              <a:rPr lang="en-US" dirty="0"/>
+              <a:t>Annual mean age with env covariates</a:t>
+            </a:r>
+          </a:p>
+        </p:txBody>
+      </p:sp>
+      <p:sp>
+        <p:nvSpPr>
+          <p:cNvPr id="3" name="Content Placeholder 2">
+            <a:extLst>
+              <a:ext uri="{FF2B5EF4-FFF2-40B4-BE49-F238E27FC236}">
+                <a16:creationId xmlns:a16="http://schemas.microsoft.com/office/drawing/2014/main" id="{F0069C7D-117B-E5CF-E117-185BC93578DC}"/>
+              </a:ext>
+            </a:extLst>
+          </p:cNvPr>
+          <p:cNvSpPr>
+            <a:spLocks noGrp="1"/>
+          </p:cNvSpPr>
+          <p:nvPr>
+            <p:ph idx="1"/>
+          </p:nvPr>
+        </p:nvSpPr>
+        <p:spPr/>
+        <p:txBody>
+          <a:bodyPr/>
+          <a:lstStyle/>
+          <a:p>
+            <a:endParaRPr lang="en-US" dirty="0"/>
+          </a:p>
+        </p:txBody>
+      </p:sp>
+      <p:pic>
+        <p:nvPicPr>
+          <p:cNvPr id="8" name="Picture 7">
+            <a:extLst>
+              <a:ext uri="{FF2B5EF4-FFF2-40B4-BE49-F238E27FC236}">
+                <a16:creationId xmlns:a16="http://schemas.microsoft.com/office/drawing/2014/main" id="{3B35CE2F-5329-6B02-B0B3-8EEE4CD6EE84}"/>
+              </a:ext>
+            </a:extLst>
+          </p:cNvPr>
+          <p:cNvPicPr>
+            <a:picLocks noChangeAspect="1"/>
+          </p:cNvPicPr>
+          <p:nvPr/>
+        </p:nvPicPr>
+        <p:blipFill>
+          <a:blip r:embed="rId2"/>
+          <a:stretch>
+            <a:fillRect/>
+          </a:stretch>
+        </p:blipFill>
+        <p:spPr>
+          <a:xfrm>
+            <a:off x="254913" y="1571370"/>
+            <a:ext cx="5956238" cy="4921505"/>
+          </a:xfrm>
+          <a:prstGeom prst="rect">
+            <a:avLst/>
+          </a:prstGeom>
+        </p:spPr>
+      </p:pic>
+      <p:pic>
+        <p:nvPicPr>
+          <p:cNvPr id="12" name="Picture 11">
+            <a:extLst>
+              <a:ext uri="{FF2B5EF4-FFF2-40B4-BE49-F238E27FC236}">
+                <a16:creationId xmlns:a16="http://schemas.microsoft.com/office/drawing/2014/main" id="{0A39B213-D867-8C9B-4E79-4E845AAC3F93}"/>
+              </a:ext>
+            </a:extLst>
+          </p:cNvPr>
+          <p:cNvPicPr>
+            <a:picLocks noChangeAspect="1"/>
+          </p:cNvPicPr>
+          <p:nvPr/>
+        </p:nvPicPr>
+        <p:blipFill>
+          <a:blip r:embed="rId3"/>
+          <a:stretch>
+            <a:fillRect/>
+          </a:stretch>
+        </p:blipFill>
+        <p:spPr>
+          <a:xfrm>
+            <a:off x="6400639" y="1503491"/>
+            <a:ext cx="5779071" cy="4989384"/>
+          </a:xfrm>
+          <a:prstGeom prst="rect">
+            <a:avLst/>
+          </a:prstGeom>
+        </p:spPr>
+      </p:pic>
+      <p:sp>
+        <p:nvSpPr>
+          <p:cNvPr id="14" name="TextBox 13">
+            <a:extLst>
+              <a:ext uri="{FF2B5EF4-FFF2-40B4-BE49-F238E27FC236}">
+                <a16:creationId xmlns:a16="http://schemas.microsoft.com/office/drawing/2014/main" id="{84C87C66-D5D4-E059-9326-536F7A75785E}"/>
+              </a:ext>
+            </a:extLst>
+          </p:cNvPr>
+          <p:cNvSpPr txBox="1"/>
+          <p:nvPr/>
+        </p:nvSpPr>
+        <p:spPr>
+          <a:xfrm>
+            <a:off x="671121" y="1177358"/>
+            <a:ext cx="1500732" cy="369332"/>
+          </a:xfrm>
+          <a:prstGeom prst="rect">
+            <a:avLst/>
+          </a:prstGeom>
+          <a:noFill/>
+        </p:spPr>
+        <p:txBody>
+          <a:bodyPr wrap="none" rtlCol="0">
+            <a:spAutoFit/>
+          </a:bodyPr>
+          <a:lstStyle/>
+          <a:p>
+            <a:r>
+              <a:rPr lang="en-US" dirty="0"/>
+              <a:t>Annual mean</a:t>
+            </a:r>
+          </a:p>
+        </p:txBody>
+      </p:sp>
+      <p:sp>
+        <p:nvSpPr>
+          <p:cNvPr id="16" name="TextBox 15">
+            <a:extLst>
+              <a:ext uri="{FF2B5EF4-FFF2-40B4-BE49-F238E27FC236}">
+                <a16:creationId xmlns:a16="http://schemas.microsoft.com/office/drawing/2014/main" id="{55029EBF-8225-99EE-0EBF-0EC9C0F0050D}"/>
+              </a:ext>
+            </a:extLst>
+          </p:cNvPr>
+          <p:cNvSpPr txBox="1"/>
+          <p:nvPr/>
+        </p:nvSpPr>
+        <p:spPr>
+          <a:xfrm>
+            <a:off x="6892414" y="1121505"/>
+            <a:ext cx="2720617" cy="369332"/>
+          </a:xfrm>
+          <a:prstGeom prst="rect">
+            <a:avLst/>
+          </a:prstGeom>
+          <a:noFill/>
+        </p:spPr>
+        <p:txBody>
+          <a:bodyPr wrap="none" rtlCol="0">
+            <a:spAutoFit/>
+          </a:bodyPr>
+          <a:lstStyle/>
+          <a:p>
+            <a:r>
+              <a:rPr lang="en-US" dirty="0"/>
+              <a:t>Spring mean (April – June)</a:t>
+            </a:r>
+          </a:p>
+        </p:txBody>
+      </p:sp>
+    </p:spTree>
+    <p:extLst>
+      <p:ext uri="{BB962C8B-B14F-4D97-AF65-F5344CB8AC3E}">
+        <p14:creationId xmlns:p14="http://schemas.microsoft.com/office/powerpoint/2010/main" val="4222444916"/>
+      </p:ext>
+    </p:extLst>
+  </p:cSld>
+  <p:clrMapOvr>
+    <a:masterClrMapping/>
+  </p:clrMapOvr>
+</p:sld>
+</file>
+
+<file path=ppt/slides/slide21.xml><?xml version="1.0" encoding="utf-8"?>
+<p:sld xmlns:a="http://schemas.openxmlformats.org/drawingml/2006/main" xmlns:r="http://schemas.openxmlformats.org/officeDocument/2006/relationships" xmlns:p="http://schemas.openxmlformats.org/presentationml/2006/main">
+  <p:cSld>
+    <p:spTree>
+      <p:nvGrpSpPr>
+        <p:cNvPr id="1" name=""/>
+        <p:cNvGrpSpPr/>
+        <p:nvPr/>
+      </p:nvGrpSpPr>
+      <p:grpSpPr>
+        <a:xfrm>
+          <a:off x="0" y="0"/>
+          <a:ext cx="0" cy="0"/>
+          <a:chOff x="0" y="0"/>
+          <a:chExt cx="0" cy="0"/>
+        </a:xfrm>
+      </p:grpSpPr>
+      <p:sp>
+        <p:nvSpPr>
+          <p:cNvPr id="2" name="Title 1">
+            <a:extLst>
+              <a:ext uri="{FF2B5EF4-FFF2-40B4-BE49-F238E27FC236}">
+                <a16:creationId xmlns:a16="http://schemas.microsoft.com/office/drawing/2014/main" id="{C19929FA-4060-5FBB-DA5F-01782E94ADB5}"/>
+              </a:ext>
+            </a:extLst>
+          </p:cNvPr>
+          <p:cNvSpPr>
+            <a:spLocks noGrp="1"/>
+          </p:cNvSpPr>
+          <p:nvPr>
+            <p:ph type="title"/>
+          </p:nvPr>
+        </p:nvSpPr>
+        <p:spPr/>
+        <p:txBody>
+          <a:bodyPr/>
+          <a:lstStyle/>
+          <a:p>
+            <a:endParaRPr lang="en-US"/>
+          </a:p>
+        </p:txBody>
+      </p:sp>
+      <p:sp>
+        <p:nvSpPr>
+          <p:cNvPr id="3" name="Content Placeholder 2">
+            <a:extLst>
+              <a:ext uri="{FF2B5EF4-FFF2-40B4-BE49-F238E27FC236}">
+                <a16:creationId xmlns:a16="http://schemas.microsoft.com/office/drawing/2014/main" id="{61A0BB3D-2541-7FBC-B800-08FE76EE340B}"/>
+              </a:ext>
+            </a:extLst>
+          </p:cNvPr>
+          <p:cNvSpPr>
+            <a:spLocks noGrp="1"/>
+          </p:cNvSpPr>
+          <p:nvPr>
+            <p:ph idx="1"/>
+          </p:nvPr>
+        </p:nvSpPr>
+        <p:spPr/>
+        <p:txBody>
+          <a:bodyPr/>
+          <a:lstStyle/>
+          <a:p>
+            <a:endParaRPr lang="en-US"/>
+          </a:p>
+        </p:txBody>
+      </p:sp>
+      <p:pic>
+        <p:nvPicPr>
+          <p:cNvPr id="5" name="Picture 4">
+            <a:extLst>
+              <a:ext uri="{FF2B5EF4-FFF2-40B4-BE49-F238E27FC236}">
+                <a16:creationId xmlns:a16="http://schemas.microsoft.com/office/drawing/2014/main" id="{F4DFA375-F069-D058-6D3C-25D0613FFA83}"/>
+              </a:ext>
+            </a:extLst>
+          </p:cNvPr>
+          <p:cNvPicPr>
+            <a:picLocks noChangeAspect="1"/>
+          </p:cNvPicPr>
+          <p:nvPr/>
+        </p:nvPicPr>
+        <p:blipFill>
+          <a:blip r:embed="rId2"/>
+          <a:stretch>
+            <a:fillRect/>
+          </a:stretch>
+        </p:blipFill>
+        <p:spPr>
+          <a:xfrm>
+            <a:off x="1890712" y="614362"/>
+            <a:ext cx="8410575" cy="5629275"/>
+          </a:xfrm>
+          <a:prstGeom prst="rect">
+            <a:avLst/>
+          </a:prstGeom>
+        </p:spPr>
+      </p:pic>
+    </p:spTree>
+    <p:extLst>
+      <p:ext uri="{BB962C8B-B14F-4D97-AF65-F5344CB8AC3E}">
+        <p14:creationId xmlns:p14="http://schemas.microsoft.com/office/powerpoint/2010/main" val="1186108255"/>
+      </p:ext>
+    </p:extLst>
+  </p:cSld>
+  <p:clrMapOvr>
+    <a:masterClrMapping/>
+  </p:clrMapOvr>
+</p:sld>
+</file>
+
+<file path=ppt/slides/slide22.xml><?xml version="1.0" encoding="utf-8"?>
+<p:sld xmlns:a="http://schemas.openxmlformats.org/drawingml/2006/main" xmlns:r="http://schemas.openxmlformats.org/officeDocument/2006/relationships" xmlns:p="http://schemas.openxmlformats.org/presentationml/2006/main">
+  <p:cSld>
+    <p:spTree>
+      <p:nvGrpSpPr>
+        <p:cNvPr id="1" name=""/>
+        <p:cNvGrpSpPr/>
+        <p:nvPr/>
+      </p:nvGrpSpPr>
+      <p:grpSpPr>
+        <a:xfrm>
+          <a:off x="0" y="0"/>
+          <a:ext cx="0" cy="0"/>
+          <a:chOff x="0" y="0"/>
+          <a:chExt cx="0" cy="0"/>
+        </a:xfrm>
+      </p:grpSpPr>
+      <p:sp>
+        <p:nvSpPr>
+          <p:cNvPr id="2" name="Title 1">
+            <a:extLst>
+              <a:ext uri="{FF2B5EF4-FFF2-40B4-BE49-F238E27FC236}">
+                <a16:creationId xmlns:a16="http://schemas.microsoft.com/office/drawing/2014/main" id="{75BAC652-5B40-B274-F246-6F66640DD4EF}"/>
+              </a:ext>
+            </a:extLst>
+          </p:cNvPr>
+          <p:cNvSpPr>
+            <a:spLocks noGrp="1"/>
+          </p:cNvSpPr>
+          <p:nvPr>
+            <p:ph type="title"/>
+          </p:nvPr>
+        </p:nvSpPr>
+        <p:spPr/>
+        <p:txBody>
+          <a:bodyPr/>
+          <a:lstStyle/>
+          <a:p>
+            <a:endParaRPr lang="en-US"/>
+          </a:p>
+        </p:txBody>
+      </p:sp>
+      <p:sp>
+        <p:nvSpPr>
+          <p:cNvPr id="3" name="Content Placeholder 2">
+            <a:extLst>
+              <a:ext uri="{FF2B5EF4-FFF2-40B4-BE49-F238E27FC236}">
+                <a16:creationId xmlns:a16="http://schemas.microsoft.com/office/drawing/2014/main" id="{14736978-8D7B-63B2-D3DE-AD4510C6D130}"/>
+              </a:ext>
+            </a:extLst>
+          </p:cNvPr>
+          <p:cNvSpPr>
+            <a:spLocks noGrp="1"/>
+          </p:cNvSpPr>
+          <p:nvPr>
+            <p:ph idx="1"/>
+          </p:nvPr>
+        </p:nvSpPr>
+        <p:spPr/>
+        <p:txBody>
+          <a:bodyPr/>
+          <a:lstStyle/>
+          <a:p>
+            <a:endParaRPr lang="en-US"/>
+          </a:p>
+        </p:txBody>
+      </p:sp>
+      <p:pic>
+        <p:nvPicPr>
+          <p:cNvPr id="5" name="Picture 4">
+            <a:extLst>
+              <a:ext uri="{FF2B5EF4-FFF2-40B4-BE49-F238E27FC236}">
+                <a16:creationId xmlns:a16="http://schemas.microsoft.com/office/drawing/2014/main" id="{C5B8155E-016F-B0AC-D13C-D51E11E44D53}"/>
+              </a:ext>
+            </a:extLst>
+          </p:cNvPr>
+          <p:cNvPicPr>
+            <a:picLocks noChangeAspect="1"/>
+          </p:cNvPicPr>
+          <p:nvPr/>
+        </p:nvPicPr>
+        <p:blipFill>
+          <a:blip r:embed="rId2"/>
+          <a:stretch>
+            <a:fillRect/>
+          </a:stretch>
+        </p:blipFill>
+        <p:spPr>
+          <a:xfrm>
+            <a:off x="1890712" y="614362"/>
+            <a:ext cx="8410575" cy="5629275"/>
+          </a:xfrm>
+          <a:prstGeom prst="rect">
+            <a:avLst/>
+          </a:prstGeom>
+        </p:spPr>
+      </p:pic>
+    </p:spTree>
+    <p:extLst>
+      <p:ext uri="{BB962C8B-B14F-4D97-AF65-F5344CB8AC3E}">
+        <p14:creationId xmlns:p14="http://schemas.microsoft.com/office/powerpoint/2010/main" val="2047275557"/>
+      </p:ext>
+    </p:extLst>
+  </p:cSld>
+  <p:clrMapOvr>
+    <a:masterClrMapping/>
+  </p:clrMapOvr>
+</p:sld>
+</file>
+
+<file path=ppt/slides/slide23.xml><?xml version="1.0" encoding="utf-8"?>
+<p:sld xmlns:a="http://schemas.openxmlformats.org/drawingml/2006/main" xmlns:r="http://schemas.openxmlformats.org/officeDocument/2006/relationships" xmlns:p="http://schemas.openxmlformats.org/presentationml/2006/main">
+  <p:cSld>
+    <p:spTree>
+      <p:nvGrpSpPr>
+        <p:cNvPr id="1" name=""/>
+        <p:cNvGrpSpPr/>
+        <p:nvPr/>
+      </p:nvGrpSpPr>
+      <p:grpSpPr>
+        <a:xfrm>
+          <a:off x="0" y="0"/>
+          <a:ext cx="0" cy="0"/>
+          <a:chOff x="0" y="0"/>
+          <a:chExt cx="0" cy="0"/>
+        </a:xfrm>
+      </p:grpSpPr>
+      <p:sp>
+        <p:nvSpPr>
+          <p:cNvPr id="2" name="Title 1">
+            <a:extLst>
+              <a:ext uri="{FF2B5EF4-FFF2-40B4-BE49-F238E27FC236}">
+                <a16:creationId xmlns:a16="http://schemas.microsoft.com/office/drawing/2014/main" id="{1B011B56-9DE8-7761-E909-4A0205E50B27}"/>
+              </a:ext>
+            </a:extLst>
+          </p:cNvPr>
+          <p:cNvSpPr>
+            <a:spLocks noGrp="1"/>
+          </p:cNvSpPr>
+          <p:nvPr>
+            <p:ph type="title"/>
+          </p:nvPr>
+        </p:nvSpPr>
+        <p:spPr/>
+        <p:txBody>
+          <a:bodyPr/>
+          <a:lstStyle/>
+          <a:p>
+            <a:endParaRPr lang="en-US"/>
+          </a:p>
+        </p:txBody>
+      </p:sp>
+      <p:sp>
+        <p:nvSpPr>
+          <p:cNvPr id="3" name="Content Placeholder 2">
+            <a:extLst>
+              <a:ext uri="{FF2B5EF4-FFF2-40B4-BE49-F238E27FC236}">
+                <a16:creationId xmlns:a16="http://schemas.microsoft.com/office/drawing/2014/main" id="{2F183027-F366-3E69-F0A6-5EF247317126}"/>
+              </a:ext>
+            </a:extLst>
+          </p:cNvPr>
+          <p:cNvSpPr>
+            <a:spLocks noGrp="1"/>
+          </p:cNvSpPr>
+          <p:nvPr>
+            <p:ph idx="1"/>
+          </p:nvPr>
+        </p:nvSpPr>
+        <p:spPr/>
+        <p:txBody>
+          <a:bodyPr/>
+          <a:lstStyle/>
+          <a:p>
+            <a:endParaRPr lang="en-US"/>
+          </a:p>
+        </p:txBody>
+      </p:sp>
+      <p:pic>
+        <p:nvPicPr>
+          <p:cNvPr id="5" name="Picture 4">
+            <a:extLst>
+              <a:ext uri="{FF2B5EF4-FFF2-40B4-BE49-F238E27FC236}">
+                <a16:creationId xmlns:a16="http://schemas.microsoft.com/office/drawing/2014/main" id="{FFB82144-DEEE-27A5-4591-A56B936896E5}"/>
+              </a:ext>
+            </a:extLst>
+          </p:cNvPr>
+          <p:cNvPicPr>
+            <a:picLocks noChangeAspect="1"/>
+          </p:cNvPicPr>
+          <p:nvPr/>
+        </p:nvPicPr>
+        <p:blipFill>
+          <a:blip r:embed="rId2"/>
+          <a:stretch>
+            <a:fillRect/>
+          </a:stretch>
+        </p:blipFill>
+        <p:spPr>
+          <a:xfrm>
+            <a:off x="2811018" y="0"/>
+            <a:ext cx="6569964" cy="6858000"/>
+          </a:xfrm>
+          <a:prstGeom prst="rect">
+            <a:avLst/>
+          </a:prstGeom>
+        </p:spPr>
+      </p:pic>
+    </p:spTree>
+    <p:extLst>
+      <p:ext uri="{BB962C8B-B14F-4D97-AF65-F5344CB8AC3E}">
+        <p14:creationId xmlns:p14="http://schemas.microsoft.com/office/powerpoint/2010/main" val="1105672825"/>
+      </p:ext>
+    </p:extLst>
+  </p:cSld>
+  <p:clrMapOvr>
+    <a:masterClrMapping/>
+  </p:clrMapOvr>
+</p:sld>
+</file>
+
+<file path=ppt/slides/slide24.xml><?xml version="1.0" encoding="utf-8"?>
+<p:sld xmlns:a="http://schemas.openxmlformats.org/drawingml/2006/main" xmlns:r="http://schemas.openxmlformats.org/officeDocument/2006/relationships" xmlns:p="http://schemas.openxmlformats.org/presentationml/2006/main">
+  <p:cSld>
+    <p:spTree>
+      <p:nvGrpSpPr>
+        <p:cNvPr id="1" name=""/>
+        <p:cNvGrpSpPr/>
+        <p:nvPr/>
+      </p:nvGrpSpPr>
+      <p:grpSpPr>
+        <a:xfrm>
+          <a:off x="0" y="0"/>
+          <a:ext cx="0" cy="0"/>
+          <a:chOff x="0" y="0"/>
+          <a:chExt cx="0" cy="0"/>
+        </a:xfrm>
+      </p:grpSpPr>
+      <p:sp>
+        <p:nvSpPr>
+          <p:cNvPr id="2" name="Title 1">
+            <a:extLst>
+              <a:ext uri="{FF2B5EF4-FFF2-40B4-BE49-F238E27FC236}">
+                <a16:creationId xmlns:a16="http://schemas.microsoft.com/office/drawing/2014/main" id="{A3322957-BA25-870A-DB7F-919CCCEA37F6}"/>
+              </a:ext>
+            </a:extLst>
+          </p:cNvPr>
+          <p:cNvSpPr>
+            <a:spLocks noGrp="1"/>
+          </p:cNvSpPr>
+          <p:nvPr>
+            <p:ph type="title"/>
+          </p:nvPr>
+        </p:nvSpPr>
+        <p:spPr/>
+        <p:txBody>
+          <a:bodyPr/>
+          <a:lstStyle/>
+          <a:p>
+            <a:endParaRPr lang="en-US"/>
+          </a:p>
+        </p:txBody>
+      </p:sp>
+      <p:sp>
+        <p:nvSpPr>
+          <p:cNvPr id="3" name="Content Placeholder 2">
+            <a:extLst>
+              <a:ext uri="{FF2B5EF4-FFF2-40B4-BE49-F238E27FC236}">
+                <a16:creationId xmlns:a16="http://schemas.microsoft.com/office/drawing/2014/main" id="{A716BB37-DFF5-98F3-8B1B-0760798A2DB9}"/>
+              </a:ext>
+            </a:extLst>
+          </p:cNvPr>
+          <p:cNvSpPr>
+            <a:spLocks noGrp="1"/>
+          </p:cNvSpPr>
+          <p:nvPr>
+            <p:ph idx="1"/>
+          </p:nvPr>
+        </p:nvSpPr>
+        <p:spPr/>
+        <p:txBody>
+          <a:bodyPr/>
+          <a:lstStyle/>
+          <a:p>
+            <a:endParaRPr lang="en-US"/>
+          </a:p>
+        </p:txBody>
+      </p:sp>
+      <p:pic>
+        <p:nvPicPr>
+          <p:cNvPr id="5" name="Picture 4">
+            <a:extLst>
+              <a:ext uri="{FF2B5EF4-FFF2-40B4-BE49-F238E27FC236}">
+                <a16:creationId xmlns:a16="http://schemas.microsoft.com/office/drawing/2014/main" id="{939DD9A7-7E5A-2651-A738-028542BA62AE}"/>
+              </a:ext>
+            </a:extLst>
+          </p:cNvPr>
+          <p:cNvPicPr>
+            <a:picLocks noChangeAspect="1"/>
+          </p:cNvPicPr>
+          <p:nvPr/>
+        </p:nvPicPr>
+        <p:blipFill>
+          <a:blip r:embed="rId2"/>
+          <a:stretch>
+            <a:fillRect/>
+          </a:stretch>
+        </p:blipFill>
+        <p:spPr>
+          <a:xfrm>
+            <a:off x="2811018" y="0"/>
+            <a:ext cx="6569964" cy="6858000"/>
+          </a:xfrm>
+          <a:prstGeom prst="rect">
+            <a:avLst/>
+          </a:prstGeom>
+        </p:spPr>
+      </p:pic>
+    </p:spTree>
+    <p:extLst>
+      <p:ext uri="{BB962C8B-B14F-4D97-AF65-F5344CB8AC3E}">
+        <p14:creationId xmlns:p14="http://schemas.microsoft.com/office/powerpoint/2010/main" val="4165770529"/>
+      </p:ext>
+    </p:extLst>
+  </p:cSld>
+  <p:clrMapOvr>
+    <a:masterClrMapping/>
+  </p:clrMapOvr>
+</p:sld>
+</file>
+
+<file path=ppt/slides/slide25.xml><?xml version="1.0" encoding="utf-8"?>
+<p:sld xmlns:a="http://schemas.openxmlformats.org/drawingml/2006/main" xmlns:r="http://schemas.openxmlformats.org/officeDocument/2006/relationships" xmlns:p="http://schemas.openxmlformats.org/presentationml/2006/main">
+  <p:cSld>
+    <p:spTree>
+      <p:nvGrpSpPr>
+        <p:cNvPr id="1" name=""/>
+        <p:cNvGrpSpPr/>
+        <p:nvPr/>
+      </p:nvGrpSpPr>
+      <p:grpSpPr>
+        <a:xfrm>
+          <a:off x="0" y="0"/>
+          <a:ext cx="0" cy="0"/>
+          <a:chOff x="0" y="0"/>
+          <a:chExt cx="0" cy="0"/>
+        </a:xfrm>
+      </p:grpSpPr>
+      <p:sp>
+        <p:nvSpPr>
+          <p:cNvPr id="2" name="Title 1">
+            <a:extLst>
+              <a:ext uri="{FF2B5EF4-FFF2-40B4-BE49-F238E27FC236}">
+                <a16:creationId xmlns:a16="http://schemas.microsoft.com/office/drawing/2014/main" id="{870EAD8F-A5E0-E791-BE7A-12ED249B55B8}"/>
+              </a:ext>
+            </a:extLst>
+          </p:cNvPr>
+          <p:cNvSpPr>
+            <a:spLocks noGrp="1"/>
+          </p:cNvSpPr>
+          <p:nvPr>
+            <p:ph type="title"/>
+          </p:nvPr>
+        </p:nvSpPr>
+        <p:spPr/>
+        <p:txBody>
+          <a:bodyPr/>
+          <a:lstStyle/>
+          <a:p>
+            <a:endParaRPr lang="en-US"/>
+          </a:p>
+        </p:txBody>
+      </p:sp>
+      <p:sp>
+        <p:nvSpPr>
+          <p:cNvPr id="3" name="Content Placeholder 2">
+            <a:extLst>
+              <a:ext uri="{FF2B5EF4-FFF2-40B4-BE49-F238E27FC236}">
+                <a16:creationId xmlns:a16="http://schemas.microsoft.com/office/drawing/2014/main" id="{217786A2-9177-4ED7-4197-F0D1CAD7DC17}"/>
+              </a:ext>
+            </a:extLst>
+          </p:cNvPr>
+          <p:cNvSpPr>
+            <a:spLocks noGrp="1"/>
+          </p:cNvSpPr>
+          <p:nvPr>
+            <p:ph idx="1"/>
+          </p:nvPr>
+        </p:nvSpPr>
+        <p:spPr/>
+        <p:txBody>
+          <a:bodyPr/>
+          <a:lstStyle/>
+          <a:p>
+            <a:endParaRPr lang="en-US"/>
+          </a:p>
+        </p:txBody>
+      </p:sp>
+      <p:pic>
+        <p:nvPicPr>
+          <p:cNvPr id="7" name="Picture 6">
+            <a:extLst>
+              <a:ext uri="{FF2B5EF4-FFF2-40B4-BE49-F238E27FC236}">
+                <a16:creationId xmlns:a16="http://schemas.microsoft.com/office/drawing/2014/main" id="{C72F0394-3D32-DD07-6C00-8DAC7D2922B0}"/>
+              </a:ext>
+            </a:extLst>
+          </p:cNvPr>
+          <p:cNvPicPr>
+            <a:picLocks noChangeAspect="1"/>
+          </p:cNvPicPr>
+          <p:nvPr/>
+        </p:nvPicPr>
+        <p:blipFill>
+          <a:blip r:embed="rId2"/>
+          <a:stretch>
+            <a:fillRect/>
+          </a:stretch>
+        </p:blipFill>
+        <p:spPr>
+          <a:xfrm>
+            <a:off x="2811018" y="0"/>
+            <a:ext cx="6569964" cy="6858000"/>
+          </a:xfrm>
+          <a:prstGeom prst="rect">
+            <a:avLst/>
+          </a:prstGeom>
+        </p:spPr>
+      </p:pic>
+    </p:spTree>
+    <p:extLst>
+      <p:ext uri="{BB962C8B-B14F-4D97-AF65-F5344CB8AC3E}">
+        <p14:creationId xmlns:p14="http://schemas.microsoft.com/office/powerpoint/2010/main" val="3384598973"/>
+      </p:ext>
+    </p:extLst>
+  </p:cSld>
+  <p:clrMapOvr>
+    <a:masterClrMapping/>
+  </p:clrMapOvr>
+</p:sld>
+</file>
+
+<file path=ppt/slides/slide26.xml><?xml version="1.0" encoding="utf-8"?>
+<p:sld xmlns:a="http://schemas.openxmlformats.org/drawingml/2006/main" xmlns:r="http://schemas.openxmlformats.org/officeDocument/2006/relationships" xmlns:p="http://schemas.openxmlformats.org/presentationml/2006/main">
+  <p:cSld>
+    <p:spTree>
+      <p:nvGrpSpPr>
+        <p:cNvPr id="1" name=""/>
+        <p:cNvGrpSpPr/>
+        <p:nvPr/>
+      </p:nvGrpSpPr>
+      <p:grpSpPr>
+        <a:xfrm>
+          <a:off x="0" y="0"/>
+          <a:ext cx="0" cy="0"/>
+          <a:chOff x="0" y="0"/>
+          <a:chExt cx="0" cy="0"/>
+        </a:xfrm>
+      </p:grpSpPr>
+      <p:sp>
+        <p:nvSpPr>
+          <p:cNvPr id="2" name="Title 1">
+            <a:extLst>
+              <a:ext uri="{FF2B5EF4-FFF2-40B4-BE49-F238E27FC236}">
+                <a16:creationId xmlns:a16="http://schemas.microsoft.com/office/drawing/2014/main" id="{201060CC-6580-8544-6521-15B86C26299D}"/>
+              </a:ext>
+            </a:extLst>
+          </p:cNvPr>
+          <p:cNvSpPr>
+            <a:spLocks noGrp="1"/>
+          </p:cNvSpPr>
+          <p:nvPr>
+            <p:ph type="title"/>
+          </p:nvPr>
+        </p:nvSpPr>
+        <p:spPr/>
+        <p:txBody>
+          <a:bodyPr/>
+          <a:lstStyle/>
+          <a:p>
+            <a:endParaRPr lang="en-US"/>
+          </a:p>
+        </p:txBody>
+      </p:sp>
+      <p:sp>
+        <p:nvSpPr>
+          <p:cNvPr id="3" name="Content Placeholder 2">
+            <a:extLst>
+              <a:ext uri="{FF2B5EF4-FFF2-40B4-BE49-F238E27FC236}">
+                <a16:creationId xmlns:a16="http://schemas.microsoft.com/office/drawing/2014/main" id="{B9D18044-7AC2-5377-15C7-E07F93CA918F}"/>
+              </a:ext>
+            </a:extLst>
+          </p:cNvPr>
+          <p:cNvSpPr>
+            <a:spLocks noGrp="1"/>
+          </p:cNvSpPr>
+          <p:nvPr>
+            <p:ph idx="1"/>
+          </p:nvPr>
+        </p:nvSpPr>
+        <p:spPr/>
+        <p:txBody>
+          <a:bodyPr/>
+          <a:lstStyle/>
+          <a:p>
+            <a:endParaRPr lang="en-US"/>
+          </a:p>
+        </p:txBody>
+      </p:sp>
+      <p:pic>
+        <p:nvPicPr>
+          <p:cNvPr id="5" name="Picture 4">
+            <a:extLst>
+              <a:ext uri="{FF2B5EF4-FFF2-40B4-BE49-F238E27FC236}">
+                <a16:creationId xmlns:a16="http://schemas.microsoft.com/office/drawing/2014/main" id="{D2C016DF-482A-8BD1-BE49-ADA3BA8D4280}"/>
+              </a:ext>
+            </a:extLst>
+          </p:cNvPr>
+          <p:cNvPicPr>
+            <a:picLocks noChangeAspect="1"/>
+          </p:cNvPicPr>
+          <p:nvPr/>
+        </p:nvPicPr>
+        <p:blipFill>
+          <a:blip r:embed="rId2"/>
+          <a:stretch>
+            <a:fillRect/>
+          </a:stretch>
+        </p:blipFill>
+        <p:spPr>
+          <a:xfrm>
+            <a:off x="2811018" y="0"/>
+            <a:ext cx="6569964" cy="6858000"/>
+          </a:xfrm>
+          <a:prstGeom prst="rect">
+            <a:avLst/>
+          </a:prstGeom>
+        </p:spPr>
+      </p:pic>
+    </p:spTree>
+    <p:extLst>
+      <p:ext uri="{BB962C8B-B14F-4D97-AF65-F5344CB8AC3E}">
+        <p14:creationId xmlns:p14="http://schemas.microsoft.com/office/powerpoint/2010/main" val="3443751830"/>
+      </p:ext>
+    </p:extLst>
+  </p:cSld>
+  <p:clrMapOvr>
+    <a:masterClrMapping/>
+  </p:clrMapOvr>
+</p:sld>
+</file>
+
+<file path=ppt/slides/slide27.xml><?xml version="1.0" encoding="utf-8"?>
+<p:sld xmlns:a="http://schemas.openxmlformats.org/drawingml/2006/main" xmlns:r="http://schemas.openxmlformats.org/officeDocument/2006/relationships" xmlns:p="http://schemas.openxmlformats.org/presentationml/2006/main">
+  <p:cSld>
+    <p:spTree>
+      <p:nvGrpSpPr>
+        <p:cNvPr id="1" name=""/>
+        <p:cNvGrpSpPr/>
+        <p:nvPr/>
+      </p:nvGrpSpPr>
+      <p:grpSpPr>
+        <a:xfrm>
+          <a:off x="0" y="0"/>
+          <a:ext cx="0" cy="0"/>
+          <a:chOff x="0" y="0"/>
+          <a:chExt cx="0" cy="0"/>
+        </a:xfrm>
+      </p:grpSpPr>
+      <p:sp>
+        <p:nvSpPr>
+          <p:cNvPr id="2" name="Title 1">
+            <a:extLst>
+              <a:ext uri="{FF2B5EF4-FFF2-40B4-BE49-F238E27FC236}">
+                <a16:creationId xmlns:a16="http://schemas.microsoft.com/office/drawing/2014/main" id="{EF566A12-6064-FAE6-BF3A-EA0EE52F4F23}"/>
+              </a:ext>
+            </a:extLst>
+          </p:cNvPr>
+          <p:cNvSpPr>
+            <a:spLocks noGrp="1"/>
+          </p:cNvSpPr>
+          <p:nvPr>
+            <p:ph type="title"/>
+          </p:nvPr>
+        </p:nvSpPr>
+        <p:spPr/>
+        <p:txBody>
+          <a:bodyPr/>
+          <a:lstStyle/>
+          <a:p>
+            <a:endParaRPr lang="en-US"/>
+          </a:p>
+        </p:txBody>
+      </p:sp>
+      <p:sp>
+        <p:nvSpPr>
+          <p:cNvPr id="3" name="Content Placeholder 2">
+            <a:extLst>
+              <a:ext uri="{FF2B5EF4-FFF2-40B4-BE49-F238E27FC236}">
+                <a16:creationId xmlns:a16="http://schemas.microsoft.com/office/drawing/2014/main" id="{D797BA6C-B1CF-383A-AFEC-93800E7776D0}"/>
+              </a:ext>
+            </a:extLst>
+          </p:cNvPr>
+          <p:cNvSpPr>
+            <a:spLocks noGrp="1"/>
+          </p:cNvSpPr>
+          <p:nvPr>
+            <p:ph idx="1"/>
+          </p:nvPr>
+        </p:nvSpPr>
+        <p:spPr/>
+        <p:txBody>
+          <a:bodyPr/>
+          <a:lstStyle/>
+          <a:p>
+            <a:endParaRPr lang="en-US"/>
+          </a:p>
+        </p:txBody>
+      </p:sp>
+      <p:pic>
+        <p:nvPicPr>
+          <p:cNvPr id="5" name="Picture 4">
+            <a:extLst>
+              <a:ext uri="{FF2B5EF4-FFF2-40B4-BE49-F238E27FC236}">
+                <a16:creationId xmlns:a16="http://schemas.microsoft.com/office/drawing/2014/main" id="{E983FB14-C514-3AB3-4107-D355A46005F2}"/>
+              </a:ext>
+            </a:extLst>
+          </p:cNvPr>
+          <p:cNvPicPr>
+            <a:picLocks noChangeAspect="1"/>
+          </p:cNvPicPr>
+          <p:nvPr/>
+        </p:nvPicPr>
+        <p:blipFill>
+          <a:blip r:embed="rId2"/>
+          <a:stretch>
+            <a:fillRect/>
+          </a:stretch>
+        </p:blipFill>
+        <p:spPr>
+          <a:xfrm>
+            <a:off x="0" y="225425"/>
+            <a:ext cx="12192000" cy="6407150"/>
+          </a:xfrm>
+          <a:prstGeom prst="rect">
+            <a:avLst/>
+          </a:prstGeom>
+        </p:spPr>
+      </p:pic>
+    </p:spTree>
+    <p:extLst>
+      <p:ext uri="{BB962C8B-B14F-4D97-AF65-F5344CB8AC3E}">
+        <p14:creationId xmlns:p14="http://schemas.microsoft.com/office/powerpoint/2010/main" val="2716879471"/>
+      </p:ext>
+    </p:extLst>
+  </p:cSld>
+  <p:clrMapOvr>
+    <a:masterClrMapping/>
+  </p:clrMapOvr>
+</p:sld>
+</file>
+
+<file path=ppt/slides/slide28.xml><?xml version="1.0" encoding="utf-8"?>
+<p:sld xmlns:a="http://schemas.openxmlformats.org/drawingml/2006/main" xmlns:r="http://schemas.openxmlformats.org/officeDocument/2006/relationships" xmlns:p="http://schemas.openxmlformats.org/presentationml/2006/main">
+  <p:cSld>
+    <p:spTree>
+      <p:nvGrpSpPr>
+        <p:cNvPr id="1" name=""/>
+        <p:cNvGrpSpPr/>
+        <p:nvPr/>
+      </p:nvGrpSpPr>
+      <p:grpSpPr>
+        <a:xfrm>
+          <a:off x="0" y="0"/>
+          <a:ext cx="0" cy="0"/>
+          <a:chOff x="0" y="0"/>
+          <a:chExt cx="0" cy="0"/>
+        </a:xfrm>
+      </p:grpSpPr>
+      <p:sp>
+        <p:nvSpPr>
+          <p:cNvPr id="2" name="Title 1">
+            <a:extLst>
+              <a:ext uri="{FF2B5EF4-FFF2-40B4-BE49-F238E27FC236}">
                 <a16:creationId xmlns:a16="http://schemas.microsoft.com/office/drawing/2014/main" id="{5B5204AC-FB7D-0970-F42A-67583A6AFFB6}"/>
               </a:ext>
             </a:extLst>
@@ -5952,7 +6859,7 @@
 </p:sld>
 </file>
 
-<file path=ppt/slides/slide21.xml><?xml version="1.0" encoding="utf-8"?>
+<file path=ppt/slides/slide29.xml><?xml version="1.0" encoding="utf-8"?>
 <p:sld xmlns:a="http://schemas.openxmlformats.org/drawingml/2006/main" xmlns:r="http://schemas.openxmlformats.org/officeDocument/2006/relationships" xmlns:p="http://schemas.openxmlformats.org/presentationml/2006/main">
   <p:cSld>
     <p:spTree>
@@ -6062,7 +6969,159 @@
 </p:sld>
 </file>
 
-<file path=ppt/slides/slide22.xml><?xml version="1.0" encoding="utf-8"?>
+<file path=ppt/slides/slide3.xml><?xml version="1.0" encoding="utf-8"?>
+<p:sld xmlns:a="http://schemas.openxmlformats.org/drawingml/2006/main" xmlns:r="http://schemas.openxmlformats.org/officeDocument/2006/relationships" xmlns:p="http://schemas.openxmlformats.org/presentationml/2006/main">
+  <p:cSld>
+    <p:spTree>
+      <p:nvGrpSpPr>
+        <p:cNvPr id="1" name="">
+          <a:extLst>
+            <a:ext uri="{FF2B5EF4-FFF2-40B4-BE49-F238E27FC236}">
+              <a16:creationId xmlns:a16="http://schemas.microsoft.com/office/drawing/2014/main" id="{57D9EE95-29B0-444E-862E-C8EBBB46B271}"/>
+            </a:ext>
+          </a:extLst>
+        </p:cNvPr>
+        <p:cNvGrpSpPr/>
+        <p:nvPr/>
+      </p:nvGrpSpPr>
+      <p:grpSpPr>
+        <a:xfrm>
+          <a:off x="0" y="0"/>
+          <a:ext cx="0" cy="0"/>
+          <a:chOff x="0" y="0"/>
+          <a:chExt cx="0" cy="0"/>
+        </a:xfrm>
+      </p:grpSpPr>
+      <p:sp>
+        <p:nvSpPr>
+          <p:cNvPr id="2" name="Title 1">
+            <a:extLst>
+              <a:ext uri="{FF2B5EF4-FFF2-40B4-BE49-F238E27FC236}">
+                <a16:creationId xmlns:a16="http://schemas.microsoft.com/office/drawing/2014/main" id="{5A38A37B-F21C-0AC6-B0A5-6E00BCBF6BD7}"/>
+              </a:ext>
+            </a:extLst>
+          </p:cNvPr>
+          <p:cNvSpPr>
+            <a:spLocks noGrp="1"/>
+          </p:cNvSpPr>
+          <p:nvPr>
+            <p:ph type="title"/>
+          </p:nvPr>
+        </p:nvSpPr>
+        <p:spPr/>
+        <p:txBody>
+          <a:bodyPr/>
+          <a:lstStyle/>
+          <a:p>
+            <a:r>
+              <a:rPr lang="en-US" dirty="0"/>
+              <a:t>Env data plots</a:t>
+            </a:r>
+          </a:p>
+        </p:txBody>
+      </p:sp>
+      <p:sp>
+        <p:nvSpPr>
+          <p:cNvPr id="3" name="Content Placeholder 2">
+            <a:extLst>
+              <a:ext uri="{FF2B5EF4-FFF2-40B4-BE49-F238E27FC236}">
+                <a16:creationId xmlns:a16="http://schemas.microsoft.com/office/drawing/2014/main" id="{C590EC79-74F3-B72A-D66F-4C024AA7B044}"/>
+              </a:ext>
+            </a:extLst>
+          </p:cNvPr>
+          <p:cNvSpPr>
+            <a:spLocks noGrp="1"/>
+          </p:cNvSpPr>
+          <p:nvPr>
+            <p:ph idx="1"/>
+          </p:nvPr>
+        </p:nvSpPr>
+        <p:spPr/>
+        <p:txBody>
+          <a:bodyPr/>
+          <a:lstStyle/>
+          <a:p>
+            <a:r>
+              <a:rPr lang="en-US" dirty="0"/>
+              <a:t>PDO and NPGO</a:t>
+            </a:r>
+          </a:p>
+        </p:txBody>
+      </p:sp>
+      <p:pic>
+        <p:nvPicPr>
+          <p:cNvPr id="6" name="Picture 5">
+            <a:extLst>
+              <a:ext uri="{FF2B5EF4-FFF2-40B4-BE49-F238E27FC236}">
+                <a16:creationId xmlns:a16="http://schemas.microsoft.com/office/drawing/2014/main" id="{A7C554CA-1D2A-2FEB-F754-E7533274B0F3}"/>
+              </a:ext>
+            </a:extLst>
+          </p:cNvPr>
+          <p:cNvPicPr>
+            <a:picLocks noChangeAspect="1"/>
+          </p:cNvPicPr>
+          <p:nvPr/>
+        </p:nvPicPr>
+        <p:blipFill>
+          <a:blip r:embed="rId2"/>
+          <a:stretch>
+            <a:fillRect/>
+          </a:stretch>
+        </p:blipFill>
+        <p:spPr>
+          <a:xfrm>
+            <a:off x="266020" y="2844799"/>
+            <a:ext cx="5720956" cy="3648076"/>
+          </a:xfrm>
+          <a:prstGeom prst="rect">
+            <a:avLst/>
+          </a:prstGeom>
+        </p:spPr>
+      </p:pic>
+      <p:pic>
+        <p:nvPicPr>
+          <p:cNvPr id="9" name="Picture 8">
+            <a:extLst>
+              <a:ext uri="{FF2B5EF4-FFF2-40B4-BE49-F238E27FC236}">
+                <a16:creationId xmlns:a16="http://schemas.microsoft.com/office/drawing/2014/main" id="{71B2C31F-292E-17AE-72DF-3499C1211FDD}"/>
+              </a:ext>
+            </a:extLst>
+          </p:cNvPr>
+          <p:cNvPicPr>
+            <a:picLocks noChangeAspect="1"/>
+          </p:cNvPicPr>
+          <p:nvPr/>
+        </p:nvPicPr>
+        <p:blipFill>
+          <a:blip r:embed="rId3"/>
+          <a:stretch>
+            <a:fillRect/>
+          </a:stretch>
+        </p:blipFill>
+        <p:spPr>
+          <a:xfrm>
+            <a:off x="6205026" y="2844799"/>
+            <a:ext cx="5720956" cy="3648076"/>
+          </a:xfrm>
+          <a:prstGeom prst="rect">
+            <a:avLst/>
+          </a:prstGeom>
+        </p:spPr>
+      </p:pic>
+    </p:spTree>
+    <p:extLst>
+      <p:ext uri="{BB962C8B-B14F-4D97-AF65-F5344CB8AC3E}">
+        <p14:creationId xmlns:p14="http://schemas.microsoft.com/office/powerpoint/2010/main" val="1379679899"/>
+      </p:ext>
+    </p:extLst>
+  </p:cSld>
+  <p:clrMapOvr>
+    <a:masterClrMapping/>
+  </p:clrMapOvr>
+</p:sld>
+</file>
+
+<file path=ppt/slides/slide30.xml><?xml version="1.0" encoding="utf-8"?>
 <p:sld xmlns:a="http://schemas.openxmlformats.org/drawingml/2006/main" xmlns:r="http://schemas.openxmlformats.org/officeDocument/2006/relationships" xmlns:p="http://schemas.openxmlformats.org/presentationml/2006/main">
   <p:cSld>
     <p:spTree>
@@ -6228,7 +7287,7 @@
 </p:sld>
 </file>
 
-<file path=ppt/slides/slide23.xml><?xml version="1.0" encoding="utf-8"?>
+<file path=ppt/slides/slide31.xml><?xml version="1.0" encoding="utf-8"?>
 <p:sld xmlns:a="http://schemas.openxmlformats.org/drawingml/2006/main" xmlns:r="http://schemas.openxmlformats.org/officeDocument/2006/relationships" xmlns:p="http://schemas.openxmlformats.org/presentationml/2006/main">
   <p:cSld>
     <p:spTree>
@@ -6388,7 +7447,7 @@
 </p:sld>
 </file>
 
-<file path=ppt/slides/slide24.xml><?xml version="1.0" encoding="utf-8"?>
+<file path=ppt/slides/slide32.xml><?xml version="1.0" encoding="utf-8"?>
 <p:sld xmlns:a="http://schemas.openxmlformats.org/drawingml/2006/main" xmlns:r="http://schemas.openxmlformats.org/officeDocument/2006/relationships" xmlns:p="http://schemas.openxmlformats.org/presentationml/2006/main">
   <p:cSld>
     <p:spTree>
@@ -6426,7 +7485,10 @@
           <a:bodyPr/>
           <a:lstStyle/>
           <a:p>
-            <a:endParaRPr lang="en-US"/>
+            <a:r>
+              <a:rPr lang="en-US" dirty="0"/>
+              <a:t>Next steps</a:t>
+            </a:r>
           </a:p>
         </p:txBody>
       </p:sp>
@@ -6451,7 +7513,34 @@
           <a:bodyPr/>
           <a:lstStyle/>
           <a:p>
-            <a:endParaRPr lang="en-US"/>
+            <a:r>
+              <a:rPr lang="en-US" dirty="0"/>
+              <a:t>Okay to include all sources</a:t>
+            </a:r>
+          </a:p>
+          <a:p>
+            <a:r>
+              <a:rPr lang="en-US" dirty="0"/>
+              <a:t>Separate by sex</a:t>
+            </a:r>
+          </a:p>
+          <a:p>
+            <a:r>
+              <a:rPr lang="en-US" dirty="0"/>
+              <a:t>Timing of fishery – perhaps just use data in core survey/catch months</a:t>
+            </a:r>
+          </a:p>
+          <a:p>
+            <a:r>
+              <a:rPr lang="en-US" dirty="0"/>
+              <a:t>Think of how to combine weight at age and LW relationship and env variables</a:t>
+            </a:r>
+          </a:p>
+          <a:p>
+            <a:endParaRPr lang="en-US" dirty="0"/>
+          </a:p>
+          <a:p>
+            <a:endParaRPr lang="en-US" dirty="0"/>
           </a:p>
         </p:txBody>
       </p:sp>
@@ -6468,7 +7557,7 @@
 </p:sld>
 </file>
 
-<file path=ppt/slides/slide25.xml><?xml version="1.0" encoding="utf-8"?>
+<file path=ppt/slides/slide33.xml><?xml version="1.0" encoding="utf-8"?>
 <p:sld xmlns:a="http://schemas.openxmlformats.org/drawingml/2006/main" xmlns:r="http://schemas.openxmlformats.org/officeDocument/2006/relationships" xmlns:p="http://schemas.openxmlformats.org/presentationml/2006/main">
   <p:cSld>
     <p:spTree>
@@ -6506,7 +7595,10 @@
           <a:bodyPr/>
           <a:lstStyle/>
           <a:p>
-            <a:endParaRPr lang="en-US"/>
+            <a:r>
+              <a:rPr lang="en-US" dirty="0"/>
+              <a:t>Apr-Jun condition with same year seasonal indicators</a:t>
+            </a:r>
           </a:p>
         </p:txBody>
       </p:sp>
@@ -6531,7 +7623,7 @@
           <a:bodyPr/>
           <a:lstStyle/>
           <a:p>
-            <a:endParaRPr lang="en-US"/>
+            <a:endParaRPr lang="en-US" dirty="0"/>
           </a:p>
         </p:txBody>
       </p:sp>
@@ -6548,7 +7640,7 @@
 </p:sld>
 </file>
 
-<file path=ppt/slides/slide26.xml><?xml version="1.0" encoding="utf-8"?>
+<file path=ppt/slides/slide34.xml><?xml version="1.0" encoding="utf-8"?>
 <p:sld xmlns:a="http://schemas.openxmlformats.org/drawingml/2006/main" xmlns:r="http://schemas.openxmlformats.org/officeDocument/2006/relationships" xmlns:p="http://schemas.openxmlformats.org/presentationml/2006/main">
   <p:cSld>
     <p:spTree>
@@ -6570,7 +7662,7 @@
           <p:cNvPr id="2" name="Title 1">
             <a:extLst>
               <a:ext uri="{FF2B5EF4-FFF2-40B4-BE49-F238E27FC236}">
-                <a16:creationId xmlns:a16="http://schemas.microsoft.com/office/drawing/2014/main" id="{C0B608F8-BBCA-D4E4-04B8-D6FAF5965948}"/>
+                <a16:creationId xmlns:a16="http://schemas.microsoft.com/office/drawing/2014/main" id="{2D9E9978-5464-76B5-6999-2F5334A9AB86}"/>
               </a:ext>
             </a:extLst>
           </p:cNvPr>
@@ -6595,7 +7687,7 @@
           <p:cNvPr id="3" name="Content Placeholder 2">
             <a:extLst>
               <a:ext uri="{FF2B5EF4-FFF2-40B4-BE49-F238E27FC236}">
-                <a16:creationId xmlns:a16="http://schemas.microsoft.com/office/drawing/2014/main" id="{69CBC5E0-A2A5-68A6-C41E-630D4281CB74}"/>
+                <a16:creationId xmlns:a16="http://schemas.microsoft.com/office/drawing/2014/main" id="{5B7842F1-FC74-F530-263F-D5985D038A6E}"/>
               </a:ext>
             </a:extLst>
           </p:cNvPr>
@@ -6615,10 +7707,40 @@
           </a:p>
         </p:txBody>
       </p:sp>
+      <p:pic>
+        <p:nvPicPr>
+          <p:cNvPr id="5" name="Picture 4">
+            <a:extLst>
+              <a:ext uri="{FF2B5EF4-FFF2-40B4-BE49-F238E27FC236}">
+                <a16:creationId xmlns:a16="http://schemas.microsoft.com/office/drawing/2014/main" id="{26382773-FD56-7C67-861C-85EE559C2D7B}"/>
+              </a:ext>
+            </a:extLst>
+          </p:cNvPr>
+          <p:cNvPicPr>
+            <a:picLocks noChangeAspect="1"/>
+          </p:cNvPicPr>
+          <p:nvPr/>
+        </p:nvPicPr>
+        <p:blipFill>
+          <a:blip r:embed="rId2"/>
+          <a:stretch>
+            <a:fillRect/>
+          </a:stretch>
+        </p:blipFill>
+        <p:spPr>
+          <a:xfrm>
+            <a:off x="2262187" y="1281112"/>
+            <a:ext cx="7667625" cy="4295775"/>
+          </a:xfrm>
+          <a:prstGeom prst="rect">
+            <a:avLst/>
+          </a:prstGeom>
+        </p:spPr>
+      </p:pic>
     </p:spTree>
     <p:extLst>
       <p:ext uri="{BB962C8B-B14F-4D97-AF65-F5344CB8AC3E}">
-        <p14:creationId xmlns:p14="http://schemas.microsoft.com/office/powerpoint/2010/main" val="330511795"/>
+        <p14:creationId xmlns:p14="http://schemas.microsoft.com/office/powerpoint/2010/main" val="1680572366"/>
       </p:ext>
     </p:extLst>
   </p:cSld>
@@ -6628,7 +7750,7 @@
 </p:sld>
 </file>
 
-<file path=ppt/slides/slide27.xml><?xml version="1.0" encoding="utf-8"?>
+<file path=ppt/slides/slide35.xml><?xml version="1.0" encoding="utf-8"?>
 <p:sld xmlns:a="http://schemas.openxmlformats.org/drawingml/2006/main" xmlns:r="http://schemas.openxmlformats.org/officeDocument/2006/relationships" xmlns:p="http://schemas.openxmlformats.org/presentationml/2006/main">
   <p:cSld>
     <p:spTree>
@@ -6650,7 +7772,7 @@
           <p:cNvPr id="2" name="Title 1">
             <a:extLst>
               <a:ext uri="{FF2B5EF4-FFF2-40B4-BE49-F238E27FC236}">
-                <a16:creationId xmlns:a16="http://schemas.microsoft.com/office/drawing/2014/main" id="{346CF44C-CD1F-7FFD-1178-6E1FEF57E7A6}"/>
+                <a16:creationId xmlns:a16="http://schemas.microsoft.com/office/drawing/2014/main" id="{C0B608F8-BBCA-D4E4-04B8-D6FAF5965948}"/>
               </a:ext>
             </a:extLst>
           </p:cNvPr>
@@ -6675,7 +7797,7 @@
           <p:cNvPr id="3" name="Content Placeholder 2">
             <a:extLst>
               <a:ext uri="{FF2B5EF4-FFF2-40B4-BE49-F238E27FC236}">
-                <a16:creationId xmlns:a16="http://schemas.microsoft.com/office/drawing/2014/main" id="{0E5F1611-A3B8-8B48-4802-F7C9F91FCC3B}"/>
+                <a16:creationId xmlns:a16="http://schemas.microsoft.com/office/drawing/2014/main" id="{69CBC5E0-A2A5-68A6-C41E-630D4281CB74}"/>
               </a:ext>
             </a:extLst>
           </p:cNvPr>
@@ -6695,10 +7817,40 @@
           </a:p>
         </p:txBody>
       </p:sp>
+      <p:pic>
+        <p:nvPicPr>
+          <p:cNvPr id="5" name="Picture 4">
+            <a:extLst>
+              <a:ext uri="{FF2B5EF4-FFF2-40B4-BE49-F238E27FC236}">
+                <a16:creationId xmlns:a16="http://schemas.microsoft.com/office/drawing/2014/main" id="{47A90585-2C24-1325-0DEE-F204909D65F9}"/>
+              </a:ext>
+            </a:extLst>
+          </p:cNvPr>
+          <p:cNvPicPr>
+            <a:picLocks noChangeAspect="1"/>
+          </p:cNvPicPr>
+          <p:nvPr/>
+        </p:nvPicPr>
+        <p:blipFill>
+          <a:blip r:embed="rId2"/>
+          <a:stretch>
+            <a:fillRect/>
+          </a:stretch>
+        </p:blipFill>
+        <p:spPr>
+          <a:xfrm>
+            <a:off x="2262187" y="1281112"/>
+            <a:ext cx="7667625" cy="4295775"/>
+          </a:xfrm>
+          <a:prstGeom prst="rect">
+            <a:avLst/>
+          </a:prstGeom>
+        </p:spPr>
+      </p:pic>
     </p:spTree>
     <p:extLst>
       <p:ext uri="{BB962C8B-B14F-4D97-AF65-F5344CB8AC3E}">
-        <p14:creationId xmlns:p14="http://schemas.microsoft.com/office/powerpoint/2010/main" val="3630585970"/>
+        <p14:creationId xmlns:p14="http://schemas.microsoft.com/office/powerpoint/2010/main" val="330511795"/>
       </p:ext>
     </p:extLst>
   </p:cSld>
@@ -6708,7 +7860,7 @@
 </p:sld>
 </file>
 
-<file path=ppt/slides/slide28.xml><?xml version="1.0" encoding="utf-8"?>
+<file path=ppt/slides/slide36.xml><?xml version="1.0" encoding="utf-8"?>
 <p:sld xmlns:a="http://schemas.openxmlformats.org/drawingml/2006/main" xmlns:r="http://schemas.openxmlformats.org/officeDocument/2006/relationships" xmlns:p="http://schemas.openxmlformats.org/presentationml/2006/main">
   <p:cSld>
     <p:spTree>
@@ -6730,7 +7882,7 @@
           <p:cNvPr id="2" name="Title 1">
             <a:extLst>
               <a:ext uri="{FF2B5EF4-FFF2-40B4-BE49-F238E27FC236}">
-                <a16:creationId xmlns:a16="http://schemas.microsoft.com/office/drawing/2014/main" id="{BCBCD289-7E48-5C9A-EFA7-3D935118A830}"/>
+                <a16:creationId xmlns:a16="http://schemas.microsoft.com/office/drawing/2014/main" id="{346CF44C-CD1F-7FFD-1178-6E1FEF57E7A6}"/>
               </a:ext>
             </a:extLst>
           </p:cNvPr>
@@ -6755,7 +7907,7 @@
           <p:cNvPr id="3" name="Content Placeholder 2">
             <a:extLst>
               <a:ext uri="{FF2B5EF4-FFF2-40B4-BE49-F238E27FC236}">
-                <a16:creationId xmlns:a16="http://schemas.microsoft.com/office/drawing/2014/main" id="{308B9F9F-32C3-BF94-4533-D143344C9A6C}"/>
+                <a16:creationId xmlns:a16="http://schemas.microsoft.com/office/drawing/2014/main" id="{0E5F1611-A3B8-8B48-4802-F7C9F91FCC3B}"/>
               </a:ext>
             </a:extLst>
           </p:cNvPr>
@@ -6775,10 +7927,40 @@
           </a:p>
         </p:txBody>
       </p:sp>
+      <p:pic>
+        <p:nvPicPr>
+          <p:cNvPr id="5" name="Picture 4">
+            <a:extLst>
+              <a:ext uri="{FF2B5EF4-FFF2-40B4-BE49-F238E27FC236}">
+                <a16:creationId xmlns:a16="http://schemas.microsoft.com/office/drawing/2014/main" id="{A542F9F7-C939-5E3E-2F78-E5B4C15D453A}"/>
+              </a:ext>
+            </a:extLst>
+          </p:cNvPr>
+          <p:cNvPicPr>
+            <a:picLocks noChangeAspect="1"/>
+          </p:cNvPicPr>
+          <p:nvPr/>
+        </p:nvPicPr>
+        <p:blipFill>
+          <a:blip r:embed="rId2"/>
+          <a:stretch>
+            <a:fillRect/>
+          </a:stretch>
+        </p:blipFill>
+        <p:spPr>
+          <a:xfrm>
+            <a:off x="2474603" y="1825625"/>
+            <a:ext cx="7667625" cy="4295775"/>
+          </a:xfrm>
+          <a:prstGeom prst="rect">
+            <a:avLst/>
+          </a:prstGeom>
+        </p:spPr>
+      </p:pic>
     </p:spTree>
     <p:extLst>
       <p:ext uri="{BB962C8B-B14F-4D97-AF65-F5344CB8AC3E}">
-        <p14:creationId xmlns:p14="http://schemas.microsoft.com/office/powerpoint/2010/main" val="4291675638"/>
+        <p14:creationId xmlns:p14="http://schemas.microsoft.com/office/powerpoint/2010/main" val="3630585970"/>
       </p:ext>
     </p:extLst>
   </p:cSld>
@@ -6788,7 +7970,7 @@
 </p:sld>
 </file>
 
-<file path=ppt/slides/slide29.xml><?xml version="1.0" encoding="utf-8"?>
+<file path=ppt/slides/slide37.xml><?xml version="1.0" encoding="utf-8"?>
 <p:sld xmlns:a="http://schemas.openxmlformats.org/drawingml/2006/main" xmlns:r="http://schemas.openxmlformats.org/officeDocument/2006/relationships" xmlns:p="http://schemas.openxmlformats.org/presentationml/2006/main">
   <p:cSld>
     <p:spTree>
@@ -6810,7 +7992,7 @@
           <p:cNvPr id="2" name="Title 1">
             <a:extLst>
               <a:ext uri="{FF2B5EF4-FFF2-40B4-BE49-F238E27FC236}">
-                <a16:creationId xmlns:a16="http://schemas.microsoft.com/office/drawing/2014/main" id="{CFCD8A87-80DC-C180-D3F1-FFE60E84471A}"/>
+                <a16:creationId xmlns:a16="http://schemas.microsoft.com/office/drawing/2014/main" id="{BCBCD289-7E48-5C9A-EFA7-3D935118A830}"/>
               </a:ext>
             </a:extLst>
           </p:cNvPr>
@@ -6835,7 +8017,7 @@
           <p:cNvPr id="3" name="Content Placeholder 2">
             <a:extLst>
               <a:ext uri="{FF2B5EF4-FFF2-40B4-BE49-F238E27FC236}">
-                <a16:creationId xmlns:a16="http://schemas.microsoft.com/office/drawing/2014/main" id="{B2064F4C-0661-F4C6-1DB0-87302985C104}"/>
+                <a16:creationId xmlns:a16="http://schemas.microsoft.com/office/drawing/2014/main" id="{308B9F9F-32C3-BF94-4533-D143344C9A6C}"/>
               </a:ext>
             </a:extLst>
           </p:cNvPr>
@@ -6858,7 +8040,7 @@
     </p:spTree>
     <p:extLst>
       <p:ext uri="{BB962C8B-B14F-4D97-AF65-F5344CB8AC3E}">
-        <p14:creationId xmlns:p14="http://schemas.microsoft.com/office/powerpoint/2010/main" val="1264616559"/>
+        <p14:creationId xmlns:p14="http://schemas.microsoft.com/office/powerpoint/2010/main" val="4291675638"/>
       </p:ext>
     </p:extLst>
   </p:cSld>
@@ -6868,7 +8050,7 @@
 </p:sld>
 </file>
 
-<file path=ppt/slides/slide3.xml><?xml version="1.0" encoding="utf-8"?>
+<file path=ppt/slides/slide38.xml><?xml version="1.0" encoding="utf-8"?>
 <p:sld xmlns:a="http://schemas.openxmlformats.org/drawingml/2006/main" xmlns:r="http://schemas.openxmlformats.org/officeDocument/2006/relationships" xmlns:p="http://schemas.openxmlformats.org/presentationml/2006/main">
   <p:cSld>
     <p:spTree>
@@ -6885,12 +8067,234 @@
           <a:chExt cx="0" cy="0"/>
         </a:xfrm>
       </p:grpSpPr>
+      <p:sp>
+        <p:nvSpPr>
+          <p:cNvPr id="2" name="Title 1">
+            <a:extLst>
+              <a:ext uri="{FF2B5EF4-FFF2-40B4-BE49-F238E27FC236}">
+                <a16:creationId xmlns:a16="http://schemas.microsoft.com/office/drawing/2014/main" id="{CFCD8A87-80DC-C180-D3F1-FFE60E84471A}"/>
+              </a:ext>
+            </a:extLst>
+          </p:cNvPr>
+          <p:cNvSpPr>
+            <a:spLocks noGrp="1"/>
+          </p:cNvSpPr>
+          <p:nvPr>
+            <p:ph type="title"/>
+          </p:nvPr>
+        </p:nvSpPr>
+        <p:spPr/>
+        <p:txBody>
+          <a:bodyPr/>
+          <a:lstStyle/>
+          <a:p>
+            <a:endParaRPr lang="en-US"/>
+          </a:p>
+        </p:txBody>
+      </p:sp>
+      <p:sp>
+        <p:nvSpPr>
+          <p:cNvPr id="3" name="Content Placeholder 2">
+            <a:extLst>
+              <a:ext uri="{FF2B5EF4-FFF2-40B4-BE49-F238E27FC236}">
+                <a16:creationId xmlns:a16="http://schemas.microsoft.com/office/drawing/2014/main" id="{B2064F4C-0661-F4C6-1DB0-87302985C104}"/>
+              </a:ext>
+            </a:extLst>
+          </p:cNvPr>
+          <p:cNvSpPr>
+            <a:spLocks noGrp="1"/>
+          </p:cNvSpPr>
+          <p:nvPr>
+            <p:ph idx="1"/>
+          </p:nvPr>
+        </p:nvSpPr>
+        <p:spPr/>
+        <p:txBody>
+          <a:bodyPr/>
+          <a:lstStyle/>
+          <a:p>
+            <a:endParaRPr lang="en-US"/>
+          </a:p>
+        </p:txBody>
+      </p:sp>
+    </p:spTree>
+    <p:extLst>
+      <p:ext uri="{BB962C8B-B14F-4D97-AF65-F5344CB8AC3E}">
+        <p14:creationId xmlns:p14="http://schemas.microsoft.com/office/powerpoint/2010/main" val="1264616559"/>
+      </p:ext>
+    </p:extLst>
+  </p:cSld>
+  <p:clrMapOvr>
+    <a:masterClrMapping/>
+  </p:clrMapOvr>
+</p:sld>
+</file>
+
+<file path=ppt/slides/slide39.xml><?xml version="1.0" encoding="utf-8"?>
+<p:sld xmlns:a="http://schemas.openxmlformats.org/drawingml/2006/main" xmlns:r="http://schemas.openxmlformats.org/officeDocument/2006/relationships" xmlns:p="http://schemas.openxmlformats.org/presentationml/2006/main">
+  <p:cSld>
+    <p:spTree>
+      <p:nvGrpSpPr>
+        <p:cNvPr id="1" name=""/>
+        <p:cNvGrpSpPr/>
+        <p:nvPr/>
+      </p:nvGrpSpPr>
+      <p:grpSpPr>
+        <a:xfrm>
+          <a:off x="0" y="0"/>
+          <a:ext cx="0" cy="0"/>
+          <a:chOff x="0" y="0"/>
+          <a:chExt cx="0" cy="0"/>
+        </a:xfrm>
+      </p:grpSpPr>
+      <p:sp>
+        <p:nvSpPr>
+          <p:cNvPr id="2" name="Title 1">
+            <a:extLst>
+              <a:ext uri="{FF2B5EF4-FFF2-40B4-BE49-F238E27FC236}">
+                <a16:creationId xmlns:a16="http://schemas.microsoft.com/office/drawing/2014/main" id="{2473313D-9410-7606-DB19-CE63EE0B4B09}"/>
+              </a:ext>
+            </a:extLst>
+          </p:cNvPr>
+          <p:cNvSpPr>
+            <a:spLocks noGrp="1"/>
+          </p:cNvSpPr>
+          <p:nvPr>
+            <p:ph type="title"/>
+          </p:nvPr>
+        </p:nvSpPr>
+        <p:spPr/>
+        <p:txBody>
+          <a:bodyPr/>
+          <a:lstStyle/>
+          <a:p>
+            <a:endParaRPr lang="en-US"/>
+          </a:p>
+        </p:txBody>
+      </p:sp>
+      <p:sp>
+        <p:nvSpPr>
+          <p:cNvPr id="3" name="Content Placeholder 2">
+            <a:extLst>
+              <a:ext uri="{FF2B5EF4-FFF2-40B4-BE49-F238E27FC236}">
+                <a16:creationId xmlns:a16="http://schemas.microsoft.com/office/drawing/2014/main" id="{2F30C77D-E59B-5D9E-C679-3B98F968634F}"/>
+              </a:ext>
+            </a:extLst>
+          </p:cNvPr>
+          <p:cNvSpPr>
+            <a:spLocks noGrp="1"/>
+          </p:cNvSpPr>
+          <p:nvPr>
+            <p:ph idx="1"/>
+          </p:nvPr>
+        </p:nvSpPr>
+        <p:spPr/>
+        <p:txBody>
+          <a:bodyPr/>
+          <a:lstStyle/>
+          <a:p>
+            <a:endParaRPr lang="en-US"/>
+          </a:p>
+        </p:txBody>
+      </p:sp>
+    </p:spTree>
+    <p:extLst>
+      <p:ext uri="{BB962C8B-B14F-4D97-AF65-F5344CB8AC3E}">
+        <p14:creationId xmlns:p14="http://schemas.microsoft.com/office/powerpoint/2010/main" val="787473245"/>
+      </p:ext>
+    </p:extLst>
+  </p:cSld>
+  <p:clrMapOvr>
+    <a:masterClrMapping/>
+  </p:clrMapOvr>
+</p:sld>
+</file>
+
+<file path=ppt/slides/slide4.xml><?xml version="1.0" encoding="utf-8"?>
+<p:sld xmlns:a="http://schemas.openxmlformats.org/drawingml/2006/main" xmlns:r="http://schemas.openxmlformats.org/officeDocument/2006/relationships" xmlns:p="http://schemas.openxmlformats.org/presentationml/2006/main">
+  <p:cSld>
+    <p:spTree>
+      <p:nvGrpSpPr>
+        <p:cNvPr id="1" name="">
+          <a:extLst>
+            <a:ext uri="{FF2B5EF4-FFF2-40B4-BE49-F238E27FC236}">
+              <a16:creationId xmlns:a16="http://schemas.microsoft.com/office/drawing/2014/main" id="{EEB1E60C-20CB-5321-9E5D-94DB47F4B15A}"/>
+            </a:ext>
+          </a:extLst>
+        </p:cNvPr>
+        <p:cNvGrpSpPr/>
+        <p:nvPr/>
+      </p:nvGrpSpPr>
+      <p:grpSpPr>
+        <a:xfrm>
+          <a:off x="0" y="0"/>
+          <a:ext cx="0" cy="0"/>
+          <a:chOff x="0" y="0"/>
+          <a:chExt cx="0" cy="0"/>
+        </a:xfrm>
+      </p:grpSpPr>
+      <p:sp>
+        <p:nvSpPr>
+          <p:cNvPr id="2" name="Title 1">
+            <a:extLst>
+              <a:ext uri="{FF2B5EF4-FFF2-40B4-BE49-F238E27FC236}">
+                <a16:creationId xmlns:a16="http://schemas.microsoft.com/office/drawing/2014/main" id="{5DA238A7-6716-640F-7161-17FECB540E5B}"/>
+              </a:ext>
+            </a:extLst>
+          </p:cNvPr>
+          <p:cNvSpPr>
+            <a:spLocks noGrp="1"/>
+          </p:cNvSpPr>
+          <p:nvPr>
+            <p:ph type="title"/>
+          </p:nvPr>
+        </p:nvSpPr>
+        <p:spPr/>
+        <p:txBody>
+          <a:bodyPr/>
+          <a:lstStyle/>
+          <a:p>
+            <a:r>
+              <a:rPr lang="en-US" dirty="0"/>
+              <a:t>Env data plots</a:t>
+            </a:r>
+          </a:p>
+        </p:txBody>
+      </p:sp>
+      <p:sp>
+        <p:nvSpPr>
+          <p:cNvPr id="3" name="Content Placeholder 2">
+            <a:extLst>
+              <a:ext uri="{FF2B5EF4-FFF2-40B4-BE49-F238E27FC236}">
+                <a16:creationId xmlns:a16="http://schemas.microsoft.com/office/drawing/2014/main" id="{67A12D8A-C703-C271-5D8B-3E9500284D34}"/>
+              </a:ext>
+            </a:extLst>
+          </p:cNvPr>
+          <p:cNvSpPr>
+            <a:spLocks noGrp="1"/>
+          </p:cNvSpPr>
+          <p:nvPr>
+            <p:ph idx="1"/>
+          </p:nvPr>
+        </p:nvSpPr>
+        <p:spPr/>
+        <p:txBody>
+          <a:bodyPr/>
+          <a:lstStyle/>
+          <a:p>
+            <a:r>
+              <a:rPr lang="en-US" dirty="0"/>
+              <a:t>ONI and NPI</a:t>
+            </a:r>
+          </a:p>
+        </p:txBody>
+      </p:sp>
       <p:pic>
         <p:nvPicPr>
-          <p:cNvPr id="9" name="Picture 8">
-            <a:extLst>
-              <a:ext uri="{FF2B5EF4-FFF2-40B4-BE49-F238E27FC236}">
-                <a16:creationId xmlns:a16="http://schemas.microsoft.com/office/drawing/2014/main" id="{B4461000-CD6C-C489-4AF9-496580DE2C94}"/>
+          <p:cNvPr id="5" name="Picture 4">
+            <a:extLst>
+              <a:ext uri="{FF2B5EF4-FFF2-40B4-BE49-F238E27FC236}">
+                <a16:creationId xmlns:a16="http://schemas.microsoft.com/office/drawing/2014/main" id="{FFF0C0A6-3A03-C95A-6F50-3F21A82E042A}"/>
               </a:ext>
             </a:extLst>
           </p:cNvPr>
@@ -6907,81 +8311,20 @@
         </p:blipFill>
         <p:spPr>
           <a:xfrm>
-            <a:off x="6272199" y="858981"/>
-            <a:ext cx="5324747" cy="5731164"/>
+            <a:off x="148331" y="2993641"/>
+            <a:ext cx="5766286" cy="3676982"/>
           </a:xfrm>
           <a:prstGeom prst="rect">
             <a:avLst/>
           </a:prstGeom>
         </p:spPr>
       </p:pic>
-      <p:sp>
-        <p:nvSpPr>
-          <p:cNvPr id="2" name="Title 1">
-            <a:extLst>
-              <a:ext uri="{FF2B5EF4-FFF2-40B4-BE49-F238E27FC236}">
-                <a16:creationId xmlns:a16="http://schemas.microsoft.com/office/drawing/2014/main" id="{7C99787E-C5E9-7C55-BF99-5D920886E980}"/>
-              </a:ext>
-            </a:extLst>
-          </p:cNvPr>
-          <p:cNvSpPr>
-            <a:spLocks noGrp="1"/>
-          </p:cNvSpPr>
-          <p:nvPr>
-            <p:ph type="title"/>
-          </p:nvPr>
-        </p:nvSpPr>
-        <p:spPr/>
-        <p:txBody>
-          <a:bodyPr/>
-          <a:lstStyle/>
-          <a:p>
-            <a:r>
-              <a:rPr lang="en-US" dirty="0"/>
-              <a:t>Le </a:t>
-            </a:r>
-            <a:r>
-              <a:rPr lang="en-US" dirty="0" err="1"/>
-              <a:t>Cren’s</a:t>
-            </a:r>
-            <a:r>
-              <a:rPr lang="en-US" dirty="0"/>
-              <a:t> body condition</a:t>
-            </a:r>
-          </a:p>
-        </p:txBody>
-      </p:sp>
-      <p:sp>
-        <p:nvSpPr>
-          <p:cNvPr id="3" name="Content Placeholder 2">
-            <a:extLst>
-              <a:ext uri="{FF2B5EF4-FFF2-40B4-BE49-F238E27FC236}">
-                <a16:creationId xmlns:a16="http://schemas.microsoft.com/office/drawing/2014/main" id="{90C36CF5-35F6-7683-E969-73033189FB70}"/>
-              </a:ext>
-            </a:extLst>
-          </p:cNvPr>
-          <p:cNvSpPr>
-            <a:spLocks noGrp="1"/>
-          </p:cNvSpPr>
-          <p:nvPr>
-            <p:ph idx="1"/>
-          </p:nvPr>
-        </p:nvSpPr>
-        <p:spPr/>
-        <p:txBody>
-          <a:bodyPr/>
-          <a:lstStyle/>
-          <a:p>
-            <a:endParaRPr lang="en-US" dirty="0"/>
-          </a:p>
-        </p:txBody>
-      </p:sp>
       <p:pic>
         <p:nvPicPr>
-          <p:cNvPr id="11" name="Picture 10">
-            <a:extLst>
-              <a:ext uri="{FF2B5EF4-FFF2-40B4-BE49-F238E27FC236}">
-                <a16:creationId xmlns:a16="http://schemas.microsoft.com/office/drawing/2014/main" id="{F96F4006-B815-AF60-A4C3-097F022B6D0D}"/>
+          <p:cNvPr id="8" name="Picture 7">
+            <a:extLst>
+              <a:ext uri="{FF2B5EF4-FFF2-40B4-BE49-F238E27FC236}">
+                <a16:creationId xmlns:a16="http://schemas.microsoft.com/office/drawing/2014/main" id="{156E5472-1329-A51D-495D-A204CDAE34F7}"/>
               </a:ext>
             </a:extLst>
           </p:cNvPr>
@@ -6998,8 +8341,210 @@
         </p:blipFill>
         <p:spPr>
           <a:xfrm>
-            <a:off x="235594" y="2576945"/>
-            <a:ext cx="5945824" cy="3338946"/>
+            <a:off x="6096000" y="2993641"/>
+            <a:ext cx="5766287" cy="3676982"/>
+          </a:xfrm>
+          <a:prstGeom prst="rect">
+            <a:avLst/>
+          </a:prstGeom>
+        </p:spPr>
+      </p:pic>
+    </p:spTree>
+    <p:extLst>
+      <p:ext uri="{BB962C8B-B14F-4D97-AF65-F5344CB8AC3E}">
+        <p14:creationId xmlns:p14="http://schemas.microsoft.com/office/powerpoint/2010/main" val="1212096548"/>
+      </p:ext>
+    </p:extLst>
+  </p:cSld>
+  <p:clrMapOvr>
+    <a:masterClrMapping/>
+  </p:clrMapOvr>
+</p:sld>
+</file>
+
+<file path=ppt/slides/slide40.xml><?xml version="1.0" encoding="utf-8"?>
+<p:sld xmlns:a="http://schemas.openxmlformats.org/drawingml/2006/main" xmlns:r="http://schemas.openxmlformats.org/officeDocument/2006/relationships" xmlns:p="http://schemas.openxmlformats.org/presentationml/2006/main">
+  <p:cSld>
+    <p:spTree>
+      <p:nvGrpSpPr>
+        <p:cNvPr id="1" name=""/>
+        <p:cNvGrpSpPr/>
+        <p:nvPr/>
+      </p:nvGrpSpPr>
+      <p:grpSpPr>
+        <a:xfrm>
+          <a:off x="0" y="0"/>
+          <a:ext cx="0" cy="0"/>
+          <a:chOff x="0" y="0"/>
+          <a:chExt cx="0" cy="0"/>
+        </a:xfrm>
+      </p:grpSpPr>
+      <p:sp>
+        <p:nvSpPr>
+          <p:cNvPr id="2" name="Title 1">
+            <a:extLst>
+              <a:ext uri="{FF2B5EF4-FFF2-40B4-BE49-F238E27FC236}">
+                <a16:creationId xmlns:a16="http://schemas.microsoft.com/office/drawing/2014/main" id="{17F016EE-8CCC-98C7-EBF4-3DD8648C6038}"/>
+              </a:ext>
+            </a:extLst>
+          </p:cNvPr>
+          <p:cNvSpPr>
+            <a:spLocks noGrp="1"/>
+          </p:cNvSpPr>
+          <p:nvPr>
+            <p:ph type="title"/>
+          </p:nvPr>
+        </p:nvSpPr>
+        <p:spPr/>
+        <p:txBody>
+          <a:bodyPr/>
+          <a:lstStyle/>
+          <a:p>
+            <a:endParaRPr lang="en-US"/>
+          </a:p>
+        </p:txBody>
+      </p:sp>
+      <p:sp>
+        <p:nvSpPr>
+          <p:cNvPr id="3" name="Content Placeholder 2">
+            <a:extLst>
+              <a:ext uri="{FF2B5EF4-FFF2-40B4-BE49-F238E27FC236}">
+                <a16:creationId xmlns:a16="http://schemas.microsoft.com/office/drawing/2014/main" id="{FCEEF53E-840B-45A6-AEE4-B33A69894A7B}"/>
+              </a:ext>
+            </a:extLst>
+          </p:cNvPr>
+          <p:cNvSpPr>
+            <a:spLocks noGrp="1"/>
+          </p:cNvSpPr>
+          <p:nvPr>
+            <p:ph idx="1"/>
+          </p:nvPr>
+        </p:nvSpPr>
+        <p:spPr/>
+        <p:txBody>
+          <a:bodyPr/>
+          <a:lstStyle/>
+          <a:p>
+            <a:endParaRPr lang="en-US"/>
+          </a:p>
+        </p:txBody>
+      </p:sp>
+    </p:spTree>
+    <p:extLst>
+      <p:ext uri="{BB962C8B-B14F-4D97-AF65-F5344CB8AC3E}">
+        <p14:creationId xmlns:p14="http://schemas.microsoft.com/office/powerpoint/2010/main" val="612133903"/>
+      </p:ext>
+    </p:extLst>
+  </p:cSld>
+  <p:clrMapOvr>
+    <a:masterClrMapping/>
+  </p:clrMapOvr>
+</p:sld>
+</file>
+
+<file path=ppt/slides/slide41.xml><?xml version="1.0" encoding="utf-8"?>
+<p:sld xmlns:a="http://schemas.openxmlformats.org/drawingml/2006/main" xmlns:r="http://schemas.openxmlformats.org/officeDocument/2006/relationships" xmlns:p="http://schemas.openxmlformats.org/presentationml/2006/main">
+  <p:cSld>
+    <p:spTree>
+      <p:nvGrpSpPr>
+        <p:cNvPr id="1" name=""/>
+        <p:cNvGrpSpPr/>
+        <p:nvPr/>
+      </p:nvGrpSpPr>
+      <p:grpSpPr>
+        <a:xfrm>
+          <a:off x="0" y="0"/>
+          <a:ext cx="0" cy="0"/>
+          <a:chOff x="0" y="0"/>
+          <a:chExt cx="0" cy="0"/>
+        </a:xfrm>
+      </p:grpSpPr>
+      <p:sp>
+        <p:nvSpPr>
+          <p:cNvPr id="2" name="Title 1">
+            <a:extLst>
+              <a:ext uri="{FF2B5EF4-FFF2-40B4-BE49-F238E27FC236}">
+                <a16:creationId xmlns:a16="http://schemas.microsoft.com/office/drawing/2014/main" id="{7C99787E-C5E9-7C55-BF99-5D920886E980}"/>
+              </a:ext>
+            </a:extLst>
+          </p:cNvPr>
+          <p:cNvSpPr>
+            <a:spLocks noGrp="1"/>
+          </p:cNvSpPr>
+          <p:nvPr>
+            <p:ph type="title"/>
+          </p:nvPr>
+        </p:nvSpPr>
+        <p:spPr/>
+        <p:txBody>
+          <a:bodyPr/>
+          <a:lstStyle/>
+          <a:p>
+            <a:r>
+              <a:rPr lang="en-US" dirty="0"/>
+              <a:t>Le </a:t>
+            </a:r>
+            <a:r>
+              <a:rPr lang="en-US" dirty="0" err="1"/>
+              <a:t>Cren’s</a:t>
+            </a:r>
+            <a:r>
+              <a:rPr lang="en-US" dirty="0"/>
+              <a:t> body condition</a:t>
+            </a:r>
+          </a:p>
+        </p:txBody>
+      </p:sp>
+      <p:sp>
+        <p:nvSpPr>
+          <p:cNvPr id="3" name="Content Placeholder 2">
+            <a:extLst>
+              <a:ext uri="{FF2B5EF4-FFF2-40B4-BE49-F238E27FC236}">
+                <a16:creationId xmlns:a16="http://schemas.microsoft.com/office/drawing/2014/main" id="{90C36CF5-35F6-7683-E969-73033189FB70}"/>
+              </a:ext>
+            </a:extLst>
+          </p:cNvPr>
+          <p:cNvSpPr>
+            <a:spLocks noGrp="1"/>
+          </p:cNvSpPr>
+          <p:nvPr>
+            <p:ph idx="1"/>
+          </p:nvPr>
+        </p:nvSpPr>
+        <p:spPr/>
+        <p:txBody>
+          <a:bodyPr/>
+          <a:lstStyle/>
+          <a:p>
+            <a:endParaRPr lang="en-US" b="1" dirty="0"/>
+          </a:p>
+        </p:txBody>
+      </p:sp>
+      <p:pic>
+        <p:nvPicPr>
+          <p:cNvPr id="9" name="Picture 8">
+            <a:extLst>
+              <a:ext uri="{FF2B5EF4-FFF2-40B4-BE49-F238E27FC236}">
+                <a16:creationId xmlns:a16="http://schemas.microsoft.com/office/drawing/2014/main" id="{B4461000-CD6C-C489-4AF9-496580DE2C94}"/>
+              </a:ext>
+            </a:extLst>
+          </p:cNvPr>
+          <p:cNvPicPr>
+            <a:picLocks noChangeAspect="1"/>
+          </p:cNvPicPr>
+          <p:nvPr/>
+        </p:nvPicPr>
+        <p:blipFill>
+          <a:blip r:embed="rId2"/>
+          <a:srcRect r="827" b="51683"/>
+          <a:stretch>
+            <a:fillRect/>
+          </a:stretch>
+        </p:blipFill>
+        <p:spPr>
+          <a:xfrm>
+            <a:off x="1564234" y="1740095"/>
+            <a:ext cx="9063531" cy="4752780"/>
           </a:xfrm>
           <a:prstGeom prst="rect">
             <a:avLst/>
@@ -7019,7 +8564,7 @@
 </p:sld>
 </file>
 
-<file path=ppt/slides/slide30.xml><?xml version="1.0" encoding="utf-8"?>
+<file path=ppt/slides/slide42.xml><?xml version="1.0" encoding="utf-8"?>
 <p:sld xmlns:a="http://schemas.openxmlformats.org/drawingml/2006/main" xmlns:r="http://schemas.openxmlformats.org/officeDocument/2006/relationships" xmlns:p="http://schemas.openxmlformats.org/presentationml/2006/main">
   <p:cSld>
     <p:spTree>
@@ -7041,166 +8586,6 @@
           <p:cNvPr id="2" name="Title 1">
             <a:extLst>
               <a:ext uri="{FF2B5EF4-FFF2-40B4-BE49-F238E27FC236}">
-                <a16:creationId xmlns:a16="http://schemas.microsoft.com/office/drawing/2014/main" id="{2473313D-9410-7606-DB19-CE63EE0B4B09}"/>
-              </a:ext>
-            </a:extLst>
-          </p:cNvPr>
-          <p:cNvSpPr>
-            <a:spLocks noGrp="1"/>
-          </p:cNvSpPr>
-          <p:nvPr>
-            <p:ph type="title"/>
-          </p:nvPr>
-        </p:nvSpPr>
-        <p:spPr/>
-        <p:txBody>
-          <a:bodyPr/>
-          <a:lstStyle/>
-          <a:p>
-            <a:endParaRPr lang="en-US"/>
-          </a:p>
-        </p:txBody>
-      </p:sp>
-      <p:sp>
-        <p:nvSpPr>
-          <p:cNvPr id="3" name="Content Placeholder 2">
-            <a:extLst>
-              <a:ext uri="{FF2B5EF4-FFF2-40B4-BE49-F238E27FC236}">
-                <a16:creationId xmlns:a16="http://schemas.microsoft.com/office/drawing/2014/main" id="{2F30C77D-E59B-5D9E-C679-3B98F968634F}"/>
-              </a:ext>
-            </a:extLst>
-          </p:cNvPr>
-          <p:cNvSpPr>
-            <a:spLocks noGrp="1"/>
-          </p:cNvSpPr>
-          <p:nvPr>
-            <p:ph idx="1"/>
-          </p:nvPr>
-        </p:nvSpPr>
-        <p:spPr/>
-        <p:txBody>
-          <a:bodyPr/>
-          <a:lstStyle/>
-          <a:p>
-            <a:endParaRPr lang="en-US"/>
-          </a:p>
-        </p:txBody>
-      </p:sp>
-    </p:spTree>
-    <p:extLst>
-      <p:ext uri="{BB962C8B-B14F-4D97-AF65-F5344CB8AC3E}">
-        <p14:creationId xmlns:p14="http://schemas.microsoft.com/office/powerpoint/2010/main" val="787473245"/>
-      </p:ext>
-    </p:extLst>
-  </p:cSld>
-  <p:clrMapOvr>
-    <a:masterClrMapping/>
-  </p:clrMapOvr>
-</p:sld>
-</file>
-
-<file path=ppt/slides/slide31.xml><?xml version="1.0" encoding="utf-8"?>
-<p:sld xmlns:a="http://schemas.openxmlformats.org/drawingml/2006/main" xmlns:r="http://schemas.openxmlformats.org/officeDocument/2006/relationships" xmlns:p="http://schemas.openxmlformats.org/presentationml/2006/main">
-  <p:cSld>
-    <p:spTree>
-      <p:nvGrpSpPr>
-        <p:cNvPr id="1" name=""/>
-        <p:cNvGrpSpPr/>
-        <p:nvPr/>
-      </p:nvGrpSpPr>
-      <p:grpSpPr>
-        <a:xfrm>
-          <a:off x="0" y="0"/>
-          <a:ext cx="0" cy="0"/>
-          <a:chOff x="0" y="0"/>
-          <a:chExt cx="0" cy="0"/>
-        </a:xfrm>
-      </p:grpSpPr>
-      <p:sp>
-        <p:nvSpPr>
-          <p:cNvPr id="2" name="Title 1">
-            <a:extLst>
-              <a:ext uri="{FF2B5EF4-FFF2-40B4-BE49-F238E27FC236}">
-                <a16:creationId xmlns:a16="http://schemas.microsoft.com/office/drawing/2014/main" id="{17F016EE-8CCC-98C7-EBF4-3DD8648C6038}"/>
-              </a:ext>
-            </a:extLst>
-          </p:cNvPr>
-          <p:cNvSpPr>
-            <a:spLocks noGrp="1"/>
-          </p:cNvSpPr>
-          <p:nvPr>
-            <p:ph type="title"/>
-          </p:nvPr>
-        </p:nvSpPr>
-        <p:spPr/>
-        <p:txBody>
-          <a:bodyPr/>
-          <a:lstStyle/>
-          <a:p>
-            <a:endParaRPr lang="en-US"/>
-          </a:p>
-        </p:txBody>
-      </p:sp>
-      <p:sp>
-        <p:nvSpPr>
-          <p:cNvPr id="3" name="Content Placeholder 2">
-            <a:extLst>
-              <a:ext uri="{FF2B5EF4-FFF2-40B4-BE49-F238E27FC236}">
-                <a16:creationId xmlns:a16="http://schemas.microsoft.com/office/drawing/2014/main" id="{FCEEF53E-840B-45A6-AEE4-B33A69894A7B}"/>
-              </a:ext>
-            </a:extLst>
-          </p:cNvPr>
-          <p:cNvSpPr>
-            <a:spLocks noGrp="1"/>
-          </p:cNvSpPr>
-          <p:nvPr>
-            <p:ph idx="1"/>
-          </p:nvPr>
-        </p:nvSpPr>
-        <p:spPr/>
-        <p:txBody>
-          <a:bodyPr/>
-          <a:lstStyle/>
-          <a:p>
-            <a:endParaRPr lang="en-US"/>
-          </a:p>
-        </p:txBody>
-      </p:sp>
-    </p:spTree>
-    <p:extLst>
-      <p:ext uri="{BB962C8B-B14F-4D97-AF65-F5344CB8AC3E}">
-        <p14:creationId xmlns:p14="http://schemas.microsoft.com/office/powerpoint/2010/main" val="612133903"/>
-      </p:ext>
-    </p:extLst>
-  </p:cSld>
-  <p:clrMapOvr>
-    <a:masterClrMapping/>
-  </p:clrMapOvr>
-</p:sld>
-</file>
-
-<file path=ppt/slides/slide32.xml><?xml version="1.0" encoding="utf-8"?>
-<p:sld xmlns:a="http://schemas.openxmlformats.org/drawingml/2006/main" xmlns:r="http://schemas.openxmlformats.org/officeDocument/2006/relationships" xmlns:p="http://schemas.openxmlformats.org/presentationml/2006/main">
-  <p:cSld>
-    <p:spTree>
-      <p:nvGrpSpPr>
-        <p:cNvPr id="1" name=""/>
-        <p:cNvGrpSpPr/>
-        <p:nvPr/>
-      </p:nvGrpSpPr>
-      <p:grpSpPr>
-        <a:xfrm>
-          <a:off x="0" y="0"/>
-          <a:ext cx="0" cy="0"/>
-          <a:chOff x="0" y="0"/>
-          <a:chExt cx="0" cy="0"/>
-        </a:xfrm>
-      </p:grpSpPr>
-      <p:sp>
-        <p:nvSpPr>
-          <p:cNvPr id="2" name="Title 1">
-            <a:extLst>
-              <a:ext uri="{FF2B5EF4-FFF2-40B4-BE49-F238E27FC236}">
                 <a16:creationId xmlns:a16="http://schemas.microsoft.com/office/drawing/2014/main" id="{6555FD4B-716A-8585-F669-ED515BE77843}"/>
               </a:ext>
             </a:extLst>
@@ -7262,7 +8647,7 @@
 </p:sld>
 </file>
 
-<file path=ppt/slides/slide33.xml><?xml version="1.0" encoding="utf-8"?>
+<file path=ppt/slides/slide43.xml><?xml version="1.0" encoding="utf-8"?>
 <p:sld xmlns:a="http://schemas.openxmlformats.org/drawingml/2006/main" xmlns:r="http://schemas.openxmlformats.org/officeDocument/2006/relationships" xmlns:p="http://schemas.openxmlformats.org/presentationml/2006/main">
   <p:cSld>
     <p:spTree>
@@ -7372,7 +8757,7 @@
 </p:sld>
 </file>
 
-<file path=ppt/slides/slide34.xml><?xml version="1.0" encoding="utf-8"?>
+<file path=ppt/slides/slide44.xml><?xml version="1.0" encoding="utf-8"?>
 <p:sld xmlns:a="http://schemas.openxmlformats.org/drawingml/2006/main" xmlns:r="http://schemas.openxmlformats.org/officeDocument/2006/relationships" xmlns:p="http://schemas.openxmlformats.org/presentationml/2006/main">
   <p:cSld>
     <p:spTree>
@@ -7482,7 +8867,7 @@
 </p:sld>
 </file>
 
-<file path=ppt/slides/slide35.xml><?xml version="1.0" encoding="utf-8"?>
+<file path=ppt/slides/slide45.xml><?xml version="1.0" encoding="utf-8"?>
 <p:sld xmlns:a="http://schemas.openxmlformats.org/drawingml/2006/main" xmlns:r="http://schemas.openxmlformats.org/officeDocument/2006/relationships" xmlns:p="http://schemas.openxmlformats.org/presentationml/2006/main">
   <p:cSld>
     <p:spTree>
@@ -7592,7 +8977,7 @@
 </p:sld>
 </file>
 
-<file path=ppt/slides/slide36.xml><?xml version="1.0" encoding="utf-8"?>
+<file path=ppt/slides/slide46.xml><?xml version="1.0" encoding="utf-8"?>
 <p:sld xmlns:a="http://schemas.openxmlformats.org/drawingml/2006/main" xmlns:r="http://schemas.openxmlformats.org/officeDocument/2006/relationships" xmlns:p="http://schemas.openxmlformats.org/presentationml/2006/main">
   <p:cSld>
     <p:spTree>
@@ -7672,7 +9057,7 @@
 </p:sld>
 </file>
 
-<file path=ppt/slides/slide37.xml><?xml version="1.0" encoding="utf-8"?>
+<file path=ppt/slides/slide47.xml><?xml version="1.0" encoding="utf-8"?>
 <p:sld xmlns:a="http://schemas.openxmlformats.org/drawingml/2006/main" xmlns:r="http://schemas.openxmlformats.org/officeDocument/2006/relationships" xmlns:p="http://schemas.openxmlformats.org/presentationml/2006/main">
   <p:cSld>
     <p:spTree>
@@ -7782,7 +9167,7 @@
 </p:sld>
 </file>
 
-<file path=ppt/slides/slide38.xml><?xml version="1.0" encoding="utf-8"?>
+<file path=ppt/slides/slide48.xml><?xml version="1.0" encoding="utf-8"?>
 <p:sld xmlns:a="http://schemas.openxmlformats.org/drawingml/2006/main" xmlns:r="http://schemas.openxmlformats.org/officeDocument/2006/relationships" xmlns:p="http://schemas.openxmlformats.org/presentationml/2006/main">
   <p:cSld>
     <p:spTree>
@@ -7925,7 +9310,7 @@
 </p:sld>
 </file>
 
-<file path=ppt/slides/slide39.xml><?xml version="1.0" encoding="utf-8"?>
+<file path=ppt/slides/slide49.xml><?xml version="1.0" encoding="utf-8"?>
 <p:sld xmlns:a="http://schemas.openxmlformats.org/drawingml/2006/main" xmlns:r="http://schemas.openxmlformats.org/officeDocument/2006/relationships" xmlns:p="http://schemas.openxmlformats.org/presentationml/2006/main">
   <p:cSld>
     <p:spTree>
@@ -8035,471 +9420,7 @@
 </p:sld>
 </file>
 
-<file path=ppt/slides/slide4.xml><?xml version="1.0" encoding="utf-8"?>
-<p:sld xmlns:a="http://schemas.openxmlformats.org/drawingml/2006/main" xmlns:r="http://schemas.openxmlformats.org/officeDocument/2006/relationships" xmlns:p="http://schemas.openxmlformats.org/presentationml/2006/main">
-  <p:cSld>
-    <p:spTree>
-      <p:nvGrpSpPr>
-        <p:cNvPr id="1" name="">
-          <a:extLst>
-            <a:ext uri="{FF2B5EF4-FFF2-40B4-BE49-F238E27FC236}">
-              <a16:creationId xmlns:a16="http://schemas.microsoft.com/office/drawing/2014/main" id="{57D9EE95-29B0-444E-862E-C8EBBB46B271}"/>
-            </a:ext>
-          </a:extLst>
-        </p:cNvPr>
-        <p:cNvGrpSpPr/>
-        <p:nvPr/>
-      </p:nvGrpSpPr>
-      <p:grpSpPr>
-        <a:xfrm>
-          <a:off x="0" y="0"/>
-          <a:ext cx="0" cy="0"/>
-          <a:chOff x="0" y="0"/>
-          <a:chExt cx="0" cy="0"/>
-        </a:xfrm>
-      </p:grpSpPr>
-      <p:sp>
-        <p:nvSpPr>
-          <p:cNvPr id="2" name="Title 1">
-            <a:extLst>
-              <a:ext uri="{FF2B5EF4-FFF2-40B4-BE49-F238E27FC236}">
-                <a16:creationId xmlns:a16="http://schemas.microsoft.com/office/drawing/2014/main" id="{5A38A37B-F21C-0AC6-B0A5-6E00BCBF6BD7}"/>
-              </a:ext>
-            </a:extLst>
-          </p:cNvPr>
-          <p:cNvSpPr>
-            <a:spLocks noGrp="1"/>
-          </p:cNvSpPr>
-          <p:nvPr>
-            <p:ph type="title"/>
-          </p:nvPr>
-        </p:nvSpPr>
-        <p:spPr/>
-        <p:txBody>
-          <a:bodyPr/>
-          <a:lstStyle/>
-          <a:p>
-            <a:r>
-              <a:rPr lang="en-US" dirty="0"/>
-              <a:t>Env data plots</a:t>
-            </a:r>
-          </a:p>
-        </p:txBody>
-      </p:sp>
-      <p:sp>
-        <p:nvSpPr>
-          <p:cNvPr id="3" name="Content Placeholder 2">
-            <a:extLst>
-              <a:ext uri="{FF2B5EF4-FFF2-40B4-BE49-F238E27FC236}">
-                <a16:creationId xmlns:a16="http://schemas.microsoft.com/office/drawing/2014/main" id="{C590EC79-74F3-B72A-D66F-4C024AA7B044}"/>
-              </a:ext>
-            </a:extLst>
-          </p:cNvPr>
-          <p:cNvSpPr>
-            <a:spLocks noGrp="1"/>
-          </p:cNvSpPr>
-          <p:nvPr>
-            <p:ph idx="1"/>
-          </p:nvPr>
-        </p:nvSpPr>
-        <p:spPr/>
-        <p:txBody>
-          <a:bodyPr/>
-          <a:lstStyle/>
-          <a:p>
-            <a:r>
-              <a:rPr lang="en-US" dirty="0"/>
-              <a:t>PDO and NPGO</a:t>
-            </a:r>
-          </a:p>
-        </p:txBody>
-      </p:sp>
-      <p:pic>
-        <p:nvPicPr>
-          <p:cNvPr id="6" name="Picture 5">
-            <a:extLst>
-              <a:ext uri="{FF2B5EF4-FFF2-40B4-BE49-F238E27FC236}">
-                <a16:creationId xmlns:a16="http://schemas.microsoft.com/office/drawing/2014/main" id="{A7C554CA-1D2A-2FEB-F754-E7533274B0F3}"/>
-              </a:ext>
-            </a:extLst>
-          </p:cNvPr>
-          <p:cNvPicPr>
-            <a:picLocks noChangeAspect="1"/>
-          </p:cNvPicPr>
-          <p:nvPr/>
-        </p:nvPicPr>
-        <p:blipFill>
-          <a:blip r:embed="rId2"/>
-          <a:stretch>
-            <a:fillRect/>
-          </a:stretch>
-        </p:blipFill>
-        <p:spPr>
-          <a:xfrm>
-            <a:off x="266020" y="2844799"/>
-            <a:ext cx="5720956" cy="3648076"/>
-          </a:xfrm>
-          <a:prstGeom prst="rect">
-            <a:avLst/>
-          </a:prstGeom>
-        </p:spPr>
-      </p:pic>
-      <p:pic>
-        <p:nvPicPr>
-          <p:cNvPr id="9" name="Picture 8">
-            <a:extLst>
-              <a:ext uri="{FF2B5EF4-FFF2-40B4-BE49-F238E27FC236}">
-                <a16:creationId xmlns:a16="http://schemas.microsoft.com/office/drawing/2014/main" id="{71B2C31F-292E-17AE-72DF-3499C1211FDD}"/>
-              </a:ext>
-            </a:extLst>
-          </p:cNvPr>
-          <p:cNvPicPr>
-            <a:picLocks noChangeAspect="1"/>
-          </p:cNvPicPr>
-          <p:nvPr/>
-        </p:nvPicPr>
-        <p:blipFill>
-          <a:blip r:embed="rId3"/>
-          <a:stretch>
-            <a:fillRect/>
-          </a:stretch>
-        </p:blipFill>
-        <p:spPr>
-          <a:xfrm>
-            <a:off x="6205026" y="2844799"/>
-            <a:ext cx="5720956" cy="3648076"/>
-          </a:xfrm>
-          <a:prstGeom prst="rect">
-            <a:avLst/>
-          </a:prstGeom>
-        </p:spPr>
-      </p:pic>
-    </p:spTree>
-    <p:extLst>
-      <p:ext uri="{BB962C8B-B14F-4D97-AF65-F5344CB8AC3E}">
-        <p14:creationId xmlns:p14="http://schemas.microsoft.com/office/powerpoint/2010/main" val="1379679899"/>
-      </p:ext>
-    </p:extLst>
-  </p:cSld>
-  <p:clrMapOvr>
-    <a:masterClrMapping/>
-  </p:clrMapOvr>
-</p:sld>
-</file>
-
-<file path=ppt/slides/slide40.xml><?xml version="1.0" encoding="utf-8"?>
-<p:sld xmlns:a="http://schemas.openxmlformats.org/drawingml/2006/main" xmlns:r="http://schemas.openxmlformats.org/officeDocument/2006/relationships" xmlns:p="http://schemas.openxmlformats.org/presentationml/2006/main">
-  <p:cSld>
-    <p:spTree>
-      <p:nvGrpSpPr>
-        <p:cNvPr id="1" name=""/>
-        <p:cNvGrpSpPr/>
-        <p:nvPr/>
-      </p:nvGrpSpPr>
-      <p:grpSpPr>
-        <a:xfrm>
-          <a:off x="0" y="0"/>
-          <a:ext cx="0" cy="0"/>
-          <a:chOff x="0" y="0"/>
-          <a:chExt cx="0" cy="0"/>
-        </a:xfrm>
-      </p:grpSpPr>
-      <p:sp>
-        <p:nvSpPr>
-          <p:cNvPr id="2" name="Title 1">
-            <a:extLst>
-              <a:ext uri="{FF2B5EF4-FFF2-40B4-BE49-F238E27FC236}">
-                <a16:creationId xmlns:a16="http://schemas.microsoft.com/office/drawing/2014/main" id="{1B4F899D-7172-97F0-AEB9-22F23528885F}"/>
-              </a:ext>
-            </a:extLst>
-          </p:cNvPr>
-          <p:cNvSpPr>
-            <a:spLocks noGrp="1"/>
-          </p:cNvSpPr>
-          <p:nvPr>
-            <p:ph type="title"/>
-          </p:nvPr>
-        </p:nvSpPr>
-        <p:spPr/>
-        <p:txBody>
-          <a:bodyPr/>
-          <a:lstStyle/>
-          <a:p>
-            <a:endParaRPr lang="en-US"/>
-          </a:p>
-        </p:txBody>
-      </p:sp>
-      <p:sp>
-        <p:nvSpPr>
-          <p:cNvPr id="3" name="Content Placeholder 2">
-            <a:extLst>
-              <a:ext uri="{FF2B5EF4-FFF2-40B4-BE49-F238E27FC236}">
-                <a16:creationId xmlns:a16="http://schemas.microsoft.com/office/drawing/2014/main" id="{97E331C5-05F1-E46E-09B0-CA9D5E9401D7}"/>
-              </a:ext>
-            </a:extLst>
-          </p:cNvPr>
-          <p:cNvSpPr>
-            <a:spLocks noGrp="1"/>
-          </p:cNvSpPr>
-          <p:nvPr>
-            <p:ph idx="1"/>
-          </p:nvPr>
-        </p:nvSpPr>
-        <p:spPr/>
-        <p:txBody>
-          <a:bodyPr/>
-          <a:lstStyle/>
-          <a:p>
-            <a:endParaRPr lang="en-US"/>
-          </a:p>
-        </p:txBody>
-      </p:sp>
-    </p:spTree>
-    <p:extLst>
-      <p:ext uri="{BB962C8B-B14F-4D97-AF65-F5344CB8AC3E}">
-        <p14:creationId xmlns:p14="http://schemas.microsoft.com/office/powerpoint/2010/main" val="387653240"/>
-      </p:ext>
-    </p:extLst>
-  </p:cSld>
-  <p:clrMapOvr>
-    <a:masterClrMapping/>
-  </p:clrMapOvr>
-</p:sld>
-</file>
-
-<file path=ppt/slides/slide41.xml><?xml version="1.0" encoding="utf-8"?>
-<p:sld xmlns:a="http://schemas.openxmlformats.org/drawingml/2006/main" xmlns:r="http://schemas.openxmlformats.org/officeDocument/2006/relationships" xmlns:p="http://schemas.openxmlformats.org/presentationml/2006/main">
-  <p:cSld>
-    <p:spTree>
-      <p:nvGrpSpPr>
-        <p:cNvPr id="1" name=""/>
-        <p:cNvGrpSpPr/>
-        <p:nvPr/>
-      </p:nvGrpSpPr>
-      <p:grpSpPr>
-        <a:xfrm>
-          <a:off x="0" y="0"/>
-          <a:ext cx="0" cy="0"/>
-          <a:chOff x="0" y="0"/>
-          <a:chExt cx="0" cy="0"/>
-        </a:xfrm>
-      </p:grpSpPr>
-      <p:sp>
-        <p:nvSpPr>
-          <p:cNvPr id="2" name="Title 1">
-            <a:extLst>
-              <a:ext uri="{FF2B5EF4-FFF2-40B4-BE49-F238E27FC236}">
-                <a16:creationId xmlns:a16="http://schemas.microsoft.com/office/drawing/2014/main" id="{8283EF55-EB33-0AE4-2506-D01C6C8E560B}"/>
-              </a:ext>
-            </a:extLst>
-          </p:cNvPr>
-          <p:cNvSpPr>
-            <a:spLocks noGrp="1"/>
-          </p:cNvSpPr>
-          <p:nvPr>
-            <p:ph type="title"/>
-          </p:nvPr>
-        </p:nvSpPr>
-        <p:spPr/>
-        <p:txBody>
-          <a:bodyPr/>
-          <a:lstStyle/>
-          <a:p>
-            <a:endParaRPr lang="en-US"/>
-          </a:p>
-        </p:txBody>
-      </p:sp>
-      <p:sp>
-        <p:nvSpPr>
-          <p:cNvPr id="3" name="Content Placeholder 2">
-            <a:extLst>
-              <a:ext uri="{FF2B5EF4-FFF2-40B4-BE49-F238E27FC236}">
-                <a16:creationId xmlns:a16="http://schemas.microsoft.com/office/drawing/2014/main" id="{0439DFE2-83DC-5A0B-AD55-CF7E09B08013}"/>
-              </a:ext>
-            </a:extLst>
-          </p:cNvPr>
-          <p:cNvSpPr>
-            <a:spLocks noGrp="1"/>
-          </p:cNvSpPr>
-          <p:nvPr>
-            <p:ph idx="1"/>
-          </p:nvPr>
-        </p:nvSpPr>
-        <p:spPr/>
-        <p:txBody>
-          <a:bodyPr/>
-          <a:lstStyle/>
-          <a:p>
-            <a:endParaRPr lang="en-US"/>
-          </a:p>
-        </p:txBody>
-      </p:sp>
-    </p:spTree>
-    <p:extLst>
-      <p:ext uri="{BB962C8B-B14F-4D97-AF65-F5344CB8AC3E}">
-        <p14:creationId xmlns:p14="http://schemas.microsoft.com/office/powerpoint/2010/main" val="3603619897"/>
-      </p:ext>
-    </p:extLst>
-  </p:cSld>
-  <p:clrMapOvr>
-    <a:masterClrMapping/>
-  </p:clrMapOvr>
-</p:sld>
-</file>
-
 <file path=ppt/slides/slide5.xml><?xml version="1.0" encoding="utf-8"?>
-<p:sld xmlns:a="http://schemas.openxmlformats.org/drawingml/2006/main" xmlns:r="http://schemas.openxmlformats.org/officeDocument/2006/relationships" xmlns:p="http://schemas.openxmlformats.org/presentationml/2006/main">
-  <p:cSld>
-    <p:spTree>
-      <p:nvGrpSpPr>
-        <p:cNvPr id="1" name="">
-          <a:extLst>
-            <a:ext uri="{FF2B5EF4-FFF2-40B4-BE49-F238E27FC236}">
-              <a16:creationId xmlns:a16="http://schemas.microsoft.com/office/drawing/2014/main" id="{EEB1E60C-20CB-5321-9E5D-94DB47F4B15A}"/>
-            </a:ext>
-          </a:extLst>
-        </p:cNvPr>
-        <p:cNvGrpSpPr/>
-        <p:nvPr/>
-      </p:nvGrpSpPr>
-      <p:grpSpPr>
-        <a:xfrm>
-          <a:off x="0" y="0"/>
-          <a:ext cx="0" cy="0"/>
-          <a:chOff x="0" y="0"/>
-          <a:chExt cx="0" cy="0"/>
-        </a:xfrm>
-      </p:grpSpPr>
-      <p:sp>
-        <p:nvSpPr>
-          <p:cNvPr id="2" name="Title 1">
-            <a:extLst>
-              <a:ext uri="{FF2B5EF4-FFF2-40B4-BE49-F238E27FC236}">
-                <a16:creationId xmlns:a16="http://schemas.microsoft.com/office/drawing/2014/main" id="{5DA238A7-6716-640F-7161-17FECB540E5B}"/>
-              </a:ext>
-            </a:extLst>
-          </p:cNvPr>
-          <p:cNvSpPr>
-            <a:spLocks noGrp="1"/>
-          </p:cNvSpPr>
-          <p:nvPr>
-            <p:ph type="title"/>
-          </p:nvPr>
-        </p:nvSpPr>
-        <p:spPr/>
-        <p:txBody>
-          <a:bodyPr/>
-          <a:lstStyle/>
-          <a:p>
-            <a:r>
-              <a:rPr lang="en-US" dirty="0"/>
-              <a:t>Env data plots</a:t>
-            </a:r>
-          </a:p>
-        </p:txBody>
-      </p:sp>
-      <p:sp>
-        <p:nvSpPr>
-          <p:cNvPr id="3" name="Content Placeholder 2">
-            <a:extLst>
-              <a:ext uri="{FF2B5EF4-FFF2-40B4-BE49-F238E27FC236}">
-                <a16:creationId xmlns:a16="http://schemas.microsoft.com/office/drawing/2014/main" id="{67A12D8A-C703-C271-5D8B-3E9500284D34}"/>
-              </a:ext>
-            </a:extLst>
-          </p:cNvPr>
-          <p:cNvSpPr>
-            <a:spLocks noGrp="1"/>
-          </p:cNvSpPr>
-          <p:nvPr>
-            <p:ph idx="1"/>
-          </p:nvPr>
-        </p:nvSpPr>
-        <p:spPr/>
-        <p:txBody>
-          <a:bodyPr/>
-          <a:lstStyle/>
-          <a:p>
-            <a:r>
-              <a:rPr lang="en-US" dirty="0"/>
-              <a:t>ONI and NPI</a:t>
-            </a:r>
-          </a:p>
-        </p:txBody>
-      </p:sp>
-      <p:pic>
-        <p:nvPicPr>
-          <p:cNvPr id="5" name="Picture 4">
-            <a:extLst>
-              <a:ext uri="{FF2B5EF4-FFF2-40B4-BE49-F238E27FC236}">
-                <a16:creationId xmlns:a16="http://schemas.microsoft.com/office/drawing/2014/main" id="{FFF0C0A6-3A03-C95A-6F50-3F21A82E042A}"/>
-              </a:ext>
-            </a:extLst>
-          </p:cNvPr>
-          <p:cNvPicPr>
-            <a:picLocks noChangeAspect="1"/>
-          </p:cNvPicPr>
-          <p:nvPr/>
-        </p:nvPicPr>
-        <p:blipFill>
-          <a:blip r:embed="rId2"/>
-          <a:stretch>
-            <a:fillRect/>
-          </a:stretch>
-        </p:blipFill>
-        <p:spPr>
-          <a:xfrm>
-            <a:off x="148331" y="2993641"/>
-            <a:ext cx="5766286" cy="3676982"/>
-          </a:xfrm>
-          <a:prstGeom prst="rect">
-            <a:avLst/>
-          </a:prstGeom>
-        </p:spPr>
-      </p:pic>
-      <p:pic>
-        <p:nvPicPr>
-          <p:cNvPr id="8" name="Picture 7">
-            <a:extLst>
-              <a:ext uri="{FF2B5EF4-FFF2-40B4-BE49-F238E27FC236}">
-                <a16:creationId xmlns:a16="http://schemas.microsoft.com/office/drawing/2014/main" id="{156E5472-1329-A51D-495D-A204CDAE34F7}"/>
-              </a:ext>
-            </a:extLst>
-          </p:cNvPr>
-          <p:cNvPicPr>
-            <a:picLocks noChangeAspect="1"/>
-          </p:cNvPicPr>
-          <p:nvPr/>
-        </p:nvPicPr>
-        <p:blipFill>
-          <a:blip r:embed="rId3"/>
-          <a:stretch>
-            <a:fillRect/>
-          </a:stretch>
-        </p:blipFill>
-        <p:spPr>
-          <a:xfrm>
-            <a:off x="6096000" y="2993641"/>
-            <a:ext cx="5766287" cy="3676982"/>
-          </a:xfrm>
-          <a:prstGeom prst="rect">
-            <a:avLst/>
-          </a:prstGeom>
-        </p:spPr>
-      </p:pic>
-    </p:spTree>
-    <p:extLst>
-      <p:ext uri="{BB962C8B-B14F-4D97-AF65-F5344CB8AC3E}">
-        <p14:creationId xmlns:p14="http://schemas.microsoft.com/office/powerpoint/2010/main" val="1212096548"/>
-      </p:ext>
-    </p:extLst>
-  </p:cSld>
-  <p:clrMapOvr>
-    <a:masterClrMapping/>
-  </p:clrMapOvr>
-</p:sld>
-</file>
-
-<file path=ppt/slides/slide6.xml><?xml version="1.0" encoding="utf-8"?>
 <p:sld xmlns:a="http://schemas.openxmlformats.org/drawingml/2006/main" xmlns:r="http://schemas.openxmlformats.org/officeDocument/2006/relationships" xmlns:p="http://schemas.openxmlformats.org/presentationml/2006/main">
   <p:cSld>
     <p:spTree>
@@ -8593,7 +9514,167 @@
 </p:sld>
 </file>
 
-<file path=ppt/slides/slide7.xml><?xml version="1.0" encoding="utf-8"?>
+<file path=ppt/slides/slide50.xml><?xml version="1.0" encoding="utf-8"?>
+<p:sld xmlns:a="http://schemas.openxmlformats.org/drawingml/2006/main" xmlns:r="http://schemas.openxmlformats.org/officeDocument/2006/relationships" xmlns:p="http://schemas.openxmlformats.org/presentationml/2006/main">
+  <p:cSld>
+    <p:spTree>
+      <p:nvGrpSpPr>
+        <p:cNvPr id="1" name=""/>
+        <p:cNvGrpSpPr/>
+        <p:nvPr/>
+      </p:nvGrpSpPr>
+      <p:grpSpPr>
+        <a:xfrm>
+          <a:off x="0" y="0"/>
+          <a:ext cx="0" cy="0"/>
+          <a:chOff x="0" y="0"/>
+          <a:chExt cx="0" cy="0"/>
+        </a:xfrm>
+      </p:grpSpPr>
+      <p:sp>
+        <p:nvSpPr>
+          <p:cNvPr id="2" name="Title 1">
+            <a:extLst>
+              <a:ext uri="{FF2B5EF4-FFF2-40B4-BE49-F238E27FC236}">
+                <a16:creationId xmlns:a16="http://schemas.microsoft.com/office/drawing/2014/main" id="{1B4F899D-7172-97F0-AEB9-22F23528885F}"/>
+              </a:ext>
+            </a:extLst>
+          </p:cNvPr>
+          <p:cNvSpPr>
+            <a:spLocks noGrp="1"/>
+          </p:cNvSpPr>
+          <p:nvPr>
+            <p:ph type="title"/>
+          </p:nvPr>
+        </p:nvSpPr>
+        <p:spPr/>
+        <p:txBody>
+          <a:bodyPr/>
+          <a:lstStyle/>
+          <a:p>
+            <a:endParaRPr lang="en-US"/>
+          </a:p>
+        </p:txBody>
+      </p:sp>
+      <p:sp>
+        <p:nvSpPr>
+          <p:cNvPr id="3" name="Content Placeholder 2">
+            <a:extLst>
+              <a:ext uri="{FF2B5EF4-FFF2-40B4-BE49-F238E27FC236}">
+                <a16:creationId xmlns:a16="http://schemas.microsoft.com/office/drawing/2014/main" id="{97E331C5-05F1-E46E-09B0-CA9D5E9401D7}"/>
+              </a:ext>
+            </a:extLst>
+          </p:cNvPr>
+          <p:cNvSpPr>
+            <a:spLocks noGrp="1"/>
+          </p:cNvSpPr>
+          <p:nvPr>
+            <p:ph idx="1"/>
+          </p:nvPr>
+        </p:nvSpPr>
+        <p:spPr/>
+        <p:txBody>
+          <a:bodyPr/>
+          <a:lstStyle/>
+          <a:p>
+            <a:endParaRPr lang="en-US"/>
+          </a:p>
+        </p:txBody>
+      </p:sp>
+    </p:spTree>
+    <p:extLst>
+      <p:ext uri="{BB962C8B-B14F-4D97-AF65-F5344CB8AC3E}">
+        <p14:creationId xmlns:p14="http://schemas.microsoft.com/office/powerpoint/2010/main" val="387653240"/>
+      </p:ext>
+    </p:extLst>
+  </p:cSld>
+  <p:clrMapOvr>
+    <a:masterClrMapping/>
+  </p:clrMapOvr>
+</p:sld>
+</file>
+
+<file path=ppt/slides/slide51.xml><?xml version="1.0" encoding="utf-8"?>
+<p:sld xmlns:a="http://schemas.openxmlformats.org/drawingml/2006/main" xmlns:r="http://schemas.openxmlformats.org/officeDocument/2006/relationships" xmlns:p="http://schemas.openxmlformats.org/presentationml/2006/main">
+  <p:cSld>
+    <p:spTree>
+      <p:nvGrpSpPr>
+        <p:cNvPr id="1" name=""/>
+        <p:cNvGrpSpPr/>
+        <p:nvPr/>
+      </p:nvGrpSpPr>
+      <p:grpSpPr>
+        <a:xfrm>
+          <a:off x="0" y="0"/>
+          <a:ext cx="0" cy="0"/>
+          <a:chOff x="0" y="0"/>
+          <a:chExt cx="0" cy="0"/>
+        </a:xfrm>
+      </p:grpSpPr>
+      <p:sp>
+        <p:nvSpPr>
+          <p:cNvPr id="2" name="Title 1">
+            <a:extLst>
+              <a:ext uri="{FF2B5EF4-FFF2-40B4-BE49-F238E27FC236}">
+                <a16:creationId xmlns:a16="http://schemas.microsoft.com/office/drawing/2014/main" id="{8283EF55-EB33-0AE4-2506-D01C6C8E560B}"/>
+              </a:ext>
+            </a:extLst>
+          </p:cNvPr>
+          <p:cNvSpPr>
+            <a:spLocks noGrp="1"/>
+          </p:cNvSpPr>
+          <p:nvPr>
+            <p:ph type="title"/>
+          </p:nvPr>
+        </p:nvSpPr>
+        <p:spPr/>
+        <p:txBody>
+          <a:bodyPr/>
+          <a:lstStyle/>
+          <a:p>
+            <a:endParaRPr lang="en-US"/>
+          </a:p>
+        </p:txBody>
+      </p:sp>
+      <p:sp>
+        <p:nvSpPr>
+          <p:cNvPr id="3" name="Content Placeholder 2">
+            <a:extLst>
+              <a:ext uri="{FF2B5EF4-FFF2-40B4-BE49-F238E27FC236}">
+                <a16:creationId xmlns:a16="http://schemas.microsoft.com/office/drawing/2014/main" id="{0439DFE2-83DC-5A0B-AD55-CF7E09B08013}"/>
+              </a:ext>
+            </a:extLst>
+          </p:cNvPr>
+          <p:cNvSpPr>
+            <a:spLocks noGrp="1"/>
+          </p:cNvSpPr>
+          <p:nvPr>
+            <p:ph idx="1"/>
+          </p:nvPr>
+        </p:nvSpPr>
+        <p:spPr/>
+        <p:txBody>
+          <a:bodyPr/>
+          <a:lstStyle/>
+          <a:p>
+            <a:endParaRPr lang="en-US"/>
+          </a:p>
+        </p:txBody>
+      </p:sp>
+    </p:spTree>
+    <p:extLst>
+      <p:ext uri="{BB962C8B-B14F-4D97-AF65-F5344CB8AC3E}">
+        <p14:creationId xmlns:p14="http://schemas.microsoft.com/office/powerpoint/2010/main" val="3603619897"/>
+      </p:ext>
+    </p:extLst>
+  </p:cSld>
+  <p:clrMapOvr>
+    <a:masterClrMapping/>
+  </p:clrMapOvr>
+</p:sld>
+</file>
+
+<file path=ppt/slides/slide6.xml><?xml version="1.0" encoding="utf-8"?>
 <p:sld xmlns:a="http://schemas.openxmlformats.org/drawingml/2006/main" xmlns:r="http://schemas.openxmlformats.org/officeDocument/2006/relationships" xmlns:p="http://schemas.openxmlformats.org/presentationml/2006/main">
   <p:cSld>
     <p:spTree>
@@ -8712,7 +9793,7 @@
 </p:sld>
 </file>
 
-<file path=ppt/slides/slide8.xml><?xml version="1.0" encoding="utf-8"?>
+<file path=ppt/slides/slide7.xml><?xml version="1.0" encoding="utf-8"?>
 <p:sld xmlns:a="http://schemas.openxmlformats.org/drawingml/2006/main" xmlns:r="http://schemas.openxmlformats.org/officeDocument/2006/relationships" xmlns:p="http://schemas.openxmlformats.org/presentationml/2006/main">
   <p:cSld>
     <p:spTree>
@@ -8831,7 +9912,7 @@
 </p:sld>
 </file>
 
-<file path=ppt/slides/slide9.xml><?xml version="1.0" encoding="utf-8"?>
+<file path=ppt/slides/slide8.xml><?xml version="1.0" encoding="utf-8"?>
 <p:sld xmlns:a="http://schemas.openxmlformats.org/drawingml/2006/main" xmlns:r="http://schemas.openxmlformats.org/officeDocument/2006/relationships" xmlns:p="http://schemas.openxmlformats.org/presentationml/2006/main">
   <p:cSld>
     <p:spTree>
@@ -8935,6 +10016,100 @@
     <p:extLst>
       <p:ext uri="{BB962C8B-B14F-4D97-AF65-F5344CB8AC3E}">
         <p14:creationId xmlns:p14="http://schemas.microsoft.com/office/powerpoint/2010/main" val="1479296786"/>
+      </p:ext>
+    </p:extLst>
+  </p:cSld>
+  <p:clrMapOvr>
+    <a:masterClrMapping/>
+  </p:clrMapOvr>
+</p:sld>
+</file>
+
+<file path=ppt/slides/slide9.xml><?xml version="1.0" encoding="utf-8"?>
+<p:sld xmlns:a="http://schemas.openxmlformats.org/drawingml/2006/main" xmlns:r="http://schemas.openxmlformats.org/officeDocument/2006/relationships" xmlns:p="http://schemas.openxmlformats.org/presentationml/2006/main">
+  <p:cSld>
+    <p:spTree>
+      <p:nvGrpSpPr>
+        <p:cNvPr id="1" name="">
+          <a:extLst>
+            <a:ext uri="{FF2B5EF4-FFF2-40B4-BE49-F238E27FC236}">
+              <a16:creationId xmlns:a16="http://schemas.microsoft.com/office/drawing/2014/main" id="{99EB299D-3070-B03A-6039-34685C748421}"/>
+            </a:ext>
+          </a:extLst>
+        </p:cNvPr>
+        <p:cNvGrpSpPr/>
+        <p:nvPr/>
+      </p:nvGrpSpPr>
+      <p:grpSpPr>
+        <a:xfrm>
+          <a:off x="0" y="0"/>
+          <a:ext cx="0" cy="0"/>
+          <a:chOff x="0" y="0"/>
+          <a:chExt cx="0" cy="0"/>
+        </a:xfrm>
+      </p:grpSpPr>
+      <p:sp>
+        <p:nvSpPr>
+          <p:cNvPr id="2" name="Title 1">
+            <a:extLst>
+              <a:ext uri="{FF2B5EF4-FFF2-40B4-BE49-F238E27FC236}">
+                <a16:creationId xmlns:a16="http://schemas.microsoft.com/office/drawing/2014/main" id="{7287E5C3-6A63-10AA-1280-022AC875066C}"/>
+              </a:ext>
+            </a:extLst>
+          </p:cNvPr>
+          <p:cNvSpPr>
+            <a:spLocks noGrp="1"/>
+          </p:cNvSpPr>
+          <p:nvPr>
+            <p:ph type="title"/>
+          </p:nvPr>
+        </p:nvSpPr>
+        <p:spPr/>
+        <p:txBody>
+          <a:bodyPr/>
+          <a:lstStyle/>
+          <a:p>
+            <a:r>
+              <a:rPr lang="en-US" dirty="0"/>
+              <a:t>Env data plots – US Data</a:t>
+            </a:r>
+          </a:p>
+        </p:txBody>
+      </p:sp>
+      <p:pic>
+        <p:nvPicPr>
+          <p:cNvPr id="4" name="Picture 3">
+            <a:extLst>
+              <a:ext uri="{FF2B5EF4-FFF2-40B4-BE49-F238E27FC236}">
+                <a16:creationId xmlns:a16="http://schemas.microsoft.com/office/drawing/2014/main" id="{759E3529-BD8B-027B-CDD6-9F00584D5600}"/>
+              </a:ext>
+            </a:extLst>
+          </p:cNvPr>
+          <p:cNvPicPr>
+            <a:picLocks noChangeAspect="1"/>
+          </p:cNvPicPr>
+          <p:nvPr/>
+        </p:nvPicPr>
+        <p:blipFill>
+          <a:blip r:embed="rId3"/>
+          <a:stretch>
+            <a:fillRect/>
+          </a:stretch>
+        </p:blipFill>
+        <p:spPr>
+          <a:xfrm>
+            <a:off x="2203578" y="1475632"/>
+            <a:ext cx="7784844" cy="5017243"/>
+          </a:xfrm>
+          <a:prstGeom prst="rect">
+            <a:avLst/>
+          </a:prstGeom>
+        </p:spPr>
+      </p:pic>
+    </p:spTree>
+    <p:extLst>
+      <p:ext uri="{BB962C8B-B14F-4D97-AF65-F5344CB8AC3E}">
+        <p14:creationId xmlns:p14="http://schemas.microsoft.com/office/powerpoint/2010/main" val="3763793456"/>
       </p:ext>
     </p:extLst>
   </p:cSld>

--- a/stock-specific/hake/output_plots_20260730.pptx
+++ b/stock-specific/hake/output_plots_20260730.pptx
@@ -5,7 +5,7 @@
     <p:sldMasterId id="2147483648" r:id="rId1"/>
   </p:sldMasterIdLst>
   <p:notesMasterIdLst>
-    <p:notesMasterId r:id="rId53"/>
+    <p:notesMasterId r:id="rId59"/>
   </p:notesMasterIdLst>
   <p:sldIdLst>
     <p:sldId id="256" r:id="rId2"/>
@@ -46,19 +46,25 @@
     <p:sldId id="317" r:id="rId37"/>
     <p:sldId id="318" r:id="rId38"/>
     <p:sldId id="319" r:id="rId39"/>
-    <p:sldId id="270" r:id="rId40"/>
-    <p:sldId id="266" r:id="rId41"/>
-    <p:sldId id="257" r:id="rId42"/>
-    <p:sldId id="287" r:id="rId43"/>
-    <p:sldId id="280" r:id="rId44"/>
-    <p:sldId id="281" r:id="rId45"/>
-    <p:sldId id="288" r:id="rId46"/>
-    <p:sldId id="289" r:id="rId47"/>
-    <p:sldId id="292" r:id="rId48"/>
-    <p:sldId id="294" r:id="rId49"/>
-    <p:sldId id="295" r:id="rId50"/>
-    <p:sldId id="296" r:id="rId51"/>
-    <p:sldId id="297" r:id="rId52"/>
+    <p:sldId id="342" r:id="rId40"/>
+    <p:sldId id="270" r:id="rId41"/>
+    <p:sldId id="266" r:id="rId42"/>
+    <p:sldId id="257" r:id="rId43"/>
+    <p:sldId id="287" r:id="rId44"/>
+    <p:sldId id="280" r:id="rId45"/>
+    <p:sldId id="281" r:id="rId46"/>
+    <p:sldId id="288" r:id="rId47"/>
+    <p:sldId id="289" r:id="rId48"/>
+    <p:sldId id="292" r:id="rId49"/>
+    <p:sldId id="294" r:id="rId50"/>
+    <p:sldId id="295" r:id="rId51"/>
+    <p:sldId id="296" r:id="rId52"/>
+    <p:sldId id="297" r:id="rId53"/>
+    <p:sldId id="337" r:id="rId54"/>
+    <p:sldId id="338" r:id="rId55"/>
+    <p:sldId id="339" r:id="rId56"/>
+    <p:sldId id="340" r:id="rId57"/>
+    <p:sldId id="341" r:id="rId58"/>
   </p:sldIdLst>
   <p:sldSz cx="12192000" cy="6858000"/>
   <p:notesSz cx="6858000" cy="9144000"/>
@@ -1120,6 +1126,282 @@
     <p:extLst>
       <p:ext uri="{BB962C8B-B14F-4D97-AF65-F5344CB8AC3E}">
         <p14:creationId xmlns:p14="http://schemas.microsoft.com/office/powerpoint/2010/main" val="2695915399"/>
+      </p:ext>
+    </p:extLst>
+  </p:cSld>
+  <p:clrMapOvr>
+    <a:masterClrMapping/>
+  </p:clrMapOvr>
+</p:notes>
+</file>
+
+<file path=ppt/notesSlides/notesSlide7.xml><?xml version="1.0" encoding="utf-8"?>
+<p:notes xmlns:a="http://schemas.openxmlformats.org/drawingml/2006/main" xmlns:r="http://schemas.openxmlformats.org/officeDocument/2006/relationships" xmlns:p="http://schemas.openxmlformats.org/presentationml/2006/main">
+  <p:cSld>
+    <p:spTree>
+      <p:nvGrpSpPr>
+        <p:cNvPr id="1" name=""/>
+        <p:cNvGrpSpPr/>
+        <p:nvPr/>
+      </p:nvGrpSpPr>
+      <p:grpSpPr>
+        <a:xfrm>
+          <a:off x="0" y="0"/>
+          <a:ext cx="0" cy="0"/>
+          <a:chOff x="0" y="0"/>
+          <a:chExt cx="0" cy="0"/>
+        </a:xfrm>
+      </p:grpSpPr>
+      <p:sp>
+        <p:nvSpPr>
+          <p:cNvPr id="2" name="Slide Image Placeholder 1"/>
+          <p:cNvSpPr>
+            <a:spLocks noGrp="1" noRot="1" noChangeAspect="1"/>
+          </p:cNvSpPr>
+          <p:nvPr>
+            <p:ph type="sldImg"/>
+          </p:nvPr>
+        </p:nvSpPr>
+        <p:spPr/>
+      </p:sp>
+      <p:sp>
+        <p:nvSpPr>
+          <p:cNvPr id="3" name="Notes Placeholder 2"/>
+          <p:cNvSpPr>
+            <a:spLocks noGrp="1"/>
+          </p:cNvSpPr>
+          <p:nvPr>
+            <p:ph type="body" idx="1"/>
+          </p:nvPr>
+        </p:nvSpPr>
+        <p:spPr/>
+        <p:txBody>
+          <a:bodyPr/>
+          <a:lstStyle/>
+          <a:p>
+            <a:r>
+              <a:rPr lang="en-US" dirty="0"/>
+              <a:t>Spring they have lower body condition coming out of winter after spawning and migrating</a:t>
+            </a:r>
+          </a:p>
+          <a:p>
+            <a:r>
+              <a:rPr lang="en-US" dirty="0"/>
+              <a:t>In summer they are in peak feeding phase and storing fat</a:t>
+            </a:r>
+          </a:p>
+        </p:txBody>
+      </p:sp>
+      <p:sp>
+        <p:nvSpPr>
+          <p:cNvPr id="4" name="Slide Number Placeholder 3"/>
+          <p:cNvSpPr>
+            <a:spLocks noGrp="1"/>
+          </p:cNvSpPr>
+          <p:nvPr>
+            <p:ph type="sldNum" sz="quarter" idx="5"/>
+          </p:nvPr>
+        </p:nvSpPr>
+        <p:spPr/>
+        <p:txBody>
+          <a:bodyPr/>
+          <a:lstStyle/>
+          <a:p>
+            <a:fld id="{BC9AF6F9-19A8-4B2B-96C4-42992BE88AC3}" type="slidenum">
+              <a:rPr lang="en-US" smtClean="0"/>
+              <a:t>54</a:t>
+            </a:fld>
+            <a:endParaRPr lang="en-US"/>
+          </a:p>
+        </p:txBody>
+      </p:sp>
+    </p:spTree>
+    <p:extLst>
+      <p:ext uri="{BB962C8B-B14F-4D97-AF65-F5344CB8AC3E}">
+        <p14:creationId xmlns:p14="http://schemas.microsoft.com/office/powerpoint/2010/main" val="1934691591"/>
+      </p:ext>
+    </p:extLst>
+  </p:cSld>
+  <p:clrMapOvr>
+    <a:masterClrMapping/>
+  </p:clrMapOvr>
+</p:notes>
+</file>
+
+<file path=ppt/notesSlides/notesSlide8.xml><?xml version="1.0" encoding="utf-8"?>
+<p:notes xmlns:a="http://schemas.openxmlformats.org/drawingml/2006/main" xmlns:r="http://schemas.openxmlformats.org/officeDocument/2006/relationships" xmlns:p="http://schemas.openxmlformats.org/presentationml/2006/main">
+  <p:cSld>
+    <p:spTree>
+      <p:nvGrpSpPr>
+        <p:cNvPr id="1" name=""/>
+        <p:cNvGrpSpPr/>
+        <p:nvPr/>
+      </p:nvGrpSpPr>
+      <p:grpSpPr>
+        <a:xfrm>
+          <a:off x="0" y="0"/>
+          <a:ext cx="0" cy="0"/>
+          <a:chOff x="0" y="0"/>
+          <a:chExt cx="0" cy="0"/>
+        </a:xfrm>
+      </p:grpSpPr>
+      <p:sp>
+        <p:nvSpPr>
+          <p:cNvPr id="2" name="Slide Image Placeholder 1"/>
+          <p:cNvSpPr>
+            <a:spLocks noGrp="1" noRot="1" noChangeAspect="1"/>
+          </p:cNvSpPr>
+          <p:nvPr>
+            <p:ph type="sldImg"/>
+          </p:nvPr>
+        </p:nvSpPr>
+        <p:spPr/>
+      </p:sp>
+      <p:sp>
+        <p:nvSpPr>
+          <p:cNvPr id="3" name="Notes Placeholder 2"/>
+          <p:cNvSpPr>
+            <a:spLocks noGrp="1"/>
+          </p:cNvSpPr>
+          <p:nvPr>
+            <p:ph type="body" idx="1"/>
+          </p:nvPr>
+        </p:nvSpPr>
+        <p:spPr/>
+        <p:txBody>
+          <a:bodyPr/>
+          <a:lstStyle/>
+          <a:p>
+            <a:r>
+              <a:rPr lang="en-US" dirty="0"/>
+              <a:t>These are Bayesian posteriors.</a:t>
+            </a:r>
+          </a:p>
+          <a:p>
+            <a:endParaRPr lang="en-US" dirty="0"/>
+          </a:p>
+          <a:p>
+            <a:r>
+              <a:rPr lang="en-US" dirty="0"/>
+              <a:t>Ecosystem drivers that are measure with these </a:t>
+            </a:r>
+          </a:p>
+        </p:txBody>
+      </p:sp>
+      <p:sp>
+        <p:nvSpPr>
+          <p:cNvPr id="4" name="Slide Number Placeholder 3"/>
+          <p:cNvSpPr>
+            <a:spLocks noGrp="1"/>
+          </p:cNvSpPr>
+          <p:nvPr>
+            <p:ph type="sldNum" sz="quarter" idx="5"/>
+          </p:nvPr>
+        </p:nvSpPr>
+        <p:spPr/>
+        <p:txBody>
+          <a:bodyPr/>
+          <a:lstStyle/>
+          <a:p>
+            <a:fld id="{BC9AF6F9-19A8-4B2B-96C4-42992BE88AC3}" type="slidenum">
+              <a:rPr lang="en-US" smtClean="0"/>
+              <a:t>55</a:t>
+            </a:fld>
+            <a:endParaRPr lang="en-US"/>
+          </a:p>
+        </p:txBody>
+      </p:sp>
+    </p:spTree>
+    <p:extLst>
+      <p:ext uri="{BB962C8B-B14F-4D97-AF65-F5344CB8AC3E}">
+        <p14:creationId xmlns:p14="http://schemas.microsoft.com/office/powerpoint/2010/main" val="422378332"/>
+      </p:ext>
+    </p:extLst>
+  </p:cSld>
+  <p:clrMapOvr>
+    <a:masterClrMapping/>
+  </p:clrMapOvr>
+</p:notes>
+</file>
+
+<file path=ppt/notesSlides/notesSlide9.xml><?xml version="1.0" encoding="utf-8"?>
+<p:notes xmlns:a="http://schemas.openxmlformats.org/drawingml/2006/main" xmlns:r="http://schemas.openxmlformats.org/officeDocument/2006/relationships" xmlns:p="http://schemas.openxmlformats.org/presentationml/2006/main">
+  <p:cSld>
+    <p:spTree>
+      <p:nvGrpSpPr>
+        <p:cNvPr id="1" name=""/>
+        <p:cNvGrpSpPr/>
+        <p:nvPr/>
+      </p:nvGrpSpPr>
+      <p:grpSpPr>
+        <a:xfrm>
+          <a:off x="0" y="0"/>
+          <a:ext cx="0" cy="0"/>
+          <a:chOff x="0" y="0"/>
+          <a:chExt cx="0" cy="0"/>
+        </a:xfrm>
+      </p:grpSpPr>
+      <p:sp>
+        <p:nvSpPr>
+          <p:cNvPr id="2" name="Slide Image Placeholder 1"/>
+          <p:cNvSpPr>
+            <a:spLocks noGrp="1" noRot="1" noChangeAspect="1"/>
+          </p:cNvSpPr>
+          <p:nvPr>
+            <p:ph type="sldImg"/>
+          </p:nvPr>
+        </p:nvSpPr>
+        <p:spPr/>
+      </p:sp>
+      <p:sp>
+        <p:nvSpPr>
+          <p:cNvPr id="3" name="Notes Placeholder 2"/>
+          <p:cNvSpPr>
+            <a:spLocks noGrp="1"/>
+          </p:cNvSpPr>
+          <p:nvPr>
+            <p:ph type="body" idx="1"/>
+          </p:nvPr>
+        </p:nvSpPr>
+        <p:spPr/>
+        <p:txBody>
+          <a:bodyPr/>
+          <a:lstStyle/>
+          <a:p>
+            <a:r>
+              <a:rPr lang="en-US" dirty="0"/>
+              <a:t>Suggests that hake may be less sensitive to differences in the environment when food and such are generally more abundant and their overall body condition is higher than normal.</a:t>
+            </a:r>
+          </a:p>
+        </p:txBody>
+      </p:sp>
+      <p:sp>
+        <p:nvSpPr>
+          <p:cNvPr id="4" name="Slide Number Placeholder 3"/>
+          <p:cNvSpPr>
+            <a:spLocks noGrp="1"/>
+          </p:cNvSpPr>
+          <p:nvPr>
+            <p:ph type="sldNum" sz="quarter" idx="5"/>
+          </p:nvPr>
+        </p:nvSpPr>
+        <p:spPr/>
+        <p:txBody>
+          <a:bodyPr/>
+          <a:lstStyle/>
+          <a:p>
+            <a:fld id="{BC9AF6F9-19A8-4B2B-96C4-42992BE88AC3}" type="slidenum">
+              <a:rPr lang="en-US" smtClean="0"/>
+              <a:t>56</a:t>
+            </a:fld>
+            <a:endParaRPr lang="en-US"/>
+          </a:p>
+        </p:txBody>
+      </p:sp>
+    </p:spTree>
+    <p:extLst>
+      <p:ext uri="{BB962C8B-B14F-4D97-AF65-F5344CB8AC3E}">
+        <p14:creationId xmlns:p14="http://schemas.microsoft.com/office/powerpoint/2010/main" val="3977632355"/>
       </p:ext>
     </p:extLst>
   </p:cSld>
@@ -8037,6 +8319,36 @@
           </a:p>
         </p:txBody>
       </p:sp>
+      <p:pic>
+        <p:nvPicPr>
+          <p:cNvPr id="5" name="Picture 4">
+            <a:extLst>
+              <a:ext uri="{FF2B5EF4-FFF2-40B4-BE49-F238E27FC236}">
+                <a16:creationId xmlns:a16="http://schemas.microsoft.com/office/drawing/2014/main" id="{2347223C-3D32-6D3C-8E68-A519724ED4CD}"/>
+              </a:ext>
+            </a:extLst>
+          </p:cNvPr>
+          <p:cNvPicPr>
+            <a:picLocks noChangeAspect="1"/>
+          </p:cNvPicPr>
+          <p:nvPr/>
+        </p:nvPicPr>
+        <p:blipFill>
+          <a:blip r:embed="rId2"/>
+          <a:stretch>
+            <a:fillRect/>
+          </a:stretch>
+        </p:blipFill>
+        <p:spPr>
+          <a:xfrm>
+            <a:off x="2750804" y="0"/>
+            <a:ext cx="6690391" cy="6858000"/>
+          </a:xfrm>
+          <a:prstGeom prst="rect">
+            <a:avLst/>
+          </a:prstGeom>
+        </p:spPr>
+      </p:pic>
     </p:spTree>
     <p:extLst>
       <p:ext uri="{BB962C8B-B14F-4D97-AF65-F5344CB8AC3E}">
@@ -8117,6 +8429,36 @@
           </a:p>
         </p:txBody>
       </p:sp>
+      <p:pic>
+        <p:nvPicPr>
+          <p:cNvPr id="5" name="Picture 4">
+            <a:extLst>
+              <a:ext uri="{FF2B5EF4-FFF2-40B4-BE49-F238E27FC236}">
+                <a16:creationId xmlns:a16="http://schemas.microsoft.com/office/drawing/2014/main" id="{CE7D219F-5887-3561-D11F-5843A805357C}"/>
+              </a:ext>
+            </a:extLst>
+          </p:cNvPr>
+          <p:cNvPicPr>
+            <a:picLocks noChangeAspect="1"/>
+          </p:cNvPicPr>
+          <p:nvPr/>
+        </p:nvPicPr>
+        <p:blipFill>
+          <a:blip r:embed="rId2"/>
+          <a:stretch>
+            <a:fillRect/>
+          </a:stretch>
+        </p:blipFill>
+        <p:spPr>
+          <a:xfrm>
+            <a:off x="3515329" y="101600"/>
+            <a:ext cx="6690391" cy="6858000"/>
+          </a:xfrm>
+          <a:prstGeom prst="rect">
+            <a:avLst/>
+          </a:prstGeom>
+        </p:spPr>
+      </p:pic>
     </p:spTree>
     <p:extLst>
       <p:ext uri="{BB962C8B-B14F-4D97-AF65-F5344CB8AC3E}">
@@ -8135,7 +8477,13 @@
   <p:cSld>
     <p:spTree>
       <p:nvGrpSpPr>
-        <p:cNvPr id="1" name=""/>
+        <p:cNvPr id="1" name="">
+          <a:extLst>
+            <a:ext uri="{FF2B5EF4-FFF2-40B4-BE49-F238E27FC236}">
+              <a16:creationId xmlns:a16="http://schemas.microsoft.com/office/drawing/2014/main" id="{85B1DD5E-009E-F3D5-3435-1AB6A85D3794}"/>
+            </a:ext>
+          </a:extLst>
+        </p:cNvPr>
         <p:cNvGrpSpPr/>
         <p:nvPr/>
       </p:nvGrpSpPr>
@@ -8152,7 +8500,7 @@
           <p:cNvPr id="2" name="Title 1">
             <a:extLst>
               <a:ext uri="{FF2B5EF4-FFF2-40B4-BE49-F238E27FC236}">
-                <a16:creationId xmlns:a16="http://schemas.microsoft.com/office/drawing/2014/main" id="{2473313D-9410-7606-DB19-CE63EE0B4B09}"/>
+                <a16:creationId xmlns:a16="http://schemas.microsoft.com/office/drawing/2014/main" id="{B8E12BEF-6637-9E10-48CE-0001A792F74B}"/>
               </a:ext>
             </a:extLst>
           </p:cNvPr>
@@ -8168,7 +8516,10 @@
           <a:bodyPr/>
           <a:lstStyle/>
           <a:p>
-            <a:endParaRPr lang="en-US"/>
+            <a:r>
+              <a:rPr lang="en-US" dirty="0"/>
+              <a:t>Aug-Oct condition with same year seasonal indicators</a:t>
+            </a:r>
           </a:p>
         </p:txBody>
       </p:sp>
@@ -8177,7 +8528,7 @@
           <p:cNvPr id="3" name="Content Placeholder 2">
             <a:extLst>
               <a:ext uri="{FF2B5EF4-FFF2-40B4-BE49-F238E27FC236}">
-                <a16:creationId xmlns:a16="http://schemas.microsoft.com/office/drawing/2014/main" id="{2F30C77D-E59B-5D9E-C679-3B98F968634F}"/>
+                <a16:creationId xmlns:a16="http://schemas.microsoft.com/office/drawing/2014/main" id="{D4AC2A56-C87C-BF4B-106F-A3036BDB3E37}"/>
               </a:ext>
             </a:extLst>
           </p:cNvPr>
@@ -8193,14 +8544,44 @@
           <a:bodyPr/>
           <a:lstStyle/>
           <a:p>
-            <a:endParaRPr lang="en-US"/>
-          </a:p>
-        </p:txBody>
-      </p:sp>
+            <a:endParaRPr lang="en-US" dirty="0"/>
+          </a:p>
+        </p:txBody>
+      </p:sp>
+      <p:pic>
+        <p:nvPicPr>
+          <p:cNvPr id="7" name="Picture 6">
+            <a:extLst>
+              <a:ext uri="{FF2B5EF4-FFF2-40B4-BE49-F238E27FC236}">
+                <a16:creationId xmlns:a16="http://schemas.microsoft.com/office/drawing/2014/main" id="{A693A7A5-957D-711E-3208-EE6C929916DC}"/>
+              </a:ext>
+            </a:extLst>
+          </p:cNvPr>
+          <p:cNvPicPr>
+            <a:picLocks noChangeAspect="1"/>
+          </p:cNvPicPr>
+          <p:nvPr/>
+        </p:nvPicPr>
+        <p:blipFill>
+          <a:blip r:embed="rId2"/>
+          <a:stretch>
+            <a:fillRect/>
+          </a:stretch>
+        </p:blipFill>
+        <p:spPr>
+          <a:xfrm>
+            <a:off x="4559285" y="1027906"/>
+            <a:ext cx="5377196" cy="5511907"/>
+          </a:xfrm>
+          <a:prstGeom prst="rect">
+            <a:avLst/>
+          </a:prstGeom>
+        </p:spPr>
+      </p:pic>
     </p:spTree>
     <p:extLst>
       <p:ext uri="{BB962C8B-B14F-4D97-AF65-F5344CB8AC3E}">
-        <p14:creationId xmlns:p14="http://schemas.microsoft.com/office/powerpoint/2010/main" val="787473245"/>
+        <p14:creationId xmlns:p14="http://schemas.microsoft.com/office/powerpoint/2010/main" val="867286663"/>
       </p:ext>
     </p:extLst>
   </p:cSld>
@@ -8384,6 +8765,86 @@
           <p:cNvPr id="2" name="Title 1">
             <a:extLst>
               <a:ext uri="{FF2B5EF4-FFF2-40B4-BE49-F238E27FC236}">
+                <a16:creationId xmlns:a16="http://schemas.microsoft.com/office/drawing/2014/main" id="{2473313D-9410-7606-DB19-CE63EE0B4B09}"/>
+              </a:ext>
+            </a:extLst>
+          </p:cNvPr>
+          <p:cNvSpPr>
+            <a:spLocks noGrp="1"/>
+          </p:cNvSpPr>
+          <p:nvPr>
+            <p:ph type="title"/>
+          </p:nvPr>
+        </p:nvSpPr>
+        <p:spPr/>
+        <p:txBody>
+          <a:bodyPr/>
+          <a:lstStyle/>
+          <a:p>
+            <a:endParaRPr lang="en-US"/>
+          </a:p>
+        </p:txBody>
+      </p:sp>
+      <p:sp>
+        <p:nvSpPr>
+          <p:cNvPr id="3" name="Content Placeholder 2">
+            <a:extLst>
+              <a:ext uri="{FF2B5EF4-FFF2-40B4-BE49-F238E27FC236}">
+                <a16:creationId xmlns:a16="http://schemas.microsoft.com/office/drawing/2014/main" id="{2F30C77D-E59B-5D9E-C679-3B98F968634F}"/>
+              </a:ext>
+            </a:extLst>
+          </p:cNvPr>
+          <p:cNvSpPr>
+            <a:spLocks noGrp="1"/>
+          </p:cNvSpPr>
+          <p:nvPr>
+            <p:ph idx="1"/>
+          </p:nvPr>
+        </p:nvSpPr>
+        <p:spPr/>
+        <p:txBody>
+          <a:bodyPr/>
+          <a:lstStyle/>
+          <a:p>
+            <a:endParaRPr lang="en-US"/>
+          </a:p>
+        </p:txBody>
+      </p:sp>
+    </p:spTree>
+    <p:extLst>
+      <p:ext uri="{BB962C8B-B14F-4D97-AF65-F5344CB8AC3E}">
+        <p14:creationId xmlns:p14="http://schemas.microsoft.com/office/powerpoint/2010/main" val="787473245"/>
+      </p:ext>
+    </p:extLst>
+  </p:cSld>
+  <p:clrMapOvr>
+    <a:masterClrMapping/>
+  </p:clrMapOvr>
+</p:sld>
+</file>
+
+<file path=ppt/slides/slide41.xml><?xml version="1.0" encoding="utf-8"?>
+<p:sld xmlns:a="http://schemas.openxmlformats.org/drawingml/2006/main" xmlns:r="http://schemas.openxmlformats.org/officeDocument/2006/relationships" xmlns:p="http://schemas.openxmlformats.org/presentationml/2006/main">
+  <p:cSld>
+    <p:spTree>
+      <p:nvGrpSpPr>
+        <p:cNvPr id="1" name=""/>
+        <p:cNvGrpSpPr/>
+        <p:nvPr/>
+      </p:nvGrpSpPr>
+      <p:grpSpPr>
+        <a:xfrm>
+          <a:off x="0" y="0"/>
+          <a:ext cx="0" cy="0"/>
+          <a:chOff x="0" y="0"/>
+          <a:chExt cx="0" cy="0"/>
+        </a:xfrm>
+      </p:grpSpPr>
+      <p:sp>
+        <p:nvSpPr>
+          <p:cNvPr id="2" name="Title 1">
+            <a:extLst>
+              <a:ext uri="{FF2B5EF4-FFF2-40B4-BE49-F238E27FC236}">
                 <a16:creationId xmlns:a16="http://schemas.microsoft.com/office/drawing/2014/main" id="{17F016EE-8CCC-98C7-EBF4-3DD8648C6038}"/>
               </a:ext>
             </a:extLst>
@@ -8442,7 +8903,7 @@
 </p:sld>
 </file>
 
-<file path=ppt/slides/slide41.xml><?xml version="1.0" encoding="utf-8"?>
+<file path=ppt/slides/slide42.xml><?xml version="1.0" encoding="utf-8"?>
 <p:sld xmlns:a="http://schemas.openxmlformats.org/drawingml/2006/main" xmlns:r="http://schemas.openxmlformats.org/officeDocument/2006/relationships" xmlns:p="http://schemas.openxmlformats.org/presentationml/2006/main">
   <p:cSld>
     <p:spTree>
@@ -8564,7 +9025,7 @@
 </p:sld>
 </file>
 
-<file path=ppt/slides/slide42.xml><?xml version="1.0" encoding="utf-8"?>
+<file path=ppt/slides/slide43.xml><?xml version="1.0" encoding="utf-8"?>
 <p:sld xmlns:a="http://schemas.openxmlformats.org/drawingml/2006/main" xmlns:r="http://schemas.openxmlformats.org/officeDocument/2006/relationships" xmlns:p="http://schemas.openxmlformats.org/presentationml/2006/main">
   <p:cSld>
     <p:spTree>
@@ -8647,7 +9108,7 @@
 </p:sld>
 </file>
 
-<file path=ppt/slides/slide43.xml><?xml version="1.0" encoding="utf-8"?>
+<file path=ppt/slides/slide44.xml><?xml version="1.0" encoding="utf-8"?>
 <p:sld xmlns:a="http://schemas.openxmlformats.org/drawingml/2006/main" xmlns:r="http://schemas.openxmlformats.org/officeDocument/2006/relationships" xmlns:p="http://schemas.openxmlformats.org/presentationml/2006/main">
   <p:cSld>
     <p:spTree>
@@ -8757,7 +9218,7 @@
 </p:sld>
 </file>
 
-<file path=ppt/slides/slide44.xml><?xml version="1.0" encoding="utf-8"?>
+<file path=ppt/slides/slide45.xml><?xml version="1.0" encoding="utf-8"?>
 <p:sld xmlns:a="http://schemas.openxmlformats.org/drawingml/2006/main" xmlns:r="http://schemas.openxmlformats.org/officeDocument/2006/relationships" xmlns:p="http://schemas.openxmlformats.org/presentationml/2006/main">
   <p:cSld>
     <p:spTree>
@@ -8867,7 +9328,7 @@
 </p:sld>
 </file>
 
-<file path=ppt/slides/slide45.xml><?xml version="1.0" encoding="utf-8"?>
+<file path=ppt/slides/slide46.xml><?xml version="1.0" encoding="utf-8"?>
 <p:sld xmlns:a="http://schemas.openxmlformats.org/drawingml/2006/main" xmlns:r="http://schemas.openxmlformats.org/officeDocument/2006/relationships" xmlns:p="http://schemas.openxmlformats.org/presentationml/2006/main">
   <p:cSld>
     <p:spTree>
@@ -8977,7 +9438,7 @@
 </p:sld>
 </file>
 
-<file path=ppt/slides/slide46.xml><?xml version="1.0" encoding="utf-8"?>
+<file path=ppt/slides/slide47.xml><?xml version="1.0" encoding="utf-8"?>
 <p:sld xmlns:a="http://schemas.openxmlformats.org/drawingml/2006/main" xmlns:r="http://schemas.openxmlformats.org/officeDocument/2006/relationships" xmlns:p="http://schemas.openxmlformats.org/presentationml/2006/main">
   <p:cSld>
     <p:spTree>
@@ -9057,7 +9518,7 @@
 </p:sld>
 </file>
 
-<file path=ppt/slides/slide47.xml><?xml version="1.0" encoding="utf-8"?>
+<file path=ppt/slides/slide48.xml><?xml version="1.0" encoding="utf-8"?>
 <p:sld xmlns:a="http://schemas.openxmlformats.org/drawingml/2006/main" xmlns:r="http://schemas.openxmlformats.org/officeDocument/2006/relationships" xmlns:p="http://schemas.openxmlformats.org/presentationml/2006/main">
   <p:cSld>
     <p:spTree>
@@ -9167,7 +9628,7 @@
 </p:sld>
 </file>
 
-<file path=ppt/slides/slide48.xml><?xml version="1.0" encoding="utf-8"?>
+<file path=ppt/slides/slide49.xml><?xml version="1.0" encoding="utf-8"?>
 <p:sld xmlns:a="http://schemas.openxmlformats.org/drawingml/2006/main" xmlns:r="http://schemas.openxmlformats.org/officeDocument/2006/relationships" xmlns:p="http://schemas.openxmlformats.org/presentationml/2006/main">
   <p:cSld>
     <p:spTree>
@@ -9310,116 +9771,6 @@
 </p:sld>
 </file>
 
-<file path=ppt/slides/slide49.xml><?xml version="1.0" encoding="utf-8"?>
-<p:sld xmlns:a="http://schemas.openxmlformats.org/drawingml/2006/main" xmlns:r="http://schemas.openxmlformats.org/officeDocument/2006/relationships" xmlns:p="http://schemas.openxmlformats.org/presentationml/2006/main">
-  <p:cSld>
-    <p:spTree>
-      <p:nvGrpSpPr>
-        <p:cNvPr id="1" name=""/>
-        <p:cNvGrpSpPr/>
-        <p:nvPr/>
-      </p:nvGrpSpPr>
-      <p:grpSpPr>
-        <a:xfrm>
-          <a:off x="0" y="0"/>
-          <a:ext cx="0" cy="0"/>
-          <a:chOff x="0" y="0"/>
-          <a:chExt cx="0" cy="0"/>
-        </a:xfrm>
-      </p:grpSpPr>
-      <p:sp>
-        <p:nvSpPr>
-          <p:cNvPr id="2" name="Title 1">
-            <a:extLst>
-              <a:ext uri="{FF2B5EF4-FFF2-40B4-BE49-F238E27FC236}">
-                <a16:creationId xmlns:a16="http://schemas.microsoft.com/office/drawing/2014/main" id="{3158255A-61DF-05D3-DC34-C85BF9EEBCD0}"/>
-              </a:ext>
-            </a:extLst>
-          </p:cNvPr>
-          <p:cNvSpPr>
-            <a:spLocks noGrp="1"/>
-          </p:cNvSpPr>
-          <p:nvPr>
-            <p:ph type="title"/>
-          </p:nvPr>
-        </p:nvSpPr>
-        <p:spPr/>
-        <p:txBody>
-          <a:bodyPr/>
-          <a:lstStyle/>
-          <a:p>
-            <a:endParaRPr lang="en-US"/>
-          </a:p>
-        </p:txBody>
-      </p:sp>
-      <p:sp>
-        <p:nvSpPr>
-          <p:cNvPr id="3" name="Content Placeholder 2">
-            <a:extLst>
-              <a:ext uri="{FF2B5EF4-FFF2-40B4-BE49-F238E27FC236}">
-                <a16:creationId xmlns:a16="http://schemas.microsoft.com/office/drawing/2014/main" id="{E853F5FE-D531-5780-2EC3-B39CF2B67FB2}"/>
-              </a:ext>
-            </a:extLst>
-          </p:cNvPr>
-          <p:cNvSpPr>
-            <a:spLocks noGrp="1"/>
-          </p:cNvSpPr>
-          <p:nvPr>
-            <p:ph idx="1"/>
-          </p:nvPr>
-        </p:nvSpPr>
-        <p:spPr/>
-        <p:txBody>
-          <a:bodyPr/>
-          <a:lstStyle/>
-          <a:p>
-            <a:endParaRPr lang="en-US"/>
-          </a:p>
-        </p:txBody>
-      </p:sp>
-      <p:pic>
-        <p:nvPicPr>
-          <p:cNvPr id="5" name="Picture 4">
-            <a:extLst>
-              <a:ext uri="{FF2B5EF4-FFF2-40B4-BE49-F238E27FC236}">
-                <a16:creationId xmlns:a16="http://schemas.microsoft.com/office/drawing/2014/main" id="{1AC09531-393B-FA8E-BC4F-FDEB86BBEAF5}"/>
-              </a:ext>
-            </a:extLst>
-          </p:cNvPr>
-          <p:cNvPicPr>
-            <a:picLocks noChangeAspect="1"/>
-          </p:cNvPicPr>
-          <p:nvPr/>
-        </p:nvPicPr>
-        <p:blipFill>
-          <a:blip r:embed="rId2"/>
-          <a:stretch>
-            <a:fillRect/>
-          </a:stretch>
-        </p:blipFill>
-        <p:spPr>
-          <a:xfrm>
-            <a:off x="619432" y="1506028"/>
-            <a:ext cx="10087897" cy="4986847"/>
-          </a:xfrm>
-          <a:prstGeom prst="rect">
-            <a:avLst/>
-          </a:prstGeom>
-        </p:spPr>
-      </p:pic>
-    </p:spTree>
-    <p:extLst>
-      <p:ext uri="{BB962C8B-B14F-4D97-AF65-F5344CB8AC3E}">
-        <p14:creationId xmlns:p14="http://schemas.microsoft.com/office/powerpoint/2010/main" val="1601108405"/>
-      </p:ext>
-    </p:extLst>
-  </p:cSld>
-  <p:clrMapOvr>
-    <a:masterClrMapping/>
-  </p:clrMapOvr>
-</p:sld>
-</file>
-
 <file path=ppt/slides/slide5.xml><?xml version="1.0" encoding="utf-8"?>
 <p:sld xmlns:a="http://schemas.openxmlformats.org/drawingml/2006/main" xmlns:r="http://schemas.openxmlformats.org/officeDocument/2006/relationships" xmlns:p="http://schemas.openxmlformats.org/presentationml/2006/main">
   <p:cSld>
@@ -9536,7 +9887,7 @@
           <p:cNvPr id="2" name="Title 1">
             <a:extLst>
               <a:ext uri="{FF2B5EF4-FFF2-40B4-BE49-F238E27FC236}">
-                <a16:creationId xmlns:a16="http://schemas.microsoft.com/office/drawing/2014/main" id="{1B4F899D-7172-97F0-AEB9-22F23528885F}"/>
+                <a16:creationId xmlns:a16="http://schemas.microsoft.com/office/drawing/2014/main" id="{3158255A-61DF-05D3-DC34-C85BF9EEBCD0}"/>
               </a:ext>
             </a:extLst>
           </p:cNvPr>
@@ -9561,7 +9912,7 @@
           <p:cNvPr id="3" name="Content Placeholder 2">
             <a:extLst>
               <a:ext uri="{FF2B5EF4-FFF2-40B4-BE49-F238E27FC236}">
-                <a16:creationId xmlns:a16="http://schemas.microsoft.com/office/drawing/2014/main" id="{97E331C5-05F1-E46E-09B0-CA9D5E9401D7}"/>
+                <a16:creationId xmlns:a16="http://schemas.microsoft.com/office/drawing/2014/main" id="{E853F5FE-D531-5780-2EC3-B39CF2B67FB2}"/>
               </a:ext>
             </a:extLst>
           </p:cNvPr>
@@ -9581,10 +9932,40 @@
           </a:p>
         </p:txBody>
       </p:sp>
+      <p:pic>
+        <p:nvPicPr>
+          <p:cNvPr id="5" name="Picture 4">
+            <a:extLst>
+              <a:ext uri="{FF2B5EF4-FFF2-40B4-BE49-F238E27FC236}">
+                <a16:creationId xmlns:a16="http://schemas.microsoft.com/office/drawing/2014/main" id="{1AC09531-393B-FA8E-BC4F-FDEB86BBEAF5}"/>
+              </a:ext>
+            </a:extLst>
+          </p:cNvPr>
+          <p:cNvPicPr>
+            <a:picLocks noChangeAspect="1"/>
+          </p:cNvPicPr>
+          <p:nvPr/>
+        </p:nvPicPr>
+        <p:blipFill>
+          <a:blip r:embed="rId2"/>
+          <a:stretch>
+            <a:fillRect/>
+          </a:stretch>
+        </p:blipFill>
+        <p:spPr>
+          <a:xfrm>
+            <a:off x="619432" y="1506028"/>
+            <a:ext cx="10087897" cy="4986847"/>
+          </a:xfrm>
+          <a:prstGeom prst="rect">
+            <a:avLst/>
+          </a:prstGeom>
+        </p:spPr>
+      </p:pic>
     </p:spTree>
     <p:extLst>
       <p:ext uri="{BB962C8B-B14F-4D97-AF65-F5344CB8AC3E}">
-        <p14:creationId xmlns:p14="http://schemas.microsoft.com/office/powerpoint/2010/main" val="387653240"/>
+        <p14:creationId xmlns:p14="http://schemas.microsoft.com/office/powerpoint/2010/main" val="1601108405"/>
       </p:ext>
     </p:extLst>
   </p:cSld>
@@ -9616,6 +9997,86 @@
           <p:cNvPr id="2" name="Title 1">
             <a:extLst>
               <a:ext uri="{FF2B5EF4-FFF2-40B4-BE49-F238E27FC236}">
+                <a16:creationId xmlns:a16="http://schemas.microsoft.com/office/drawing/2014/main" id="{1B4F899D-7172-97F0-AEB9-22F23528885F}"/>
+              </a:ext>
+            </a:extLst>
+          </p:cNvPr>
+          <p:cNvSpPr>
+            <a:spLocks noGrp="1"/>
+          </p:cNvSpPr>
+          <p:nvPr>
+            <p:ph type="title"/>
+          </p:nvPr>
+        </p:nvSpPr>
+        <p:spPr/>
+        <p:txBody>
+          <a:bodyPr/>
+          <a:lstStyle/>
+          <a:p>
+            <a:endParaRPr lang="en-US"/>
+          </a:p>
+        </p:txBody>
+      </p:sp>
+      <p:sp>
+        <p:nvSpPr>
+          <p:cNvPr id="3" name="Content Placeholder 2">
+            <a:extLst>
+              <a:ext uri="{FF2B5EF4-FFF2-40B4-BE49-F238E27FC236}">
+                <a16:creationId xmlns:a16="http://schemas.microsoft.com/office/drawing/2014/main" id="{97E331C5-05F1-E46E-09B0-CA9D5E9401D7}"/>
+              </a:ext>
+            </a:extLst>
+          </p:cNvPr>
+          <p:cNvSpPr>
+            <a:spLocks noGrp="1"/>
+          </p:cNvSpPr>
+          <p:nvPr>
+            <p:ph idx="1"/>
+          </p:nvPr>
+        </p:nvSpPr>
+        <p:spPr/>
+        <p:txBody>
+          <a:bodyPr/>
+          <a:lstStyle/>
+          <a:p>
+            <a:endParaRPr lang="en-US"/>
+          </a:p>
+        </p:txBody>
+      </p:sp>
+    </p:spTree>
+    <p:extLst>
+      <p:ext uri="{BB962C8B-B14F-4D97-AF65-F5344CB8AC3E}">
+        <p14:creationId xmlns:p14="http://schemas.microsoft.com/office/powerpoint/2010/main" val="387653240"/>
+      </p:ext>
+    </p:extLst>
+  </p:cSld>
+  <p:clrMapOvr>
+    <a:masterClrMapping/>
+  </p:clrMapOvr>
+</p:sld>
+</file>
+
+<file path=ppt/slides/slide52.xml><?xml version="1.0" encoding="utf-8"?>
+<p:sld xmlns:a="http://schemas.openxmlformats.org/drawingml/2006/main" xmlns:r="http://schemas.openxmlformats.org/officeDocument/2006/relationships" xmlns:p="http://schemas.openxmlformats.org/presentationml/2006/main">
+  <p:cSld>
+    <p:spTree>
+      <p:nvGrpSpPr>
+        <p:cNvPr id="1" name=""/>
+        <p:cNvGrpSpPr/>
+        <p:nvPr/>
+      </p:nvGrpSpPr>
+      <p:grpSpPr>
+        <a:xfrm>
+          <a:off x="0" y="0"/>
+          <a:ext cx="0" cy="0"/>
+          <a:chOff x="0" y="0"/>
+          <a:chExt cx="0" cy="0"/>
+        </a:xfrm>
+      </p:grpSpPr>
+      <p:sp>
+        <p:nvSpPr>
+          <p:cNvPr id="2" name="Title 1">
+            <a:extLst>
+              <a:ext uri="{FF2B5EF4-FFF2-40B4-BE49-F238E27FC236}">
                 <a16:creationId xmlns:a16="http://schemas.microsoft.com/office/drawing/2014/main" id="{8283EF55-EB33-0AE4-2506-D01C6C8E560B}"/>
               </a:ext>
             </a:extLst>
@@ -9665,6 +10126,836 @@
     <p:extLst>
       <p:ext uri="{BB962C8B-B14F-4D97-AF65-F5344CB8AC3E}">
         <p14:creationId xmlns:p14="http://schemas.microsoft.com/office/powerpoint/2010/main" val="3603619897"/>
+      </p:ext>
+    </p:extLst>
+  </p:cSld>
+  <p:clrMapOvr>
+    <a:masterClrMapping/>
+  </p:clrMapOvr>
+</p:sld>
+</file>
+
+<file path=ppt/slides/slide53.xml><?xml version="1.0" encoding="utf-8"?>
+<p:sld xmlns:a="http://schemas.openxmlformats.org/drawingml/2006/main" xmlns:r="http://schemas.openxmlformats.org/officeDocument/2006/relationships" xmlns:p="http://schemas.openxmlformats.org/presentationml/2006/main">
+  <p:cSld>
+    <p:spTree>
+      <p:nvGrpSpPr>
+        <p:cNvPr id="1" name=""/>
+        <p:cNvGrpSpPr/>
+        <p:nvPr/>
+      </p:nvGrpSpPr>
+      <p:grpSpPr>
+        <a:xfrm>
+          <a:off x="0" y="0"/>
+          <a:ext cx="0" cy="0"/>
+          <a:chOff x="0" y="0"/>
+          <a:chExt cx="0" cy="0"/>
+        </a:xfrm>
+      </p:grpSpPr>
+      <p:sp>
+        <p:nvSpPr>
+          <p:cNvPr id="2" name="Title 1">
+            <a:extLst>
+              <a:ext uri="{FF2B5EF4-FFF2-40B4-BE49-F238E27FC236}">
+                <a16:creationId xmlns:a16="http://schemas.microsoft.com/office/drawing/2014/main" id="{959CF5EB-F128-4451-60D6-6B1DEF6E1205}"/>
+              </a:ext>
+            </a:extLst>
+          </p:cNvPr>
+          <p:cNvSpPr>
+            <a:spLocks noGrp="1"/>
+          </p:cNvSpPr>
+          <p:nvPr>
+            <p:ph type="title"/>
+          </p:nvPr>
+        </p:nvSpPr>
+        <p:spPr/>
+        <p:txBody>
+          <a:bodyPr/>
+          <a:lstStyle/>
+          <a:p>
+            <a:r>
+              <a:rPr lang="en-US" dirty="0"/>
+              <a:t>Slides for Andy</a:t>
+            </a:r>
+          </a:p>
+        </p:txBody>
+      </p:sp>
+      <p:sp>
+        <p:nvSpPr>
+          <p:cNvPr id="3" name="Content Placeholder 2">
+            <a:extLst>
+              <a:ext uri="{FF2B5EF4-FFF2-40B4-BE49-F238E27FC236}">
+                <a16:creationId xmlns:a16="http://schemas.microsoft.com/office/drawing/2014/main" id="{8031EB6E-6B9E-DBFA-998E-8B9668CD4B25}"/>
+              </a:ext>
+            </a:extLst>
+          </p:cNvPr>
+          <p:cNvSpPr>
+            <a:spLocks noGrp="1"/>
+          </p:cNvSpPr>
+          <p:nvPr>
+            <p:ph idx="1"/>
+          </p:nvPr>
+        </p:nvSpPr>
+        <p:spPr/>
+        <p:txBody>
+          <a:bodyPr/>
+          <a:lstStyle/>
+          <a:p>
+            <a:endParaRPr lang="en-US"/>
+          </a:p>
+        </p:txBody>
+      </p:sp>
+    </p:spTree>
+    <p:extLst>
+      <p:ext uri="{BB962C8B-B14F-4D97-AF65-F5344CB8AC3E}">
+        <p14:creationId xmlns:p14="http://schemas.microsoft.com/office/powerpoint/2010/main" val="3092105910"/>
+      </p:ext>
+    </p:extLst>
+  </p:cSld>
+  <p:clrMapOvr>
+    <a:masterClrMapping/>
+  </p:clrMapOvr>
+</p:sld>
+</file>
+
+<file path=ppt/slides/slide54.xml><?xml version="1.0" encoding="utf-8"?>
+<p:sld xmlns:a="http://schemas.openxmlformats.org/drawingml/2006/main" xmlns:r="http://schemas.openxmlformats.org/officeDocument/2006/relationships" xmlns:p="http://schemas.openxmlformats.org/presentationml/2006/main">
+  <p:cSld>
+    <p:spTree>
+      <p:nvGrpSpPr>
+        <p:cNvPr id="1" name=""/>
+        <p:cNvGrpSpPr/>
+        <p:nvPr/>
+      </p:nvGrpSpPr>
+      <p:grpSpPr>
+        <a:xfrm>
+          <a:off x="0" y="0"/>
+          <a:ext cx="0" cy="0"/>
+          <a:chOff x="0" y="0"/>
+          <a:chExt cx="0" cy="0"/>
+        </a:xfrm>
+      </p:grpSpPr>
+      <p:sp>
+        <p:nvSpPr>
+          <p:cNvPr id="2" name="Title 1">
+            <a:extLst>
+              <a:ext uri="{FF2B5EF4-FFF2-40B4-BE49-F238E27FC236}">
+                <a16:creationId xmlns:a16="http://schemas.microsoft.com/office/drawing/2014/main" id="{49488999-1CA3-00B5-34D6-1EC8BEC338BC}"/>
+              </a:ext>
+            </a:extLst>
+          </p:cNvPr>
+          <p:cNvSpPr>
+            <a:spLocks noGrp="1"/>
+          </p:cNvSpPr>
+          <p:nvPr>
+            <p:ph type="title"/>
+          </p:nvPr>
+        </p:nvSpPr>
+        <p:spPr/>
+        <p:txBody>
+          <a:bodyPr/>
+          <a:lstStyle/>
+          <a:p>
+            <a:r>
+              <a:rPr lang="en-US" dirty="0"/>
+              <a:t>Le </a:t>
+            </a:r>
+            <a:r>
+              <a:rPr lang="en-US" dirty="0" err="1"/>
+              <a:t>Cren’s</a:t>
+            </a:r>
+            <a:r>
+              <a:rPr lang="en-US" dirty="0"/>
+              <a:t> body condition</a:t>
+            </a:r>
+          </a:p>
+        </p:txBody>
+      </p:sp>
+      <p:sp>
+        <p:nvSpPr>
+          <p:cNvPr id="3" name="Content Placeholder 2">
+            <a:extLst>
+              <a:ext uri="{FF2B5EF4-FFF2-40B4-BE49-F238E27FC236}">
+                <a16:creationId xmlns:a16="http://schemas.microsoft.com/office/drawing/2014/main" id="{CAC8E92A-FFD1-AA93-B882-AEB15BE45C8B}"/>
+              </a:ext>
+            </a:extLst>
+          </p:cNvPr>
+          <p:cNvSpPr>
+            <a:spLocks noGrp="1"/>
+          </p:cNvSpPr>
+          <p:nvPr>
+            <p:ph idx="1"/>
+          </p:nvPr>
+        </p:nvSpPr>
+        <p:spPr>
+          <a:xfrm>
+            <a:off x="838200" y="1825625"/>
+            <a:ext cx="4688840" cy="4351338"/>
+          </a:xfrm>
+        </p:spPr>
+        <p:txBody>
+          <a:bodyPr>
+            <a:normAutofit lnSpcReduction="10000"/>
+          </a:bodyPr>
+          <a:lstStyle/>
+          <a:p>
+            <a:r>
+              <a:rPr lang="en-US" sz="2000" dirty="0"/>
+              <a:t>Model the length-weight relationship and the parameters </a:t>
+            </a:r>
+            <a:r>
+              <a:rPr lang="en-US" sz="2000" i="1" dirty="0"/>
+              <a:t>a</a:t>
+            </a:r>
+            <a:r>
+              <a:rPr lang="en-US" sz="2000" dirty="0"/>
+              <a:t> and </a:t>
+            </a:r>
+            <a:r>
+              <a:rPr lang="en-US" sz="2000" i="1" dirty="0"/>
+              <a:t>b</a:t>
+            </a:r>
+            <a:r>
+              <a:rPr lang="en-US" sz="2000" dirty="0"/>
+              <a:t>:</a:t>
+            </a:r>
+          </a:p>
+          <a:p>
+            <a:pPr marL="457200" lvl="1" indent="0">
+              <a:buNone/>
+            </a:pPr>
+            <a:endParaRPr lang="en-US" sz="1800" dirty="0"/>
+          </a:p>
+          <a:p>
+            <a:pPr marL="457200" lvl="1" indent="0">
+              <a:buNone/>
+            </a:pPr>
+            <a:r>
+              <a:rPr lang="en-US" sz="1800" i="1" dirty="0"/>
+              <a:t>W = </a:t>
+            </a:r>
+            <a:r>
+              <a:rPr lang="en-US" sz="1800" i="1" dirty="0" err="1"/>
+              <a:t>aL^b</a:t>
+            </a:r>
+            <a:endParaRPr lang="en-US" sz="1800" i="1" dirty="0"/>
+          </a:p>
+          <a:p>
+            <a:endParaRPr lang="en-US" sz="2000" dirty="0"/>
+          </a:p>
+          <a:p>
+            <a:r>
+              <a:rPr lang="en-US" sz="2000" dirty="0"/>
+              <a:t>Use the a and b parameters to estimate expected weight W`, and body condition, K, as:</a:t>
+            </a:r>
+          </a:p>
+          <a:p>
+            <a:endParaRPr lang="en-US" sz="2000" dirty="0"/>
+          </a:p>
+          <a:p>
+            <a:pPr marL="457200" lvl="1" indent="0">
+              <a:buNone/>
+            </a:pPr>
+            <a:r>
+              <a:rPr lang="en-US" sz="1800" dirty="0"/>
+              <a:t>K = </a:t>
+            </a:r>
+            <a:r>
+              <a:rPr lang="en-US" sz="1800" dirty="0" err="1"/>
+              <a:t>W</a:t>
+            </a:r>
+            <a:r>
+              <a:rPr lang="en-US" sz="1800" baseline="-25000" dirty="0" err="1"/>
+              <a:t>obs</a:t>
+            </a:r>
+            <a:r>
+              <a:rPr lang="en-US" sz="1800" dirty="0"/>
+              <a:t> / W`</a:t>
+            </a:r>
+          </a:p>
+          <a:p>
+            <a:endParaRPr lang="en-US" sz="2000" dirty="0"/>
+          </a:p>
+          <a:p>
+            <a:r>
+              <a:rPr lang="en-US" sz="2000" dirty="0"/>
+              <a:t>Lower body condition in spring, higher in late summer</a:t>
+            </a:r>
+          </a:p>
+        </p:txBody>
+      </p:sp>
+      <p:pic>
+        <p:nvPicPr>
+          <p:cNvPr id="16" name="Picture 15">
+            <a:extLst>
+              <a:ext uri="{FF2B5EF4-FFF2-40B4-BE49-F238E27FC236}">
+                <a16:creationId xmlns:a16="http://schemas.microsoft.com/office/drawing/2014/main" id="{F1CB0425-7666-0F35-553D-1B606B7FBF13}"/>
+              </a:ext>
+            </a:extLst>
+          </p:cNvPr>
+          <p:cNvPicPr>
+            <a:picLocks noChangeAspect="1"/>
+          </p:cNvPicPr>
+          <p:nvPr/>
+        </p:nvPicPr>
+        <p:blipFill>
+          <a:blip r:embed="rId3"/>
+          <a:stretch>
+            <a:fillRect/>
+          </a:stretch>
+        </p:blipFill>
+        <p:spPr>
+          <a:xfrm>
+            <a:off x="7714974" y="727849"/>
+            <a:ext cx="4217946" cy="2789764"/>
+          </a:xfrm>
+          <a:prstGeom prst="rect">
+            <a:avLst/>
+          </a:prstGeom>
+        </p:spPr>
+      </p:pic>
+      <p:sp>
+        <p:nvSpPr>
+          <p:cNvPr id="8" name="TextBox 7">
+            <a:extLst>
+              <a:ext uri="{FF2B5EF4-FFF2-40B4-BE49-F238E27FC236}">
+                <a16:creationId xmlns:a16="http://schemas.microsoft.com/office/drawing/2014/main" id="{8F5C1752-7920-5809-E850-CC6D6F3854CC}"/>
+              </a:ext>
+            </a:extLst>
+          </p:cNvPr>
+          <p:cNvSpPr txBox="1"/>
+          <p:nvPr/>
+        </p:nvSpPr>
+        <p:spPr>
+          <a:xfrm>
+            <a:off x="8524568" y="1286540"/>
+            <a:ext cx="1027845" cy="584775"/>
+          </a:xfrm>
+          <a:prstGeom prst="rect">
+            <a:avLst/>
+          </a:prstGeom>
+          <a:noFill/>
+        </p:spPr>
+        <p:txBody>
+          <a:bodyPr wrap="none" rtlCol="0">
+            <a:spAutoFit/>
+          </a:bodyPr>
+          <a:lstStyle/>
+          <a:p>
+            <a:r>
+              <a:rPr lang="en-US" sz="1600" dirty="0"/>
+              <a:t>Good </a:t>
+            </a:r>
+          </a:p>
+          <a:p>
+            <a:r>
+              <a:rPr lang="en-US" sz="1600" dirty="0"/>
+              <a:t>condition</a:t>
+            </a:r>
+          </a:p>
+        </p:txBody>
+      </p:sp>
+      <p:sp>
+        <p:nvSpPr>
+          <p:cNvPr id="10" name="TextBox 9">
+            <a:extLst>
+              <a:ext uri="{FF2B5EF4-FFF2-40B4-BE49-F238E27FC236}">
+                <a16:creationId xmlns:a16="http://schemas.microsoft.com/office/drawing/2014/main" id="{FC504361-0837-DFC5-FB97-FA7A44D90751}"/>
+              </a:ext>
+            </a:extLst>
+          </p:cNvPr>
+          <p:cNvSpPr txBox="1"/>
+          <p:nvPr/>
+        </p:nvSpPr>
+        <p:spPr>
+          <a:xfrm>
+            <a:off x="9823947" y="2402076"/>
+            <a:ext cx="1027845" cy="584775"/>
+          </a:xfrm>
+          <a:prstGeom prst="rect">
+            <a:avLst/>
+          </a:prstGeom>
+          <a:noFill/>
+        </p:spPr>
+        <p:txBody>
+          <a:bodyPr wrap="none" rtlCol="0">
+            <a:spAutoFit/>
+          </a:bodyPr>
+          <a:lstStyle/>
+          <a:p>
+            <a:r>
+              <a:rPr lang="en-US" sz="1600" dirty="0"/>
+              <a:t>Poor </a:t>
+            </a:r>
+          </a:p>
+          <a:p>
+            <a:r>
+              <a:rPr lang="en-US" sz="1600" dirty="0"/>
+              <a:t>condition</a:t>
+            </a:r>
+          </a:p>
+        </p:txBody>
+      </p:sp>
+      <p:pic>
+        <p:nvPicPr>
+          <p:cNvPr id="18" name="Picture 17">
+            <a:extLst>
+              <a:ext uri="{FF2B5EF4-FFF2-40B4-BE49-F238E27FC236}">
+                <a16:creationId xmlns:a16="http://schemas.microsoft.com/office/drawing/2014/main" id="{C5DBE00D-5A01-D6A0-1B68-7A22AE0386AE}"/>
+              </a:ext>
+            </a:extLst>
+          </p:cNvPr>
+          <p:cNvPicPr>
+            <a:picLocks noChangeAspect="1"/>
+          </p:cNvPicPr>
+          <p:nvPr/>
+        </p:nvPicPr>
+        <p:blipFill>
+          <a:blip r:embed="rId4"/>
+          <a:stretch>
+            <a:fillRect/>
+          </a:stretch>
+        </p:blipFill>
+        <p:spPr>
+          <a:xfrm>
+            <a:off x="5770881" y="3591692"/>
+            <a:ext cx="6228080" cy="3225668"/>
+          </a:xfrm>
+          <a:prstGeom prst="rect">
+            <a:avLst/>
+          </a:prstGeom>
+        </p:spPr>
+      </p:pic>
+    </p:spTree>
+    <p:extLst>
+      <p:ext uri="{BB962C8B-B14F-4D97-AF65-F5344CB8AC3E}">
+        <p14:creationId xmlns:p14="http://schemas.microsoft.com/office/powerpoint/2010/main" val="1262578990"/>
+      </p:ext>
+    </p:extLst>
+  </p:cSld>
+  <p:clrMapOvr>
+    <a:masterClrMapping/>
+  </p:clrMapOvr>
+</p:sld>
+</file>
+
+<file path=ppt/slides/slide55.xml><?xml version="1.0" encoding="utf-8"?>
+<p:sld xmlns:a="http://schemas.openxmlformats.org/drawingml/2006/main" xmlns:r="http://schemas.openxmlformats.org/officeDocument/2006/relationships" xmlns:p="http://schemas.openxmlformats.org/presentationml/2006/main">
+  <p:cSld>
+    <p:spTree>
+      <p:nvGrpSpPr>
+        <p:cNvPr id="1" name=""/>
+        <p:cNvGrpSpPr/>
+        <p:nvPr/>
+      </p:nvGrpSpPr>
+      <p:grpSpPr>
+        <a:xfrm>
+          <a:off x="0" y="0"/>
+          <a:ext cx="0" cy="0"/>
+          <a:chOff x="0" y="0"/>
+          <a:chExt cx="0" cy="0"/>
+        </a:xfrm>
+      </p:grpSpPr>
+      <p:sp>
+        <p:nvSpPr>
+          <p:cNvPr id="2" name="Title 1">
+            <a:extLst>
+              <a:ext uri="{FF2B5EF4-FFF2-40B4-BE49-F238E27FC236}">
+                <a16:creationId xmlns:a16="http://schemas.microsoft.com/office/drawing/2014/main" id="{324E614A-5CBB-3D74-9673-22B7C4307C31}"/>
+              </a:ext>
+            </a:extLst>
+          </p:cNvPr>
+          <p:cNvSpPr>
+            <a:spLocks noGrp="1"/>
+          </p:cNvSpPr>
+          <p:nvPr>
+            <p:ph type="title"/>
+          </p:nvPr>
+        </p:nvSpPr>
+        <p:spPr/>
+        <p:txBody>
+          <a:bodyPr/>
+          <a:lstStyle/>
+          <a:p>
+            <a:r>
+              <a:rPr lang="en-US" dirty="0"/>
+              <a:t>Spring body condition</a:t>
+            </a:r>
+          </a:p>
+        </p:txBody>
+      </p:sp>
+      <p:sp>
+        <p:nvSpPr>
+          <p:cNvPr id="3" name="Content Placeholder 2">
+            <a:extLst>
+              <a:ext uri="{FF2B5EF4-FFF2-40B4-BE49-F238E27FC236}">
+                <a16:creationId xmlns:a16="http://schemas.microsoft.com/office/drawing/2014/main" id="{54F1D035-F7F4-EA0D-E76A-E9FE2C65D7F5}"/>
+              </a:ext>
+            </a:extLst>
+          </p:cNvPr>
+          <p:cNvSpPr>
+            <a:spLocks noGrp="1"/>
+          </p:cNvSpPr>
+          <p:nvPr>
+            <p:ph idx="1"/>
+          </p:nvPr>
+        </p:nvSpPr>
+        <p:spPr>
+          <a:xfrm>
+            <a:off x="838200" y="1825625"/>
+            <a:ext cx="5521960" cy="4351338"/>
+          </a:xfrm>
+        </p:spPr>
+        <p:txBody>
+          <a:bodyPr>
+            <a:normAutofit/>
+          </a:bodyPr>
+          <a:lstStyle/>
+          <a:p>
+            <a:r>
+              <a:rPr lang="en-US" dirty="0"/>
+              <a:t>Environmental indices stored in </a:t>
+            </a:r>
+            <a:r>
+              <a:rPr lang="en-US" dirty="0" err="1"/>
+              <a:t>pacea</a:t>
+            </a:r>
+            <a:r>
+              <a:rPr lang="en-US" dirty="0"/>
+              <a:t> R package</a:t>
+            </a:r>
+          </a:p>
+          <a:p>
+            <a:r>
+              <a:rPr lang="en-US" dirty="0"/>
+              <a:t>Apr-Jun means of body condition and environment</a:t>
+            </a:r>
+          </a:p>
+          <a:p>
+            <a:pPr marL="0" indent="0">
+              <a:buNone/>
+            </a:pPr>
+            <a:endParaRPr lang="en-US" dirty="0"/>
+          </a:p>
+          <a:p>
+            <a:r>
+              <a:rPr lang="en-US" dirty="0"/>
+              <a:t>Hake body condition is sensitive to changes in environmental during the early spring when body condition is already low coming out of winter</a:t>
+            </a:r>
+          </a:p>
+        </p:txBody>
+      </p:sp>
+      <p:pic>
+        <p:nvPicPr>
+          <p:cNvPr id="9" name="Picture 8">
+            <a:extLst>
+              <a:ext uri="{FF2B5EF4-FFF2-40B4-BE49-F238E27FC236}">
+                <a16:creationId xmlns:a16="http://schemas.microsoft.com/office/drawing/2014/main" id="{B17759A0-05AD-1455-58DD-A8FAA388D662}"/>
+              </a:ext>
+            </a:extLst>
+          </p:cNvPr>
+          <p:cNvPicPr>
+            <a:picLocks noChangeAspect="1"/>
+          </p:cNvPicPr>
+          <p:nvPr/>
+        </p:nvPicPr>
+        <p:blipFill>
+          <a:blip r:embed="rId3"/>
+          <a:stretch>
+            <a:fillRect/>
+          </a:stretch>
+        </p:blipFill>
+        <p:spPr>
+          <a:xfrm>
+            <a:off x="6444784" y="846433"/>
+            <a:ext cx="5477531" cy="2976563"/>
+          </a:xfrm>
+          <a:prstGeom prst="rect">
+            <a:avLst/>
+          </a:prstGeom>
+        </p:spPr>
+      </p:pic>
+      <p:pic>
+        <p:nvPicPr>
+          <p:cNvPr id="13" name="Picture 12">
+            <a:extLst>
+              <a:ext uri="{FF2B5EF4-FFF2-40B4-BE49-F238E27FC236}">
+                <a16:creationId xmlns:a16="http://schemas.microsoft.com/office/drawing/2014/main" id="{4C6EE695-AB33-7585-8295-9F62121A7532}"/>
+              </a:ext>
+            </a:extLst>
+          </p:cNvPr>
+          <p:cNvPicPr>
+            <a:picLocks noChangeAspect="1"/>
+          </p:cNvPicPr>
+          <p:nvPr/>
+        </p:nvPicPr>
+        <p:blipFill>
+          <a:blip r:embed="rId4"/>
+          <a:stretch>
+            <a:fillRect/>
+          </a:stretch>
+        </p:blipFill>
+        <p:spPr>
+          <a:xfrm>
+            <a:off x="6360160" y="4124031"/>
+            <a:ext cx="3702495" cy="2445044"/>
+          </a:xfrm>
+          <a:prstGeom prst="rect">
+            <a:avLst/>
+          </a:prstGeom>
+        </p:spPr>
+      </p:pic>
+    </p:spTree>
+    <p:extLst>
+      <p:ext uri="{BB962C8B-B14F-4D97-AF65-F5344CB8AC3E}">
+        <p14:creationId xmlns:p14="http://schemas.microsoft.com/office/powerpoint/2010/main" val="606901517"/>
+      </p:ext>
+    </p:extLst>
+  </p:cSld>
+  <p:clrMapOvr>
+    <a:masterClrMapping/>
+  </p:clrMapOvr>
+</p:sld>
+</file>
+
+<file path=ppt/slides/slide56.xml><?xml version="1.0" encoding="utf-8"?>
+<p:sld xmlns:a="http://schemas.openxmlformats.org/drawingml/2006/main" xmlns:r="http://schemas.openxmlformats.org/officeDocument/2006/relationships" xmlns:p="http://schemas.openxmlformats.org/presentationml/2006/main">
+  <p:cSld>
+    <p:spTree>
+      <p:nvGrpSpPr>
+        <p:cNvPr id="1" name=""/>
+        <p:cNvGrpSpPr/>
+        <p:nvPr/>
+      </p:nvGrpSpPr>
+      <p:grpSpPr>
+        <a:xfrm>
+          <a:off x="0" y="0"/>
+          <a:ext cx="0" cy="0"/>
+          <a:chOff x="0" y="0"/>
+          <a:chExt cx="0" cy="0"/>
+        </a:xfrm>
+      </p:grpSpPr>
+      <p:sp>
+        <p:nvSpPr>
+          <p:cNvPr id="2" name="Title 1">
+            <a:extLst>
+              <a:ext uri="{FF2B5EF4-FFF2-40B4-BE49-F238E27FC236}">
+                <a16:creationId xmlns:a16="http://schemas.microsoft.com/office/drawing/2014/main" id="{173CD597-A9D5-497F-CCD1-DBCFA2205361}"/>
+              </a:ext>
+            </a:extLst>
+          </p:cNvPr>
+          <p:cNvSpPr>
+            <a:spLocks noGrp="1"/>
+          </p:cNvSpPr>
+          <p:nvPr>
+            <p:ph type="title"/>
+          </p:nvPr>
+        </p:nvSpPr>
+        <p:spPr/>
+        <p:txBody>
+          <a:bodyPr/>
+          <a:lstStyle/>
+          <a:p>
+            <a:r>
+              <a:rPr lang="en-US" dirty="0"/>
+              <a:t>Late summer body </a:t>
+            </a:r>
+            <a:br>
+              <a:rPr lang="en-US" dirty="0"/>
+            </a:br>
+            <a:r>
+              <a:rPr lang="en-US" dirty="0"/>
+              <a:t>condition</a:t>
+            </a:r>
+          </a:p>
+        </p:txBody>
+      </p:sp>
+      <p:sp>
+        <p:nvSpPr>
+          <p:cNvPr id="3" name="Content Placeholder 2">
+            <a:extLst>
+              <a:ext uri="{FF2B5EF4-FFF2-40B4-BE49-F238E27FC236}">
+                <a16:creationId xmlns:a16="http://schemas.microsoft.com/office/drawing/2014/main" id="{6D603B2E-39B5-A9D3-FA09-4C4F138DE2B0}"/>
+              </a:ext>
+            </a:extLst>
+          </p:cNvPr>
+          <p:cNvSpPr>
+            <a:spLocks noGrp="1"/>
+          </p:cNvSpPr>
+          <p:nvPr>
+            <p:ph idx="1"/>
+          </p:nvPr>
+        </p:nvSpPr>
+        <p:spPr>
+          <a:xfrm>
+            <a:off x="838200" y="1825625"/>
+            <a:ext cx="5046996" cy="4351338"/>
+          </a:xfrm>
+        </p:spPr>
+        <p:txBody>
+          <a:bodyPr/>
+          <a:lstStyle/>
+          <a:p>
+            <a:r>
+              <a:rPr lang="en-US" dirty="0"/>
+              <a:t>Aug-Oct means of body condition and environment</a:t>
+            </a:r>
+          </a:p>
+          <a:p>
+            <a:endParaRPr lang="en-US" dirty="0"/>
+          </a:p>
+          <a:p>
+            <a:r>
+              <a:rPr lang="en-US" dirty="0"/>
+              <a:t>Patterns are less clear during the high feeding periods of the summer when body condition is generally higher</a:t>
+            </a:r>
+          </a:p>
+        </p:txBody>
+      </p:sp>
+      <p:pic>
+        <p:nvPicPr>
+          <p:cNvPr id="9" name="Picture 8">
+            <a:extLst>
+              <a:ext uri="{FF2B5EF4-FFF2-40B4-BE49-F238E27FC236}">
+                <a16:creationId xmlns:a16="http://schemas.microsoft.com/office/drawing/2014/main" id="{857503F4-B846-6BDA-4DF8-5526B81E600C}"/>
+              </a:ext>
+            </a:extLst>
+          </p:cNvPr>
+          <p:cNvPicPr>
+            <a:picLocks noChangeAspect="1"/>
+          </p:cNvPicPr>
+          <p:nvPr/>
+        </p:nvPicPr>
+        <p:blipFill>
+          <a:blip r:embed="rId3"/>
+          <a:stretch>
+            <a:fillRect/>
+          </a:stretch>
+        </p:blipFill>
+        <p:spPr>
+          <a:xfrm>
+            <a:off x="6010275" y="3980974"/>
+            <a:ext cx="4322445" cy="2854445"/>
+          </a:xfrm>
+          <a:prstGeom prst="rect">
+            <a:avLst/>
+          </a:prstGeom>
+        </p:spPr>
+      </p:pic>
+      <p:pic>
+        <p:nvPicPr>
+          <p:cNvPr id="11" name="Picture 10">
+            <a:extLst>
+              <a:ext uri="{FF2B5EF4-FFF2-40B4-BE49-F238E27FC236}">
+                <a16:creationId xmlns:a16="http://schemas.microsoft.com/office/drawing/2014/main" id="{4AFB5751-2397-E479-600B-22B869F51CF1}"/>
+              </a:ext>
+            </a:extLst>
+          </p:cNvPr>
+          <p:cNvPicPr>
+            <a:picLocks noChangeAspect="1"/>
+          </p:cNvPicPr>
+          <p:nvPr/>
+        </p:nvPicPr>
+        <p:blipFill>
+          <a:blip r:embed="rId4"/>
+          <a:stretch>
+            <a:fillRect/>
+          </a:stretch>
+        </p:blipFill>
+        <p:spPr>
+          <a:xfrm>
+            <a:off x="6010275" y="498465"/>
+            <a:ext cx="5209009" cy="3289469"/>
+          </a:xfrm>
+          <a:prstGeom prst="rect">
+            <a:avLst/>
+          </a:prstGeom>
+        </p:spPr>
+      </p:pic>
+    </p:spTree>
+    <p:extLst>
+      <p:ext uri="{BB962C8B-B14F-4D97-AF65-F5344CB8AC3E}">
+        <p14:creationId xmlns:p14="http://schemas.microsoft.com/office/powerpoint/2010/main" val="600607100"/>
+      </p:ext>
+    </p:extLst>
+  </p:cSld>
+  <p:clrMapOvr>
+    <a:masterClrMapping/>
+  </p:clrMapOvr>
+</p:sld>
+</file>
+
+<file path=ppt/slides/slide57.xml><?xml version="1.0" encoding="utf-8"?>
+<p:sld xmlns:a="http://schemas.openxmlformats.org/drawingml/2006/main" xmlns:r="http://schemas.openxmlformats.org/officeDocument/2006/relationships" xmlns:p="http://schemas.openxmlformats.org/presentationml/2006/main">
+  <p:cSld>
+    <p:spTree>
+      <p:nvGrpSpPr>
+        <p:cNvPr id="1" name=""/>
+        <p:cNvGrpSpPr/>
+        <p:nvPr/>
+      </p:nvGrpSpPr>
+      <p:grpSpPr>
+        <a:xfrm>
+          <a:off x="0" y="0"/>
+          <a:ext cx="0" cy="0"/>
+          <a:chOff x="0" y="0"/>
+          <a:chExt cx="0" cy="0"/>
+        </a:xfrm>
+      </p:grpSpPr>
+      <p:sp>
+        <p:nvSpPr>
+          <p:cNvPr id="2" name="Title 1">
+            <a:extLst>
+              <a:ext uri="{FF2B5EF4-FFF2-40B4-BE49-F238E27FC236}">
+                <a16:creationId xmlns:a16="http://schemas.microsoft.com/office/drawing/2014/main" id="{184D7E90-0197-40D2-283C-9BA1E843C090}"/>
+              </a:ext>
+            </a:extLst>
+          </p:cNvPr>
+          <p:cNvSpPr>
+            <a:spLocks noGrp="1"/>
+          </p:cNvSpPr>
+          <p:nvPr>
+            <p:ph type="title"/>
+          </p:nvPr>
+        </p:nvSpPr>
+        <p:spPr/>
+        <p:txBody>
+          <a:bodyPr/>
+          <a:lstStyle/>
+          <a:p>
+            <a:endParaRPr lang="en-US"/>
+          </a:p>
+        </p:txBody>
+      </p:sp>
+      <p:sp>
+        <p:nvSpPr>
+          <p:cNvPr id="3" name="Content Placeholder 2">
+            <a:extLst>
+              <a:ext uri="{FF2B5EF4-FFF2-40B4-BE49-F238E27FC236}">
+                <a16:creationId xmlns:a16="http://schemas.microsoft.com/office/drawing/2014/main" id="{E5DD603D-CF43-EFE7-351F-742623507E92}"/>
+              </a:ext>
+            </a:extLst>
+          </p:cNvPr>
+          <p:cNvSpPr>
+            <a:spLocks noGrp="1"/>
+          </p:cNvSpPr>
+          <p:nvPr>
+            <p:ph idx="1"/>
+          </p:nvPr>
+        </p:nvSpPr>
+        <p:spPr/>
+        <p:txBody>
+          <a:bodyPr/>
+          <a:lstStyle/>
+          <a:p>
+            <a:endParaRPr lang="en-US"/>
+          </a:p>
+        </p:txBody>
+      </p:sp>
+    </p:spTree>
+    <p:extLst>
+      <p:ext uri="{BB962C8B-B14F-4D97-AF65-F5344CB8AC3E}">
+        <p14:creationId xmlns:p14="http://schemas.microsoft.com/office/powerpoint/2010/main" val="1339027459"/>
       </p:ext>
     </p:extLst>
   </p:cSld>
